--- a/pptx_template/output.pptx
+++ b/pptx_template/output.pptx
@@ -3988,7 +3988,7 @@
               </a:defRPr>
             </a:pPr>
             <a:r>
-              <a:t>창세기 1:1-3</a:t>
+              <a:t>창세기 1:1</a:t>
             </a:r>
             <a:endParaRPr kumimoji="1" lang="en-US" altLang="ko-KR" sz="3733" b="1" i="0" u="none" strike="noStrike" kern="1200" cap="none" spc="0" normalizeH="0" baseline="0" noProof="0" dirty="0">
               <a:ln>
@@ -4004,6 +4004,19 @@
               <a:ea typeface="나눔스퀘어 네오 ExtraBold" panose="00000900000000000000" pitchFamily="2" charset="-127"/>
               <a:cs typeface="+mn-cs"/>
             </a:endParaRPr>
+          </a:p>
+          <a:p>
+            <a:pPr>
+              <a:defRPr sz="3729">
+                <a:solidFill>
+                  <a:srgbClr val="1F3337"/>
+                </a:solidFill>
+                <a:latin typeface="나눔스퀘어 네오 ExtraBold"/>
+              </a:defRPr>
+            </a:pPr>
+            <a:r>
+              <a:t>에베소서 1:1</a:t>
+            </a:r>
           </a:p>
           <a:p>
             <a:pPr>
@@ -5189,7 +5202,7 @@
               </a:defRPr>
             </a:pPr>
             <a:r>
-              <a:t>Gen 1:1-3</a:t>
+              <a:t>Gen 1:1</a:t>
             </a:r>
             <a:endParaRPr kumimoji="1" lang="en-US" altLang="ko-KR" sz="2800" b="1" i="0" u="none" strike="noStrike" kern="1200" cap="none" spc="0" normalizeH="0" baseline="0" noProof="0" dirty="0">
               <a:ln>
@@ -5215,6 +5228,19 @@
                 <a:latin typeface="나눔스퀘어 네오 ExtraBold"/>
               </a:defRPr>
             </a:pPr>
+            <a:r>
+              <a:t>Eph 1:1</a:t>
+            </a:r>
+          </a:p>
+          <a:p>
+            <a:pPr>
+              <a:defRPr sz="2800">
+                <a:solidFill>
+                  <a:srgbClr val="8FA79F"/>
+                </a:solidFill>
+                <a:latin typeface="나눔스퀘어 네오 ExtraBold"/>
+              </a:defRPr>
+            </a:pPr>
           </a:p>
         </p:txBody>
       </p:sp>
@@ -5255,7 +5281,7 @@
               </a:defRPr>
             </a:pPr>
             <a:r>
-              <a:t>¹ 태초에 하나님이 천지를 창조하시니라</a:t>
+              <a:t>¹˸¹ 태초에 하나님이 천지를 창조하시니라</a:t>
             </a:r>
           </a:p>
           <a:p>
@@ -5268,20 +5294,7 @@
               </a:defRPr>
             </a:pPr>
             <a:r>
-              <a:t>² 땅이 혼돈하고 공허하며 흑암이 깊음 위에 있고 하나님의 영은 수면 위에 운행하시니라</a:t>
-            </a:r>
-          </a:p>
-          <a:p>
-            <a:pPr>
-              <a:defRPr sz="2800">
-                <a:solidFill>
-                  <a:srgbClr val="1F3337"/>
-                </a:solidFill>
-                <a:latin typeface="나눔스퀘어 네오 Bold"/>
-              </a:defRPr>
-            </a:pPr>
-            <a:r>
-              <a:t>³ 하나님이 이르시되 빛이 있으라 하시니 빛이 있었고</a:t>
+              <a:t>¹˸¹ 하나님의 뜻으로 말미암아 그리스도 예수의 사도 된 바울은 에베소에 있는 성도들과 그리스도 예수 안에 있는 신실한 자들에게 편지하노니</a:t>
             </a:r>
           </a:p>
         </p:txBody>
@@ -5323,7 +5336,7 @@
               </a:defRPr>
             </a:pPr>
             <a:r>
-              <a:t>¹ In the beginning, God created the heavens and the earth.</a:t>
+              <a:t>¹˸¹ In the beginning, God created the heavens and the earth.</a:t>
             </a:r>
             <a:endParaRPr lang="ko-KR" altLang="en-US" dirty="0"/>
           </a:p>
@@ -5337,20 +5350,7 @@
               </a:defRPr>
             </a:pPr>
             <a:r>
-              <a:t>² The earth was without form and void, and darkness was over the face of the deep. And the Spirit of God was hovering over the face of the waters.</a:t>
-            </a:r>
-          </a:p>
-          <a:p>
-            <a:pPr>
-              <a:defRPr sz="2000">
-                <a:solidFill>
-                  <a:srgbClr val="4F655E"/>
-                </a:solidFill>
-                <a:latin typeface="Pretendard Variable"/>
-              </a:defRPr>
-            </a:pPr>
-            <a:r>
-              <a:t>³ And God said, "Let there be light," and there was light.</a:t>
+              <a:t>¹˸¹ Paul, an apostle of Christ Jesus by the will of God, To the saints who are in Ephesus, and are faithful in Christ Jesus:</a:t>
             </a:r>
           </a:p>
         </p:txBody>

--- a/pptx_template/output.pptx
+++ b/pptx_template/output.pptx
@@ -9,6 +9,7 @@
   </p:notesMasterIdLst>
   <p:sldIdLst>
     <p:sldId id="4772" r:id="rId2"/>
+    <p:sldId id="4773" r:id="rId8"/>
   </p:sldIdLst>
   <p:sldSz cx="12192000" cy="6858000"/>
   <p:notesSz cx="6858000" cy="9144000"/>
@@ -3988,7 +3989,7 @@
               </a:defRPr>
             </a:pPr>
             <a:r>
-              <a:t>창세기 1:1</a:t>
+              <a:t>창세기</a:t>
             </a:r>
             <a:endParaRPr kumimoji="1" lang="en-US" altLang="ko-KR" sz="3733" b="1" i="0" u="none" strike="noStrike" kern="1200" cap="none" spc="0" normalizeH="0" baseline="0" noProof="0" dirty="0">
               <a:ln>
@@ -4015,18 +4016,8 @@
               </a:defRPr>
             </a:pPr>
             <a:r>
-              <a:t>에베소서 1:1</a:t>
-            </a:r>
-          </a:p>
-          <a:p>
-            <a:pPr>
-              <a:defRPr sz="3729">
-                <a:solidFill>
-                  <a:srgbClr val="1F3337"/>
-                </a:solidFill>
-                <a:latin typeface="나눔스퀘어 네오 ExtraBold"/>
-              </a:defRPr>
-            </a:pPr>
+              <a:t>1:1-3</a:t>
+            </a:r>
           </a:p>
         </p:txBody>
       </p:sp>
@@ -5202,7 +5193,7 @@
               </a:defRPr>
             </a:pPr>
             <a:r>
-              <a:t>Gen 1:1</a:t>
+              <a:t>Gen 1:1-3</a:t>
             </a:r>
             <a:endParaRPr kumimoji="1" lang="en-US" altLang="ko-KR" sz="2800" b="1" i="0" u="none" strike="noStrike" kern="1200" cap="none" spc="0" normalizeH="0" baseline="0" noProof="0" dirty="0">
               <a:ln>
@@ -5228,19 +5219,6 @@
                 <a:latin typeface="나눔스퀘어 네오 ExtraBold"/>
               </a:defRPr>
             </a:pPr>
-            <a:r>
-              <a:t>Eph 1:1</a:t>
-            </a:r>
-          </a:p>
-          <a:p>
-            <a:pPr>
-              <a:defRPr sz="2800">
-                <a:solidFill>
-                  <a:srgbClr val="8FA79F"/>
-                </a:solidFill>
-                <a:latin typeface="나눔스퀘어 네오 ExtraBold"/>
-              </a:defRPr>
-            </a:pPr>
           </a:p>
         </p:txBody>
       </p:sp>
@@ -5281,7 +5259,7 @@
               </a:defRPr>
             </a:pPr>
             <a:r>
-              <a:t>¹˸¹ 태초에 하나님이 천지를 창조하시니라</a:t>
+              <a:t>¹ 태초에 하나님이 천지를 창조하시니라</a:t>
             </a:r>
           </a:p>
           <a:p>
@@ -5294,7 +5272,20 @@
               </a:defRPr>
             </a:pPr>
             <a:r>
-              <a:t>¹˸¹ 하나님의 뜻으로 말미암아 그리스도 예수의 사도 된 바울은 에베소에 있는 성도들과 그리스도 예수 안에 있는 신실한 자들에게 편지하노니</a:t>
+              <a:t>² 땅이 혼돈하고 공허하며 흑암이 깊음 위에 있고 하나님의 영은 수면 위에 운행하시니라</a:t>
+            </a:r>
+          </a:p>
+          <a:p>
+            <a:pPr>
+              <a:defRPr sz="2800">
+                <a:solidFill>
+                  <a:srgbClr val="1F3337"/>
+                </a:solidFill>
+                <a:latin typeface="나눔스퀘어 네오 Bold"/>
+              </a:defRPr>
+            </a:pPr>
+            <a:r>
+              <a:t>³ 하나님이 이르시되 빛이 있으라 하시니 빛이 있었고</a:t>
             </a:r>
           </a:p>
         </p:txBody>
@@ -5336,7 +5327,7 @@
               </a:defRPr>
             </a:pPr>
             <a:r>
-              <a:t>¹˸¹ In the beginning, God created the heavens and the earth.</a:t>
+              <a:t>¹ In the beginning, God created the heavens and the earth.</a:t>
             </a:r>
             <a:endParaRPr lang="ko-KR" altLang="en-US" dirty="0"/>
           </a:p>
@@ -5350,7 +5341,20 @@
               </a:defRPr>
             </a:pPr>
             <a:r>
-              <a:t>¹˸¹ Paul, an apostle of Christ Jesus by the will of God, To the saints who are in Ephesus, and are faithful in Christ Jesus:</a:t>
+              <a:t>² The earth was without form and void, and darkness was over the face of the deep. And the Spirit of God was hovering over the face of the waters.</a:t>
+            </a:r>
+          </a:p>
+          <a:p>
+            <a:pPr>
+              <a:defRPr sz="2000">
+                <a:solidFill>
+                  <a:srgbClr val="4F655E"/>
+                </a:solidFill>
+                <a:latin typeface="Pretendard Variable"/>
+              </a:defRPr>
+            </a:pPr>
+            <a:r>
+              <a:t>³ And God said, "Let there be light," and there was light.</a:t>
             </a:r>
           </a:p>
         </p:txBody>
@@ -5361,6 +5365,1527 @@
         <p14:creationId xmlns:p14="http://schemas.microsoft.com/office/powerpoint/2010/main" val="2381306744"/>
       </p:ext>
     </p:extLst>
+  </p:cSld>
+  <p:clrMapOvr>
+    <a:masterClrMapping/>
+  </p:clrMapOvr>
+</p:sld>
+</file>
+
+<file path=ppt/slides/slide2.xml><?xml version="1.0" encoding="utf-8"?>
+<p:sld xmlns:a="http://schemas.openxmlformats.org/drawingml/2006/main" xmlns:p="http://schemas.openxmlformats.org/presentationml/2006/main" xmlns:r="http://schemas.openxmlformats.org/officeDocument/2006/relationships">
+  <p:cSld>
+    <p:spTree>
+      <p:nvGrpSpPr>
+        <p:cNvPr id="1" name=""/>
+        <p:cNvGrpSpPr/>
+        <p:nvPr/>
+      </p:nvGrpSpPr>
+      <p:grpSpPr/>
+      <p:sp>
+        <p:nvSpPr>
+          <p:cNvPr id="23" name="직사각형 22">
+            <a:extLst>
+              <a:ext uri="{FF2B5EF4-FFF2-40B4-BE49-F238E27FC236}">
+                <a16:creationId xmlns:a16="http://schemas.microsoft.com/office/drawing/2014/main" id="{19169C31-E35E-B58F-A814-E65D8A184638}"/>
+              </a:ext>
+            </a:extLst>
+          </p:cNvPr>
+          <p:cNvSpPr/>
+          <p:nvPr/>
+        </p:nvSpPr>
+        <p:spPr>
+          <a:xfrm>
+            <a:off x="-7468" y="0"/>
+            <a:ext cx="4212175" cy="6858000"/>
+          </a:xfrm>
+          <a:prstGeom prst="rect">
+            <a:avLst/>
+          </a:prstGeom>
+          <a:solidFill>
+            <a:schemeClr val="accent6">
+              <a:lumMod val="20000"/>
+              <a:lumOff val="80000"/>
+              <a:alpha val="50000"/>
+            </a:schemeClr>
+          </a:solidFill>
+          <a:ln>
+            <a:noFill/>
+          </a:ln>
+        </p:spPr>
+        <p:style>
+          <a:lnRef idx="2">
+            <a:schemeClr val="accent1">
+              <a:shade val="15000"/>
+            </a:schemeClr>
+          </a:lnRef>
+          <a:fillRef idx="1">
+            <a:schemeClr val="accent1"/>
+          </a:fillRef>
+          <a:effectRef idx="0">
+            <a:schemeClr val="accent1"/>
+          </a:effectRef>
+          <a:fontRef idx="minor">
+            <a:schemeClr val="lt1"/>
+          </a:fontRef>
+        </p:style>
+        <p:txBody>
+          <a:bodyPr rtlCol="0" anchor="ctr"/>
+          <a:lstStyle/>
+          <a:p>
+            <a:pPr marL="0" marR="0" lvl="0" indent="0" algn="ctr" defTabSz="1219140" rtl="0" eaLnBrk="0" fontAlgn="base" latinLnBrk="0" hangingPunct="0">
+              <a:lnSpc>
+                <a:spcPct val="100000"/>
+              </a:lnSpc>
+              <a:spcBef>
+                <a:spcPct val="0"/>
+              </a:spcBef>
+              <a:spcAft>
+                <a:spcPct val="0"/>
+              </a:spcAft>
+              <a:buClrTx/>
+              <a:buSzTx/>
+              <a:buFontTx/>
+              <a:buNone/>
+              <a:tabLst/>
+              <a:defRPr/>
+            </a:pPr>
+            <a:endParaRPr kumimoji="1" lang="ko-KR" altLang="en-US" sz="2400" b="0" i="0" u="none" strike="noStrike" kern="1200" cap="none" spc="0" normalizeH="0" baseline="0" noProof="0" dirty="0">
+              <a:ln>
+                <a:noFill/>
+              </a:ln>
+              <a:solidFill>
+                <a:prstClr val="white"/>
+              </a:solidFill>
+              <a:effectLst/>
+              <a:uLnTx/>
+              <a:uFillTx/>
+              <a:latin typeface="맑은 고딕" panose="020F0502020204030204"/>
+              <a:ea typeface="맑은 고딕" panose="020B0503020000020004" pitchFamily="50" charset="-127"/>
+              <a:cs typeface="+mn-cs"/>
+            </a:endParaRPr>
+          </a:p>
+        </p:txBody>
+      </p:sp>
+      <p:sp>
+        <p:nvSpPr>
+          <p:cNvPr id="10" name="TextBox 9">
+            <a:extLst>
+              <a:ext uri="{FF2B5EF4-FFF2-40B4-BE49-F238E27FC236}">
+                <a16:creationId xmlns:a16="http://schemas.microsoft.com/office/drawing/2014/main" id="{F1C51526-9E46-003D-540D-3596EB5F6E8E}"/>
+              </a:ext>
+            </a:extLst>
+          </p:cNvPr>
+          <p:cNvSpPr txBox="1"/>
+          <p:nvPr/>
+        </p:nvSpPr>
+        <p:spPr>
+          <a:xfrm>
+            <a:off x="541691" y="568591"/>
+            <a:ext cx="3867332" cy="666786"/>
+          </a:xfrm>
+          <a:prstGeom prst="rect">
+            <a:avLst/>
+          </a:prstGeom>
+          <a:noFill/>
+        </p:spPr>
+        <p:txBody>
+          <a:bodyPr wrap="square" rtlCol="0">
+            <a:spAutoFit/>
+          </a:bodyPr>
+          <a:lstStyle/>
+          <a:p>
+            <a:pPr marL="0" marR="0" lvl="0" indent="0" algn="l" defTabSz="1219140" rtl="0" eaLnBrk="0" fontAlgn="base" latinLnBrk="0" hangingPunct="0">
+              <a:lnSpc>
+                <a:spcPct val="100000"/>
+              </a:lnSpc>
+              <a:spcBef>
+                <a:spcPct val="0"/>
+              </a:spcBef>
+              <a:spcAft>
+                <a:spcPct val="0"/>
+              </a:spcAft>
+              <a:buClrTx/>
+              <a:buSzTx/>
+              <a:buFontTx/>
+              <a:buNone/>
+              <a:tabLst/>
+              <a:defRPr sz="3729">
+                <a:solidFill>
+                  <a:srgbClr val="1F3337"/>
+                </a:solidFill>
+                <a:latin typeface="나눔스퀘어 네오 ExtraBold"/>
+              </a:defRPr>
+            </a:pPr>
+            <a:r>
+              <a:t>시편 1:1</a:t>
+            </a:r>
+            <a:endParaRPr kumimoji="1" lang="en-US" altLang="ko-KR" sz="3733" b="1" i="0" u="none" strike="noStrike" kern="1200" cap="none" spc="0" normalizeH="0" baseline="0" noProof="0" dirty="0">
+              <a:ln>
+                <a:noFill/>
+              </a:ln>
+              <a:solidFill>
+                <a:srgbClr val="213337"/>
+              </a:solidFill>
+              <a:effectLst/>
+              <a:uLnTx/>
+              <a:uFillTx/>
+              <a:latin typeface="나눔스퀘어 네오 ExtraBold" panose="00000900000000000000" pitchFamily="2" charset="-127"/>
+              <a:ea typeface="나눔스퀘어 네오 ExtraBold" panose="00000900000000000000" pitchFamily="2" charset="-127"/>
+              <a:cs typeface="+mn-cs"/>
+            </a:endParaRPr>
+          </a:p>
+          <a:p>
+            <a:pPr>
+              <a:defRPr sz="3729">
+                <a:solidFill>
+                  <a:srgbClr val="1F3337"/>
+                </a:solidFill>
+                <a:latin typeface="나눔스퀘어 네오 ExtraBold"/>
+              </a:defRPr>
+            </a:pPr>
+            <a:r>
+              <a:t>고린도전서 3:3</a:t>
+            </a:r>
+          </a:p>
+          <a:p>
+            <a:pPr>
+              <a:defRPr sz="3729">
+                <a:solidFill>
+                  <a:srgbClr val="1F3337"/>
+                </a:solidFill>
+                <a:latin typeface="나눔스퀘어 네오 ExtraBold"/>
+              </a:defRPr>
+            </a:pPr>
+          </a:p>
+        </p:txBody>
+      </p:sp>
+      <p:cxnSp>
+        <p:nvCxnSpPr>
+          <p:cNvPr id="14" name="직선 연결선 13">
+            <a:extLst>
+              <a:ext uri="{FF2B5EF4-FFF2-40B4-BE49-F238E27FC236}">
+                <a16:creationId xmlns:a16="http://schemas.microsoft.com/office/drawing/2014/main" id="{DF27D16E-3EE5-D795-3F3F-D360817DC3AA}"/>
+              </a:ext>
+            </a:extLst>
+          </p:cNvPr>
+          <p:cNvCxnSpPr>
+            <a:cxnSpLocks/>
+          </p:cNvCxnSpPr>
+          <p:nvPr/>
+        </p:nvCxnSpPr>
+        <p:spPr>
+          <a:xfrm>
+            <a:off x="4212177" y="241302"/>
+            <a:ext cx="0" cy="6379633"/>
+          </a:xfrm>
+          <a:prstGeom prst="line">
+            <a:avLst/>
+          </a:prstGeom>
+          <a:ln w="19050">
+            <a:solidFill>
+              <a:srgbClr val="213337"/>
+            </a:solidFill>
+          </a:ln>
+        </p:spPr>
+        <p:style>
+          <a:lnRef idx="1">
+            <a:schemeClr val="accent2"/>
+          </a:lnRef>
+          <a:fillRef idx="0">
+            <a:schemeClr val="accent2"/>
+          </a:fillRef>
+          <a:effectRef idx="0">
+            <a:schemeClr val="accent2"/>
+          </a:effectRef>
+          <a:fontRef idx="minor">
+            <a:schemeClr val="tx1"/>
+          </a:fontRef>
+        </p:style>
+      </p:cxnSp>
+      <p:sp>
+        <p:nvSpPr>
+          <p:cNvPr id="15" name="타원 14">
+            <a:extLst>
+              <a:ext uri="{FF2B5EF4-FFF2-40B4-BE49-F238E27FC236}">
+                <a16:creationId xmlns:a16="http://schemas.microsoft.com/office/drawing/2014/main" id="{07FD1CA4-A20B-11FC-E23C-FC5F3F624592}"/>
+              </a:ext>
+            </a:extLst>
+          </p:cNvPr>
+          <p:cNvSpPr/>
+          <p:nvPr/>
+        </p:nvSpPr>
+        <p:spPr>
+          <a:xfrm>
+            <a:off x="4095764" y="578135"/>
+            <a:ext cx="228595" cy="228595"/>
+          </a:xfrm>
+          <a:prstGeom prst="ellipse">
+            <a:avLst/>
+          </a:prstGeom>
+          <a:solidFill>
+            <a:srgbClr val="213337"/>
+          </a:solidFill>
+          <a:ln>
+            <a:noFill/>
+          </a:ln>
+        </p:spPr>
+        <p:style>
+          <a:lnRef idx="2">
+            <a:schemeClr val="accent1">
+              <a:shade val="15000"/>
+            </a:schemeClr>
+          </a:lnRef>
+          <a:fillRef idx="1">
+            <a:schemeClr val="accent1"/>
+          </a:fillRef>
+          <a:effectRef idx="0">
+            <a:schemeClr val="accent1"/>
+          </a:effectRef>
+          <a:fontRef idx="minor">
+            <a:schemeClr val="lt1"/>
+          </a:fontRef>
+        </p:style>
+        <p:txBody>
+          <a:bodyPr rtlCol="0" anchor="ctr"/>
+          <a:lstStyle/>
+          <a:p>
+            <a:pPr marL="0" marR="0" lvl="0" indent="0" algn="ctr" defTabSz="1219140" rtl="0" eaLnBrk="0" fontAlgn="base" latinLnBrk="0" hangingPunct="0">
+              <a:lnSpc>
+                <a:spcPct val="100000"/>
+              </a:lnSpc>
+              <a:spcBef>
+                <a:spcPct val="0"/>
+              </a:spcBef>
+              <a:spcAft>
+                <a:spcPct val="0"/>
+              </a:spcAft>
+              <a:buClrTx/>
+              <a:buSzTx/>
+              <a:buFontTx/>
+              <a:buNone/>
+              <a:tabLst/>
+              <a:defRPr/>
+            </a:pPr>
+            <a:endParaRPr kumimoji="1" lang="ko-KR" altLang="en-US" sz="2400" b="0" i="0" u="none" strike="noStrike" kern="1200" cap="none" spc="0" normalizeH="0" baseline="0" noProof="0">
+              <a:ln>
+                <a:noFill/>
+              </a:ln>
+              <a:solidFill>
+                <a:prstClr val="white"/>
+              </a:solidFill>
+              <a:effectLst/>
+              <a:uLnTx/>
+              <a:uFillTx/>
+              <a:latin typeface="맑은 고딕" panose="020F0502020204030204"/>
+              <a:ea typeface="맑은 고딕" panose="020B0503020000020004" pitchFamily="50" charset="-127"/>
+              <a:cs typeface="+mn-cs"/>
+            </a:endParaRPr>
+          </a:p>
+        </p:txBody>
+      </p:sp>
+      <p:sp>
+        <p:nvSpPr>
+          <p:cNvPr id="22" name="그래픽 20">
+            <a:extLst>
+              <a:ext uri="{FF2B5EF4-FFF2-40B4-BE49-F238E27FC236}">
+                <a16:creationId xmlns:a16="http://schemas.microsoft.com/office/drawing/2014/main" id="{59909059-D14E-9A87-C3A1-5A731C56D049}"/>
+              </a:ext>
+            </a:extLst>
+          </p:cNvPr>
+          <p:cNvSpPr/>
+          <p:nvPr/>
+        </p:nvSpPr>
+        <p:spPr>
+          <a:xfrm rot="10953421">
+            <a:off x="722713" y="1970970"/>
+            <a:ext cx="1134324" cy="332292"/>
+          </a:xfrm>
+          <a:custGeom>
+            <a:avLst/>
+            <a:gdLst>
+              <a:gd name="connsiteX0" fmla="*/ 847353 w 850743"/>
+              <a:gd name="connsiteY0" fmla="*/ 123779 h 249219"/>
+              <a:gd name="connsiteX1" fmla="*/ 707811 w 850743"/>
+              <a:gd name="connsiteY1" fmla="*/ 86105 h 249219"/>
+              <a:gd name="connsiteX2" fmla="*/ 680661 w 850743"/>
+              <a:gd name="connsiteY2" fmla="*/ 85053 h 249219"/>
+              <a:gd name="connsiteX3" fmla="*/ 606575 w 850743"/>
+              <a:gd name="connsiteY3" fmla="*/ 112203 h 249219"/>
+              <a:gd name="connsiteX4" fmla="*/ 606154 w 850743"/>
+              <a:gd name="connsiteY4" fmla="*/ 112835 h 249219"/>
+              <a:gd name="connsiteX5" fmla="*/ 605312 w 850743"/>
+              <a:gd name="connsiteY5" fmla="*/ 112835 h 249219"/>
+              <a:gd name="connsiteX6" fmla="*/ 513547 w 850743"/>
+              <a:gd name="connsiteY6" fmla="*/ 114098 h 249219"/>
+              <a:gd name="connsiteX7" fmla="*/ 503655 w 850743"/>
+              <a:gd name="connsiteY7" fmla="*/ 114098 h 249219"/>
+              <a:gd name="connsiteX8" fmla="*/ 512916 w 850743"/>
+              <a:gd name="connsiteY8" fmla="*/ 110730 h 249219"/>
+              <a:gd name="connsiteX9" fmla="*/ 619204 w 850743"/>
+              <a:gd name="connsiteY9" fmla="*/ 8442 h 249219"/>
+              <a:gd name="connsiteX10" fmla="*/ 618151 w 850743"/>
+              <a:gd name="connsiteY10" fmla="*/ 2759 h 249219"/>
+              <a:gd name="connsiteX11" fmla="*/ 612889 w 850743"/>
+              <a:gd name="connsiteY11" fmla="*/ 23 h 249219"/>
+              <a:gd name="connsiteX12" fmla="*/ 612468 w 850743"/>
+              <a:gd name="connsiteY12" fmla="*/ 23 h 249219"/>
+              <a:gd name="connsiteX13" fmla="*/ 430412 w 850743"/>
+              <a:gd name="connsiteY13" fmla="*/ 114519 h 249219"/>
+              <a:gd name="connsiteX14" fmla="*/ 429991 w 850743"/>
+              <a:gd name="connsiteY14" fmla="*/ 115361 h 249219"/>
+              <a:gd name="connsiteX15" fmla="*/ 428938 w 850743"/>
+              <a:gd name="connsiteY15" fmla="*/ 115361 h 249219"/>
+              <a:gd name="connsiteX16" fmla="*/ 334016 w 850743"/>
+              <a:gd name="connsiteY16" fmla="*/ 116623 h 249219"/>
+              <a:gd name="connsiteX17" fmla="*/ 323072 w 850743"/>
+              <a:gd name="connsiteY17" fmla="*/ 116623 h 249219"/>
+              <a:gd name="connsiteX18" fmla="*/ 333385 w 850743"/>
+              <a:gd name="connsiteY18" fmla="*/ 113256 h 249219"/>
+              <a:gd name="connsiteX19" fmla="*/ 456300 w 850743"/>
+              <a:gd name="connsiteY19" fmla="*/ 13072 h 249219"/>
+              <a:gd name="connsiteX20" fmla="*/ 455458 w 850743"/>
+              <a:gd name="connsiteY20" fmla="*/ 7600 h 249219"/>
+              <a:gd name="connsiteX21" fmla="*/ 449985 w 850743"/>
+              <a:gd name="connsiteY21" fmla="*/ 4443 h 249219"/>
+              <a:gd name="connsiteX22" fmla="*/ 449564 w 850743"/>
+              <a:gd name="connsiteY22" fmla="*/ 4443 h 249219"/>
+              <a:gd name="connsiteX23" fmla="*/ 276768 w 850743"/>
+              <a:gd name="connsiteY23" fmla="*/ 112203 h 249219"/>
+              <a:gd name="connsiteX24" fmla="*/ 276347 w 850743"/>
+              <a:gd name="connsiteY24" fmla="*/ 112835 h 249219"/>
+              <a:gd name="connsiteX25" fmla="*/ 273822 w 850743"/>
+              <a:gd name="connsiteY25" fmla="*/ 116202 h 249219"/>
+              <a:gd name="connsiteX26" fmla="*/ 273401 w 850743"/>
+              <a:gd name="connsiteY26" fmla="*/ 117465 h 249219"/>
+              <a:gd name="connsiteX27" fmla="*/ 236148 w 850743"/>
+              <a:gd name="connsiteY27" fmla="*/ 117886 h 249219"/>
+              <a:gd name="connsiteX28" fmla="*/ 5051 w 850743"/>
+              <a:gd name="connsiteY28" fmla="*/ 118728 h 249219"/>
+              <a:gd name="connsiteX29" fmla="*/ 0 w 850743"/>
+              <a:gd name="connsiteY29" fmla="*/ 132198 h 249219"/>
+              <a:gd name="connsiteX30" fmla="*/ 279084 w 850743"/>
+              <a:gd name="connsiteY30" fmla="*/ 130935 h 249219"/>
+              <a:gd name="connsiteX31" fmla="*/ 280136 w 850743"/>
+              <a:gd name="connsiteY31" fmla="*/ 130935 h 249219"/>
+              <a:gd name="connsiteX32" fmla="*/ 280557 w 850743"/>
+              <a:gd name="connsiteY32" fmla="*/ 131777 h 249219"/>
+              <a:gd name="connsiteX33" fmla="*/ 451248 w 850743"/>
+              <a:gd name="connsiteY33" fmla="*/ 244589 h 249219"/>
+              <a:gd name="connsiteX34" fmla="*/ 452722 w 850743"/>
+              <a:gd name="connsiteY34" fmla="*/ 244589 h 249219"/>
+              <a:gd name="connsiteX35" fmla="*/ 458615 w 850743"/>
+              <a:gd name="connsiteY35" fmla="*/ 241432 h 249219"/>
+              <a:gd name="connsiteX36" fmla="*/ 458615 w 850743"/>
+              <a:gd name="connsiteY36" fmla="*/ 234697 h 249219"/>
+              <a:gd name="connsiteX37" fmla="*/ 344329 w 850743"/>
+              <a:gd name="connsiteY37" fmla="*/ 133461 h 249219"/>
+              <a:gd name="connsiteX38" fmla="*/ 336963 w 850743"/>
+              <a:gd name="connsiteY38" fmla="*/ 130304 h 249219"/>
+              <a:gd name="connsiteX39" fmla="*/ 345171 w 850743"/>
+              <a:gd name="connsiteY39" fmla="*/ 130304 h 249219"/>
+              <a:gd name="connsiteX40" fmla="*/ 419046 w 850743"/>
+              <a:gd name="connsiteY40" fmla="*/ 129252 h 249219"/>
+              <a:gd name="connsiteX41" fmla="*/ 432095 w 850743"/>
+              <a:gd name="connsiteY41" fmla="*/ 129252 h 249219"/>
+              <a:gd name="connsiteX42" fmla="*/ 432516 w 850743"/>
+              <a:gd name="connsiteY42" fmla="*/ 130304 h 249219"/>
+              <a:gd name="connsiteX43" fmla="*/ 507444 w 850743"/>
+              <a:gd name="connsiteY43" fmla="*/ 211545 h 249219"/>
+              <a:gd name="connsiteX44" fmla="*/ 655825 w 850743"/>
+              <a:gd name="connsiteY44" fmla="*/ 249219 h 249219"/>
+              <a:gd name="connsiteX45" fmla="*/ 661719 w 850743"/>
+              <a:gd name="connsiteY45" fmla="*/ 245221 h 249219"/>
+              <a:gd name="connsiteX46" fmla="*/ 661298 w 850743"/>
+              <a:gd name="connsiteY46" fmla="*/ 238906 h 249219"/>
+              <a:gd name="connsiteX47" fmla="*/ 514179 w 850743"/>
+              <a:gd name="connsiteY47" fmla="*/ 131146 h 249219"/>
+              <a:gd name="connsiteX48" fmla="*/ 505339 w 850743"/>
+              <a:gd name="connsiteY48" fmla="*/ 127989 h 249219"/>
+              <a:gd name="connsiteX49" fmla="*/ 514600 w 850743"/>
+              <a:gd name="connsiteY49" fmla="*/ 127989 h 249219"/>
+              <a:gd name="connsiteX50" fmla="*/ 594999 w 850743"/>
+              <a:gd name="connsiteY50" fmla="*/ 126726 h 249219"/>
+              <a:gd name="connsiteX51" fmla="*/ 596052 w 850743"/>
+              <a:gd name="connsiteY51" fmla="*/ 126726 h 249219"/>
+              <a:gd name="connsiteX52" fmla="*/ 596473 w 850743"/>
+              <a:gd name="connsiteY52" fmla="*/ 127568 h 249219"/>
+              <a:gd name="connsiteX53" fmla="*/ 598367 w 850743"/>
+              <a:gd name="connsiteY53" fmla="*/ 129672 h 249219"/>
+              <a:gd name="connsiteX54" fmla="*/ 720650 w 850743"/>
+              <a:gd name="connsiteY54" fmla="*/ 161664 h 249219"/>
+              <a:gd name="connsiteX55" fmla="*/ 734120 w 850743"/>
+              <a:gd name="connsiteY55" fmla="*/ 161664 h 249219"/>
+              <a:gd name="connsiteX56" fmla="*/ 847564 w 850743"/>
+              <a:gd name="connsiteY56" fmla="*/ 135776 h 249219"/>
+              <a:gd name="connsiteX57" fmla="*/ 850721 w 850743"/>
+              <a:gd name="connsiteY57" fmla="*/ 129252 h 249219"/>
+              <a:gd name="connsiteX58" fmla="*/ 847353 w 850743"/>
+              <a:gd name="connsiteY58" fmla="*/ 123990 h 249219"/>
+              <a:gd name="connsiteX59" fmla="*/ 295921 w 850743"/>
+              <a:gd name="connsiteY59" fmla="*/ 107363 h 249219"/>
+              <a:gd name="connsiteX60" fmla="*/ 435463 w 850743"/>
+              <a:gd name="connsiteY60" fmla="*/ 19807 h 249219"/>
+              <a:gd name="connsiteX61" fmla="*/ 438830 w 850743"/>
+              <a:gd name="connsiteY61" fmla="*/ 19386 h 249219"/>
+              <a:gd name="connsiteX62" fmla="*/ 437147 w 850743"/>
+              <a:gd name="connsiteY62" fmla="*/ 22333 h 249219"/>
+              <a:gd name="connsiteX63" fmla="*/ 297605 w 850743"/>
+              <a:gd name="connsiteY63" fmla="*/ 110099 h 249219"/>
+              <a:gd name="connsiteX64" fmla="*/ 292975 w 850743"/>
+              <a:gd name="connsiteY64" fmla="*/ 111362 h 249219"/>
+              <a:gd name="connsiteX65" fmla="*/ 295711 w 850743"/>
+              <a:gd name="connsiteY65" fmla="*/ 107573 h 249219"/>
+              <a:gd name="connsiteX66" fmla="*/ 437357 w 850743"/>
+              <a:gd name="connsiteY66" fmla="*/ 225226 h 249219"/>
+              <a:gd name="connsiteX67" fmla="*/ 439672 w 850743"/>
+              <a:gd name="connsiteY67" fmla="*/ 228804 h 249219"/>
+              <a:gd name="connsiteX68" fmla="*/ 435463 w 850743"/>
+              <a:gd name="connsiteY68" fmla="*/ 227752 h 249219"/>
+              <a:gd name="connsiteX69" fmla="*/ 299078 w 850743"/>
+              <a:gd name="connsiteY69" fmla="*/ 135355 h 249219"/>
+              <a:gd name="connsiteX70" fmla="*/ 296342 w 850743"/>
+              <a:gd name="connsiteY70" fmla="*/ 131356 h 249219"/>
+              <a:gd name="connsiteX71" fmla="*/ 300972 w 850743"/>
+              <a:gd name="connsiteY71" fmla="*/ 132619 h 249219"/>
+              <a:gd name="connsiteX72" fmla="*/ 437357 w 850743"/>
+              <a:gd name="connsiteY72" fmla="*/ 225015 h 249219"/>
+              <a:gd name="connsiteX73" fmla="*/ 449144 w 850743"/>
+              <a:gd name="connsiteY73" fmla="*/ 109467 h 249219"/>
+              <a:gd name="connsiteX74" fmla="*/ 599419 w 850743"/>
+              <a:gd name="connsiteY74" fmla="*/ 14966 h 249219"/>
+              <a:gd name="connsiteX75" fmla="*/ 602366 w 850743"/>
+              <a:gd name="connsiteY75" fmla="*/ 14545 h 249219"/>
+              <a:gd name="connsiteX76" fmla="*/ 601103 w 850743"/>
+              <a:gd name="connsiteY76" fmla="*/ 17281 h 249219"/>
+              <a:gd name="connsiteX77" fmla="*/ 450617 w 850743"/>
+              <a:gd name="connsiteY77" fmla="*/ 111993 h 249219"/>
+              <a:gd name="connsiteX78" fmla="*/ 447039 w 850743"/>
+              <a:gd name="connsiteY78" fmla="*/ 112414 h 249219"/>
+              <a:gd name="connsiteX79" fmla="*/ 448933 w 850743"/>
+              <a:gd name="connsiteY79" fmla="*/ 109257 h 249219"/>
+              <a:gd name="connsiteX80" fmla="*/ 638146 w 850743"/>
+              <a:gd name="connsiteY80" fmla="*/ 231961 h 249219"/>
+              <a:gd name="connsiteX81" fmla="*/ 640882 w 850743"/>
+              <a:gd name="connsiteY81" fmla="*/ 235118 h 249219"/>
+              <a:gd name="connsiteX82" fmla="*/ 636673 w 850743"/>
+              <a:gd name="connsiteY82" fmla="*/ 235118 h 249219"/>
+              <a:gd name="connsiteX83" fmla="*/ 520914 w 850743"/>
+              <a:gd name="connsiteY83" fmla="*/ 203337 h 249219"/>
+              <a:gd name="connsiteX84" fmla="*/ 446197 w 850743"/>
+              <a:gd name="connsiteY84" fmla="*/ 130935 h 249219"/>
+              <a:gd name="connsiteX85" fmla="*/ 445566 w 850743"/>
+              <a:gd name="connsiteY85" fmla="*/ 128831 h 249219"/>
+              <a:gd name="connsiteX86" fmla="*/ 451669 w 850743"/>
+              <a:gd name="connsiteY86" fmla="*/ 128831 h 249219"/>
+              <a:gd name="connsiteX87" fmla="*/ 638146 w 850743"/>
+              <a:gd name="connsiteY87" fmla="*/ 231961 h 249219"/>
+              <a:gd name="connsiteX88" fmla="*/ 825885 w 850743"/>
+              <a:gd name="connsiteY88" fmla="*/ 131988 h 249219"/>
+              <a:gd name="connsiteX89" fmla="*/ 734541 w 850743"/>
+              <a:gd name="connsiteY89" fmla="*/ 147983 h 249219"/>
+              <a:gd name="connsiteX90" fmla="*/ 727806 w 850743"/>
+              <a:gd name="connsiteY90" fmla="*/ 147983 h 249219"/>
+              <a:gd name="connsiteX91" fmla="*/ 720650 w 850743"/>
+              <a:gd name="connsiteY91" fmla="*/ 147983 h 249219"/>
+              <a:gd name="connsiteX92" fmla="*/ 616467 w 850743"/>
+              <a:gd name="connsiteY92" fmla="*/ 124832 h 249219"/>
+              <a:gd name="connsiteX93" fmla="*/ 614784 w 850743"/>
+              <a:gd name="connsiteY93" fmla="*/ 123779 h 249219"/>
+              <a:gd name="connsiteX94" fmla="*/ 616046 w 850743"/>
+              <a:gd name="connsiteY94" fmla="*/ 122306 h 249219"/>
+              <a:gd name="connsiteX95" fmla="*/ 679608 w 850743"/>
+              <a:gd name="connsiteY95" fmla="*/ 98523 h 249219"/>
+              <a:gd name="connsiteX96" fmla="*/ 716020 w 850743"/>
+              <a:gd name="connsiteY96" fmla="*/ 100628 h 249219"/>
+              <a:gd name="connsiteX97" fmla="*/ 825885 w 850743"/>
+              <a:gd name="connsiteY97" fmla="*/ 129041 h 249219"/>
+              <a:gd name="connsiteX98" fmla="*/ 829463 w 850743"/>
+              <a:gd name="connsiteY98" fmla="*/ 130514 h 249219"/>
+              <a:gd name="connsiteX99" fmla="*/ 825885 w 850743"/>
+              <a:gd name="connsiteY99" fmla="*/ 132198 h 249219"/>
+            </a:gdLst>
+            <a:ahLst/>
+            <a:cxnLst>
+              <a:cxn ang="0">
+                <a:pos x="connsiteX0" y="connsiteY0"/>
+              </a:cxn>
+              <a:cxn ang="0">
+                <a:pos x="connsiteX1" y="connsiteY1"/>
+              </a:cxn>
+              <a:cxn ang="0">
+                <a:pos x="connsiteX2" y="connsiteY2"/>
+              </a:cxn>
+              <a:cxn ang="0">
+                <a:pos x="connsiteX3" y="connsiteY3"/>
+              </a:cxn>
+              <a:cxn ang="0">
+                <a:pos x="connsiteX4" y="connsiteY4"/>
+              </a:cxn>
+              <a:cxn ang="0">
+                <a:pos x="connsiteX5" y="connsiteY5"/>
+              </a:cxn>
+              <a:cxn ang="0">
+                <a:pos x="connsiteX6" y="connsiteY6"/>
+              </a:cxn>
+              <a:cxn ang="0">
+                <a:pos x="connsiteX7" y="connsiteY7"/>
+              </a:cxn>
+              <a:cxn ang="0">
+                <a:pos x="connsiteX8" y="connsiteY8"/>
+              </a:cxn>
+              <a:cxn ang="0">
+                <a:pos x="connsiteX9" y="connsiteY9"/>
+              </a:cxn>
+              <a:cxn ang="0">
+                <a:pos x="connsiteX10" y="connsiteY10"/>
+              </a:cxn>
+              <a:cxn ang="0">
+                <a:pos x="connsiteX11" y="connsiteY11"/>
+              </a:cxn>
+              <a:cxn ang="0">
+                <a:pos x="connsiteX12" y="connsiteY12"/>
+              </a:cxn>
+              <a:cxn ang="0">
+                <a:pos x="connsiteX13" y="connsiteY13"/>
+              </a:cxn>
+              <a:cxn ang="0">
+                <a:pos x="connsiteX14" y="connsiteY14"/>
+              </a:cxn>
+              <a:cxn ang="0">
+                <a:pos x="connsiteX15" y="connsiteY15"/>
+              </a:cxn>
+              <a:cxn ang="0">
+                <a:pos x="connsiteX16" y="connsiteY16"/>
+              </a:cxn>
+              <a:cxn ang="0">
+                <a:pos x="connsiteX17" y="connsiteY17"/>
+              </a:cxn>
+              <a:cxn ang="0">
+                <a:pos x="connsiteX18" y="connsiteY18"/>
+              </a:cxn>
+              <a:cxn ang="0">
+                <a:pos x="connsiteX19" y="connsiteY19"/>
+              </a:cxn>
+              <a:cxn ang="0">
+                <a:pos x="connsiteX20" y="connsiteY20"/>
+              </a:cxn>
+              <a:cxn ang="0">
+                <a:pos x="connsiteX21" y="connsiteY21"/>
+              </a:cxn>
+              <a:cxn ang="0">
+                <a:pos x="connsiteX22" y="connsiteY22"/>
+              </a:cxn>
+              <a:cxn ang="0">
+                <a:pos x="connsiteX23" y="connsiteY23"/>
+              </a:cxn>
+              <a:cxn ang="0">
+                <a:pos x="connsiteX24" y="connsiteY24"/>
+              </a:cxn>
+              <a:cxn ang="0">
+                <a:pos x="connsiteX25" y="connsiteY25"/>
+              </a:cxn>
+              <a:cxn ang="0">
+                <a:pos x="connsiteX26" y="connsiteY26"/>
+              </a:cxn>
+              <a:cxn ang="0">
+                <a:pos x="connsiteX27" y="connsiteY27"/>
+              </a:cxn>
+              <a:cxn ang="0">
+                <a:pos x="connsiteX28" y="connsiteY28"/>
+              </a:cxn>
+              <a:cxn ang="0">
+                <a:pos x="connsiteX29" y="connsiteY29"/>
+              </a:cxn>
+              <a:cxn ang="0">
+                <a:pos x="connsiteX30" y="connsiteY30"/>
+              </a:cxn>
+              <a:cxn ang="0">
+                <a:pos x="connsiteX31" y="connsiteY31"/>
+              </a:cxn>
+              <a:cxn ang="0">
+                <a:pos x="connsiteX32" y="connsiteY32"/>
+              </a:cxn>
+              <a:cxn ang="0">
+                <a:pos x="connsiteX33" y="connsiteY33"/>
+              </a:cxn>
+              <a:cxn ang="0">
+                <a:pos x="connsiteX34" y="connsiteY34"/>
+              </a:cxn>
+              <a:cxn ang="0">
+                <a:pos x="connsiteX35" y="connsiteY35"/>
+              </a:cxn>
+              <a:cxn ang="0">
+                <a:pos x="connsiteX36" y="connsiteY36"/>
+              </a:cxn>
+              <a:cxn ang="0">
+                <a:pos x="connsiteX37" y="connsiteY37"/>
+              </a:cxn>
+              <a:cxn ang="0">
+                <a:pos x="connsiteX38" y="connsiteY38"/>
+              </a:cxn>
+              <a:cxn ang="0">
+                <a:pos x="connsiteX39" y="connsiteY39"/>
+              </a:cxn>
+              <a:cxn ang="0">
+                <a:pos x="connsiteX40" y="connsiteY40"/>
+              </a:cxn>
+              <a:cxn ang="0">
+                <a:pos x="connsiteX41" y="connsiteY41"/>
+              </a:cxn>
+              <a:cxn ang="0">
+                <a:pos x="connsiteX42" y="connsiteY42"/>
+              </a:cxn>
+              <a:cxn ang="0">
+                <a:pos x="connsiteX43" y="connsiteY43"/>
+              </a:cxn>
+              <a:cxn ang="0">
+                <a:pos x="connsiteX44" y="connsiteY44"/>
+              </a:cxn>
+              <a:cxn ang="0">
+                <a:pos x="connsiteX45" y="connsiteY45"/>
+              </a:cxn>
+              <a:cxn ang="0">
+                <a:pos x="connsiteX46" y="connsiteY46"/>
+              </a:cxn>
+              <a:cxn ang="0">
+                <a:pos x="connsiteX47" y="connsiteY47"/>
+              </a:cxn>
+              <a:cxn ang="0">
+                <a:pos x="connsiteX48" y="connsiteY48"/>
+              </a:cxn>
+              <a:cxn ang="0">
+                <a:pos x="connsiteX49" y="connsiteY49"/>
+              </a:cxn>
+              <a:cxn ang="0">
+                <a:pos x="connsiteX50" y="connsiteY50"/>
+              </a:cxn>
+              <a:cxn ang="0">
+                <a:pos x="connsiteX51" y="connsiteY51"/>
+              </a:cxn>
+              <a:cxn ang="0">
+                <a:pos x="connsiteX52" y="connsiteY52"/>
+              </a:cxn>
+              <a:cxn ang="0">
+                <a:pos x="connsiteX53" y="connsiteY53"/>
+              </a:cxn>
+              <a:cxn ang="0">
+                <a:pos x="connsiteX54" y="connsiteY54"/>
+              </a:cxn>
+              <a:cxn ang="0">
+                <a:pos x="connsiteX55" y="connsiteY55"/>
+              </a:cxn>
+              <a:cxn ang="0">
+                <a:pos x="connsiteX56" y="connsiteY56"/>
+              </a:cxn>
+              <a:cxn ang="0">
+                <a:pos x="connsiteX57" y="connsiteY57"/>
+              </a:cxn>
+              <a:cxn ang="0">
+                <a:pos x="connsiteX58" y="connsiteY58"/>
+              </a:cxn>
+              <a:cxn ang="0">
+                <a:pos x="connsiteX59" y="connsiteY59"/>
+              </a:cxn>
+              <a:cxn ang="0">
+                <a:pos x="connsiteX60" y="connsiteY60"/>
+              </a:cxn>
+              <a:cxn ang="0">
+                <a:pos x="connsiteX61" y="connsiteY61"/>
+              </a:cxn>
+              <a:cxn ang="0">
+                <a:pos x="connsiteX62" y="connsiteY62"/>
+              </a:cxn>
+              <a:cxn ang="0">
+                <a:pos x="connsiteX63" y="connsiteY63"/>
+              </a:cxn>
+              <a:cxn ang="0">
+                <a:pos x="connsiteX64" y="connsiteY64"/>
+              </a:cxn>
+              <a:cxn ang="0">
+                <a:pos x="connsiteX65" y="connsiteY65"/>
+              </a:cxn>
+              <a:cxn ang="0">
+                <a:pos x="connsiteX66" y="connsiteY66"/>
+              </a:cxn>
+              <a:cxn ang="0">
+                <a:pos x="connsiteX67" y="connsiteY67"/>
+              </a:cxn>
+              <a:cxn ang="0">
+                <a:pos x="connsiteX68" y="connsiteY68"/>
+              </a:cxn>
+              <a:cxn ang="0">
+                <a:pos x="connsiteX69" y="connsiteY69"/>
+              </a:cxn>
+              <a:cxn ang="0">
+                <a:pos x="connsiteX70" y="connsiteY70"/>
+              </a:cxn>
+              <a:cxn ang="0">
+                <a:pos x="connsiteX71" y="connsiteY71"/>
+              </a:cxn>
+              <a:cxn ang="0">
+                <a:pos x="connsiteX72" y="connsiteY72"/>
+              </a:cxn>
+              <a:cxn ang="0">
+                <a:pos x="connsiteX73" y="connsiteY73"/>
+              </a:cxn>
+              <a:cxn ang="0">
+                <a:pos x="connsiteX74" y="connsiteY74"/>
+              </a:cxn>
+              <a:cxn ang="0">
+                <a:pos x="connsiteX75" y="connsiteY75"/>
+              </a:cxn>
+              <a:cxn ang="0">
+                <a:pos x="connsiteX76" y="connsiteY76"/>
+              </a:cxn>
+              <a:cxn ang="0">
+                <a:pos x="connsiteX77" y="connsiteY77"/>
+              </a:cxn>
+              <a:cxn ang="0">
+                <a:pos x="connsiteX78" y="connsiteY78"/>
+              </a:cxn>
+              <a:cxn ang="0">
+                <a:pos x="connsiteX79" y="connsiteY79"/>
+              </a:cxn>
+              <a:cxn ang="0">
+                <a:pos x="connsiteX80" y="connsiteY80"/>
+              </a:cxn>
+              <a:cxn ang="0">
+                <a:pos x="connsiteX81" y="connsiteY81"/>
+              </a:cxn>
+              <a:cxn ang="0">
+                <a:pos x="connsiteX82" y="connsiteY82"/>
+              </a:cxn>
+              <a:cxn ang="0">
+                <a:pos x="connsiteX83" y="connsiteY83"/>
+              </a:cxn>
+              <a:cxn ang="0">
+                <a:pos x="connsiteX84" y="connsiteY84"/>
+              </a:cxn>
+              <a:cxn ang="0">
+                <a:pos x="connsiteX85" y="connsiteY85"/>
+              </a:cxn>
+              <a:cxn ang="0">
+                <a:pos x="connsiteX86" y="connsiteY86"/>
+              </a:cxn>
+              <a:cxn ang="0">
+                <a:pos x="connsiteX87" y="connsiteY87"/>
+              </a:cxn>
+              <a:cxn ang="0">
+                <a:pos x="connsiteX88" y="connsiteY88"/>
+              </a:cxn>
+              <a:cxn ang="0">
+                <a:pos x="connsiteX89" y="connsiteY89"/>
+              </a:cxn>
+              <a:cxn ang="0">
+                <a:pos x="connsiteX90" y="connsiteY90"/>
+              </a:cxn>
+              <a:cxn ang="0">
+                <a:pos x="connsiteX91" y="connsiteY91"/>
+              </a:cxn>
+              <a:cxn ang="0">
+                <a:pos x="connsiteX92" y="connsiteY92"/>
+              </a:cxn>
+              <a:cxn ang="0">
+                <a:pos x="connsiteX93" y="connsiteY93"/>
+              </a:cxn>
+              <a:cxn ang="0">
+                <a:pos x="connsiteX94" y="connsiteY94"/>
+              </a:cxn>
+              <a:cxn ang="0">
+                <a:pos x="connsiteX95" y="connsiteY95"/>
+              </a:cxn>
+              <a:cxn ang="0">
+                <a:pos x="connsiteX96" y="connsiteY96"/>
+              </a:cxn>
+              <a:cxn ang="0">
+                <a:pos x="connsiteX97" y="connsiteY97"/>
+              </a:cxn>
+              <a:cxn ang="0">
+                <a:pos x="connsiteX98" y="connsiteY98"/>
+              </a:cxn>
+              <a:cxn ang="0">
+                <a:pos x="connsiteX99" y="connsiteY99"/>
+              </a:cxn>
+            </a:cxnLst>
+            <a:rect l="l" t="t" r="r" b="b"/>
+            <a:pathLst>
+              <a:path w="850743" h="249219">
+                <a:moveTo>
+                  <a:pt x="847353" y="123779"/>
+                </a:moveTo>
+                <a:cubicBezTo>
+                  <a:pt x="802734" y="102522"/>
+                  <a:pt x="755799" y="89894"/>
+                  <a:pt x="707811" y="86105"/>
+                </a:cubicBezTo>
+                <a:cubicBezTo>
+                  <a:pt x="697288" y="85263"/>
+                  <a:pt x="688659" y="85053"/>
+                  <a:pt x="680661" y="85053"/>
+                </a:cubicBezTo>
+                <a:cubicBezTo>
+                  <a:pt x="645933" y="85474"/>
+                  <a:pt x="621729" y="94314"/>
+                  <a:pt x="606575" y="112203"/>
+                </a:cubicBezTo>
+                <a:lnTo>
+                  <a:pt x="606154" y="112835"/>
+                </a:lnTo>
+                <a:lnTo>
+                  <a:pt x="605312" y="112835"/>
+                </a:lnTo>
+                <a:cubicBezTo>
+                  <a:pt x="574794" y="113256"/>
+                  <a:pt x="544066" y="113677"/>
+                  <a:pt x="513547" y="114098"/>
+                </a:cubicBezTo>
+                <a:lnTo>
+                  <a:pt x="503655" y="114098"/>
+                </a:lnTo>
+                <a:cubicBezTo>
+                  <a:pt x="503655" y="114098"/>
+                  <a:pt x="512916" y="110730"/>
+                  <a:pt x="512916" y="110730"/>
+                </a:cubicBezTo>
+                <a:cubicBezTo>
+                  <a:pt x="566165" y="90946"/>
+                  <a:pt x="604050" y="54745"/>
+                  <a:pt x="619204" y="8442"/>
+                </a:cubicBezTo>
+                <a:cubicBezTo>
+                  <a:pt x="619835" y="6548"/>
+                  <a:pt x="619414" y="4443"/>
+                  <a:pt x="618151" y="2759"/>
+                </a:cubicBezTo>
+                <a:cubicBezTo>
+                  <a:pt x="616888" y="1075"/>
+                  <a:pt x="614784" y="-188"/>
+                  <a:pt x="612889" y="23"/>
+                </a:cubicBezTo>
+                <a:lnTo>
+                  <a:pt x="612468" y="23"/>
+                </a:lnTo>
+                <a:cubicBezTo>
+                  <a:pt x="536910" y="4653"/>
+                  <a:pt x="467244" y="48431"/>
+                  <a:pt x="430412" y="114519"/>
+                </a:cubicBezTo>
+                <a:lnTo>
+                  <a:pt x="429991" y="115361"/>
+                </a:lnTo>
+                <a:lnTo>
+                  <a:pt x="428938" y="115361"/>
+                </a:lnTo>
+                <a:cubicBezTo>
+                  <a:pt x="397368" y="115781"/>
+                  <a:pt x="365587" y="116202"/>
+                  <a:pt x="334016" y="116623"/>
+                </a:cubicBezTo>
+                <a:lnTo>
+                  <a:pt x="323072" y="116623"/>
+                </a:lnTo>
+                <a:cubicBezTo>
+                  <a:pt x="323072" y="116623"/>
+                  <a:pt x="333385" y="113256"/>
+                  <a:pt x="333385" y="113256"/>
+                </a:cubicBezTo>
+                <a:cubicBezTo>
+                  <a:pt x="374848" y="99365"/>
+                  <a:pt x="432727" y="73687"/>
+                  <a:pt x="456300" y="13072"/>
+                </a:cubicBezTo>
+                <a:cubicBezTo>
+                  <a:pt x="456931" y="11388"/>
+                  <a:pt x="456720" y="9284"/>
+                  <a:pt x="455458" y="7600"/>
+                </a:cubicBezTo>
+                <a:cubicBezTo>
+                  <a:pt x="454195" y="5706"/>
+                  <a:pt x="452090" y="4443"/>
+                  <a:pt x="449985" y="4443"/>
+                </a:cubicBezTo>
+                <a:lnTo>
+                  <a:pt x="449564" y="4443"/>
+                </a:lnTo>
+                <a:cubicBezTo>
+                  <a:pt x="378005" y="10336"/>
+                  <a:pt x="313390" y="50746"/>
+                  <a:pt x="276768" y="112203"/>
+                </a:cubicBezTo>
+                <a:lnTo>
+                  <a:pt x="276347" y="112835"/>
+                </a:lnTo>
+                <a:cubicBezTo>
+                  <a:pt x="275085" y="113677"/>
+                  <a:pt x="274243" y="114940"/>
+                  <a:pt x="273822" y="116202"/>
+                </a:cubicBezTo>
+                <a:lnTo>
+                  <a:pt x="273401" y="117465"/>
+                </a:lnTo>
+                <a:lnTo>
+                  <a:pt x="236148" y="117886"/>
+                </a:lnTo>
+                <a:cubicBezTo>
+                  <a:pt x="216574" y="118097"/>
+                  <a:pt x="96816" y="118307"/>
+                  <a:pt x="5051" y="118728"/>
+                </a:cubicBezTo>
+                <a:cubicBezTo>
+                  <a:pt x="3368" y="123148"/>
+                  <a:pt x="1684" y="127568"/>
+                  <a:pt x="0" y="132198"/>
+                </a:cubicBezTo>
+                <a:cubicBezTo>
+                  <a:pt x="105235" y="131777"/>
+                  <a:pt x="246461" y="131356"/>
+                  <a:pt x="279084" y="130935"/>
+                </a:cubicBezTo>
+                <a:lnTo>
+                  <a:pt x="280136" y="130935"/>
+                </a:lnTo>
+                <a:cubicBezTo>
+                  <a:pt x="280136" y="130935"/>
+                  <a:pt x="280557" y="131777"/>
+                  <a:pt x="280557" y="131777"/>
+                </a:cubicBezTo>
+                <a:cubicBezTo>
+                  <a:pt x="319073" y="191972"/>
+                  <a:pt x="381162" y="233224"/>
+                  <a:pt x="451248" y="244589"/>
+                </a:cubicBezTo>
+                <a:cubicBezTo>
+                  <a:pt x="451669" y="244589"/>
+                  <a:pt x="452090" y="244589"/>
+                  <a:pt x="452722" y="244589"/>
+                </a:cubicBezTo>
+                <a:cubicBezTo>
+                  <a:pt x="455247" y="244589"/>
+                  <a:pt x="457352" y="243326"/>
+                  <a:pt x="458615" y="241432"/>
+                </a:cubicBezTo>
+                <a:cubicBezTo>
+                  <a:pt x="459878" y="239327"/>
+                  <a:pt x="459878" y="237012"/>
+                  <a:pt x="458615" y="234697"/>
+                </a:cubicBezTo>
+                <a:cubicBezTo>
+                  <a:pt x="430833" y="179343"/>
+                  <a:pt x="381162" y="149036"/>
+                  <a:pt x="344329" y="133461"/>
+                </a:cubicBezTo>
+                <a:lnTo>
+                  <a:pt x="336963" y="130304"/>
+                </a:lnTo>
+                <a:lnTo>
+                  <a:pt x="345171" y="130304"/>
+                </a:lnTo>
+                <a:cubicBezTo>
+                  <a:pt x="345171" y="130304"/>
+                  <a:pt x="398841" y="129462"/>
+                  <a:pt x="419046" y="129252"/>
+                </a:cubicBezTo>
+                <a:lnTo>
+                  <a:pt x="432095" y="129252"/>
+                </a:lnTo>
+                <a:cubicBezTo>
+                  <a:pt x="432095" y="129252"/>
+                  <a:pt x="432516" y="130304"/>
+                  <a:pt x="432516" y="130304"/>
+                </a:cubicBezTo>
+                <a:cubicBezTo>
+                  <a:pt x="440304" y="162085"/>
+                  <a:pt x="465350" y="189235"/>
+                  <a:pt x="507444" y="211545"/>
+                </a:cubicBezTo>
+                <a:cubicBezTo>
+                  <a:pt x="552274" y="235328"/>
+                  <a:pt x="603629" y="248378"/>
+                  <a:pt x="655825" y="249219"/>
+                </a:cubicBezTo>
+                <a:cubicBezTo>
+                  <a:pt x="658141" y="249219"/>
+                  <a:pt x="660666" y="247536"/>
+                  <a:pt x="661719" y="245221"/>
+                </a:cubicBezTo>
+                <a:cubicBezTo>
+                  <a:pt x="662771" y="243116"/>
+                  <a:pt x="662560" y="240801"/>
+                  <a:pt x="661298" y="238906"/>
+                </a:cubicBezTo>
+                <a:cubicBezTo>
+                  <a:pt x="623413" y="189656"/>
+                  <a:pt x="572690" y="152403"/>
+                  <a:pt x="514179" y="131146"/>
+                </a:cubicBezTo>
+                <a:lnTo>
+                  <a:pt x="505339" y="127989"/>
+                </a:lnTo>
+                <a:lnTo>
+                  <a:pt x="514600" y="127989"/>
+                </a:lnTo>
+                <a:cubicBezTo>
+                  <a:pt x="514600" y="127989"/>
+                  <a:pt x="572900" y="126936"/>
+                  <a:pt x="594999" y="126726"/>
+                </a:cubicBezTo>
+                <a:lnTo>
+                  <a:pt x="596052" y="126726"/>
+                </a:lnTo>
+                <a:cubicBezTo>
+                  <a:pt x="596052" y="126726"/>
+                  <a:pt x="596473" y="127568"/>
+                  <a:pt x="596473" y="127568"/>
+                </a:cubicBezTo>
+                <a:cubicBezTo>
+                  <a:pt x="596894" y="128410"/>
+                  <a:pt x="597736" y="129041"/>
+                  <a:pt x="598367" y="129672"/>
+                </a:cubicBezTo>
+                <a:cubicBezTo>
+                  <a:pt x="629517" y="150719"/>
+                  <a:pt x="669506" y="161243"/>
+                  <a:pt x="720650" y="161664"/>
+                </a:cubicBezTo>
+                <a:cubicBezTo>
+                  <a:pt x="725070" y="161664"/>
+                  <a:pt x="729700" y="161664"/>
+                  <a:pt x="734120" y="161664"/>
+                </a:cubicBezTo>
+                <a:cubicBezTo>
+                  <a:pt x="768637" y="161243"/>
+                  <a:pt x="812836" y="158086"/>
+                  <a:pt x="847564" y="135776"/>
+                </a:cubicBezTo>
+                <a:cubicBezTo>
+                  <a:pt x="849668" y="134513"/>
+                  <a:pt x="850931" y="131777"/>
+                  <a:pt x="850721" y="129252"/>
+                </a:cubicBezTo>
+                <a:cubicBezTo>
+                  <a:pt x="850721" y="126936"/>
+                  <a:pt x="849248" y="125042"/>
+                  <a:pt x="847353" y="123990"/>
+                </a:cubicBezTo>
+                <a:close/>
+                <a:moveTo>
+                  <a:pt x="295921" y="107363"/>
+                </a:moveTo>
+                <a:cubicBezTo>
+                  <a:pt x="328544" y="60428"/>
+                  <a:pt x="379478" y="28647"/>
+                  <a:pt x="435463" y="19807"/>
+                </a:cubicBezTo>
+                <a:lnTo>
+                  <a:pt x="438830" y="19386"/>
+                </a:lnTo>
+                <a:lnTo>
+                  <a:pt x="437147" y="22333"/>
+                </a:lnTo>
+                <a:cubicBezTo>
+                  <a:pt x="409996" y="73687"/>
+                  <a:pt x="351485" y="95576"/>
+                  <a:pt x="297605" y="110099"/>
+                </a:cubicBezTo>
+                <a:lnTo>
+                  <a:pt x="292975" y="111362"/>
+                </a:lnTo>
+                <a:lnTo>
+                  <a:pt x="295711" y="107573"/>
+                </a:lnTo>
+                <a:close/>
+                <a:moveTo>
+                  <a:pt x="437357" y="225226"/>
+                </a:moveTo>
+                <a:lnTo>
+                  <a:pt x="439672" y="228804"/>
+                </a:lnTo>
+                <a:lnTo>
+                  <a:pt x="435463" y="227752"/>
+                </a:lnTo>
+                <a:cubicBezTo>
+                  <a:pt x="380530" y="214071"/>
+                  <a:pt x="332122" y="181238"/>
+                  <a:pt x="299078" y="135355"/>
+                </a:cubicBezTo>
+                <a:lnTo>
+                  <a:pt x="296342" y="131356"/>
+                </a:lnTo>
+                <a:lnTo>
+                  <a:pt x="300972" y="132619"/>
+                </a:lnTo>
+                <a:cubicBezTo>
+                  <a:pt x="361167" y="149036"/>
+                  <a:pt x="409575" y="181869"/>
+                  <a:pt x="437357" y="225015"/>
+                </a:cubicBezTo>
+                <a:close/>
+                <a:moveTo>
+                  <a:pt x="449144" y="109467"/>
+                </a:moveTo>
+                <a:cubicBezTo>
+                  <a:pt x="482608" y="57902"/>
+                  <a:pt x="538804" y="22543"/>
+                  <a:pt x="599419" y="14966"/>
+                </a:cubicBezTo>
+                <a:lnTo>
+                  <a:pt x="602366" y="14545"/>
+                </a:lnTo>
+                <a:lnTo>
+                  <a:pt x="601103" y="17281"/>
+                </a:lnTo>
+                <a:cubicBezTo>
+                  <a:pt x="587633" y="47379"/>
+                  <a:pt x="550169" y="99996"/>
+                  <a:pt x="450617" y="111993"/>
+                </a:cubicBezTo>
+                <a:lnTo>
+                  <a:pt x="447039" y="112414"/>
+                </a:lnTo>
+                <a:lnTo>
+                  <a:pt x="448933" y="109257"/>
+                </a:lnTo>
+                <a:close/>
+                <a:moveTo>
+                  <a:pt x="638146" y="231961"/>
+                </a:moveTo>
+                <a:lnTo>
+                  <a:pt x="640882" y="235118"/>
+                </a:lnTo>
+                <a:lnTo>
+                  <a:pt x="636673" y="235118"/>
+                </a:lnTo>
+                <a:cubicBezTo>
+                  <a:pt x="595631" y="231750"/>
+                  <a:pt x="556694" y="221227"/>
+                  <a:pt x="520914" y="203337"/>
+                </a:cubicBezTo>
+                <a:cubicBezTo>
+                  <a:pt x="478820" y="182500"/>
+                  <a:pt x="454405" y="158717"/>
+                  <a:pt x="446197" y="130935"/>
+                </a:cubicBezTo>
+                <a:lnTo>
+                  <a:pt x="445566" y="128831"/>
+                </a:lnTo>
+                <a:lnTo>
+                  <a:pt x="451669" y="128831"/>
+                </a:lnTo>
+                <a:cubicBezTo>
+                  <a:pt x="523019" y="139986"/>
+                  <a:pt x="590790" y="177660"/>
+                  <a:pt x="638146" y="231961"/>
+                </a:cubicBezTo>
+                <a:close/>
+                <a:moveTo>
+                  <a:pt x="825885" y="131988"/>
+                </a:moveTo>
+                <a:cubicBezTo>
+                  <a:pt x="796419" y="145458"/>
+                  <a:pt x="763165" y="147562"/>
+                  <a:pt x="734541" y="147983"/>
+                </a:cubicBezTo>
+                <a:cubicBezTo>
+                  <a:pt x="732226" y="147983"/>
+                  <a:pt x="729911" y="147983"/>
+                  <a:pt x="727806" y="147983"/>
+                </a:cubicBezTo>
+                <a:cubicBezTo>
+                  <a:pt x="725491" y="147983"/>
+                  <a:pt x="722965" y="147983"/>
+                  <a:pt x="720650" y="147983"/>
+                </a:cubicBezTo>
+                <a:cubicBezTo>
+                  <a:pt x="678135" y="147562"/>
+                  <a:pt x="644039" y="139986"/>
+                  <a:pt x="616467" y="124832"/>
+                </a:cubicBezTo>
+                <a:lnTo>
+                  <a:pt x="614784" y="123779"/>
+                </a:lnTo>
+                <a:lnTo>
+                  <a:pt x="616046" y="122306"/>
+                </a:lnTo>
+                <a:cubicBezTo>
+                  <a:pt x="628043" y="106731"/>
+                  <a:pt x="648880" y="98944"/>
+                  <a:pt x="679608" y="98523"/>
+                </a:cubicBezTo>
+                <a:cubicBezTo>
+                  <a:pt x="692237" y="98523"/>
+                  <a:pt x="704654" y="99575"/>
+                  <a:pt x="716020" y="100628"/>
+                </a:cubicBezTo>
+                <a:cubicBezTo>
+                  <a:pt x="753273" y="104206"/>
+                  <a:pt x="790316" y="113887"/>
+                  <a:pt x="825885" y="129041"/>
+                </a:cubicBezTo>
+                <a:lnTo>
+                  <a:pt x="829463" y="130514"/>
+                </a:lnTo>
+                <a:lnTo>
+                  <a:pt x="825885" y="132198"/>
+                </a:lnTo>
+                <a:close/>
+              </a:path>
+            </a:pathLst>
+          </a:custGeom>
+          <a:solidFill>
+            <a:schemeClr val="accent6">
+              <a:lumMod val="50000"/>
+            </a:schemeClr>
+          </a:solidFill>
+          <a:ln w="20955" cap="flat">
+            <a:noFill/>
+            <a:prstDash val="solid"/>
+            <a:miter/>
+          </a:ln>
+        </p:spPr>
+        <p:txBody>
+          <a:bodyPr rtlCol="0" anchor="ctr"/>
+          <a:lstStyle/>
+          <a:p>
+            <a:pPr marL="0" marR="0" lvl="0" indent="0" algn="l" defTabSz="1219140" rtl="0" eaLnBrk="0" fontAlgn="base" latinLnBrk="0" hangingPunct="0">
+              <a:lnSpc>
+                <a:spcPct val="100000"/>
+              </a:lnSpc>
+              <a:spcBef>
+                <a:spcPct val="0"/>
+              </a:spcBef>
+              <a:spcAft>
+                <a:spcPct val="0"/>
+              </a:spcAft>
+              <a:buClrTx/>
+              <a:buSzTx/>
+              <a:buFontTx/>
+              <a:buNone/>
+              <a:tabLst/>
+              <a:defRPr/>
+            </a:pPr>
+            <a:endParaRPr kumimoji="1" lang="ko-KR" altLang="en-US" sz="2400" b="0" i="0" u="none" strike="noStrike" kern="1200" cap="none" spc="0" normalizeH="0" baseline="0" noProof="0">
+              <a:ln>
+                <a:noFill/>
+              </a:ln>
+              <a:solidFill>
+                <a:prstClr val="black"/>
+              </a:solidFill>
+              <a:effectLst/>
+              <a:uLnTx/>
+              <a:uFillTx/>
+              <a:latin typeface="굴림" panose="020B0600000101010101" pitchFamily="34" charset="-127"/>
+              <a:ea typeface="굴림" panose="020B0600000101010101" pitchFamily="34" charset="-127"/>
+              <a:cs typeface="+mn-cs"/>
+            </a:endParaRPr>
+          </a:p>
+        </p:txBody>
+      </p:sp>
+      <p:sp>
+        <p:nvSpPr>
+          <p:cNvPr id="6" name="TextBox 5">
+            <a:extLst>
+              <a:ext uri="{FF2B5EF4-FFF2-40B4-BE49-F238E27FC236}">
+                <a16:creationId xmlns:a16="http://schemas.microsoft.com/office/drawing/2014/main" id="{3F0B8729-3DE5-F574-A00E-A2D375E3F9CD}"/>
+              </a:ext>
+            </a:extLst>
+          </p:cNvPr>
+          <p:cNvSpPr txBox="1"/>
+          <p:nvPr/>
+        </p:nvSpPr>
+        <p:spPr>
+          <a:xfrm>
+            <a:off x="541691" y="2565221"/>
+            <a:ext cx="3867332" cy="523220"/>
+          </a:xfrm>
+          <a:prstGeom prst="rect">
+            <a:avLst/>
+          </a:prstGeom>
+          <a:noFill/>
+        </p:spPr>
+        <p:txBody>
+          <a:bodyPr wrap="square" rtlCol="0">
+            <a:spAutoFit/>
+          </a:bodyPr>
+          <a:lstStyle/>
+          <a:p>
+            <a:pPr marL="0" marR="0" lvl="0" indent="0" algn="l" defTabSz="1219140" rtl="0" eaLnBrk="0" fontAlgn="base" latinLnBrk="0" hangingPunct="0">
+              <a:lnSpc>
+                <a:spcPct val="100000"/>
+              </a:lnSpc>
+              <a:spcBef>
+                <a:spcPct val="0"/>
+              </a:spcBef>
+              <a:spcAft>
+                <a:spcPct val="0"/>
+              </a:spcAft>
+              <a:buClrTx/>
+              <a:buSzTx/>
+              <a:buFontTx/>
+              <a:buNone/>
+              <a:tabLst/>
+              <a:defRPr sz="2800">
+                <a:solidFill>
+                  <a:srgbClr val="8FA79F"/>
+                </a:solidFill>
+                <a:latin typeface="나눔스퀘어 네오 ExtraBold"/>
+              </a:defRPr>
+            </a:pPr>
+            <a:r>
+              <a:t>Psa 1:1</a:t>
+            </a:r>
+            <a:endParaRPr kumimoji="1" lang="en-US" altLang="ko-KR" sz="2800" b="1" i="0" u="none" strike="noStrike" kern="1200" cap="none" spc="0" normalizeH="0" baseline="0" noProof="0" dirty="0">
+              <a:ln>
+                <a:noFill/>
+              </a:ln>
+              <a:solidFill>
+                <a:srgbClr val="8FA79F"/>
+              </a:solidFill>
+              <a:effectLst/>
+              <a:uLnTx/>
+              <a:uFillTx/>
+              <a:latin typeface="나눔스퀘어 네오 ExtraBold" panose="00000900000000000000" pitchFamily="2" charset="-127"/>
+              <a:ea typeface="나눔스퀘어 네오 ExtraBold" panose="00000900000000000000" pitchFamily="2" charset="-127"/>
+              <a:cs typeface="+mn-cs"/>
+            </a:endParaRPr>
+          </a:p>
+          <a:p>
+            <a:pPr>
+              <a:defRPr sz="2800">
+                <a:solidFill>
+                  <a:srgbClr val="8FA79F"/>
+                </a:solidFill>
+                <a:latin typeface="나눔스퀘어 네오 ExtraBold"/>
+              </a:defRPr>
+            </a:pPr>
+            <a:r>
+              <a:t>1Co 3:3</a:t>
+            </a:r>
+          </a:p>
+          <a:p>
+            <a:pPr>
+              <a:defRPr sz="2800">
+                <a:solidFill>
+                  <a:srgbClr val="8FA79F"/>
+                </a:solidFill>
+                <a:latin typeface="나눔스퀘어 네오 ExtraBold"/>
+              </a:defRPr>
+            </a:pPr>
+          </a:p>
+        </p:txBody>
+      </p:sp>
+      <p:sp>
+        <p:nvSpPr>
+          <p:cNvPr id="5" name="TextBox 4">
+            <a:extLst>
+              <a:ext uri="{FF2B5EF4-FFF2-40B4-BE49-F238E27FC236}">
+                <a16:creationId xmlns:a16="http://schemas.microsoft.com/office/drawing/2014/main" id="{66F56BDC-842A-F82D-62A9-29DCB99DBEEB}"/>
+              </a:ext>
+            </a:extLst>
+          </p:cNvPr>
+          <p:cNvSpPr txBox="1"/>
+          <p:nvPr/>
+        </p:nvSpPr>
+        <p:spPr>
+          <a:xfrm>
+            <a:off x="4606904" y="414536"/>
+            <a:ext cx="7246825" cy="369332"/>
+          </a:xfrm>
+          <a:prstGeom prst="rect">
+            <a:avLst/>
+          </a:prstGeom>
+          <a:noFill/>
+        </p:spPr>
+        <p:txBody>
+          <a:bodyPr wrap="square" rtlCol="0">
+            <a:spAutoFit/>
+          </a:bodyPr>
+          <a:lstStyle/>
+          <a:p>
+            <a:pPr>
+              <a:defRPr sz="2800">
+                <a:solidFill>
+                  <a:srgbClr val="1F3337"/>
+                </a:solidFill>
+                <a:latin typeface="나눔스퀘어 네오 Bold"/>
+              </a:defRPr>
+            </a:pPr>
+            <a:r>
+              <a:t>¹˸¹ 복 있는 사람은 악인들의 꾀를 따르지 아니하며 죄인들의 길에 서지 아니하며 오만한 자들의 자리에 앉지 아니하고</a:t>
+            </a:r>
+          </a:p>
+          <a:p>
+            <a:pPr>
+              <a:defRPr sz="2800">
+                <a:solidFill>
+                  <a:srgbClr val="1F3337"/>
+                </a:solidFill>
+                <a:latin typeface="나눔스퀘어 네오 Bold"/>
+              </a:defRPr>
+            </a:pPr>
+            <a:r>
+              <a:t>³˸³ 너희는 아직도 육신에 속한 자로다 너희 가운데 시기와 분쟁이 있으니 어찌 육신에 속하여 사람을 따라 행함이 아니리요</a:t>
+            </a:r>
+          </a:p>
+        </p:txBody>
+      </p:sp>
+      <p:sp>
+        <p:nvSpPr>
+          <p:cNvPr id="3" name="TextBox 2">
+            <a:extLst>
+              <a:ext uri="{FF2B5EF4-FFF2-40B4-BE49-F238E27FC236}">
+                <a16:creationId xmlns:a16="http://schemas.microsoft.com/office/drawing/2014/main" id="{9992D8C0-60E8-B6D2-A388-9B378A00EBBC}"/>
+              </a:ext>
+            </a:extLst>
+          </p:cNvPr>
+          <p:cNvSpPr txBox="1"/>
+          <p:nvPr/>
+        </p:nvSpPr>
+        <p:spPr>
+          <a:xfrm>
+            <a:off x="4606908" y="3992331"/>
+            <a:ext cx="7246821" cy="369332"/>
+          </a:xfrm>
+          <a:prstGeom prst="rect">
+            <a:avLst/>
+          </a:prstGeom>
+          <a:noFill/>
+        </p:spPr>
+        <p:txBody>
+          <a:bodyPr wrap="square" rtlCol="0">
+            <a:spAutoFit/>
+          </a:bodyPr>
+          <a:lstStyle/>
+          <a:p>
+            <a:pPr>
+              <a:defRPr sz="2000">
+                <a:solidFill>
+                  <a:srgbClr val="4F655E"/>
+                </a:solidFill>
+                <a:latin typeface="Pretendard Variable"/>
+              </a:defRPr>
+            </a:pPr>
+            <a:r>
+              <a:t>¹˸¹ Blessed is the manwho walks not in the counsel of the wicked, nor stands in the way of sinners, nor sits in the seat of scoffers;</a:t>
+            </a:r>
+            <a:endParaRPr lang="ko-KR" altLang="en-US" dirty="0"/>
+          </a:p>
+          <a:p>
+            <a:pPr>
+              <a:defRPr sz="2000">
+                <a:solidFill>
+                  <a:srgbClr val="4F655E"/>
+                </a:solidFill>
+                <a:latin typeface="Pretendard Variable"/>
+              </a:defRPr>
+            </a:pPr>
+            <a:r>
+              <a:t>³˸³ for you are still of the flesh. For while there is jealousy and strife among you, are you not of the flesh and behaving only in a human way?</a:t>
+            </a:r>
+          </a:p>
+        </p:txBody>
+      </p:sp>
+    </p:spTree>
   </p:cSld>
   <p:clrMapOvr>
     <a:masterClrMapping/>

--- a/pptx_template/output.pptx
+++ b/pptx_template/output.pptx
@@ -10,6 +10,7 @@
   <p:sldIdLst>
     <p:sldId id="4772" r:id="rId2"/>
     <p:sldId id="4773" r:id="rId8"/>
+    <p:sldId id="4774" r:id="rId9"/>
   </p:sldIdLst>
   <p:sldSz cx="12192000" cy="6858000"/>
   <p:notesSz cx="6858000" cy="9144000"/>
@@ -3989,7 +3990,7 @@
               </a:defRPr>
             </a:pPr>
             <a:r>
-              <a:t>창세기</a:t>
+              <a:t>창세기 1:1</a:t>
             </a:r>
             <a:endParaRPr kumimoji="1" lang="en-US" altLang="ko-KR" sz="3733" b="1" i="0" u="none" strike="noStrike" kern="1200" cap="none" spc="0" normalizeH="0" baseline="0" noProof="0" dirty="0">
               <a:ln>
@@ -4016,8 +4017,18 @@
               </a:defRPr>
             </a:pPr>
             <a:r>
-              <a:t>1:1-3</a:t>
+              <a:t>고린도전서 1:3</a:t>
             </a:r>
+          </a:p>
+          <a:p>
+            <a:pPr>
+              <a:defRPr sz="3729">
+                <a:solidFill>
+                  <a:srgbClr val="1F3337"/>
+                </a:solidFill>
+                <a:latin typeface="나눔스퀘어 네오 ExtraBold"/>
+              </a:defRPr>
+            </a:pPr>
           </a:p>
         </p:txBody>
       </p:sp>
@@ -5193,7 +5204,7 @@
               </a:defRPr>
             </a:pPr>
             <a:r>
-              <a:t>Gen 1:1-3</a:t>
+              <a:t>Gen 1:1</a:t>
             </a:r>
             <a:endParaRPr kumimoji="1" lang="en-US" altLang="ko-KR" sz="2800" b="1" i="0" u="none" strike="noStrike" kern="1200" cap="none" spc="0" normalizeH="0" baseline="0" noProof="0" dirty="0">
               <a:ln>
@@ -5219,6 +5230,19 @@
                 <a:latin typeface="나눔스퀘어 네오 ExtraBold"/>
               </a:defRPr>
             </a:pPr>
+            <a:r>
+              <a:t>1Co 1:3</a:t>
+            </a:r>
+          </a:p>
+          <a:p>
+            <a:pPr>
+              <a:defRPr sz="2800">
+                <a:solidFill>
+                  <a:srgbClr val="8FA79F"/>
+                </a:solidFill>
+                <a:latin typeface="나눔스퀘어 네오 ExtraBold"/>
+              </a:defRPr>
+            </a:pPr>
           </a:p>
         </p:txBody>
       </p:sp>
@@ -5259,7 +5283,7 @@
               </a:defRPr>
             </a:pPr>
             <a:r>
-              <a:t>¹ 태초에 하나님이 천지를 창조하시니라</a:t>
+              <a:t>¹˸¹ 태초에 하나님이 천지를 창조하시니라</a:t>
             </a:r>
           </a:p>
           <a:p>
@@ -5272,20 +5296,7 @@
               </a:defRPr>
             </a:pPr>
             <a:r>
-              <a:t>² 땅이 혼돈하고 공허하며 흑암이 깊음 위에 있고 하나님의 영은 수면 위에 운행하시니라</a:t>
-            </a:r>
-          </a:p>
-          <a:p>
-            <a:pPr>
-              <a:defRPr sz="2800">
-                <a:solidFill>
-                  <a:srgbClr val="1F3337"/>
-                </a:solidFill>
-                <a:latin typeface="나눔스퀘어 네오 Bold"/>
-              </a:defRPr>
-            </a:pPr>
-            <a:r>
-              <a:t>³ 하나님이 이르시되 빛이 있으라 하시니 빛이 있었고</a:t>
+              <a:t>¹˸³ 하나님 우리 아버지와 주 예수 그리스도로부터 은혜와 평강이 있기를 원하노라</a:t>
             </a:r>
           </a:p>
         </p:txBody>
@@ -5327,7 +5338,7 @@
               </a:defRPr>
             </a:pPr>
             <a:r>
-              <a:t>¹ In the beginning, God created the heavens and the earth.</a:t>
+              <a:t>¹˸¹ In the beginning, God created the heavens and the earth.</a:t>
             </a:r>
             <a:endParaRPr lang="ko-KR" altLang="en-US" dirty="0"/>
           </a:p>
@@ -5341,20 +5352,7 @@
               </a:defRPr>
             </a:pPr>
             <a:r>
-              <a:t>² The earth was without form and void, and darkness was over the face of the deep. And the Spirit of God was hovering over the face of the waters.</a:t>
-            </a:r>
-          </a:p>
-          <a:p>
-            <a:pPr>
-              <a:defRPr sz="2000">
-                <a:solidFill>
-                  <a:srgbClr val="4F655E"/>
-                </a:solidFill>
-                <a:latin typeface="Pretendard Variable"/>
-              </a:defRPr>
-            </a:pPr>
-            <a:r>
-              <a:t>³ And God said, "Let there be light," and there was light.</a:t>
+              <a:t>¹˸³ Grace to you and peace from God our Father and the Lord Jesus Christ.</a:t>
             </a:r>
           </a:p>
         </p:txBody>
@@ -5510,15 +5508,15 @@
               <a:buFontTx/>
               <a:buNone/>
               <a:tabLst/>
-              <a:defRPr sz="3729">
+              <a:defRPr sz="2800">
                 <a:solidFill>
                   <a:srgbClr val="1F3337"/>
                 </a:solidFill>
-                <a:latin typeface="나눔스퀘어 네오 ExtraBold"/>
+                <a:latin typeface="나눔스퀘어 네오 Bold"/>
               </a:defRPr>
             </a:pPr>
             <a:r>
-              <a:t>시편 1:1</a:t>
+              <a:t>고린도전서</a:t>
             </a:r>
             <a:endParaRPr kumimoji="1" lang="en-US" altLang="ko-KR" sz="3733" b="1" i="0" u="none" strike="noStrike" kern="1200" cap="none" spc="0" normalizeH="0" baseline="0" noProof="0" dirty="0">
               <a:ln>
@@ -5537,26 +5535,16 @@
           </a:p>
           <a:p>
             <a:pPr>
-              <a:defRPr sz="3729">
+              <a:defRPr sz="2800">
                 <a:solidFill>
                   <a:srgbClr val="1F3337"/>
                 </a:solidFill>
-                <a:latin typeface="나눔스퀘어 네오 ExtraBold"/>
+                <a:latin typeface="나눔스퀘어 네오 Bold"/>
               </a:defRPr>
             </a:pPr>
             <a:r>
-              <a:t>고린도전서 3:3</a:t>
+              <a:t>1:1-3</a:t>
             </a:r>
-          </a:p>
-          <a:p>
-            <a:pPr>
-              <a:defRPr sz="3729">
-                <a:solidFill>
-                  <a:srgbClr val="1F3337"/>
-                </a:solidFill>
-                <a:latin typeface="나눔스퀘어 네오 ExtraBold"/>
-              </a:defRPr>
-            </a:pPr>
           </a:p>
         </p:txBody>
       </p:sp>
@@ -6732,6 +6720,1530 @@
               </a:defRPr>
             </a:pPr>
             <a:r>
+              <a:t>1Co 1:1-3</a:t>
+            </a:r>
+            <a:endParaRPr kumimoji="1" lang="en-US" altLang="ko-KR" sz="2800" b="1" i="0" u="none" strike="noStrike" kern="1200" cap="none" spc="0" normalizeH="0" baseline="0" noProof="0" dirty="0">
+              <a:ln>
+                <a:noFill/>
+              </a:ln>
+              <a:solidFill>
+                <a:srgbClr val="8FA79F"/>
+              </a:solidFill>
+              <a:effectLst/>
+              <a:uLnTx/>
+              <a:uFillTx/>
+              <a:latin typeface="나눔스퀘어 네오 ExtraBold" panose="00000900000000000000" pitchFamily="2" charset="-127"/>
+              <a:ea typeface="나눔스퀘어 네오 ExtraBold" panose="00000900000000000000" pitchFamily="2" charset="-127"/>
+              <a:cs typeface="+mn-cs"/>
+            </a:endParaRPr>
+          </a:p>
+          <a:p>
+            <a:pPr>
+              <a:defRPr sz="2800">
+                <a:solidFill>
+                  <a:srgbClr val="8FA79F"/>
+                </a:solidFill>
+                <a:latin typeface="나눔스퀘어 네오 ExtraBold"/>
+              </a:defRPr>
+            </a:pPr>
+          </a:p>
+        </p:txBody>
+      </p:sp>
+      <p:sp>
+        <p:nvSpPr>
+          <p:cNvPr id="5" name="TextBox 4">
+            <a:extLst>
+              <a:ext uri="{FF2B5EF4-FFF2-40B4-BE49-F238E27FC236}">
+                <a16:creationId xmlns:a16="http://schemas.microsoft.com/office/drawing/2014/main" id="{66F56BDC-842A-F82D-62A9-29DCB99DBEEB}"/>
+              </a:ext>
+            </a:extLst>
+          </p:cNvPr>
+          <p:cNvSpPr txBox="1"/>
+          <p:nvPr/>
+        </p:nvSpPr>
+        <p:spPr>
+          <a:xfrm>
+            <a:off x="4606904" y="414536"/>
+            <a:ext cx="7246825" cy="369332"/>
+          </a:xfrm>
+          <a:prstGeom prst="rect">
+            <a:avLst/>
+          </a:prstGeom>
+          <a:noFill/>
+        </p:spPr>
+        <p:txBody>
+          <a:bodyPr wrap="square" rtlCol="0">
+            <a:spAutoFit/>
+          </a:bodyPr>
+          <a:lstStyle/>
+          <a:p>
+            <a:pPr>
+              <a:defRPr sz="2800">
+                <a:solidFill>
+                  <a:srgbClr val="1F3337"/>
+                </a:solidFill>
+                <a:latin typeface="나눔스퀘어 네오 Bold"/>
+              </a:defRPr>
+            </a:pPr>
+            <a:r>
+              <a:t>¹ 하나님의 뜻을 따라 그리스도 예수의 사도로 부르심을 받은 바울과 형제 소스데네는</a:t>
+            </a:r>
+          </a:p>
+          <a:p>
+            <a:pPr>
+              <a:defRPr sz="2800">
+                <a:solidFill>
+                  <a:srgbClr val="1F3337"/>
+                </a:solidFill>
+                <a:latin typeface="나눔스퀘어 네오 Bold"/>
+              </a:defRPr>
+            </a:pPr>
+            <a:r>
+              <a:t>² 고린도에 있는 하나님의 교회 곧 그리스도 예수 안에서 거룩하여지고 성도라 부르심을 받은 자들과 또 각처에서 우리의 주 곧 그들과 우리의 주 되신 예수 그리스도의 이름을 부르는 모든 자들에게</a:t>
+            </a:r>
+          </a:p>
+          <a:p>
+            <a:pPr>
+              <a:defRPr sz="2800">
+                <a:solidFill>
+                  <a:srgbClr val="1F3337"/>
+                </a:solidFill>
+                <a:latin typeface="나눔스퀘어 네오 Bold"/>
+              </a:defRPr>
+            </a:pPr>
+            <a:r>
+              <a:t>³ 하나님 우리 아버지와 주 예수 그리스도로부터 은혜와 평강이 있기를 원하노라</a:t>
+            </a:r>
+          </a:p>
+        </p:txBody>
+      </p:sp>
+      <p:sp>
+        <p:nvSpPr>
+          <p:cNvPr id="3" name="TextBox 2">
+            <a:extLst>
+              <a:ext uri="{FF2B5EF4-FFF2-40B4-BE49-F238E27FC236}">
+                <a16:creationId xmlns:a16="http://schemas.microsoft.com/office/drawing/2014/main" id="{9992D8C0-60E8-B6D2-A388-9B378A00EBBC}"/>
+              </a:ext>
+            </a:extLst>
+          </p:cNvPr>
+          <p:cNvSpPr txBox="1"/>
+          <p:nvPr/>
+        </p:nvSpPr>
+        <p:spPr>
+          <a:xfrm>
+            <a:off x="4606908" y="3992331"/>
+            <a:ext cx="7246821" cy="369332"/>
+          </a:xfrm>
+          <a:prstGeom prst="rect">
+            <a:avLst/>
+          </a:prstGeom>
+          <a:noFill/>
+        </p:spPr>
+        <p:txBody>
+          <a:bodyPr wrap="square" rtlCol="0">
+            <a:spAutoFit/>
+          </a:bodyPr>
+          <a:lstStyle/>
+          <a:p>
+            <a:pPr>
+              <a:defRPr sz="2000">
+                <a:solidFill>
+                  <a:srgbClr val="4F655E"/>
+                </a:solidFill>
+                <a:latin typeface="Pretendard Variable"/>
+              </a:defRPr>
+            </a:pPr>
+            <a:r>
+              <a:t>¹ Paul, called by the will of God to be an apostle of Christ Jesus, and our brother Sosthenes,</a:t>
+            </a:r>
+            <a:endParaRPr lang="ko-KR" altLang="en-US" dirty="0"/>
+          </a:p>
+          <a:p>
+            <a:pPr>
+              <a:defRPr sz="2000">
+                <a:solidFill>
+                  <a:srgbClr val="4F655E"/>
+                </a:solidFill>
+                <a:latin typeface="Pretendard Variable"/>
+              </a:defRPr>
+            </a:pPr>
+            <a:r>
+              <a:t>² To the church of God that is in Corinth, to those sanctified in Christ Jesus, called to be saints together with all those who in every place call upon the name of our Lord Jesus Christ, both their Lord and ours:</a:t>
+            </a:r>
+          </a:p>
+          <a:p>
+            <a:pPr>
+              <a:defRPr sz="2000">
+                <a:solidFill>
+                  <a:srgbClr val="4F655E"/>
+                </a:solidFill>
+                <a:latin typeface="Pretendard Variable"/>
+              </a:defRPr>
+            </a:pPr>
+            <a:r>
+              <a:t>³ Grace to you and peace from God our Father and the Lord Jesus Christ.</a:t>
+            </a:r>
+          </a:p>
+        </p:txBody>
+      </p:sp>
+    </p:spTree>
+  </p:cSld>
+  <p:clrMapOvr>
+    <a:masterClrMapping/>
+  </p:clrMapOvr>
+</p:sld>
+</file>
+
+<file path=ppt/slides/slide3.xml><?xml version="1.0" encoding="utf-8"?>
+<p:sld xmlns:a="http://schemas.openxmlformats.org/drawingml/2006/main" xmlns:p="http://schemas.openxmlformats.org/presentationml/2006/main" xmlns:r="http://schemas.openxmlformats.org/officeDocument/2006/relationships">
+  <p:cSld>
+    <p:spTree>
+      <p:nvGrpSpPr>
+        <p:cNvPr id="1" name=""/>
+        <p:cNvGrpSpPr/>
+        <p:nvPr/>
+      </p:nvGrpSpPr>
+      <p:grpSpPr/>
+      <p:sp>
+        <p:nvSpPr>
+          <p:cNvPr id="23" name="직사각형 22">
+            <a:extLst>
+              <a:ext uri="{FF2B5EF4-FFF2-40B4-BE49-F238E27FC236}">
+                <a16:creationId xmlns:a16="http://schemas.microsoft.com/office/drawing/2014/main" id="{19169C31-E35E-B58F-A814-E65D8A184638}"/>
+              </a:ext>
+            </a:extLst>
+          </p:cNvPr>
+          <p:cNvSpPr/>
+          <p:nvPr/>
+        </p:nvSpPr>
+        <p:spPr>
+          <a:xfrm>
+            <a:off x="-7468" y="0"/>
+            <a:ext cx="4212175" cy="6858000"/>
+          </a:xfrm>
+          <a:prstGeom prst="rect">
+            <a:avLst/>
+          </a:prstGeom>
+          <a:solidFill>
+            <a:schemeClr val="accent6">
+              <a:lumMod val="20000"/>
+              <a:lumOff val="80000"/>
+              <a:alpha val="50000"/>
+            </a:schemeClr>
+          </a:solidFill>
+          <a:ln>
+            <a:noFill/>
+          </a:ln>
+        </p:spPr>
+        <p:style>
+          <a:lnRef idx="2">
+            <a:schemeClr val="accent1">
+              <a:shade val="15000"/>
+            </a:schemeClr>
+          </a:lnRef>
+          <a:fillRef idx="1">
+            <a:schemeClr val="accent1"/>
+          </a:fillRef>
+          <a:effectRef idx="0">
+            <a:schemeClr val="accent1"/>
+          </a:effectRef>
+          <a:fontRef idx="minor">
+            <a:schemeClr val="lt1"/>
+          </a:fontRef>
+        </p:style>
+        <p:txBody>
+          <a:bodyPr rtlCol="0" anchor="ctr"/>
+          <a:lstStyle/>
+          <a:p>
+            <a:pPr marL="0" marR="0" lvl="0" indent="0" algn="ctr" defTabSz="1219140" rtl="0" eaLnBrk="0" fontAlgn="base" latinLnBrk="0" hangingPunct="0">
+              <a:lnSpc>
+                <a:spcPct val="100000"/>
+              </a:lnSpc>
+              <a:spcBef>
+                <a:spcPct val="0"/>
+              </a:spcBef>
+              <a:spcAft>
+                <a:spcPct val="0"/>
+              </a:spcAft>
+              <a:buClrTx/>
+              <a:buSzTx/>
+              <a:buFontTx/>
+              <a:buNone/>
+              <a:tabLst/>
+              <a:defRPr/>
+            </a:pPr>
+            <a:endParaRPr kumimoji="1" lang="ko-KR" altLang="en-US" sz="2400" b="0" i="0" u="none" strike="noStrike" kern="1200" cap="none" spc="0" normalizeH="0" baseline="0" noProof="0" dirty="0">
+              <a:ln>
+                <a:noFill/>
+              </a:ln>
+              <a:solidFill>
+                <a:prstClr val="white"/>
+              </a:solidFill>
+              <a:effectLst/>
+              <a:uLnTx/>
+              <a:uFillTx/>
+              <a:latin typeface="맑은 고딕" panose="020F0502020204030204"/>
+              <a:ea typeface="맑은 고딕" panose="020B0503020000020004" pitchFamily="50" charset="-127"/>
+              <a:cs typeface="+mn-cs"/>
+            </a:endParaRPr>
+          </a:p>
+        </p:txBody>
+      </p:sp>
+      <p:sp>
+        <p:nvSpPr>
+          <p:cNvPr id="10" name="TextBox 9">
+            <a:extLst>
+              <a:ext uri="{FF2B5EF4-FFF2-40B4-BE49-F238E27FC236}">
+                <a16:creationId xmlns:a16="http://schemas.microsoft.com/office/drawing/2014/main" id="{F1C51526-9E46-003D-540D-3596EB5F6E8E}"/>
+              </a:ext>
+            </a:extLst>
+          </p:cNvPr>
+          <p:cNvSpPr txBox="1"/>
+          <p:nvPr/>
+        </p:nvSpPr>
+        <p:spPr>
+          <a:xfrm>
+            <a:off x="541691" y="568591"/>
+            <a:ext cx="3867332" cy="666786"/>
+          </a:xfrm>
+          <a:prstGeom prst="rect">
+            <a:avLst/>
+          </a:prstGeom>
+          <a:noFill/>
+        </p:spPr>
+        <p:txBody>
+          <a:bodyPr wrap="square" rtlCol="0">
+            <a:spAutoFit/>
+          </a:bodyPr>
+          <a:lstStyle/>
+          <a:p>
+            <a:pPr marL="0" marR="0" lvl="0" indent="0" algn="l" defTabSz="1219140" rtl="0" eaLnBrk="0" fontAlgn="base" latinLnBrk="0" hangingPunct="0">
+              <a:lnSpc>
+                <a:spcPct val="100000"/>
+              </a:lnSpc>
+              <a:spcBef>
+                <a:spcPct val="0"/>
+              </a:spcBef>
+              <a:spcAft>
+                <a:spcPct val="0"/>
+              </a:spcAft>
+              <a:buClrTx/>
+              <a:buSzTx/>
+              <a:buFontTx/>
+              <a:buNone/>
+              <a:tabLst/>
+              <a:defRPr sz="2800">
+                <a:solidFill>
+                  <a:srgbClr val="1F3337"/>
+                </a:solidFill>
+                <a:latin typeface="나눔스퀘어 네오 Bold"/>
+              </a:defRPr>
+            </a:pPr>
+            <a:r>
+              <a:t>시편</a:t>
+            </a:r>
+            <a:endParaRPr kumimoji="1" lang="en-US" altLang="ko-KR" sz="3733" b="1" i="0" u="none" strike="noStrike" kern="1200" cap="none" spc="0" normalizeH="0" baseline="0" noProof="0" dirty="0">
+              <a:ln>
+                <a:noFill/>
+              </a:ln>
+              <a:solidFill>
+                <a:srgbClr val="213337"/>
+              </a:solidFill>
+              <a:effectLst/>
+              <a:uLnTx/>
+              <a:uFillTx/>
+              <a:latin typeface="나눔스퀘어 네오 ExtraBold" panose="00000900000000000000" pitchFamily="2" charset="-127"/>
+              <a:ea typeface="나눔스퀘어 네오 ExtraBold" panose="00000900000000000000" pitchFamily="2" charset="-127"/>
+              <a:cs typeface="+mn-cs"/>
+            </a:endParaRPr>
+          </a:p>
+          <a:p>
+            <a:pPr>
+              <a:defRPr sz="2800">
+                <a:solidFill>
+                  <a:srgbClr val="1F3337"/>
+                </a:solidFill>
+                <a:latin typeface="나눔스퀘어 네오 Bold"/>
+              </a:defRPr>
+            </a:pPr>
+            <a:r>
+              <a:t>1:1</a:t>
+            </a:r>
+          </a:p>
+        </p:txBody>
+      </p:sp>
+      <p:cxnSp>
+        <p:nvCxnSpPr>
+          <p:cNvPr id="14" name="직선 연결선 13">
+            <a:extLst>
+              <a:ext uri="{FF2B5EF4-FFF2-40B4-BE49-F238E27FC236}">
+                <a16:creationId xmlns:a16="http://schemas.microsoft.com/office/drawing/2014/main" id="{DF27D16E-3EE5-D795-3F3F-D360817DC3AA}"/>
+              </a:ext>
+            </a:extLst>
+          </p:cNvPr>
+          <p:cNvCxnSpPr>
+            <a:cxnSpLocks/>
+          </p:cNvCxnSpPr>
+          <p:nvPr/>
+        </p:nvCxnSpPr>
+        <p:spPr>
+          <a:xfrm>
+            <a:off x="4212177" y="241302"/>
+            <a:ext cx="0" cy="6379633"/>
+          </a:xfrm>
+          <a:prstGeom prst="line">
+            <a:avLst/>
+          </a:prstGeom>
+          <a:ln w="19050">
+            <a:solidFill>
+              <a:srgbClr val="213337"/>
+            </a:solidFill>
+          </a:ln>
+        </p:spPr>
+        <p:style>
+          <a:lnRef idx="1">
+            <a:schemeClr val="accent2"/>
+          </a:lnRef>
+          <a:fillRef idx="0">
+            <a:schemeClr val="accent2"/>
+          </a:fillRef>
+          <a:effectRef idx="0">
+            <a:schemeClr val="accent2"/>
+          </a:effectRef>
+          <a:fontRef idx="minor">
+            <a:schemeClr val="tx1"/>
+          </a:fontRef>
+        </p:style>
+      </p:cxnSp>
+      <p:sp>
+        <p:nvSpPr>
+          <p:cNvPr id="15" name="타원 14">
+            <a:extLst>
+              <a:ext uri="{FF2B5EF4-FFF2-40B4-BE49-F238E27FC236}">
+                <a16:creationId xmlns:a16="http://schemas.microsoft.com/office/drawing/2014/main" id="{07FD1CA4-A20B-11FC-E23C-FC5F3F624592}"/>
+              </a:ext>
+            </a:extLst>
+          </p:cNvPr>
+          <p:cNvSpPr/>
+          <p:nvPr/>
+        </p:nvSpPr>
+        <p:spPr>
+          <a:xfrm>
+            <a:off x="4095764" y="578135"/>
+            <a:ext cx="228595" cy="228595"/>
+          </a:xfrm>
+          <a:prstGeom prst="ellipse">
+            <a:avLst/>
+          </a:prstGeom>
+          <a:solidFill>
+            <a:srgbClr val="213337"/>
+          </a:solidFill>
+          <a:ln>
+            <a:noFill/>
+          </a:ln>
+        </p:spPr>
+        <p:style>
+          <a:lnRef idx="2">
+            <a:schemeClr val="accent1">
+              <a:shade val="15000"/>
+            </a:schemeClr>
+          </a:lnRef>
+          <a:fillRef idx="1">
+            <a:schemeClr val="accent1"/>
+          </a:fillRef>
+          <a:effectRef idx="0">
+            <a:schemeClr val="accent1"/>
+          </a:effectRef>
+          <a:fontRef idx="minor">
+            <a:schemeClr val="lt1"/>
+          </a:fontRef>
+        </p:style>
+        <p:txBody>
+          <a:bodyPr rtlCol="0" anchor="ctr"/>
+          <a:lstStyle/>
+          <a:p>
+            <a:pPr marL="0" marR="0" lvl="0" indent="0" algn="ctr" defTabSz="1219140" rtl="0" eaLnBrk="0" fontAlgn="base" latinLnBrk="0" hangingPunct="0">
+              <a:lnSpc>
+                <a:spcPct val="100000"/>
+              </a:lnSpc>
+              <a:spcBef>
+                <a:spcPct val="0"/>
+              </a:spcBef>
+              <a:spcAft>
+                <a:spcPct val="0"/>
+              </a:spcAft>
+              <a:buClrTx/>
+              <a:buSzTx/>
+              <a:buFontTx/>
+              <a:buNone/>
+              <a:tabLst/>
+              <a:defRPr/>
+            </a:pPr>
+            <a:endParaRPr kumimoji="1" lang="ko-KR" altLang="en-US" sz="2400" b="0" i="0" u="none" strike="noStrike" kern="1200" cap="none" spc="0" normalizeH="0" baseline="0" noProof="0">
+              <a:ln>
+                <a:noFill/>
+              </a:ln>
+              <a:solidFill>
+                <a:prstClr val="white"/>
+              </a:solidFill>
+              <a:effectLst/>
+              <a:uLnTx/>
+              <a:uFillTx/>
+              <a:latin typeface="맑은 고딕" panose="020F0502020204030204"/>
+              <a:ea typeface="맑은 고딕" panose="020B0503020000020004" pitchFamily="50" charset="-127"/>
+              <a:cs typeface="+mn-cs"/>
+            </a:endParaRPr>
+          </a:p>
+        </p:txBody>
+      </p:sp>
+      <p:sp>
+        <p:nvSpPr>
+          <p:cNvPr id="22" name="그래픽 20">
+            <a:extLst>
+              <a:ext uri="{FF2B5EF4-FFF2-40B4-BE49-F238E27FC236}">
+                <a16:creationId xmlns:a16="http://schemas.microsoft.com/office/drawing/2014/main" id="{59909059-D14E-9A87-C3A1-5A731C56D049}"/>
+              </a:ext>
+            </a:extLst>
+          </p:cNvPr>
+          <p:cNvSpPr/>
+          <p:nvPr/>
+        </p:nvSpPr>
+        <p:spPr>
+          <a:xfrm rot="10953421">
+            <a:off x="722713" y="1970970"/>
+            <a:ext cx="1134324" cy="332292"/>
+          </a:xfrm>
+          <a:custGeom>
+            <a:avLst/>
+            <a:gdLst>
+              <a:gd name="connsiteX0" fmla="*/ 847353 w 850743"/>
+              <a:gd name="connsiteY0" fmla="*/ 123779 h 249219"/>
+              <a:gd name="connsiteX1" fmla="*/ 707811 w 850743"/>
+              <a:gd name="connsiteY1" fmla="*/ 86105 h 249219"/>
+              <a:gd name="connsiteX2" fmla="*/ 680661 w 850743"/>
+              <a:gd name="connsiteY2" fmla="*/ 85053 h 249219"/>
+              <a:gd name="connsiteX3" fmla="*/ 606575 w 850743"/>
+              <a:gd name="connsiteY3" fmla="*/ 112203 h 249219"/>
+              <a:gd name="connsiteX4" fmla="*/ 606154 w 850743"/>
+              <a:gd name="connsiteY4" fmla="*/ 112835 h 249219"/>
+              <a:gd name="connsiteX5" fmla="*/ 605312 w 850743"/>
+              <a:gd name="connsiteY5" fmla="*/ 112835 h 249219"/>
+              <a:gd name="connsiteX6" fmla="*/ 513547 w 850743"/>
+              <a:gd name="connsiteY6" fmla="*/ 114098 h 249219"/>
+              <a:gd name="connsiteX7" fmla="*/ 503655 w 850743"/>
+              <a:gd name="connsiteY7" fmla="*/ 114098 h 249219"/>
+              <a:gd name="connsiteX8" fmla="*/ 512916 w 850743"/>
+              <a:gd name="connsiteY8" fmla="*/ 110730 h 249219"/>
+              <a:gd name="connsiteX9" fmla="*/ 619204 w 850743"/>
+              <a:gd name="connsiteY9" fmla="*/ 8442 h 249219"/>
+              <a:gd name="connsiteX10" fmla="*/ 618151 w 850743"/>
+              <a:gd name="connsiteY10" fmla="*/ 2759 h 249219"/>
+              <a:gd name="connsiteX11" fmla="*/ 612889 w 850743"/>
+              <a:gd name="connsiteY11" fmla="*/ 23 h 249219"/>
+              <a:gd name="connsiteX12" fmla="*/ 612468 w 850743"/>
+              <a:gd name="connsiteY12" fmla="*/ 23 h 249219"/>
+              <a:gd name="connsiteX13" fmla="*/ 430412 w 850743"/>
+              <a:gd name="connsiteY13" fmla="*/ 114519 h 249219"/>
+              <a:gd name="connsiteX14" fmla="*/ 429991 w 850743"/>
+              <a:gd name="connsiteY14" fmla="*/ 115361 h 249219"/>
+              <a:gd name="connsiteX15" fmla="*/ 428938 w 850743"/>
+              <a:gd name="connsiteY15" fmla="*/ 115361 h 249219"/>
+              <a:gd name="connsiteX16" fmla="*/ 334016 w 850743"/>
+              <a:gd name="connsiteY16" fmla="*/ 116623 h 249219"/>
+              <a:gd name="connsiteX17" fmla="*/ 323072 w 850743"/>
+              <a:gd name="connsiteY17" fmla="*/ 116623 h 249219"/>
+              <a:gd name="connsiteX18" fmla="*/ 333385 w 850743"/>
+              <a:gd name="connsiteY18" fmla="*/ 113256 h 249219"/>
+              <a:gd name="connsiteX19" fmla="*/ 456300 w 850743"/>
+              <a:gd name="connsiteY19" fmla="*/ 13072 h 249219"/>
+              <a:gd name="connsiteX20" fmla="*/ 455458 w 850743"/>
+              <a:gd name="connsiteY20" fmla="*/ 7600 h 249219"/>
+              <a:gd name="connsiteX21" fmla="*/ 449985 w 850743"/>
+              <a:gd name="connsiteY21" fmla="*/ 4443 h 249219"/>
+              <a:gd name="connsiteX22" fmla="*/ 449564 w 850743"/>
+              <a:gd name="connsiteY22" fmla="*/ 4443 h 249219"/>
+              <a:gd name="connsiteX23" fmla="*/ 276768 w 850743"/>
+              <a:gd name="connsiteY23" fmla="*/ 112203 h 249219"/>
+              <a:gd name="connsiteX24" fmla="*/ 276347 w 850743"/>
+              <a:gd name="connsiteY24" fmla="*/ 112835 h 249219"/>
+              <a:gd name="connsiteX25" fmla="*/ 273822 w 850743"/>
+              <a:gd name="connsiteY25" fmla="*/ 116202 h 249219"/>
+              <a:gd name="connsiteX26" fmla="*/ 273401 w 850743"/>
+              <a:gd name="connsiteY26" fmla="*/ 117465 h 249219"/>
+              <a:gd name="connsiteX27" fmla="*/ 236148 w 850743"/>
+              <a:gd name="connsiteY27" fmla="*/ 117886 h 249219"/>
+              <a:gd name="connsiteX28" fmla="*/ 5051 w 850743"/>
+              <a:gd name="connsiteY28" fmla="*/ 118728 h 249219"/>
+              <a:gd name="connsiteX29" fmla="*/ 0 w 850743"/>
+              <a:gd name="connsiteY29" fmla="*/ 132198 h 249219"/>
+              <a:gd name="connsiteX30" fmla="*/ 279084 w 850743"/>
+              <a:gd name="connsiteY30" fmla="*/ 130935 h 249219"/>
+              <a:gd name="connsiteX31" fmla="*/ 280136 w 850743"/>
+              <a:gd name="connsiteY31" fmla="*/ 130935 h 249219"/>
+              <a:gd name="connsiteX32" fmla="*/ 280557 w 850743"/>
+              <a:gd name="connsiteY32" fmla="*/ 131777 h 249219"/>
+              <a:gd name="connsiteX33" fmla="*/ 451248 w 850743"/>
+              <a:gd name="connsiteY33" fmla="*/ 244589 h 249219"/>
+              <a:gd name="connsiteX34" fmla="*/ 452722 w 850743"/>
+              <a:gd name="connsiteY34" fmla="*/ 244589 h 249219"/>
+              <a:gd name="connsiteX35" fmla="*/ 458615 w 850743"/>
+              <a:gd name="connsiteY35" fmla="*/ 241432 h 249219"/>
+              <a:gd name="connsiteX36" fmla="*/ 458615 w 850743"/>
+              <a:gd name="connsiteY36" fmla="*/ 234697 h 249219"/>
+              <a:gd name="connsiteX37" fmla="*/ 344329 w 850743"/>
+              <a:gd name="connsiteY37" fmla="*/ 133461 h 249219"/>
+              <a:gd name="connsiteX38" fmla="*/ 336963 w 850743"/>
+              <a:gd name="connsiteY38" fmla="*/ 130304 h 249219"/>
+              <a:gd name="connsiteX39" fmla="*/ 345171 w 850743"/>
+              <a:gd name="connsiteY39" fmla="*/ 130304 h 249219"/>
+              <a:gd name="connsiteX40" fmla="*/ 419046 w 850743"/>
+              <a:gd name="connsiteY40" fmla="*/ 129252 h 249219"/>
+              <a:gd name="connsiteX41" fmla="*/ 432095 w 850743"/>
+              <a:gd name="connsiteY41" fmla="*/ 129252 h 249219"/>
+              <a:gd name="connsiteX42" fmla="*/ 432516 w 850743"/>
+              <a:gd name="connsiteY42" fmla="*/ 130304 h 249219"/>
+              <a:gd name="connsiteX43" fmla="*/ 507444 w 850743"/>
+              <a:gd name="connsiteY43" fmla="*/ 211545 h 249219"/>
+              <a:gd name="connsiteX44" fmla="*/ 655825 w 850743"/>
+              <a:gd name="connsiteY44" fmla="*/ 249219 h 249219"/>
+              <a:gd name="connsiteX45" fmla="*/ 661719 w 850743"/>
+              <a:gd name="connsiteY45" fmla="*/ 245221 h 249219"/>
+              <a:gd name="connsiteX46" fmla="*/ 661298 w 850743"/>
+              <a:gd name="connsiteY46" fmla="*/ 238906 h 249219"/>
+              <a:gd name="connsiteX47" fmla="*/ 514179 w 850743"/>
+              <a:gd name="connsiteY47" fmla="*/ 131146 h 249219"/>
+              <a:gd name="connsiteX48" fmla="*/ 505339 w 850743"/>
+              <a:gd name="connsiteY48" fmla="*/ 127989 h 249219"/>
+              <a:gd name="connsiteX49" fmla="*/ 514600 w 850743"/>
+              <a:gd name="connsiteY49" fmla="*/ 127989 h 249219"/>
+              <a:gd name="connsiteX50" fmla="*/ 594999 w 850743"/>
+              <a:gd name="connsiteY50" fmla="*/ 126726 h 249219"/>
+              <a:gd name="connsiteX51" fmla="*/ 596052 w 850743"/>
+              <a:gd name="connsiteY51" fmla="*/ 126726 h 249219"/>
+              <a:gd name="connsiteX52" fmla="*/ 596473 w 850743"/>
+              <a:gd name="connsiteY52" fmla="*/ 127568 h 249219"/>
+              <a:gd name="connsiteX53" fmla="*/ 598367 w 850743"/>
+              <a:gd name="connsiteY53" fmla="*/ 129672 h 249219"/>
+              <a:gd name="connsiteX54" fmla="*/ 720650 w 850743"/>
+              <a:gd name="connsiteY54" fmla="*/ 161664 h 249219"/>
+              <a:gd name="connsiteX55" fmla="*/ 734120 w 850743"/>
+              <a:gd name="connsiteY55" fmla="*/ 161664 h 249219"/>
+              <a:gd name="connsiteX56" fmla="*/ 847564 w 850743"/>
+              <a:gd name="connsiteY56" fmla="*/ 135776 h 249219"/>
+              <a:gd name="connsiteX57" fmla="*/ 850721 w 850743"/>
+              <a:gd name="connsiteY57" fmla="*/ 129252 h 249219"/>
+              <a:gd name="connsiteX58" fmla="*/ 847353 w 850743"/>
+              <a:gd name="connsiteY58" fmla="*/ 123990 h 249219"/>
+              <a:gd name="connsiteX59" fmla="*/ 295921 w 850743"/>
+              <a:gd name="connsiteY59" fmla="*/ 107363 h 249219"/>
+              <a:gd name="connsiteX60" fmla="*/ 435463 w 850743"/>
+              <a:gd name="connsiteY60" fmla="*/ 19807 h 249219"/>
+              <a:gd name="connsiteX61" fmla="*/ 438830 w 850743"/>
+              <a:gd name="connsiteY61" fmla="*/ 19386 h 249219"/>
+              <a:gd name="connsiteX62" fmla="*/ 437147 w 850743"/>
+              <a:gd name="connsiteY62" fmla="*/ 22333 h 249219"/>
+              <a:gd name="connsiteX63" fmla="*/ 297605 w 850743"/>
+              <a:gd name="connsiteY63" fmla="*/ 110099 h 249219"/>
+              <a:gd name="connsiteX64" fmla="*/ 292975 w 850743"/>
+              <a:gd name="connsiteY64" fmla="*/ 111362 h 249219"/>
+              <a:gd name="connsiteX65" fmla="*/ 295711 w 850743"/>
+              <a:gd name="connsiteY65" fmla="*/ 107573 h 249219"/>
+              <a:gd name="connsiteX66" fmla="*/ 437357 w 850743"/>
+              <a:gd name="connsiteY66" fmla="*/ 225226 h 249219"/>
+              <a:gd name="connsiteX67" fmla="*/ 439672 w 850743"/>
+              <a:gd name="connsiteY67" fmla="*/ 228804 h 249219"/>
+              <a:gd name="connsiteX68" fmla="*/ 435463 w 850743"/>
+              <a:gd name="connsiteY68" fmla="*/ 227752 h 249219"/>
+              <a:gd name="connsiteX69" fmla="*/ 299078 w 850743"/>
+              <a:gd name="connsiteY69" fmla="*/ 135355 h 249219"/>
+              <a:gd name="connsiteX70" fmla="*/ 296342 w 850743"/>
+              <a:gd name="connsiteY70" fmla="*/ 131356 h 249219"/>
+              <a:gd name="connsiteX71" fmla="*/ 300972 w 850743"/>
+              <a:gd name="connsiteY71" fmla="*/ 132619 h 249219"/>
+              <a:gd name="connsiteX72" fmla="*/ 437357 w 850743"/>
+              <a:gd name="connsiteY72" fmla="*/ 225015 h 249219"/>
+              <a:gd name="connsiteX73" fmla="*/ 449144 w 850743"/>
+              <a:gd name="connsiteY73" fmla="*/ 109467 h 249219"/>
+              <a:gd name="connsiteX74" fmla="*/ 599419 w 850743"/>
+              <a:gd name="connsiteY74" fmla="*/ 14966 h 249219"/>
+              <a:gd name="connsiteX75" fmla="*/ 602366 w 850743"/>
+              <a:gd name="connsiteY75" fmla="*/ 14545 h 249219"/>
+              <a:gd name="connsiteX76" fmla="*/ 601103 w 850743"/>
+              <a:gd name="connsiteY76" fmla="*/ 17281 h 249219"/>
+              <a:gd name="connsiteX77" fmla="*/ 450617 w 850743"/>
+              <a:gd name="connsiteY77" fmla="*/ 111993 h 249219"/>
+              <a:gd name="connsiteX78" fmla="*/ 447039 w 850743"/>
+              <a:gd name="connsiteY78" fmla="*/ 112414 h 249219"/>
+              <a:gd name="connsiteX79" fmla="*/ 448933 w 850743"/>
+              <a:gd name="connsiteY79" fmla="*/ 109257 h 249219"/>
+              <a:gd name="connsiteX80" fmla="*/ 638146 w 850743"/>
+              <a:gd name="connsiteY80" fmla="*/ 231961 h 249219"/>
+              <a:gd name="connsiteX81" fmla="*/ 640882 w 850743"/>
+              <a:gd name="connsiteY81" fmla="*/ 235118 h 249219"/>
+              <a:gd name="connsiteX82" fmla="*/ 636673 w 850743"/>
+              <a:gd name="connsiteY82" fmla="*/ 235118 h 249219"/>
+              <a:gd name="connsiteX83" fmla="*/ 520914 w 850743"/>
+              <a:gd name="connsiteY83" fmla="*/ 203337 h 249219"/>
+              <a:gd name="connsiteX84" fmla="*/ 446197 w 850743"/>
+              <a:gd name="connsiteY84" fmla="*/ 130935 h 249219"/>
+              <a:gd name="connsiteX85" fmla="*/ 445566 w 850743"/>
+              <a:gd name="connsiteY85" fmla="*/ 128831 h 249219"/>
+              <a:gd name="connsiteX86" fmla="*/ 451669 w 850743"/>
+              <a:gd name="connsiteY86" fmla="*/ 128831 h 249219"/>
+              <a:gd name="connsiteX87" fmla="*/ 638146 w 850743"/>
+              <a:gd name="connsiteY87" fmla="*/ 231961 h 249219"/>
+              <a:gd name="connsiteX88" fmla="*/ 825885 w 850743"/>
+              <a:gd name="connsiteY88" fmla="*/ 131988 h 249219"/>
+              <a:gd name="connsiteX89" fmla="*/ 734541 w 850743"/>
+              <a:gd name="connsiteY89" fmla="*/ 147983 h 249219"/>
+              <a:gd name="connsiteX90" fmla="*/ 727806 w 850743"/>
+              <a:gd name="connsiteY90" fmla="*/ 147983 h 249219"/>
+              <a:gd name="connsiteX91" fmla="*/ 720650 w 850743"/>
+              <a:gd name="connsiteY91" fmla="*/ 147983 h 249219"/>
+              <a:gd name="connsiteX92" fmla="*/ 616467 w 850743"/>
+              <a:gd name="connsiteY92" fmla="*/ 124832 h 249219"/>
+              <a:gd name="connsiteX93" fmla="*/ 614784 w 850743"/>
+              <a:gd name="connsiteY93" fmla="*/ 123779 h 249219"/>
+              <a:gd name="connsiteX94" fmla="*/ 616046 w 850743"/>
+              <a:gd name="connsiteY94" fmla="*/ 122306 h 249219"/>
+              <a:gd name="connsiteX95" fmla="*/ 679608 w 850743"/>
+              <a:gd name="connsiteY95" fmla="*/ 98523 h 249219"/>
+              <a:gd name="connsiteX96" fmla="*/ 716020 w 850743"/>
+              <a:gd name="connsiteY96" fmla="*/ 100628 h 249219"/>
+              <a:gd name="connsiteX97" fmla="*/ 825885 w 850743"/>
+              <a:gd name="connsiteY97" fmla="*/ 129041 h 249219"/>
+              <a:gd name="connsiteX98" fmla="*/ 829463 w 850743"/>
+              <a:gd name="connsiteY98" fmla="*/ 130514 h 249219"/>
+              <a:gd name="connsiteX99" fmla="*/ 825885 w 850743"/>
+              <a:gd name="connsiteY99" fmla="*/ 132198 h 249219"/>
+            </a:gdLst>
+            <a:ahLst/>
+            <a:cxnLst>
+              <a:cxn ang="0">
+                <a:pos x="connsiteX0" y="connsiteY0"/>
+              </a:cxn>
+              <a:cxn ang="0">
+                <a:pos x="connsiteX1" y="connsiteY1"/>
+              </a:cxn>
+              <a:cxn ang="0">
+                <a:pos x="connsiteX2" y="connsiteY2"/>
+              </a:cxn>
+              <a:cxn ang="0">
+                <a:pos x="connsiteX3" y="connsiteY3"/>
+              </a:cxn>
+              <a:cxn ang="0">
+                <a:pos x="connsiteX4" y="connsiteY4"/>
+              </a:cxn>
+              <a:cxn ang="0">
+                <a:pos x="connsiteX5" y="connsiteY5"/>
+              </a:cxn>
+              <a:cxn ang="0">
+                <a:pos x="connsiteX6" y="connsiteY6"/>
+              </a:cxn>
+              <a:cxn ang="0">
+                <a:pos x="connsiteX7" y="connsiteY7"/>
+              </a:cxn>
+              <a:cxn ang="0">
+                <a:pos x="connsiteX8" y="connsiteY8"/>
+              </a:cxn>
+              <a:cxn ang="0">
+                <a:pos x="connsiteX9" y="connsiteY9"/>
+              </a:cxn>
+              <a:cxn ang="0">
+                <a:pos x="connsiteX10" y="connsiteY10"/>
+              </a:cxn>
+              <a:cxn ang="0">
+                <a:pos x="connsiteX11" y="connsiteY11"/>
+              </a:cxn>
+              <a:cxn ang="0">
+                <a:pos x="connsiteX12" y="connsiteY12"/>
+              </a:cxn>
+              <a:cxn ang="0">
+                <a:pos x="connsiteX13" y="connsiteY13"/>
+              </a:cxn>
+              <a:cxn ang="0">
+                <a:pos x="connsiteX14" y="connsiteY14"/>
+              </a:cxn>
+              <a:cxn ang="0">
+                <a:pos x="connsiteX15" y="connsiteY15"/>
+              </a:cxn>
+              <a:cxn ang="0">
+                <a:pos x="connsiteX16" y="connsiteY16"/>
+              </a:cxn>
+              <a:cxn ang="0">
+                <a:pos x="connsiteX17" y="connsiteY17"/>
+              </a:cxn>
+              <a:cxn ang="0">
+                <a:pos x="connsiteX18" y="connsiteY18"/>
+              </a:cxn>
+              <a:cxn ang="0">
+                <a:pos x="connsiteX19" y="connsiteY19"/>
+              </a:cxn>
+              <a:cxn ang="0">
+                <a:pos x="connsiteX20" y="connsiteY20"/>
+              </a:cxn>
+              <a:cxn ang="0">
+                <a:pos x="connsiteX21" y="connsiteY21"/>
+              </a:cxn>
+              <a:cxn ang="0">
+                <a:pos x="connsiteX22" y="connsiteY22"/>
+              </a:cxn>
+              <a:cxn ang="0">
+                <a:pos x="connsiteX23" y="connsiteY23"/>
+              </a:cxn>
+              <a:cxn ang="0">
+                <a:pos x="connsiteX24" y="connsiteY24"/>
+              </a:cxn>
+              <a:cxn ang="0">
+                <a:pos x="connsiteX25" y="connsiteY25"/>
+              </a:cxn>
+              <a:cxn ang="0">
+                <a:pos x="connsiteX26" y="connsiteY26"/>
+              </a:cxn>
+              <a:cxn ang="0">
+                <a:pos x="connsiteX27" y="connsiteY27"/>
+              </a:cxn>
+              <a:cxn ang="0">
+                <a:pos x="connsiteX28" y="connsiteY28"/>
+              </a:cxn>
+              <a:cxn ang="0">
+                <a:pos x="connsiteX29" y="connsiteY29"/>
+              </a:cxn>
+              <a:cxn ang="0">
+                <a:pos x="connsiteX30" y="connsiteY30"/>
+              </a:cxn>
+              <a:cxn ang="0">
+                <a:pos x="connsiteX31" y="connsiteY31"/>
+              </a:cxn>
+              <a:cxn ang="0">
+                <a:pos x="connsiteX32" y="connsiteY32"/>
+              </a:cxn>
+              <a:cxn ang="0">
+                <a:pos x="connsiteX33" y="connsiteY33"/>
+              </a:cxn>
+              <a:cxn ang="0">
+                <a:pos x="connsiteX34" y="connsiteY34"/>
+              </a:cxn>
+              <a:cxn ang="0">
+                <a:pos x="connsiteX35" y="connsiteY35"/>
+              </a:cxn>
+              <a:cxn ang="0">
+                <a:pos x="connsiteX36" y="connsiteY36"/>
+              </a:cxn>
+              <a:cxn ang="0">
+                <a:pos x="connsiteX37" y="connsiteY37"/>
+              </a:cxn>
+              <a:cxn ang="0">
+                <a:pos x="connsiteX38" y="connsiteY38"/>
+              </a:cxn>
+              <a:cxn ang="0">
+                <a:pos x="connsiteX39" y="connsiteY39"/>
+              </a:cxn>
+              <a:cxn ang="0">
+                <a:pos x="connsiteX40" y="connsiteY40"/>
+              </a:cxn>
+              <a:cxn ang="0">
+                <a:pos x="connsiteX41" y="connsiteY41"/>
+              </a:cxn>
+              <a:cxn ang="0">
+                <a:pos x="connsiteX42" y="connsiteY42"/>
+              </a:cxn>
+              <a:cxn ang="0">
+                <a:pos x="connsiteX43" y="connsiteY43"/>
+              </a:cxn>
+              <a:cxn ang="0">
+                <a:pos x="connsiteX44" y="connsiteY44"/>
+              </a:cxn>
+              <a:cxn ang="0">
+                <a:pos x="connsiteX45" y="connsiteY45"/>
+              </a:cxn>
+              <a:cxn ang="0">
+                <a:pos x="connsiteX46" y="connsiteY46"/>
+              </a:cxn>
+              <a:cxn ang="0">
+                <a:pos x="connsiteX47" y="connsiteY47"/>
+              </a:cxn>
+              <a:cxn ang="0">
+                <a:pos x="connsiteX48" y="connsiteY48"/>
+              </a:cxn>
+              <a:cxn ang="0">
+                <a:pos x="connsiteX49" y="connsiteY49"/>
+              </a:cxn>
+              <a:cxn ang="0">
+                <a:pos x="connsiteX50" y="connsiteY50"/>
+              </a:cxn>
+              <a:cxn ang="0">
+                <a:pos x="connsiteX51" y="connsiteY51"/>
+              </a:cxn>
+              <a:cxn ang="0">
+                <a:pos x="connsiteX52" y="connsiteY52"/>
+              </a:cxn>
+              <a:cxn ang="0">
+                <a:pos x="connsiteX53" y="connsiteY53"/>
+              </a:cxn>
+              <a:cxn ang="0">
+                <a:pos x="connsiteX54" y="connsiteY54"/>
+              </a:cxn>
+              <a:cxn ang="0">
+                <a:pos x="connsiteX55" y="connsiteY55"/>
+              </a:cxn>
+              <a:cxn ang="0">
+                <a:pos x="connsiteX56" y="connsiteY56"/>
+              </a:cxn>
+              <a:cxn ang="0">
+                <a:pos x="connsiteX57" y="connsiteY57"/>
+              </a:cxn>
+              <a:cxn ang="0">
+                <a:pos x="connsiteX58" y="connsiteY58"/>
+              </a:cxn>
+              <a:cxn ang="0">
+                <a:pos x="connsiteX59" y="connsiteY59"/>
+              </a:cxn>
+              <a:cxn ang="0">
+                <a:pos x="connsiteX60" y="connsiteY60"/>
+              </a:cxn>
+              <a:cxn ang="0">
+                <a:pos x="connsiteX61" y="connsiteY61"/>
+              </a:cxn>
+              <a:cxn ang="0">
+                <a:pos x="connsiteX62" y="connsiteY62"/>
+              </a:cxn>
+              <a:cxn ang="0">
+                <a:pos x="connsiteX63" y="connsiteY63"/>
+              </a:cxn>
+              <a:cxn ang="0">
+                <a:pos x="connsiteX64" y="connsiteY64"/>
+              </a:cxn>
+              <a:cxn ang="0">
+                <a:pos x="connsiteX65" y="connsiteY65"/>
+              </a:cxn>
+              <a:cxn ang="0">
+                <a:pos x="connsiteX66" y="connsiteY66"/>
+              </a:cxn>
+              <a:cxn ang="0">
+                <a:pos x="connsiteX67" y="connsiteY67"/>
+              </a:cxn>
+              <a:cxn ang="0">
+                <a:pos x="connsiteX68" y="connsiteY68"/>
+              </a:cxn>
+              <a:cxn ang="0">
+                <a:pos x="connsiteX69" y="connsiteY69"/>
+              </a:cxn>
+              <a:cxn ang="0">
+                <a:pos x="connsiteX70" y="connsiteY70"/>
+              </a:cxn>
+              <a:cxn ang="0">
+                <a:pos x="connsiteX71" y="connsiteY71"/>
+              </a:cxn>
+              <a:cxn ang="0">
+                <a:pos x="connsiteX72" y="connsiteY72"/>
+              </a:cxn>
+              <a:cxn ang="0">
+                <a:pos x="connsiteX73" y="connsiteY73"/>
+              </a:cxn>
+              <a:cxn ang="0">
+                <a:pos x="connsiteX74" y="connsiteY74"/>
+              </a:cxn>
+              <a:cxn ang="0">
+                <a:pos x="connsiteX75" y="connsiteY75"/>
+              </a:cxn>
+              <a:cxn ang="0">
+                <a:pos x="connsiteX76" y="connsiteY76"/>
+              </a:cxn>
+              <a:cxn ang="0">
+                <a:pos x="connsiteX77" y="connsiteY77"/>
+              </a:cxn>
+              <a:cxn ang="0">
+                <a:pos x="connsiteX78" y="connsiteY78"/>
+              </a:cxn>
+              <a:cxn ang="0">
+                <a:pos x="connsiteX79" y="connsiteY79"/>
+              </a:cxn>
+              <a:cxn ang="0">
+                <a:pos x="connsiteX80" y="connsiteY80"/>
+              </a:cxn>
+              <a:cxn ang="0">
+                <a:pos x="connsiteX81" y="connsiteY81"/>
+              </a:cxn>
+              <a:cxn ang="0">
+                <a:pos x="connsiteX82" y="connsiteY82"/>
+              </a:cxn>
+              <a:cxn ang="0">
+                <a:pos x="connsiteX83" y="connsiteY83"/>
+              </a:cxn>
+              <a:cxn ang="0">
+                <a:pos x="connsiteX84" y="connsiteY84"/>
+              </a:cxn>
+              <a:cxn ang="0">
+                <a:pos x="connsiteX85" y="connsiteY85"/>
+              </a:cxn>
+              <a:cxn ang="0">
+                <a:pos x="connsiteX86" y="connsiteY86"/>
+              </a:cxn>
+              <a:cxn ang="0">
+                <a:pos x="connsiteX87" y="connsiteY87"/>
+              </a:cxn>
+              <a:cxn ang="0">
+                <a:pos x="connsiteX88" y="connsiteY88"/>
+              </a:cxn>
+              <a:cxn ang="0">
+                <a:pos x="connsiteX89" y="connsiteY89"/>
+              </a:cxn>
+              <a:cxn ang="0">
+                <a:pos x="connsiteX90" y="connsiteY90"/>
+              </a:cxn>
+              <a:cxn ang="0">
+                <a:pos x="connsiteX91" y="connsiteY91"/>
+              </a:cxn>
+              <a:cxn ang="0">
+                <a:pos x="connsiteX92" y="connsiteY92"/>
+              </a:cxn>
+              <a:cxn ang="0">
+                <a:pos x="connsiteX93" y="connsiteY93"/>
+              </a:cxn>
+              <a:cxn ang="0">
+                <a:pos x="connsiteX94" y="connsiteY94"/>
+              </a:cxn>
+              <a:cxn ang="0">
+                <a:pos x="connsiteX95" y="connsiteY95"/>
+              </a:cxn>
+              <a:cxn ang="0">
+                <a:pos x="connsiteX96" y="connsiteY96"/>
+              </a:cxn>
+              <a:cxn ang="0">
+                <a:pos x="connsiteX97" y="connsiteY97"/>
+              </a:cxn>
+              <a:cxn ang="0">
+                <a:pos x="connsiteX98" y="connsiteY98"/>
+              </a:cxn>
+              <a:cxn ang="0">
+                <a:pos x="connsiteX99" y="connsiteY99"/>
+              </a:cxn>
+            </a:cxnLst>
+            <a:rect l="l" t="t" r="r" b="b"/>
+            <a:pathLst>
+              <a:path w="850743" h="249219">
+                <a:moveTo>
+                  <a:pt x="847353" y="123779"/>
+                </a:moveTo>
+                <a:cubicBezTo>
+                  <a:pt x="802734" y="102522"/>
+                  <a:pt x="755799" y="89894"/>
+                  <a:pt x="707811" y="86105"/>
+                </a:cubicBezTo>
+                <a:cubicBezTo>
+                  <a:pt x="697288" y="85263"/>
+                  <a:pt x="688659" y="85053"/>
+                  <a:pt x="680661" y="85053"/>
+                </a:cubicBezTo>
+                <a:cubicBezTo>
+                  <a:pt x="645933" y="85474"/>
+                  <a:pt x="621729" y="94314"/>
+                  <a:pt x="606575" y="112203"/>
+                </a:cubicBezTo>
+                <a:lnTo>
+                  <a:pt x="606154" y="112835"/>
+                </a:lnTo>
+                <a:lnTo>
+                  <a:pt x="605312" y="112835"/>
+                </a:lnTo>
+                <a:cubicBezTo>
+                  <a:pt x="574794" y="113256"/>
+                  <a:pt x="544066" y="113677"/>
+                  <a:pt x="513547" y="114098"/>
+                </a:cubicBezTo>
+                <a:lnTo>
+                  <a:pt x="503655" y="114098"/>
+                </a:lnTo>
+                <a:cubicBezTo>
+                  <a:pt x="503655" y="114098"/>
+                  <a:pt x="512916" y="110730"/>
+                  <a:pt x="512916" y="110730"/>
+                </a:cubicBezTo>
+                <a:cubicBezTo>
+                  <a:pt x="566165" y="90946"/>
+                  <a:pt x="604050" y="54745"/>
+                  <a:pt x="619204" y="8442"/>
+                </a:cubicBezTo>
+                <a:cubicBezTo>
+                  <a:pt x="619835" y="6548"/>
+                  <a:pt x="619414" y="4443"/>
+                  <a:pt x="618151" y="2759"/>
+                </a:cubicBezTo>
+                <a:cubicBezTo>
+                  <a:pt x="616888" y="1075"/>
+                  <a:pt x="614784" y="-188"/>
+                  <a:pt x="612889" y="23"/>
+                </a:cubicBezTo>
+                <a:lnTo>
+                  <a:pt x="612468" y="23"/>
+                </a:lnTo>
+                <a:cubicBezTo>
+                  <a:pt x="536910" y="4653"/>
+                  <a:pt x="467244" y="48431"/>
+                  <a:pt x="430412" y="114519"/>
+                </a:cubicBezTo>
+                <a:lnTo>
+                  <a:pt x="429991" y="115361"/>
+                </a:lnTo>
+                <a:lnTo>
+                  <a:pt x="428938" y="115361"/>
+                </a:lnTo>
+                <a:cubicBezTo>
+                  <a:pt x="397368" y="115781"/>
+                  <a:pt x="365587" y="116202"/>
+                  <a:pt x="334016" y="116623"/>
+                </a:cubicBezTo>
+                <a:lnTo>
+                  <a:pt x="323072" y="116623"/>
+                </a:lnTo>
+                <a:cubicBezTo>
+                  <a:pt x="323072" y="116623"/>
+                  <a:pt x="333385" y="113256"/>
+                  <a:pt x="333385" y="113256"/>
+                </a:cubicBezTo>
+                <a:cubicBezTo>
+                  <a:pt x="374848" y="99365"/>
+                  <a:pt x="432727" y="73687"/>
+                  <a:pt x="456300" y="13072"/>
+                </a:cubicBezTo>
+                <a:cubicBezTo>
+                  <a:pt x="456931" y="11388"/>
+                  <a:pt x="456720" y="9284"/>
+                  <a:pt x="455458" y="7600"/>
+                </a:cubicBezTo>
+                <a:cubicBezTo>
+                  <a:pt x="454195" y="5706"/>
+                  <a:pt x="452090" y="4443"/>
+                  <a:pt x="449985" y="4443"/>
+                </a:cubicBezTo>
+                <a:lnTo>
+                  <a:pt x="449564" y="4443"/>
+                </a:lnTo>
+                <a:cubicBezTo>
+                  <a:pt x="378005" y="10336"/>
+                  <a:pt x="313390" y="50746"/>
+                  <a:pt x="276768" y="112203"/>
+                </a:cubicBezTo>
+                <a:lnTo>
+                  <a:pt x="276347" y="112835"/>
+                </a:lnTo>
+                <a:cubicBezTo>
+                  <a:pt x="275085" y="113677"/>
+                  <a:pt x="274243" y="114940"/>
+                  <a:pt x="273822" y="116202"/>
+                </a:cubicBezTo>
+                <a:lnTo>
+                  <a:pt x="273401" y="117465"/>
+                </a:lnTo>
+                <a:lnTo>
+                  <a:pt x="236148" y="117886"/>
+                </a:lnTo>
+                <a:cubicBezTo>
+                  <a:pt x="216574" y="118097"/>
+                  <a:pt x="96816" y="118307"/>
+                  <a:pt x="5051" y="118728"/>
+                </a:cubicBezTo>
+                <a:cubicBezTo>
+                  <a:pt x="3368" y="123148"/>
+                  <a:pt x="1684" y="127568"/>
+                  <a:pt x="0" y="132198"/>
+                </a:cubicBezTo>
+                <a:cubicBezTo>
+                  <a:pt x="105235" y="131777"/>
+                  <a:pt x="246461" y="131356"/>
+                  <a:pt x="279084" y="130935"/>
+                </a:cubicBezTo>
+                <a:lnTo>
+                  <a:pt x="280136" y="130935"/>
+                </a:lnTo>
+                <a:cubicBezTo>
+                  <a:pt x="280136" y="130935"/>
+                  <a:pt x="280557" y="131777"/>
+                  <a:pt x="280557" y="131777"/>
+                </a:cubicBezTo>
+                <a:cubicBezTo>
+                  <a:pt x="319073" y="191972"/>
+                  <a:pt x="381162" y="233224"/>
+                  <a:pt x="451248" y="244589"/>
+                </a:cubicBezTo>
+                <a:cubicBezTo>
+                  <a:pt x="451669" y="244589"/>
+                  <a:pt x="452090" y="244589"/>
+                  <a:pt x="452722" y="244589"/>
+                </a:cubicBezTo>
+                <a:cubicBezTo>
+                  <a:pt x="455247" y="244589"/>
+                  <a:pt x="457352" y="243326"/>
+                  <a:pt x="458615" y="241432"/>
+                </a:cubicBezTo>
+                <a:cubicBezTo>
+                  <a:pt x="459878" y="239327"/>
+                  <a:pt x="459878" y="237012"/>
+                  <a:pt x="458615" y="234697"/>
+                </a:cubicBezTo>
+                <a:cubicBezTo>
+                  <a:pt x="430833" y="179343"/>
+                  <a:pt x="381162" y="149036"/>
+                  <a:pt x="344329" y="133461"/>
+                </a:cubicBezTo>
+                <a:lnTo>
+                  <a:pt x="336963" y="130304"/>
+                </a:lnTo>
+                <a:lnTo>
+                  <a:pt x="345171" y="130304"/>
+                </a:lnTo>
+                <a:cubicBezTo>
+                  <a:pt x="345171" y="130304"/>
+                  <a:pt x="398841" y="129462"/>
+                  <a:pt x="419046" y="129252"/>
+                </a:cubicBezTo>
+                <a:lnTo>
+                  <a:pt x="432095" y="129252"/>
+                </a:lnTo>
+                <a:cubicBezTo>
+                  <a:pt x="432095" y="129252"/>
+                  <a:pt x="432516" y="130304"/>
+                  <a:pt x="432516" y="130304"/>
+                </a:cubicBezTo>
+                <a:cubicBezTo>
+                  <a:pt x="440304" y="162085"/>
+                  <a:pt x="465350" y="189235"/>
+                  <a:pt x="507444" y="211545"/>
+                </a:cubicBezTo>
+                <a:cubicBezTo>
+                  <a:pt x="552274" y="235328"/>
+                  <a:pt x="603629" y="248378"/>
+                  <a:pt x="655825" y="249219"/>
+                </a:cubicBezTo>
+                <a:cubicBezTo>
+                  <a:pt x="658141" y="249219"/>
+                  <a:pt x="660666" y="247536"/>
+                  <a:pt x="661719" y="245221"/>
+                </a:cubicBezTo>
+                <a:cubicBezTo>
+                  <a:pt x="662771" y="243116"/>
+                  <a:pt x="662560" y="240801"/>
+                  <a:pt x="661298" y="238906"/>
+                </a:cubicBezTo>
+                <a:cubicBezTo>
+                  <a:pt x="623413" y="189656"/>
+                  <a:pt x="572690" y="152403"/>
+                  <a:pt x="514179" y="131146"/>
+                </a:cubicBezTo>
+                <a:lnTo>
+                  <a:pt x="505339" y="127989"/>
+                </a:lnTo>
+                <a:lnTo>
+                  <a:pt x="514600" y="127989"/>
+                </a:lnTo>
+                <a:cubicBezTo>
+                  <a:pt x="514600" y="127989"/>
+                  <a:pt x="572900" y="126936"/>
+                  <a:pt x="594999" y="126726"/>
+                </a:cubicBezTo>
+                <a:lnTo>
+                  <a:pt x="596052" y="126726"/>
+                </a:lnTo>
+                <a:cubicBezTo>
+                  <a:pt x="596052" y="126726"/>
+                  <a:pt x="596473" y="127568"/>
+                  <a:pt x="596473" y="127568"/>
+                </a:cubicBezTo>
+                <a:cubicBezTo>
+                  <a:pt x="596894" y="128410"/>
+                  <a:pt x="597736" y="129041"/>
+                  <a:pt x="598367" y="129672"/>
+                </a:cubicBezTo>
+                <a:cubicBezTo>
+                  <a:pt x="629517" y="150719"/>
+                  <a:pt x="669506" y="161243"/>
+                  <a:pt x="720650" y="161664"/>
+                </a:cubicBezTo>
+                <a:cubicBezTo>
+                  <a:pt x="725070" y="161664"/>
+                  <a:pt x="729700" y="161664"/>
+                  <a:pt x="734120" y="161664"/>
+                </a:cubicBezTo>
+                <a:cubicBezTo>
+                  <a:pt x="768637" y="161243"/>
+                  <a:pt x="812836" y="158086"/>
+                  <a:pt x="847564" y="135776"/>
+                </a:cubicBezTo>
+                <a:cubicBezTo>
+                  <a:pt x="849668" y="134513"/>
+                  <a:pt x="850931" y="131777"/>
+                  <a:pt x="850721" y="129252"/>
+                </a:cubicBezTo>
+                <a:cubicBezTo>
+                  <a:pt x="850721" y="126936"/>
+                  <a:pt x="849248" y="125042"/>
+                  <a:pt x="847353" y="123990"/>
+                </a:cubicBezTo>
+                <a:close/>
+                <a:moveTo>
+                  <a:pt x="295921" y="107363"/>
+                </a:moveTo>
+                <a:cubicBezTo>
+                  <a:pt x="328544" y="60428"/>
+                  <a:pt x="379478" y="28647"/>
+                  <a:pt x="435463" y="19807"/>
+                </a:cubicBezTo>
+                <a:lnTo>
+                  <a:pt x="438830" y="19386"/>
+                </a:lnTo>
+                <a:lnTo>
+                  <a:pt x="437147" y="22333"/>
+                </a:lnTo>
+                <a:cubicBezTo>
+                  <a:pt x="409996" y="73687"/>
+                  <a:pt x="351485" y="95576"/>
+                  <a:pt x="297605" y="110099"/>
+                </a:cubicBezTo>
+                <a:lnTo>
+                  <a:pt x="292975" y="111362"/>
+                </a:lnTo>
+                <a:lnTo>
+                  <a:pt x="295711" y="107573"/>
+                </a:lnTo>
+                <a:close/>
+                <a:moveTo>
+                  <a:pt x="437357" y="225226"/>
+                </a:moveTo>
+                <a:lnTo>
+                  <a:pt x="439672" y="228804"/>
+                </a:lnTo>
+                <a:lnTo>
+                  <a:pt x="435463" y="227752"/>
+                </a:lnTo>
+                <a:cubicBezTo>
+                  <a:pt x="380530" y="214071"/>
+                  <a:pt x="332122" y="181238"/>
+                  <a:pt x="299078" y="135355"/>
+                </a:cubicBezTo>
+                <a:lnTo>
+                  <a:pt x="296342" y="131356"/>
+                </a:lnTo>
+                <a:lnTo>
+                  <a:pt x="300972" y="132619"/>
+                </a:lnTo>
+                <a:cubicBezTo>
+                  <a:pt x="361167" y="149036"/>
+                  <a:pt x="409575" y="181869"/>
+                  <a:pt x="437357" y="225015"/>
+                </a:cubicBezTo>
+                <a:close/>
+                <a:moveTo>
+                  <a:pt x="449144" y="109467"/>
+                </a:moveTo>
+                <a:cubicBezTo>
+                  <a:pt x="482608" y="57902"/>
+                  <a:pt x="538804" y="22543"/>
+                  <a:pt x="599419" y="14966"/>
+                </a:cubicBezTo>
+                <a:lnTo>
+                  <a:pt x="602366" y="14545"/>
+                </a:lnTo>
+                <a:lnTo>
+                  <a:pt x="601103" y="17281"/>
+                </a:lnTo>
+                <a:cubicBezTo>
+                  <a:pt x="587633" y="47379"/>
+                  <a:pt x="550169" y="99996"/>
+                  <a:pt x="450617" y="111993"/>
+                </a:cubicBezTo>
+                <a:lnTo>
+                  <a:pt x="447039" y="112414"/>
+                </a:lnTo>
+                <a:lnTo>
+                  <a:pt x="448933" y="109257"/>
+                </a:lnTo>
+                <a:close/>
+                <a:moveTo>
+                  <a:pt x="638146" y="231961"/>
+                </a:moveTo>
+                <a:lnTo>
+                  <a:pt x="640882" y="235118"/>
+                </a:lnTo>
+                <a:lnTo>
+                  <a:pt x="636673" y="235118"/>
+                </a:lnTo>
+                <a:cubicBezTo>
+                  <a:pt x="595631" y="231750"/>
+                  <a:pt x="556694" y="221227"/>
+                  <a:pt x="520914" y="203337"/>
+                </a:cubicBezTo>
+                <a:cubicBezTo>
+                  <a:pt x="478820" y="182500"/>
+                  <a:pt x="454405" y="158717"/>
+                  <a:pt x="446197" y="130935"/>
+                </a:cubicBezTo>
+                <a:lnTo>
+                  <a:pt x="445566" y="128831"/>
+                </a:lnTo>
+                <a:lnTo>
+                  <a:pt x="451669" y="128831"/>
+                </a:lnTo>
+                <a:cubicBezTo>
+                  <a:pt x="523019" y="139986"/>
+                  <a:pt x="590790" y="177660"/>
+                  <a:pt x="638146" y="231961"/>
+                </a:cubicBezTo>
+                <a:close/>
+                <a:moveTo>
+                  <a:pt x="825885" y="131988"/>
+                </a:moveTo>
+                <a:cubicBezTo>
+                  <a:pt x="796419" y="145458"/>
+                  <a:pt x="763165" y="147562"/>
+                  <a:pt x="734541" y="147983"/>
+                </a:cubicBezTo>
+                <a:cubicBezTo>
+                  <a:pt x="732226" y="147983"/>
+                  <a:pt x="729911" y="147983"/>
+                  <a:pt x="727806" y="147983"/>
+                </a:cubicBezTo>
+                <a:cubicBezTo>
+                  <a:pt x="725491" y="147983"/>
+                  <a:pt x="722965" y="147983"/>
+                  <a:pt x="720650" y="147983"/>
+                </a:cubicBezTo>
+                <a:cubicBezTo>
+                  <a:pt x="678135" y="147562"/>
+                  <a:pt x="644039" y="139986"/>
+                  <a:pt x="616467" y="124832"/>
+                </a:cubicBezTo>
+                <a:lnTo>
+                  <a:pt x="614784" y="123779"/>
+                </a:lnTo>
+                <a:lnTo>
+                  <a:pt x="616046" y="122306"/>
+                </a:lnTo>
+                <a:cubicBezTo>
+                  <a:pt x="628043" y="106731"/>
+                  <a:pt x="648880" y="98944"/>
+                  <a:pt x="679608" y="98523"/>
+                </a:cubicBezTo>
+                <a:cubicBezTo>
+                  <a:pt x="692237" y="98523"/>
+                  <a:pt x="704654" y="99575"/>
+                  <a:pt x="716020" y="100628"/>
+                </a:cubicBezTo>
+                <a:cubicBezTo>
+                  <a:pt x="753273" y="104206"/>
+                  <a:pt x="790316" y="113887"/>
+                  <a:pt x="825885" y="129041"/>
+                </a:cubicBezTo>
+                <a:lnTo>
+                  <a:pt x="829463" y="130514"/>
+                </a:lnTo>
+                <a:lnTo>
+                  <a:pt x="825885" y="132198"/>
+                </a:lnTo>
+                <a:close/>
+              </a:path>
+            </a:pathLst>
+          </a:custGeom>
+          <a:solidFill>
+            <a:schemeClr val="accent6">
+              <a:lumMod val="50000"/>
+            </a:schemeClr>
+          </a:solidFill>
+          <a:ln w="20955" cap="flat">
+            <a:noFill/>
+            <a:prstDash val="solid"/>
+            <a:miter/>
+          </a:ln>
+        </p:spPr>
+        <p:txBody>
+          <a:bodyPr rtlCol="0" anchor="ctr"/>
+          <a:lstStyle/>
+          <a:p>
+            <a:pPr marL="0" marR="0" lvl="0" indent="0" algn="l" defTabSz="1219140" rtl="0" eaLnBrk="0" fontAlgn="base" latinLnBrk="0" hangingPunct="0">
+              <a:lnSpc>
+                <a:spcPct val="100000"/>
+              </a:lnSpc>
+              <a:spcBef>
+                <a:spcPct val="0"/>
+              </a:spcBef>
+              <a:spcAft>
+                <a:spcPct val="0"/>
+              </a:spcAft>
+              <a:buClrTx/>
+              <a:buSzTx/>
+              <a:buFontTx/>
+              <a:buNone/>
+              <a:tabLst/>
+              <a:defRPr/>
+            </a:pPr>
+            <a:endParaRPr kumimoji="1" lang="ko-KR" altLang="en-US" sz="2400" b="0" i="0" u="none" strike="noStrike" kern="1200" cap="none" spc="0" normalizeH="0" baseline="0" noProof="0">
+              <a:ln>
+                <a:noFill/>
+              </a:ln>
+              <a:solidFill>
+                <a:prstClr val="black"/>
+              </a:solidFill>
+              <a:effectLst/>
+              <a:uLnTx/>
+              <a:uFillTx/>
+              <a:latin typeface="굴림" panose="020B0600000101010101" pitchFamily="34" charset="-127"/>
+              <a:ea typeface="굴림" panose="020B0600000101010101" pitchFamily="34" charset="-127"/>
+              <a:cs typeface="+mn-cs"/>
+            </a:endParaRPr>
+          </a:p>
+        </p:txBody>
+      </p:sp>
+      <p:sp>
+        <p:nvSpPr>
+          <p:cNvPr id="6" name="TextBox 5">
+            <a:extLst>
+              <a:ext uri="{FF2B5EF4-FFF2-40B4-BE49-F238E27FC236}">
+                <a16:creationId xmlns:a16="http://schemas.microsoft.com/office/drawing/2014/main" id="{3F0B8729-3DE5-F574-A00E-A2D375E3F9CD}"/>
+              </a:ext>
+            </a:extLst>
+          </p:cNvPr>
+          <p:cNvSpPr txBox="1"/>
+          <p:nvPr/>
+        </p:nvSpPr>
+        <p:spPr>
+          <a:xfrm>
+            <a:off x="541691" y="2565221"/>
+            <a:ext cx="3867332" cy="523220"/>
+          </a:xfrm>
+          <a:prstGeom prst="rect">
+            <a:avLst/>
+          </a:prstGeom>
+          <a:noFill/>
+        </p:spPr>
+        <p:txBody>
+          <a:bodyPr wrap="square" rtlCol="0">
+            <a:spAutoFit/>
+          </a:bodyPr>
+          <a:lstStyle/>
+          <a:p>
+            <a:pPr marL="0" marR="0" lvl="0" indent="0" algn="l" defTabSz="1219140" rtl="0" eaLnBrk="0" fontAlgn="base" latinLnBrk="0" hangingPunct="0">
+              <a:lnSpc>
+                <a:spcPct val="100000"/>
+              </a:lnSpc>
+              <a:spcBef>
+                <a:spcPct val="0"/>
+              </a:spcBef>
+              <a:spcAft>
+                <a:spcPct val="0"/>
+              </a:spcAft>
+              <a:buClrTx/>
+              <a:buSzTx/>
+              <a:buFontTx/>
+              <a:buNone/>
+              <a:tabLst/>
+              <a:defRPr sz="2800">
+                <a:solidFill>
+                  <a:srgbClr val="8FA79F"/>
+                </a:solidFill>
+                <a:latin typeface="나눔스퀘어 네오 ExtraBold"/>
+              </a:defRPr>
+            </a:pPr>
+            <a:r>
               <a:t>Psa 1:1</a:t>
             </a:r>
             <a:endParaRPr kumimoji="1" lang="en-US" altLang="ko-KR" sz="2800" b="1" i="0" u="none" strike="noStrike" kern="1200" cap="none" spc="0" normalizeH="0" baseline="0" noProof="0" dirty="0">
@@ -6758,19 +8270,6 @@
                 <a:latin typeface="나눔스퀘어 네오 ExtraBold"/>
               </a:defRPr>
             </a:pPr>
-            <a:r>
-              <a:t>1Co 3:3</a:t>
-            </a:r>
-          </a:p>
-          <a:p>
-            <a:pPr>
-              <a:defRPr sz="2800">
-                <a:solidFill>
-                  <a:srgbClr val="8FA79F"/>
-                </a:solidFill>
-                <a:latin typeface="나눔스퀘어 네오 ExtraBold"/>
-              </a:defRPr>
-            </a:pPr>
           </a:p>
         </p:txBody>
       </p:sp>
@@ -6811,20 +8310,7 @@
               </a:defRPr>
             </a:pPr>
             <a:r>
-              <a:t>¹˸¹ 복 있는 사람은 악인들의 꾀를 따르지 아니하며 죄인들의 길에 서지 아니하며 오만한 자들의 자리에 앉지 아니하고</a:t>
-            </a:r>
-          </a:p>
-          <a:p>
-            <a:pPr>
-              <a:defRPr sz="2800">
-                <a:solidFill>
-                  <a:srgbClr val="1F3337"/>
-                </a:solidFill>
-                <a:latin typeface="나눔스퀘어 네오 Bold"/>
-              </a:defRPr>
-            </a:pPr>
-            <a:r>
-              <a:t>³˸³ 너희는 아직도 육신에 속한 자로다 너희 가운데 시기와 분쟁이 있으니 어찌 육신에 속하여 사람을 따라 행함이 아니리요</a:t>
+              <a:t>¹ 복 있는 사람은 악인들의 꾀를 따르지 아니하며 죄인들의 길에 서지 아니하며 오만한 자들의 자리에 앉지 아니하고</a:t>
             </a:r>
           </a:p>
         </p:txBody>
@@ -6866,22 +8352,9 @@
               </a:defRPr>
             </a:pPr>
             <a:r>
-              <a:t>¹˸¹ Blessed is the manwho walks not in the counsel of the wicked, nor stands in the way of sinners, nor sits in the seat of scoffers;</a:t>
+              <a:t>¹ Blessed is the manwho walks not in the counsel of the wicked, nor stands in the way of sinners, nor sits in the seat of scoffers;</a:t>
             </a:r>
             <a:endParaRPr lang="ko-KR" altLang="en-US" dirty="0"/>
-          </a:p>
-          <a:p>
-            <a:pPr>
-              <a:defRPr sz="2000">
-                <a:solidFill>
-                  <a:srgbClr val="4F655E"/>
-                </a:solidFill>
-                <a:latin typeface="Pretendard Variable"/>
-              </a:defRPr>
-            </a:pPr>
-            <a:r>
-              <a:t>³˸³ for you are still of the flesh. For while there is jealousy and strife among you, are you not of the flesh and behaving only in a human way?</a:t>
-            </a:r>
           </a:p>
         </p:txBody>
       </p:sp>

--- a/pptx_template/output.pptx
+++ b/pptx_template/output.pptx
@@ -10,7 +10,6 @@
   <p:sldIdLst>
     <p:sldId id="4772" r:id="rId2"/>
     <p:sldId id="4773" r:id="rId8"/>
-    <p:sldId id="4774" r:id="rId9"/>
   </p:sldIdLst>
   <p:sldSz cx="12192000" cy="6858000"/>
   <p:notesSz cx="6858000" cy="9144000"/>
@@ -3982,15 +3981,16 @@
               <a:buFontTx/>
               <a:buNone/>
               <a:tabLst/>
-              <a:defRPr sz="3729">
+              <a:defRPr/>
+            </a:pPr>
+            <a:r>
+              <a:rPr sz="5000">
                 <a:solidFill>
                   <a:srgbClr val="1F3337"/>
                 </a:solidFill>
-                <a:latin typeface="나눔스퀘어 네오 ExtraBold"/>
-              </a:defRPr>
-            </a:pPr>
-            <a:r>
-              <a:t>창세기 1:1</a:t>
+                <a:latin typeface="굴림"/>
+              </a:rPr>
+              <a:t>창세기</a:t>
             </a:r>
             <a:endParaRPr kumimoji="1" lang="en-US" altLang="ko-KR" sz="3733" b="1" i="0" u="none" strike="noStrike" kern="1200" cap="none" spc="0" normalizeH="0" baseline="0" noProof="0" dirty="0">
               <a:ln>
@@ -4008,27 +4008,15 @@
             </a:endParaRPr>
           </a:p>
           <a:p>
-            <a:pPr>
-              <a:defRPr sz="3729">
+            <a:r>
+              <a:rPr sz="5000">
                 <a:solidFill>
                   <a:srgbClr val="1F3337"/>
                 </a:solidFill>
-                <a:latin typeface="나눔스퀘어 네오 ExtraBold"/>
-              </a:defRPr>
-            </a:pPr>
-            <a:r>
-              <a:t>고린도전서 1:3</a:t>
-            </a:r>
-          </a:p>
-          <a:p>
-            <a:pPr>
-              <a:defRPr sz="3729">
-                <a:solidFill>
-                  <a:srgbClr val="1F3337"/>
-                </a:solidFill>
-                <a:latin typeface="나눔스퀘어 네오 ExtraBold"/>
-              </a:defRPr>
-            </a:pPr>
+                <a:latin typeface="굴림"/>
+              </a:rPr>
+              <a:t>1:1-3</a:t>
+            </a:r>
           </a:p>
         </p:txBody>
       </p:sp>
@@ -5204,7 +5192,7 @@
               </a:defRPr>
             </a:pPr>
             <a:r>
-              <a:t>Gen 1:1</a:t>
+              <a:t>Gen 1:1-3</a:t>
             </a:r>
             <a:endParaRPr kumimoji="1" lang="en-US" altLang="ko-KR" sz="2800" b="1" i="0" u="none" strike="noStrike" kern="1200" cap="none" spc="0" normalizeH="0" baseline="0" noProof="0" dirty="0">
               <a:ln>
@@ -5230,19 +5218,6 @@
                 <a:latin typeface="나눔스퀘어 네오 ExtraBold"/>
               </a:defRPr>
             </a:pPr>
-            <a:r>
-              <a:t>1Co 1:3</a:t>
-            </a:r>
-          </a:p>
-          <a:p>
-            <a:pPr>
-              <a:defRPr sz="2800">
-                <a:solidFill>
-                  <a:srgbClr val="8FA79F"/>
-                </a:solidFill>
-                <a:latin typeface="나눔스퀘어 네오 ExtraBold"/>
-              </a:defRPr>
-            </a:pPr>
           </a:p>
         </p:txBody>
       </p:sp>
@@ -5274,29 +5249,36 @@
           </a:bodyPr>
           <a:lstStyle/>
           <a:p>
-            <a:pPr>
-              <a:defRPr sz="2800">
+            <a:r>
+              <a:rPr sz="4000">
                 <a:solidFill>
-                  <a:srgbClr val="1F3337"/>
+                  <a:srgbClr val="FFFFFF"/>
                 </a:solidFill>
-                <a:latin typeface="나눔스퀘어 네오 Bold"/>
-              </a:defRPr>
-            </a:pPr>
-            <a:r>
-              <a:t>¹˸¹ 태초에 하나님이 천지를 창조하시니라</a:t>
-            </a:r>
-          </a:p>
-          <a:p>
-            <a:pPr>
-              <a:defRPr sz="2800">
+                <a:latin typeface="나눔스퀘어 네오 ExtraBold"/>
+              </a:rPr>
+              <a:t>¹ 태초에 하나님이 천지를 창조하시니라</a:t>
+            </a:r>
+          </a:p>
+          <a:p>
+            <a:r>
+              <a:rPr sz="4000">
                 <a:solidFill>
-                  <a:srgbClr val="1F3337"/>
+                  <a:srgbClr val="FFFFFF"/>
                 </a:solidFill>
-                <a:latin typeface="나눔스퀘어 네오 Bold"/>
-              </a:defRPr>
-            </a:pPr>
-            <a:r>
-              <a:t>¹˸³ 하나님 우리 아버지와 주 예수 그리스도로부터 은혜와 평강이 있기를 원하노라</a:t>
+                <a:latin typeface="나눔스퀘어 네오 ExtraBold"/>
+              </a:rPr>
+              <a:t>² 땅이 혼돈하고 공허하며 흑암이 깊음 위에 있고 하나님의 영은 수면 위에 운행하시니라</a:t>
+            </a:r>
+          </a:p>
+          <a:p>
+            <a:r>
+              <a:rPr sz="4000">
+                <a:solidFill>
+                  <a:srgbClr val="FFFFFF"/>
+                </a:solidFill>
+                <a:latin typeface="나눔스퀘어 네오 ExtraBold"/>
+              </a:rPr>
+              <a:t>³ 하나님이 이르시되 빛이 있으라 하시니 빛이 있었고</a:t>
             </a:r>
           </a:p>
         </p:txBody>
@@ -5338,7 +5320,7 @@
               </a:defRPr>
             </a:pPr>
             <a:r>
-              <a:t>¹˸¹ In the beginning, God created the heavens and the earth.</a:t>
+              <a:t>¹ In the beginning, God created the heavens and the earth.</a:t>
             </a:r>
             <a:endParaRPr lang="ko-KR" altLang="en-US" dirty="0"/>
           </a:p>
@@ -5352,7 +5334,20 @@
               </a:defRPr>
             </a:pPr>
             <a:r>
-              <a:t>¹˸³ Grace to you and peace from God our Father and the Lord Jesus Christ.</a:t>
+              <a:t>² The earth was without form and void, and darkness was over the face of the deep. And the Spirit of God was hovering over the face of the waters.</a:t>
+            </a:r>
+          </a:p>
+          <a:p>
+            <a:pPr>
+              <a:defRPr sz="2000">
+                <a:solidFill>
+                  <a:srgbClr val="4F655E"/>
+                </a:solidFill>
+                <a:latin typeface="Pretendard Variable"/>
+              </a:defRPr>
+            </a:pPr>
+            <a:r>
+              <a:t>³ And God said, "Let there be light," and there was light.</a:t>
             </a:r>
           </a:p>
         </p:txBody>
@@ -5508,14 +5503,15 @@
               <a:buFontTx/>
               <a:buNone/>
               <a:tabLst/>
-              <a:defRPr sz="2800">
+              <a:defRPr/>
+            </a:pPr>
+            <a:r>
+              <a:rPr sz="5000">
                 <a:solidFill>
                   <a:srgbClr val="1F3337"/>
                 </a:solidFill>
-                <a:latin typeface="나눔스퀘어 네오 Bold"/>
-              </a:defRPr>
-            </a:pPr>
-            <a:r>
+                <a:latin typeface="굴림"/>
+              </a:rPr>
               <a:t>고린도전서</a:t>
             </a:r>
             <a:endParaRPr kumimoji="1" lang="en-US" altLang="ko-KR" sz="3733" b="1" i="0" u="none" strike="noStrike" kern="1200" cap="none" spc="0" normalizeH="0" baseline="0" noProof="0" dirty="0">
@@ -5534,16 +5530,14 @@
             </a:endParaRPr>
           </a:p>
           <a:p>
-            <a:pPr>
-              <a:defRPr sz="2800">
+            <a:r>
+              <a:rPr sz="5000">
                 <a:solidFill>
                   <a:srgbClr val="1F3337"/>
                 </a:solidFill>
-                <a:latin typeface="나눔스퀘어 네오 Bold"/>
-              </a:defRPr>
-            </a:pPr>
-            <a:r>
-              <a:t>1:1-3</a:t>
+                <a:latin typeface="굴림"/>
+              </a:rPr>
+              <a:t>13:1</a:t>
             </a:r>
           </a:p>
         </p:txBody>
@@ -6720,7 +6714,7 @@
               </a:defRPr>
             </a:pPr>
             <a:r>
-              <a:t>1Co 1:1-3</a:t>
+              <a:t>1Co 13:1</a:t>
             </a:r>
             <a:endParaRPr kumimoji="1" lang="en-US" altLang="ko-KR" sz="2800" b="1" i="0" u="none" strike="noStrike" kern="1200" cap="none" spc="0" normalizeH="0" baseline="0" noProof="0" dirty="0">
               <a:ln>
@@ -6777,42 +6771,14 @@
           </a:bodyPr>
           <a:lstStyle/>
           <a:p>
-            <a:pPr>
-              <a:defRPr sz="2800">
+            <a:r>
+              <a:rPr sz="4000">
                 <a:solidFill>
-                  <a:srgbClr val="1F3337"/>
+                  <a:srgbClr val="FFFFFF"/>
                 </a:solidFill>
-                <a:latin typeface="나눔스퀘어 네오 Bold"/>
-              </a:defRPr>
-            </a:pPr>
-            <a:r>
-              <a:t>¹ 하나님의 뜻을 따라 그리스도 예수의 사도로 부르심을 받은 바울과 형제 소스데네는</a:t>
-            </a:r>
-          </a:p>
-          <a:p>
-            <a:pPr>
-              <a:defRPr sz="2800">
-                <a:solidFill>
-                  <a:srgbClr val="1F3337"/>
-                </a:solidFill>
-                <a:latin typeface="나눔스퀘어 네오 Bold"/>
-              </a:defRPr>
-            </a:pPr>
-            <a:r>
-              <a:t>² 고린도에 있는 하나님의 교회 곧 그리스도 예수 안에서 거룩하여지고 성도라 부르심을 받은 자들과 또 각처에서 우리의 주 곧 그들과 우리의 주 되신 예수 그리스도의 이름을 부르는 모든 자들에게</a:t>
-            </a:r>
-          </a:p>
-          <a:p>
-            <a:pPr>
-              <a:defRPr sz="2800">
-                <a:solidFill>
-                  <a:srgbClr val="1F3337"/>
-                </a:solidFill>
-                <a:latin typeface="나눔스퀘어 네오 Bold"/>
-              </a:defRPr>
-            </a:pPr>
-            <a:r>
-              <a:t>³ 하나님 우리 아버지와 주 예수 그리스도로부터 은혜와 평강이 있기를 원하노라</a:t>
+                <a:latin typeface="나눔스퀘어 네오 ExtraBold"/>
+              </a:rPr>
+              <a:t>¹ 내가 사람의 방언과 천사의 말을 할지라도 사랑이 없으면 소리 나는 구리와 울리는 꽹과리가 되고</a:t>
             </a:r>
           </a:p>
         </p:txBody>
@@ -6854,1505 +6820,7 @@
               </a:defRPr>
             </a:pPr>
             <a:r>
-              <a:t>¹ Paul, called by the will of God to be an apostle of Christ Jesus, and our brother Sosthenes,</a:t>
-            </a:r>
-            <a:endParaRPr lang="ko-KR" altLang="en-US" dirty="0"/>
-          </a:p>
-          <a:p>
-            <a:pPr>
-              <a:defRPr sz="2000">
-                <a:solidFill>
-                  <a:srgbClr val="4F655E"/>
-                </a:solidFill>
-                <a:latin typeface="Pretendard Variable"/>
-              </a:defRPr>
-            </a:pPr>
-            <a:r>
-              <a:t>² To the church of God that is in Corinth, to those sanctified in Christ Jesus, called to be saints together with all those who in every place call upon the name of our Lord Jesus Christ, both their Lord and ours:</a:t>
-            </a:r>
-          </a:p>
-          <a:p>
-            <a:pPr>
-              <a:defRPr sz="2000">
-                <a:solidFill>
-                  <a:srgbClr val="4F655E"/>
-                </a:solidFill>
-                <a:latin typeface="Pretendard Variable"/>
-              </a:defRPr>
-            </a:pPr>
-            <a:r>
-              <a:t>³ Grace to you and peace from God our Father and the Lord Jesus Christ.</a:t>
-            </a:r>
-          </a:p>
-        </p:txBody>
-      </p:sp>
-    </p:spTree>
-  </p:cSld>
-  <p:clrMapOvr>
-    <a:masterClrMapping/>
-  </p:clrMapOvr>
-</p:sld>
-</file>
-
-<file path=ppt/slides/slide3.xml><?xml version="1.0" encoding="utf-8"?>
-<p:sld xmlns:a="http://schemas.openxmlformats.org/drawingml/2006/main" xmlns:p="http://schemas.openxmlformats.org/presentationml/2006/main" xmlns:r="http://schemas.openxmlformats.org/officeDocument/2006/relationships">
-  <p:cSld>
-    <p:spTree>
-      <p:nvGrpSpPr>
-        <p:cNvPr id="1" name=""/>
-        <p:cNvGrpSpPr/>
-        <p:nvPr/>
-      </p:nvGrpSpPr>
-      <p:grpSpPr/>
-      <p:sp>
-        <p:nvSpPr>
-          <p:cNvPr id="23" name="직사각형 22">
-            <a:extLst>
-              <a:ext uri="{FF2B5EF4-FFF2-40B4-BE49-F238E27FC236}">
-                <a16:creationId xmlns:a16="http://schemas.microsoft.com/office/drawing/2014/main" id="{19169C31-E35E-B58F-A814-E65D8A184638}"/>
-              </a:ext>
-            </a:extLst>
-          </p:cNvPr>
-          <p:cNvSpPr/>
-          <p:nvPr/>
-        </p:nvSpPr>
-        <p:spPr>
-          <a:xfrm>
-            <a:off x="-7468" y="0"/>
-            <a:ext cx="4212175" cy="6858000"/>
-          </a:xfrm>
-          <a:prstGeom prst="rect">
-            <a:avLst/>
-          </a:prstGeom>
-          <a:solidFill>
-            <a:schemeClr val="accent6">
-              <a:lumMod val="20000"/>
-              <a:lumOff val="80000"/>
-              <a:alpha val="50000"/>
-            </a:schemeClr>
-          </a:solidFill>
-          <a:ln>
-            <a:noFill/>
-          </a:ln>
-        </p:spPr>
-        <p:style>
-          <a:lnRef idx="2">
-            <a:schemeClr val="accent1">
-              <a:shade val="15000"/>
-            </a:schemeClr>
-          </a:lnRef>
-          <a:fillRef idx="1">
-            <a:schemeClr val="accent1"/>
-          </a:fillRef>
-          <a:effectRef idx="0">
-            <a:schemeClr val="accent1"/>
-          </a:effectRef>
-          <a:fontRef idx="minor">
-            <a:schemeClr val="lt1"/>
-          </a:fontRef>
-        </p:style>
-        <p:txBody>
-          <a:bodyPr rtlCol="0" anchor="ctr"/>
-          <a:lstStyle/>
-          <a:p>
-            <a:pPr marL="0" marR="0" lvl="0" indent="0" algn="ctr" defTabSz="1219140" rtl="0" eaLnBrk="0" fontAlgn="base" latinLnBrk="0" hangingPunct="0">
-              <a:lnSpc>
-                <a:spcPct val="100000"/>
-              </a:lnSpc>
-              <a:spcBef>
-                <a:spcPct val="0"/>
-              </a:spcBef>
-              <a:spcAft>
-                <a:spcPct val="0"/>
-              </a:spcAft>
-              <a:buClrTx/>
-              <a:buSzTx/>
-              <a:buFontTx/>
-              <a:buNone/>
-              <a:tabLst/>
-              <a:defRPr/>
-            </a:pPr>
-            <a:endParaRPr kumimoji="1" lang="ko-KR" altLang="en-US" sz="2400" b="0" i="0" u="none" strike="noStrike" kern="1200" cap="none" spc="0" normalizeH="0" baseline="0" noProof="0" dirty="0">
-              <a:ln>
-                <a:noFill/>
-              </a:ln>
-              <a:solidFill>
-                <a:prstClr val="white"/>
-              </a:solidFill>
-              <a:effectLst/>
-              <a:uLnTx/>
-              <a:uFillTx/>
-              <a:latin typeface="맑은 고딕" panose="020F0502020204030204"/>
-              <a:ea typeface="맑은 고딕" panose="020B0503020000020004" pitchFamily="50" charset="-127"/>
-              <a:cs typeface="+mn-cs"/>
-            </a:endParaRPr>
-          </a:p>
-        </p:txBody>
-      </p:sp>
-      <p:sp>
-        <p:nvSpPr>
-          <p:cNvPr id="10" name="TextBox 9">
-            <a:extLst>
-              <a:ext uri="{FF2B5EF4-FFF2-40B4-BE49-F238E27FC236}">
-                <a16:creationId xmlns:a16="http://schemas.microsoft.com/office/drawing/2014/main" id="{F1C51526-9E46-003D-540D-3596EB5F6E8E}"/>
-              </a:ext>
-            </a:extLst>
-          </p:cNvPr>
-          <p:cNvSpPr txBox="1"/>
-          <p:nvPr/>
-        </p:nvSpPr>
-        <p:spPr>
-          <a:xfrm>
-            <a:off x="541691" y="568591"/>
-            <a:ext cx="3867332" cy="666786"/>
-          </a:xfrm>
-          <a:prstGeom prst="rect">
-            <a:avLst/>
-          </a:prstGeom>
-          <a:noFill/>
-        </p:spPr>
-        <p:txBody>
-          <a:bodyPr wrap="square" rtlCol="0">
-            <a:spAutoFit/>
-          </a:bodyPr>
-          <a:lstStyle/>
-          <a:p>
-            <a:pPr marL="0" marR="0" lvl="0" indent="0" algn="l" defTabSz="1219140" rtl="0" eaLnBrk="0" fontAlgn="base" latinLnBrk="0" hangingPunct="0">
-              <a:lnSpc>
-                <a:spcPct val="100000"/>
-              </a:lnSpc>
-              <a:spcBef>
-                <a:spcPct val="0"/>
-              </a:spcBef>
-              <a:spcAft>
-                <a:spcPct val="0"/>
-              </a:spcAft>
-              <a:buClrTx/>
-              <a:buSzTx/>
-              <a:buFontTx/>
-              <a:buNone/>
-              <a:tabLst/>
-              <a:defRPr sz="2800">
-                <a:solidFill>
-                  <a:srgbClr val="1F3337"/>
-                </a:solidFill>
-                <a:latin typeface="나눔스퀘어 네오 Bold"/>
-              </a:defRPr>
-            </a:pPr>
-            <a:r>
-              <a:t>시편</a:t>
-            </a:r>
-            <a:endParaRPr kumimoji="1" lang="en-US" altLang="ko-KR" sz="3733" b="1" i="0" u="none" strike="noStrike" kern="1200" cap="none" spc="0" normalizeH="0" baseline="0" noProof="0" dirty="0">
-              <a:ln>
-                <a:noFill/>
-              </a:ln>
-              <a:solidFill>
-                <a:srgbClr val="213337"/>
-              </a:solidFill>
-              <a:effectLst/>
-              <a:uLnTx/>
-              <a:uFillTx/>
-              <a:latin typeface="나눔스퀘어 네오 ExtraBold" panose="00000900000000000000" pitchFamily="2" charset="-127"/>
-              <a:ea typeface="나눔스퀘어 네오 ExtraBold" panose="00000900000000000000" pitchFamily="2" charset="-127"/>
-              <a:cs typeface="+mn-cs"/>
-            </a:endParaRPr>
-          </a:p>
-          <a:p>
-            <a:pPr>
-              <a:defRPr sz="2800">
-                <a:solidFill>
-                  <a:srgbClr val="1F3337"/>
-                </a:solidFill>
-                <a:latin typeface="나눔스퀘어 네오 Bold"/>
-              </a:defRPr>
-            </a:pPr>
-            <a:r>
-              <a:t>1:1</a:t>
-            </a:r>
-          </a:p>
-        </p:txBody>
-      </p:sp>
-      <p:cxnSp>
-        <p:nvCxnSpPr>
-          <p:cNvPr id="14" name="직선 연결선 13">
-            <a:extLst>
-              <a:ext uri="{FF2B5EF4-FFF2-40B4-BE49-F238E27FC236}">
-                <a16:creationId xmlns:a16="http://schemas.microsoft.com/office/drawing/2014/main" id="{DF27D16E-3EE5-D795-3F3F-D360817DC3AA}"/>
-              </a:ext>
-            </a:extLst>
-          </p:cNvPr>
-          <p:cNvCxnSpPr>
-            <a:cxnSpLocks/>
-          </p:cNvCxnSpPr>
-          <p:nvPr/>
-        </p:nvCxnSpPr>
-        <p:spPr>
-          <a:xfrm>
-            <a:off x="4212177" y="241302"/>
-            <a:ext cx="0" cy="6379633"/>
-          </a:xfrm>
-          <a:prstGeom prst="line">
-            <a:avLst/>
-          </a:prstGeom>
-          <a:ln w="19050">
-            <a:solidFill>
-              <a:srgbClr val="213337"/>
-            </a:solidFill>
-          </a:ln>
-        </p:spPr>
-        <p:style>
-          <a:lnRef idx="1">
-            <a:schemeClr val="accent2"/>
-          </a:lnRef>
-          <a:fillRef idx="0">
-            <a:schemeClr val="accent2"/>
-          </a:fillRef>
-          <a:effectRef idx="0">
-            <a:schemeClr val="accent2"/>
-          </a:effectRef>
-          <a:fontRef idx="minor">
-            <a:schemeClr val="tx1"/>
-          </a:fontRef>
-        </p:style>
-      </p:cxnSp>
-      <p:sp>
-        <p:nvSpPr>
-          <p:cNvPr id="15" name="타원 14">
-            <a:extLst>
-              <a:ext uri="{FF2B5EF4-FFF2-40B4-BE49-F238E27FC236}">
-                <a16:creationId xmlns:a16="http://schemas.microsoft.com/office/drawing/2014/main" id="{07FD1CA4-A20B-11FC-E23C-FC5F3F624592}"/>
-              </a:ext>
-            </a:extLst>
-          </p:cNvPr>
-          <p:cNvSpPr/>
-          <p:nvPr/>
-        </p:nvSpPr>
-        <p:spPr>
-          <a:xfrm>
-            <a:off x="4095764" y="578135"/>
-            <a:ext cx="228595" cy="228595"/>
-          </a:xfrm>
-          <a:prstGeom prst="ellipse">
-            <a:avLst/>
-          </a:prstGeom>
-          <a:solidFill>
-            <a:srgbClr val="213337"/>
-          </a:solidFill>
-          <a:ln>
-            <a:noFill/>
-          </a:ln>
-        </p:spPr>
-        <p:style>
-          <a:lnRef idx="2">
-            <a:schemeClr val="accent1">
-              <a:shade val="15000"/>
-            </a:schemeClr>
-          </a:lnRef>
-          <a:fillRef idx="1">
-            <a:schemeClr val="accent1"/>
-          </a:fillRef>
-          <a:effectRef idx="0">
-            <a:schemeClr val="accent1"/>
-          </a:effectRef>
-          <a:fontRef idx="minor">
-            <a:schemeClr val="lt1"/>
-          </a:fontRef>
-        </p:style>
-        <p:txBody>
-          <a:bodyPr rtlCol="0" anchor="ctr"/>
-          <a:lstStyle/>
-          <a:p>
-            <a:pPr marL="0" marR="0" lvl="0" indent="0" algn="ctr" defTabSz="1219140" rtl="0" eaLnBrk="0" fontAlgn="base" latinLnBrk="0" hangingPunct="0">
-              <a:lnSpc>
-                <a:spcPct val="100000"/>
-              </a:lnSpc>
-              <a:spcBef>
-                <a:spcPct val="0"/>
-              </a:spcBef>
-              <a:spcAft>
-                <a:spcPct val="0"/>
-              </a:spcAft>
-              <a:buClrTx/>
-              <a:buSzTx/>
-              <a:buFontTx/>
-              <a:buNone/>
-              <a:tabLst/>
-              <a:defRPr/>
-            </a:pPr>
-            <a:endParaRPr kumimoji="1" lang="ko-KR" altLang="en-US" sz="2400" b="0" i="0" u="none" strike="noStrike" kern="1200" cap="none" spc="0" normalizeH="0" baseline="0" noProof="0">
-              <a:ln>
-                <a:noFill/>
-              </a:ln>
-              <a:solidFill>
-                <a:prstClr val="white"/>
-              </a:solidFill>
-              <a:effectLst/>
-              <a:uLnTx/>
-              <a:uFillTx/>
-              <a:latin typeface="맑은 고딕" panose="020F0502020204030204"/>
-              <a:ea typeface="맑은 고딕" panose="020B0503020000020004" pitchFamily="50" charset="-127"/>
-              <a:cs typeface="+mn-cs"/>
-            </a:endParaRPr>
-          </a:p>
-        </p:txBody>
-      </p:sp>
-      <p:sp>
-        <p:nvSpPr>
-          <p:cNvPr id="22" name="그래픽 20">
-            <a:extLst>
-              <a:ext uri="{FF2B5EF4-FFF2-40B4-BE49-F238E27FC236}">
-                <a16:creationId xmlns:a16="http://schemas.microsoft.com/office/drawing/2014/main" id="{59909059-D14E-9A87-C3A1-5A731C56D049}"/>
-              </a:ext>
-            </a:extLst>
-          </p:cNvPr>
-          <p:cNvSpPr/>
-          <p:nvPr/>
-        </p:nvSpPr>
-        <p:spPr>
-          <a:xfrm rot="10953421">
-            <a:off x="722713" y="1970970"/>
-            <a:ext cx="1134324" cy="332292"/>
-          </a:xfrm>
-          <a:custGeom>
-            <a:avLst/>
-            <a:gdLst>
-              <a:gd name="connsiteX0" fmla="*/ 847353 w 850743"/>
-              <a:gd name="connsiteY0" fmla="*/ 123779 h 249219"/>
-              <a:gd name="connsiteX1" fmla="*/ 707811 w 850743"/>
-              <a:gd name="connsiteY1" fmla="*/ 86105 h 249219"/>
-              <a:gd name="connsiteX2" fmla="*/ 680661 w 850743"/>
-              <a:gd name="connsiteY2" fmla="*/ 85053 h 249219"/>
-              <a:gd name="connsiteX3" fmla="*/ 606575 w 850743"/>
-              <a:gd name="connsiteY3" fmla="*/ 112203 h 249219"/>
-              <a:gd name="connsiteX4" fmla="*/ 606154 w 850743"/>
-              <a:gd name="connsiteY4" fmla="*/ 112835 h 249219"/>
-              <a:gd name="connsiteX5" fmla="*/ 605312 w 850743"/>
-              <a:gd name="connsiteY5" fmla="*/ 112835 h 249219"/>
-              <a:gd name="connsiteX6" fmla="*/ 513547 w 850743"/>
-              <a:gd name="connsiteY6" fmla="*/ 114098 h 249219"/>
-              <a:gd name="connsiteX7" fmla="*/ 503655 w 850743"/>
-              <a:gd name="connsiteY7" fmla="*/ 114098 h 249219"/>
-              <a:gd name="connsiteX8" fmla="*/ 512916 w 850743"/>
-              <a:gd name="connsiteY8" fmla="*/ 110730 h 249219"/>
-              <a:gd name="connsiteX9" fmla="*/ 619204 w 850743"/>
-              <a:gd name="connsiteY9" fmla="*/ 8442 h 249219"/>
-              <a:gd name="connsiteX10" fmla="*/ 618151 w 850743"/>
-              <a:gd name="connsiteY10" fmla="*/ 2759 h 249219"/>
-              <a:gd name="connsiteX11" fmla="*/ 612889 w 850743"/>
-              <a:gd name="connsiteY11" fmla="*/ 23 h 249219"/>
-              <a:gd name="connsiteX12" fmla="*/ 612468 w 850743"/>
-              <a:gd name="connsiteY12" fmla="*/ 23 h 249219"/>
-              <a:gd name="connsiteX13" fmla="*/ 430412 w 850743"/>
-              <a:gd name="connsiteY13" fmla="*/ 114519 h 249219"/>
-              <a:gd name="connsiteX14" fmla="*/ 429991 w 850743"/>
-              <a:gd name="connsiteY14" fmla="*/ 115361 h 249219"/>
-              <a:gd name="connsiteX15" fmla="*/ 428938 w 850743"/>
-              <a:gd name="connsiteY15" fmla="*/ 115361 h 249219"/>
-              <a:gd name="connsiteX16" fmla="*/ 334016 w 850743"/>
-              <a:gd name="connsiteY16" fmla="*/ 116623 h 249219"/>
-              <a:gd name="connsiteX17" fmla="*/ 323072 w 850743"/>
-              <a:gd name="connsiteY17" fmla="*/ 116623 h 249219"/>
-              <a:gd name="connsiteX18" fmla="*/ 333385 w 850743"/>
-              <a:gd name="connsiteY18" fmla="*/ 113256 h 249219"/>
-              <a:gd name="connsiteX19" fmla="*/ 456300 w 850743"/>
-              <a:gd name="connsiteY19" fmla="*/ 13072 h 249219"/>
-              <a:gd name="connsiteX20" fmla="*/ 455458 w 850743"/>
-              <a:gd name="connsiteY20" fmla="*/ 7600 h 249219"/>
-              <a:gd name="connsiteX21" fmla="*/ 449985 w 850743"/>
-              <a:gd name="connsiteY21" fmla="*/ 4443 h 249219"/>
-              <a:gd name="connsiteX22" fmla="*/ 449564 w 850743"/>
-              <a:gd name="connsiteY22" fmla="*/ 4443 h 249219"/>
-              <a:gd name="connsiteX23" fmla="*/ 276768 w 850743"/>
-              <a:gd name="connsiteY23" fmla="*/ 112203 h 249219"/>
-              <a:gd name="connsiteX24" fmla="*/ 276347 w 850743"/>
-              <a:gd name="connsiteY24" fmla="*/ 112835 h 249219"/>
-              <a:gd name="connsiteX25" fmla="*/ 273822 w 850743"/>
-              <a:gd name="connsiteY25" fmla="*/ 116202 h 249219"/>
-              <a:gd name="connsiteX26" fmla="*/ 273401 w 850743"/>
-              <a:gd name="connsiteY26" fmla="*/ 117465 h 249219"/>
-              <a:gd name="connsiteX27" fmla="*/ 236148 w 850743"/>
-              <a:gd name="connsiteY27" fmla="*/ 117886 h 249219"/>
-              <a:gd name="connsiteX28" fmla="*/ 5051 w 850743"/>
-              <a:gd name="connsiteY28" fmla="*/ 118728 h 249219"/>
-              <a:gd name="connsiteX29" fmla="*/ 0 w 850743"/>
-              <a:gd name="connsiteY29" fmla="*/ 132198 h 249219"/>
-              <a:gd name="connsiteX30" fmla="*/ 279084 w 850743"/>
-              <a:gd name="connsiteY30" fmla="*/ 130935 h 249219"/>
-              <a:gd name="connsiteX31" fmla="*/ 280136 w 850743"/>
-              <a:gd name="connsiteY31" fmla="*/ 130935 h 249219"/>
-              <a:gd name="connsiteX32" fmla="*/ 280557 w 850743"/>
-              <a:gd name="connsiteY32" fmla="*/ 131777 h 249219"/>
-              <a:gd name="connsiteX33" fmla="*/ 451248 w 850743"/>
-              <a:gd name="connsiteY33" fmla="*/ 244589 h 249219"/>
-              <a:gd name="connsiteX34" fmla="*/ 452722 w 850743"/>
-              <a:gd name="connsiteY34" fmla="*/ 244589 h 249219"/>
-              <a:gd name="connsiteX35" fmla="*/ 458615 w 850743"/>
-              <a:gd name="connsiteY35" fmla="*/ 241432 h 249219"/>
-              <a:gd name="connsiteX36" fmla="*/ 458615 w 850743"/>
-              <a:gd name="connsiteY36" fmla="*/ 234697 h 249219"/>
-              <a:gd name="connsiteX37" fmla="*/ 344329 w 850743"/>
-              <a:gd name="connsiteY37" fmla="*/ 133461 h 249219"/>
-              <a:gd name="connsiteX38" fmla="*/ 336963 w 850743"/>
-              <a:gd name="connsiteY38" fmla="*/ 130304 h 249219"/>
-              <a:gd name="connsiteX39" fmla="*/ 345171 w 850743"/>
-              <a:gd name="connsiteY39" fmla="*/ 130304 h 249219"/>
-              <a:gd name="connsiteX40" fmla="*/ 419046 w 850743"/>
-              <a:gd name="connsiteY40" fmla="*/ 129252 h 249219"/>
-              <a:gd name="connsiteX41" fmla="*/ 432095 w 850743"/>
-              <a:gd name="connsiteY41" fmla="*/ 129252 h 249219"/>
-              <a:gd name="connsiteX42" fmla="*/ 432516 w 850743"/>
-              <a:gd name="connsiteY42" fmla="*/ 130304 h 249219"/>
-              <a:gd name="connsiteX43" fmla="*/ 507444 w 850743"/>
-              <a:gd name="connsiteY43" fmla="*/ 211545 h 249219"/>
-              <a:gd name="connsiteX44" fmla="*/ 655825 w 850743"/>
-              <a:gd name="connsiteY44" fmla="*/ 249219 h 249219"/>
-              <a:gd name="connsiteX45" fmla="*/ 661719 w 850743"/>
-              <a:gd name="connsiteY45" fmla="*/ 245221 h 249219"/>
-              <a:gd name="connsiteX46" fmla="*/ 661298 w 850743"/>
-              <a:gd name="connsiteY46" fmla="*/ 238906 h 249219"/>
-              <a:gd name="connsiteX47" fmla="*/ 514179 w 850743"/>
-              <a:gd name="connsiteY47" fmla="*/ 131146 h 249219"/>
-              <a:gd name="connsiteX48" fmla="*/ 505339 w 850743"/>
-              <a:gd name="connsiteY48" fmla="*/ 127989 h 249219"/>
-              <a:gd name="connsiteX49" fmla="*/ 514600 w 850743"/>
-              <a:gd name="connsiteY49" fmla="*/ 127989 h 249219"/>
-              <a:gd name="connsiteX50" fmla="*/ 594999 w 850743"/>
-              <a:gd name="connsiteY50" fmla="*/ 126726 h 249219"/>
-              <a:gd name="connsiteX51" fmla="*/ 596052 w 850743"/>
-              <a:gd name="connsiteY51" fmla="*/ 126726 h 249219"/>
-              <a:gd name="connsiteX52" fmla="*/ 596473 w 850743"/>
-              <a:gd name="connsiteY52" fmla="*/ 127568 h 249219"/>
-              <a:gd name="connsiteX53" fmla="*/ 598367 w 850743"/>
-              <a:gd name="connsiteY53" fmla="*/ 129672 h 249219"/>
-              <a:gd name="connsiteX54" fmla="*/ 720650 w 850743"/>
-              <a:gd name="connsiteY54" fmla="*/ 161664 h 249219"/>
-              <a:gd name="connsiteX55" fmla="*/ 734120 w 850743"/>
-              <a:gd name="connsiteY55" fmla="*/ 161664 h 249219"/>
-              <a:gd name="connsiteX56" fmla="*/ 847564 w 850743"/>
-              <a:gd name="connsiteY56" fmla="*/ 135776 h 249219"/>
-              <a:gd name="connsiteX57" fmla="*/ 850721 w 850743"/>
-              <a:gd name="connsiteY57" fmla="*/ 129252 h 249219"/>
-              <a:gd name="connsiteX58" fmla="*/ 847353 w 850743"/>
-              <a:gd name="connsiteY58" fmla="*/ 123990 h 249219"/>
-              <a:gd name="connsiteX59" fmla="*/ 295921 w 850743"/>
-              <a:gd name="connsiteY59" fmla="*/ 107363 h 249219"/>
-              <a:gd name="connsiteX60" fmla="*/ 435463 w 850743"/>
-              <a:gd name="connsiteY60" fmla="*/ 19807 h 249219"/>
-              <a:gd name="connsiteX61" fmla="*/ 438830 w 850743"/>
-              <a:gd name="connsiteY61" fmla="*/ 19386 h 249219"/>
-              <a:gd name="connsiteX62" fmla="*/ 437147 w 850743"/>
-              <a:gd name="connsiteY62" fmla="*/ 22333 h 249219"/>
-              <a:gd name="connsiteX63" fmla="*/ 297605 w 850743"/>
-              <a:gd name="connsiteY63" fmla="*/ 110099 h 249219"/>
-              <a:gd name="connsiteX64" fmla="*/ 292975 w 850743"/>
-              <a:gd name="connsiteY64" fmla="*/ 111362 h 249219"/>
-              <a:gd name="connsiteX65" fmla="*/ 295711 w 850743"/>
-              <a:gd name="connsiteY65" fmla="*/ 107573 h 249219"/>
-              <a:gd name="connsiteX66" fmla="*/ 437357 w 850743"/>
-              <a:gd name="connsiteY66" fmla="*/ 225226 h 249219"/>
-              <a:gd name="connsiteX67" fmla="*/ 439672 w 850743"/>
-              <a:gd name="connsiteY67" fmla="*/ 228804 h 249219"/>
-              <a:gd name="connsiteX68" fmla="*/ 435463 w 850743"/>
-              <a:gd name="connsiteY68" fmla="*/ 227752 h 249219"/>
-              <a:gd name="connsiteX69" fmla="*/ 299078 w 850743"/>
-              <a:gd name="connsiteY69" fmla="*/ 135355 h 249219"/>
-              <a:gd name="connsiteX70" fmla="*/ 296342 w 850743"/>
-              <a:gd name="connsiteY70" fmla="*/ 131356 h 249219"/>
-              <a:gd name="connsiteX71" fmla="*/ 300972 w 850743"/>
-              <a:gd name="connsiteY71" fmla="*/ 132619 h 249219"/>
-              <a:gd name="connsiteX72" fmla="*/ 437357 w 850743"/>
-              <a:gd name="connsiteY72" fmla="*/ 225015 h 249219"/>
-              <a:gd name="connsiteX73" fmla="*/ 449144 w 850743"/>
-              <a:gd name="connsiteY73" fmla="*/ 109467 h 249219"/>
-              <a:gd name="connsiteX74" fmla="*/ 599419 w 850743"/>
-              <a:gd name="connsiteY74" fmla="*/ 14966 h 249219"/>
-              <a:gd name="connsiteX75" fmla="*/ 602366 w 850743"/>
-              <a:gd name="connsiteY75" fmla="*/ 14545 h 249219"/>
-              <a:gd name="connsiteX76" fmla="*/ 601103 w 850743"/>
-              <a:gd name="connsiteY76" fmla="*/ 17281 h 249219"/>
-              <a:gd name="connsiteX77" fmla="*/ 450617 w 850743"/>
-              <a:gd name="connsiteY77" fmla="*/ 111993 h 249219"/>
-              <a:gd name="connsiteX78" fmla="*/ 447039 w 850743"/>
-              <a:gd name="connsiteY78" fmla="*/ 112414 h 249219"/>
-              <a:gd name="connsiteX79" fmla="*/ 448933 w 850743"/>
-              <a:gd name="connsiteY79" fmla="*/ 109257 h 249219"/>
-              <a:gd name="connsiteX80" fmla="*/ 638146 w 850743"/>
-              <a:gd name="connsiteY80" fmla="*/ 231961 h 249219"/>
-              <a:gd name="connsiteX81" fmla="*/ 640882 w 850743"/>
-              <a:gd name="connsiteY81" fmla="*/ 235118 h 249219"/>
-              <a:gd name="connsiteX82" fmla="*/ 636673 w 850743"/>
-              <a:gd name="connsiteY82" fmla="*/ 235118 h 249219"/>
-              <a:gd name="connsiteX83" fmla="*/ 520914 w 850743"/>
-              <a:gd name="connsiteY83" fmla="*/ 203337 h 249219"/>
-              <a:gd name="connsiteX84" fmla="*/ 446197 w 850743"/>
-              <a:gd name="connsiteY84" fmla="*/ 130935 h 249219"/>
-              <a:gd name="connsiteX85" fmla="*/ 445566 w 850743"/>
-              <a:gd name="connsiteY85" fmla="*/ 128831 h 249219"/>
-              <a:gd name="connsiteX86" fmla="*/ 451669 w 850743"/>
-              <a:gd name="connsiteY86" fmla="*/ 128831 h 249219"/>
-              <a:gd name="connsiteX87" fmla="*/ 638146 w 850743"/>
-              <a:gd name="connsiteY87" fmla="*/ 231961 h 249219"/>
-              <a:gd name="connsiteX88" fmla="*/ 825885 w 850743"/>
-              <a:gd name="connsiteY88" fmla="*/ 131988 h 249219"/>
-              <a:gd name="connsiteX89" fmla="*/ 734541 w 850743"/>
-              <a:gd name="connsiteY89" fmla="*/ 147983 h 249219"/>
-              <a:gd name="connsiteX90" fmla="*/ 727806 w 850743"/>
-              <a:gd name="connsiteY90" fmla="*/ 147983 h 249219"/>
-              <a:gd name="connsiteX91" fmla="*/ 720650 w 850743"/>
-              <a:gd name="connsiteY91" fmla="*/ 147983 h 249219"/>
-              <a:gd name="connsiteX92" fmla="*/ 616467 w 850743"/>
-              <a:gd name="connsiteY92" fmla="*/ 124832 h 249219"/>
-              <a:gd name="connsiteX93" fmla="*/ 614784 w 850743"/>
-              <a:gd name="connsiteY93" fmla="*/ 123779 h 249219"/>
-              <a:gd name="connsiteX94" fmla="*/ 616046 w 850743"/>
-              <a:gd name="connsiteY94" fmla="*/ 122306 h 249219"/>
-              <a:gd name="connsiteX95" fmla="*/ 679608 w 850743"/>
-              <a:gd name="connsiteY95" fmla="*/ 98523 h 249219"/>
-              <a:gd name="connsiteX96" fmla="*/ 716020 w 850743"/>
-              <a:gd name="connsiteY96" fmla="*/ 100628 h 249219"/>
-              <a:gd name="connsiteX97" fmla="*/ 825885 w 850743"/>
-              <a:gd name="connsiteY97" fmla="*/ 129041 h 249219"/>
-              <a:gd name="connsiteX98" fmla="*/ 829463 w 850743"/>
-              <a:gd name="connsiteY98" fmla="*/ 130514 h 249219"/>
-              <a:gd name="connsiteX99" fmla="*/ 825885 w 850743"/>
-              <a:gd name="connsiteY99" fmla="*/ 132198 h 249219"/>
-            </a:gdLst>
-            <a:ahLst/>
-            <a:cxnLst>
-              <a:cxn ang="0">
-                <a:pos x="connsiteX0" y="connsiteY0"/>
-              </a:cxn>
-              <a:cxn ang="0">
-                <a:pos x="connsiteX1" y="connsiteY1"/>
-              </a:cxn>
-              <a:cxn ang="0">
-                <a:pos x="connsiteX2" y="connsiteY2"/>
-              </a:cxn>
-              <a:cxn ang="0">
-                <a:pos x="connsiteX3" y="connsiteY3"/>
-              </a:cxn>
-              <a:cxn ang="0">
-                <a:pos x="connsiteX4" y="connsiteY4"/>
-              </a:cxn>
-              <a:cxn ang="0">
-                <a:pos x="connsiteX5" y="connsiteY5"/>
-              </a:cxn>
-              <a:cxn ang="0">
-                <a:pos x="connsiteX6" y="connsiteY6"/>
-              </a:cxn>
-              <a:cxn ang="0">
-                <a:pos x="connsiteX7" y="connsiteY7"/>
-              </a:cxn>
-              <a:cxn ang="0">
-                <a:pos x="connsiteX8" y="connsiteY8"/>
-              </a:cxn>
-              <a:cxn ang="0">
-                <a:pos x="connsiteX9" y="connsiteY9"/>
-              </a:cxn>
-              <a:cxn ang="0">
-                <a:pos x="connsiteX10" y="connsiteY10"/>
-              </a:cxn>
-              <a:cxn ang="0">
-                <a:pos x="connsiteX11" y="connsiteY11"/>
-              </a:cxn>
-              <a:cxn ang="0">
-                <a:pos x="connsiteX12" y="connsiteY12"/>
-              </a:cxn>
-              <a:cxn ang="0">
-                <a:pos x="connsiteX13" y="connsiteY13"/>
-              </a:cxn>
-              <a:cxn ang="0">
-                <a:pos x="connsiteX14" y="connsiteY14"/>
-              </a:cxn>
-              <a:cxn ang="0">
-                <a:pos x="connsiteX15" y="connsiteY15"/>
-              </a:cxn>
-              <a:cxn ang="0">
-                <a:pos x="connsiteX16" y="connsiteY16"/>
-              </a:cxn>
-              <a:cxn ang="0">
-                <a:pos x="connsiteX17" y="connsiteY17"/>
-              </a:cxn>
-              <a:cxn ang="0">
-                <a:pos x="connsiteX18" y="connsiteY18"/>
-              </a:cxn>
-              <a:cxn ang="0">
-                <a:pos x="connsiteX19" y="connsiteY19"/>
-              </a:cxn>
-              <a:cxn ang="0">
-                <a:pos x="connsiteX20" y="connsiteY20"/>
-              </a:cxn>
-              <a:cxn ang="0">
-                <a:pos x="connsiteX21" y="connsiteY21"/>
-              </a:cxn>
-              <a:cxn ang="0">
-                <a:pos x="connsiteX22" y="connsiteY22"/>
-              </a:cxn>
-              <a:cxn ang="0">
-                <a:pos x="connsiteX23" y="connsiteY23"/>
-              </a:cxn>
-              <a:cxn ang="0">
-                <a:pos x="connsiteX24" y="connsiteY24"/>
-              </a:cxn>
-              <a:cxn ang="0">
-                <a:pos x="connsiteX25" y="connsiteY25"/>
-              </a:cxn>
-              <a:cxn ang="0">
-                <a:pos x="connsiteX26" y="connsiteY26"/>
-              </a:cxn>
-              <a:cxn ang="0">
-                <a:pos x="connsiteX27" y="connsiteY27"/>
-              </a:cxn>
-              <a:cxn ang="0">
-                <a:pos x="connsiteX28" y="connsiteY28"/>
-              </a:cxn>
-              <a:cxn ang="0">
-                <a:pos x="connsiteX29" y="connsiteY29"/>
-              </a:cxn>
-              <a:cxn ang="0">
-                <a:pos x="connsiteX30" y="connsiteY30"/>
-              </a:cxn>
-              <a:cxn ang="0">
-                <a:pos x="connsiteX31" y="connsiteY31"/>
-              </a:cxn>
-              <a:cxn ang="0">
-                <a:pos x="connsiteX32" y="connsiteY32"/>
-              </a:cxn>
-              <a:cxn ang="0">
-                <a:pos x="connsiteX33" y="connsiteY33"/>
-              </a:cxn>
-              <a:cxn ang="0">
-                <a:pos x="connsiteX34" y="connsiteY34"/>
-              </a:cxn>
-              <a:cxn ang="0">
-                <a:pos x="connsiteX35" y="connsiteY35"/>
-              </a:cxn>
-              <a:cxn ang="0">
-                <a:pos x="connsiteX36" y="connsiteY36"/>
-              </a:cxn>
-              <a:cxn ang="0">
-                <a:pos x="connsiteX37" y="connsiteY37"/>
-              </a:cxn>
-              <a:cxn ang="0">
-                <a:pos x="connsiteX38" y="connsiteY38"/>
-              </a:cxn>
-              <a:cxn ang="0">
-                <a:pos x="connsiteX39" y="connsiteY39"/>
-              </a:cxn>
-              <a:cxn ang="0">
-                <a:pos x="connsiteX40" y="connsiteY40"/>
-              </a:cxn>
-              <a:cxn ang="0">
-                <a:pos x="connsiteX41" y="connsiteY41"/>
-              </a:cxn>
-              <a:cxn ang="0">
-                <a:pos x="connsiteX42" y="connsiteY42"/>
-              </a:cxn>
-              <a:cxn ang="0">
-                <a:pos x="connsiteX43" y="connsiteY43"/>
-              </a:cxn>
-              <a:cxn ang="0">
-                <a:pos x="connsiteX44" y="connsiteY44"/>
-              </a:cxn>
-              <a:cxn ang="0">
-                <a:pos x="connsiteX45" y="connsiteY45"/>
-              </a:cxn>
-              <a:cxn ang="0">
-                <a:pos x="connsiteX46" y="connsiteY46"/>
-              </a:cxn>
-              <a:cxn ang="0">
-                <a:pos x="connsiteX47" y="connsiteY47"/>
-              </a:cxn>
-              <a:cxn ang="0">
-                <a:pos x="connsiteX48" y="connsiteY48"/>
-              </a:cxn>
-              <a:cxn ang="0">
-                <a:pos x="connsiteX49" y="connsiteY49"/>
-              </a:cxn>
-              <a:cxn ang="0">
-                <a:pos x="connsiteX50" y="connsiteY50"/>
-              </a:cxn>
-              <a:cxn ang="0">
-                <a:pos x="connsiteX51" y="connsiteY51"/>
-              </a:cxn>
-              <a:cxn ang="0">
-                <a:pos x="connsiteX52" y="connsiteY52"/>
-              </a:cxn>
-              <a:cxn ang="0">
-                <a:pos x="connsiteX53" y="connsiteY53"/>
-              </a:cxn>
-              <a:cxn ang="0">
-                <a:pos x="connsiteX54" y="connsiteY54"/>
-              </a:cxn>
-              <a:cxn ang="0">
-                <a:pos x="connsiteX55" y="connsiteY55"/>
-              </a:cxn>
-              <a:cxn ang="0">
-                <a:pos x="connsiteX56" y="connsiteY56"/>
-              </a:cxn>
-              <a:cxn ang="0">
-                <a:pos x="connsiteX57" y="connsiteY57"/>
-              </a:cxn>
-              <a:cxn ang="0">
-                <a:pos x="connsiteX58" y="connsiteY58"/>
-              </a:cxn>
-              <a:cxn ang="0">
-                <a:pos x="connsiteX59" y="connsiteY59"/>
-              </a:cxn>
-              <a:cxn ang="0">
-                <a:pos x="connsiteX60" y="connsiteY60"/>
-              </a:cxn>
-              <a:cxn ang="0">
-                <a:pos x="connsiteX61" y="connsiteY61"/>
-              </a:cxn>
-              <a:cxn ang="0">
-                <a:pos x="connsiteX62" y="connsiteY62"/>
-              </a:cxn>
-              <a:cxn ang="0">
-                <a:pos x="connsiteX63" y="connsiteY63"/>
-              </a:cxn>
-              <a:cxn ang="0">
-                <a:pos x="connsiteX64" y="connsiteY64"/>
-              </a:cxn>
-              <a:cxn ang="0">
-                <a:pos x="connsiteX65" y="connsiteY65"/>
-              </a:cxn>
-              <a:cxn ang="0">
-                <a:pos x="connsiteX66" y="connsiteY66"/>
-              </a:cxn>
-              <a:cxn ang="0">
-                <a:pos x="connsiteX67" y="connsiteY67"/>
-              </a:cxn>
-              <a:cxn ang="0">
-                <a:pos x="connsiteX68" y="connsiteY68"/>
-              </a:cxn>
-              <a:cxn ang="0">
-                <a:pos x="connsiteX69" y="connsiteY69"/>
-              </a:cxn>
-              <a:cxn ang="0">
-                <a:pos x="connsiteX70" y="connsiteY70"/>
-              </a:cxn>
-              <a:cxn ang="0">
-                <a:pos x="connsiteX71" y="connsiteY71"/>
-              </a:cxn>
-              <a:cxn ang="0">
-                <a:pos x="connsiteX72" y="connsiteY72"/>
-              </a:cxn>
-              <a:cxn ang="0">
-                <a:pos x="connsiteX73" y="connsiteY73"/>
-              </a:cxn>
-              <a:cxn ang="0">
-                <a:pos x="connsiteX74" y="connsiteY74"/>
-              </a:cxn>
-              <a:cxn ang="0">
-                <a:pos x="connsiteX75" y="connsiteY75"/>
-              </a:cxn>
-              <a:cxn ang="0">
-                <a:pos x="connsiteX76" y="connsiteY76"/>
-              </a:cxn>
-              <a:cxn ang="0">
-                <a:pos x="connsiteX77" y="connsiteY77"/>
-              </a:cxn>
-              <a:cxn ang="0">
-                <a:pos x="connsiteX78" y="connsiteY78"/>
-              </a:cxn>
-              <a:cxn ang="0">
-                <a:pos x="connsiteX79" y="connsiteY79"/>
-              </a:cxn>
-              <a:cxn ang="0">
-                <a:pos x="connsiteX80" y="connsiteY80"/>
-              </a:cxn>
-              <a:cxn ang="0">
-                <a:pos x="connsiteX81" y="connsiteY81"/>
-              </a:cxn>
-              <a:cxn ang="0">
-                <a:pos x="connsiteX82" y="connsiteY82"/>
-              </a:cxn>
-              <a:cxn ang="0">
-                <a:pos x="connsiteX83" y="connsiteY83"/>
-              </a:cxn>
-              <a:cxn ang="0">
-                <a:pos x="connsiteX84" y="connsiteY84"/>
-              </a:cxn>
-              <a:cxn ang="0">
-                <a:pos x="connsiteX85" y="connsiteY85"/>
-              </a:cxn>
-              <a:cxn ang="0">
-                <a:pos x="connsiteX86" y="connsiteY86"/>
-              </a:cxn>
-              <a:cxn ang="0">
-                <a:pos x="connsiteX87" y="connsiteY87"/>
-              </a:cxn>
-              <a:cxn ang="0">
-                <a:pos x="connsiteX88" y="connsiteY88"/>
-              </a:cxn>
-              <a:cxn ang="0">
-                <a:pos x="connsiteX89" y="connsiteY89"/>
-              </a:cxn>
-              <a:cxn ang="0">
-                <a:pos x="connsiteX90" y="connsiteY90"/>
-              </a:cxn>
-              <a:cxn ang="0">
-                <a:pos x="connsiteX91" y="connsiteY91"/>
-              </a:cxn>
-              <a:cxn ang="0">
-                <a:pos x="connsiteX92" y="connsiteY92"/>
-              </a:cxn>
-              <a:cxn ang="0">
-                <a:pos x="connsiteX93" y="connsiteY93"/>
-              </a:cxn>
-              <a:cxn ang="0">
-                <a:pos x="connsiteX94" y="connsiteY94"/>
-              </a:cxn>
-              <a:cxn ang="0">
-                <a:pos x="connsiteX95" y="connsiteY95"/>
-              </a:cxn>
-              <a:cxn ang="0">
-                <a:pos x="connsiteX96" y="connsiteY96"/>
-              </a:cxn>
-              <a:cxn ang="0">
-                <a:pos x="connsiteX97" y="connsiteY97"/>
-              </a:cxn>
-              <a:cxn ang="0">
-                <a:pos x="connsiteX98" y="connsiteY98"/>
-              </a:cxn>
-              <a:cxn ang="0">
-                <a:pos x="connsiteX99" y="connsiteY99"/>
-              </a:cxn>
-            </a:cxnLst>
-            <a:rect l="l" t="t" r="r" b="b"/>
-            <a:pathLst>
-              <a:path w="850743" h="249219">
-                <a:moveTo>
-                  <a:pt x="847353" y="123779"/>
-                </a:moveTo>
-                <a:cubicBezTo>
-                  <a:pt x="802734" y="102522"/>
-                  <a:pt x="755799" y="89894"/>
-                  <a:pt x="707811" y="86105"/>
-                </a:cubicBezTo>
-                <a:cubicBezTo>
-                  <a:pt x="697288" y="85263"/>
-                  <a:pt x="688659" y="85053"/>
-                  <a:pt x="680661" y="85053"/>
-                </a:cubicBezTo>
-                <a:cubicBezTo>
-                  <a:pt x="645933" y="85474"/>
-                  <a:pt x="621729" y="94314"/>
-                  <a:pt x="606575" y="112203"/>
-                </a:cubicBezTo>
-                <a:lnTo>
-                  <a:pt x="606154" y="112835"/>
-                </a:lnTo>
-                <a:lnTo>
-                  <a:pt x="605312" y="112835"/>
-                </a:lnTo>
-                <a:cubicBezTo>
-                  <a:pt x="574794" y="113256"/>
-                  <a:pt x="544066" y="113677"/>
-                  <a:pt x="513547" y="114098"/>
-                </a:cubicBezTo>
-                <a:lnTo>
-                  <a:pt x="503655" y="114098"/>
-                </a:lnTo>
-                <a:cubicBezTo>
-                  <a:pt x="503655" y="114098"/>
-                  <a:pt x="512916" y="110730"/>
-                  <a:pt x="512916" y="110730"/>
-                </a:cubicBezTo>
-                <a:cubicBezTo>
-                  <a:pt x="566165" y="90946"/>
-                  <a:pt x="604050" y="54745"/>
-                  <a:pt x="619204" y="8442"/>
-                </a:cubicBezTo>
-                <a:cubicBezTo>
-                  <a:pt x="619835" y="6548"/>
-                  <a:pt x="619414" y="4443"/>
-                  <a:pt x="618151" y="2759"/>
-                </a:cubicBezTo>
-                <a:cubicBezTo>
-                  <a:pt x="616888" y="1075"/>
-                  <a:pt x="614784" y="-188"/>
-                  <a:pt x="612889" y="23"/>
-                </a:cubicBezTo>
-                <a:lnTo>
-                  <a:pt x="612468" y="23"/>
-                </a:lnTo>
-                <a:cubicBezTo>
-                  <a:pt x="536910" y="4653"/>
-                  <a:pt x="467244" y="48431"/>
-                  <a:pt x="430412" y="114519"/>
-                </a:cubicBezTo>
-                <a:lnTo>
-                  <a:pt x="429991" y="115361"/>
-                </a:lnTo>
-                <a:lnTo>
-                  <a:pt x="428938" y="115361"/>
-                </a:lnTo>
-                <a:cubicBezTo>
-                  <a:pt x="397368" y="115781"/>
-                  <a:pt x="365587" y="116202"/>
-                  <a:pt x="334016" y="116623"/>
-                </a:cubicBezTo>
-                <a:lnTo>
-                  <a:pt x="323072" y="116623"/>
-                </a:lnTo>
-                <a:cubicBezTo>
-                  <a:pt x="323072" y="116623"/>
-                  <a:pt x="333385" y="113256"/>
-                  <a:pt x="333385" y="113256"/>
-                </a:cubicBezTo>
-                <a:cubicBezTo>
-                  <a:pt x="374848" y="99365"/>
-                  <a:pt x="432727" y="73687"/>
-                  <a:pt x="456300" y="13072"/>
-                </a:cubicBezTo>
-                <a:cubicBezTo>
-                  <a:pt x="456931" y="11388"/>
-                  <a:pt x="456720" y="9284"/>
-                  <a:pt x="455458" y="7600"/>
-                </a:cubicBezTo>
-                <a:cubicBezTo>
-                  <a:pt x="454195" y="5706"/>
-                  <a:pt x="452090" y="4443"/>
-                  <a:pt x="449985" y="4443"/>
-                </a:cubicBezTo>
-                <a:lnTo>
-                  <a:pt x="449564" y="4443"/>
-                </a:lnTo>
-                <a:cubicBezTo>
-                  <a:pt x="378005" y="10336"/>
-                  <a:pt x="313390" y="50746"/>
-                  <a:pt x="276768" y="112203"/>
-                </a:cubicBezTo>
-                <a:lnTo>
-                  <a:pt x="276347" y="112835"/>
-                </a:lnTo>
-                <a:cubicBezTo>
-                  <a:pt x="275085" y="113677"/>
-                  <a:pt x="274243" y="114940"/>
-                  <a:pt x="273822" y="116202"/>
-                </a:cubicBezTo>
-                <a:lnTo>
-                  <a:pt x="273401" y="117465"/>
-                </a:lnTo>
-                <a:lnTo>
-                  <a:pt x="236148" y="117886"/>
-                </a:lnTo>
-                <a:cubicBezTo>
-                  <a:pt x="216574" y="118097"/>
-                  <a:pt x="96816" y="118307"/>
-                  <a:pt x="5051" y="118728"/>
-                </a:cubicBezTo>
-                <a:cubicBezTo>
-                  <a:pt x="3368" y="123148"/>
-                  <a:pt x="1684" y="127568"/>
-                  <a:pt x="0" y="132198"/>
-                </a:cubicBezTo>
-                <a:cubicBezTo>
-                  <a:pt x="105235" y="131777"/>
-                  <a:pt x="246461" y="131356"/>
-                  <a:pt x="279084" y="130935"/>
-                </a:cubicBezTo>
-                <a:lnTo>
-                  <a:pt x="280136" y="130935"/>
-                </a:lnTo>
-                <a:cubicBezTo>
-                  <a:pt x="280136" y="130935"/>
-                  <a:pt x="280557" y="131777"/>
-                  <a:pt x="280557" y="131777"/>
-                </a:cubicBezTo>
-                <a:cubicBezTo>
-                  <a:pt x="319073" y="191972"/>
-                  <a:pt x="381162" y="233224"/>
-                  <a:pt x="451248" y="244589"/>
-                </a:cubicBezTo>
-                <a:cubicBezTo>
-                  <a:pt x="451669" y="244589"/>
-                  <a:pt x="452090" y="244589"/>
-                  <a:pt x="452722" y="244589"/>
-                </a:cubicBezTo>
-                <a:cubicBezTo>
-                  <a:pt x="455247" y="244589"/>
-                  <a:pt x="457352" y="243326"/>
-                  <a:pt x="458615" y="241432"/>
-                </a:cubicBezTo>
-                <a:cubicBezTo>
-                  <a:pt x="459878" y="239327"/>
-                  <a:pt x="459878" y="237012"/>
-                  <a:pt x="458615" y="234697"/>
-                </a:cubicBezTo>
-                <a:cubicBezTo>
-                  <a:pt x="430833" y="179343"/>
-                  <a:pt x="381162" y="149036"/>
-                  <a:pt x="344329" y="133461"/>
-                </a:cubicBezTo>
-                <a:lnTo>
-                  <a:pt x="336963" y="130304"/>
-                </a:lnTo>
-                <a:lnTo>
-                  <a:pt x="345171" y="130304"/>
-                </a:lnTo>
-                <a:cubicBezTo>
-                  <a:pt x="345171" y="130304"/>
-                  <a:pt x="398841" y="129462"/>
-                  <a:pt x="419046" y="129252"/>
-                </a:cubicBezTo>
-                <a:lnTo>
-                  <a:pt x="432095" y="129252"/>
-                </a:lnTo>
-                <a:cubicBezTo>
-                  <a:pt x="432095" y="129252"/>
-                  <a:pt x="432516" y="130304"/>
-                  <a:pt x="432516" y="130304"/>
-                </a:cubicBezTo>
-                <a:cubicBezTo>
-                  <a:pt x="440304" y="162085"/>
-                  <a:pt x="465350" y="189235"/>
-                  <a:pt x="507444" y="211545"/>
-                </a:cubicBezTo>
-                <a:cubicBezTo>
-                  <a:pt x="552274" y="235328"/>
-                  <a:pt x="603629" y="248378"/>
-                  <a:pt x="655825" y="249219"/>
-                </a:cubicBezTo>
-                <a:cubicBezTo>
-                  <a:pt x="658141" y="249219"/>
-                  <a:pt x="660666" y="247536"/>
-                  <a:pt x="661719" y="245221"/>
-                </a:cubicBezTo>
-                <a:cubicBezTo>
-                  <a:pt x="662771" y="243116"/>
-                  <a:pt x="662560" y="240801"/>
-                  <a:pt x="661298" y="238906"/>
-                </a:cubicBezTo>
-                <a:cubicBezTo>
-                  <a:pt x="623413" y="189656"/>
-                  <a:pt x="572690" y="152403"/>
-                  <a:pt x="514179" y="131146"/>
-                </a:cubicBezTo>
-                <a:lnTo>
-                  <a:pt x="505339" y="127989"/>
-                </a:lnTo>
-                <a:lnTo>
-                  <a:pt x="514600" y="127989"/>
-                </a:lnTo>
-                <a:cubicBezTo>
-                  <a:pt x="514600" y="127989"/>
-                  <a:pt x="572900" y="126936"/>
-                  <a:pt x="594999" y="126726"/>
-                </a:cubicBezTo>
-                <a:lnTo>
-                  <a:pt x="596052" y="126726"/>
-                </a:lnTo>
-                <a:cubicBezTo>
-                  <a:pt x="596052" y="126726"/>
-                  <a:pt x="596473" y="127568"/>
-                  <a:pt x="596473" y="127568"/>
-                </a:cubicBezTo>
-                <a:cubicBezTo>
-                  <a:pt x="596894" y="128410"/>
-                  <a:pt x="597736" y="129041"/>
-                  <a:pt x="598367" y="129672"/>
-                </a:cubicBezTo>
-                <a:cubicBezTo>
-                  <a:pt x="629517" y="150719"/>
-                  <a:pt x="669506" y="161243"/>
-                  <a:pt x="720650" y="161664"/>
-                </a:cubicBezTo>
-                <a:cubicBezTo>
-                  <a:pt x="725070" y="161664"/>
-                  <a:pt x="729700" y="161664"/>
-                  <a:pt x="734120" y="161664"/>
-                </a:cubicBezTo>
-                <a:cubicBezTo>
-                  <a:pt x="768637" y="161243"/>
-                  <a:pt x="812836" y="158086"/>
-                  <a:pt x="847564" y="135776"/>
-                </a:cubicBezTo>
-                <a:cubicBezTo>
-                  <a:pt x="849668" y="134513"/>
-                  <a:pt x="850931" y="131777"/>
-                  <a:pt x="850721" y="129252"/>
-                </a:cubicBezTo>
-                <a:cubicBezTo>
-                  <a:pt x="850721" y="126936"/>
-                  <a:pt x="849248" y="125042"/>
-                  <a:pt x="847353" y="123990"/>
-                </a:cubicBezTo>
-                <a:close/>
-                <a:moveTo>
-                  <a:pt x="295921" y="107363"/>
-                </a:moveTo>
-                <a:cubicBezTo>
-                  <a:pt x="328544" y="60428"/>
-                  <a:pt x="379478" y="28647"/>
-                  <a:pt x="435463" y="19807"/>
-                </a:cubicBezTo>
-                <a:lnTo>
-                  <a:pt x="438830" y="19386"/>
-                </a:lnTo>
-                <a:lnTo>
-                  <a:pt x="437147" y="22333"/>
-                </a:lnTo>
-                <a:cubicBezTo>
-                  <a:pt x="409996" y="73687"/>
-                  <a:pt x="351485" y="95576"/>
-                  <a:pt x="297605" y="110099"/>
-                </a:cubicBezTo>
-                <a:lnTo>
-                  <a:pt x="292975" y="111362"/>
-                </a:lnTo>
-                <a:lnTo>
-                  <a:pt x="295711" y="107573"/>
-                </a:lnTo>
-                <a:close/>
-                <a:moveTo>
-                  <a:pt x="437357" y="225226"/>
-                </a:moveTo>
-                <a:lnTo>
-                  <a:pt x="439672" y="228804"/>
-                </a:lnTo>
-                <a:lnTo>
-                  <a:pt x="435463" y="227752"/>
-                </a:lnTo>
-                <a:cubicBezTo>
-                  <a:pt x="380530" y="214071"/>
-                  <a:pt x="332122" y="181238"/>
-                  <a:pt x="299078" y="135355"/>
-                </a:cubicBezTo>
-                <a:lnTo>
-                  <a:pt x="296342" y="131356"/>
-                </a:lnTo>
-                <a:lnTo>
-                  <a:pt x="300972" y="132619"/>
-                </a:lnTo>
-                <a:cubicBezTo>
-                  <a:pt x="361167" y="149036"/>
-                  <a:pt x="409575" y="181869"/>
-                  <a:pt x="437357" y="225015"/>
-                </a:cubicBezTo>
-                <a:close/>
-                <a:moveTo>
-                  <a:pt x="449144" y="109467"/>
-                </a:moveTo>
-                <a:cubicBezTo>
-                  <a:pt x="482608" y="57902"/>
-                  <a:pt x="538804" y="22543"/>
-                  <a:pt x="599419" y="14966"/>
-                </a:cubicBezTo>
-                <a:lnTo>
-                  <a:pt x="602366" y="14545"/>
-                </a:lnTo>
-                <a:lnTo>
-                  <a:pt x="601103" y="17281"/>
-                </a:lnTo>
-                <a:cubicBezTo>
-                  <a:pt x="587633" y="47379"/>
-                  <a:pt x="550169" y="99996"/>
-                  <a:pt x="450617" y="111993"/>
-                </a:cubicBezTo>
-                <a:lnTo>
-                  <a:pt x="447039" y="112414"/>
-                </a:lnTo>
-                <a:lnTo>
-                  <a:pt x="448933" y="109257"/>
-                </a:lnTo>
-                <a:close/>
-                <a:moveTo>
-                  <a:pt x="638146" y="231961"/>
-                </a:moveTo>
-                <a:lnTo>
-                  <a:pt x="640882" y="235118"/>
-                </a:lnTo>
-                <a:lnTo>
-                  <a:pt x="636673" y="235118"/>
-                </a:lnTo>
-                <a:cubicBezTo>
-                  <a:pt x="595631" y="231750"/>
-                  <a:pt x="556694" y="221227"/>
-                  <a:pt x="520914" y="203337"/>
-                </a:cubicBezTo>
-                <a:cubicBezTo>
-                  <a:pt x="478820" y="182500"/>
-                  <a:pt x="454405" y="158717"/>
-                  <a:pt x="446197" y="130935"/>
-                </a:cubicBezTo>
-                <a:lnTo>
-                  <a:pt x="445566" y="128831"/>
-                </a:lnTo>
-                <a:lnTo>
-                  <a:pt x="451669" y="128831"/>
-                </a:lnTo>
-                <a:cubicBezTo>
-                  <a:pt x="523019" y="139986"/>
-                  <a:pt x="590790" y="177660"/>
-                  <a:pt x="638146" y="231961"/>
-                </a:cubicBezTo>
-                <a:close/>
-                <a:moveTo>
-                  <a:pt x="825885" y="131988"/>
-                </a:moveTo>
-                <a:cubicBezTo>
-                  <a:pt x="796419" y="145458"/>
-                  <a:pt x="763165" y="147562"/>
-                  <a:pt x="734541" y="147983"/>
-                </a:cubicBezTo>
-                <a:cubicBezTo>
-                  <a:pt x="732226" y="147983"/>
-                  <a:pt x="729911" y="147983"/>
-                  <a:pt x="727806" y="147983"/>
-                </a:cubicBezTo>
-                <a:cubicBezTo>
-                  <a:pt x="725491" y="147983"/>
-                  <a:pt x="722965" y="147983"/>
-                  <a:pt x="720650" y="147983"/>
-                </a:cubicBezTo>
-                <a:cubicBezTo>
-                  <a:pt x="678135" y="147562"/>
-                  <a:pt x="644039" y="139986"/>
-                  <a:pt x="616467" y="124832"/>
-                </a:cubicBezTo>
-                <a:lnTo>
-                  <a:pt x="614784" y="123779"/>
-                </a:lnTo>
-                <a:lnTo>
-                  <a:pt x="616046" y="122306"/>
-                </a:lnTo>
-                <a:cubicBezTo>
-                  <a:pt x="628043" y="106731"/>
-                  <a:pt x="648880" y="98944"/>
-                  <a:pt x="679608" y="98523"/>
-                </a:cubicBezTo>
-                <a:cubicBezTo>
-                  <a:pt x="692237" y="98523"/>
-                  <a:pt x="704654" y="99575"/>
-                  <a:pt x="716020" y="100628"/>
-                </a:cubicBezTo>
-                <a:cubicBezTo>
-                  <a:pt x="753273" y="104206"/>
-                  <a:pt x="790316" y="113887"/>
-                  <a:pt x="825885" y="129041"/>
-                </a:cubicBezTo>
-                <a:lnTo>
-                  <a:pt x="829463" y="130514"/>
-                </a:lnTo>
-                <a:lnTo>
-                  <a:pt x="825885" y="132198"/>
-                </a:lnTo>
-                <a:close/>
-              </a:path>
-            </a:pathLst>
-          </a:custGeom>
-          <a:solidFill>
-            <a:schemeClr val="accent6">
-              <a:lumMod val="50000"/>
-            </a:schemeClr>
-          </a:solidFill>
-          <a:ln w="20955" cap="flat">
-            <a:noFill/>
-            <a:prstDash val="solid"/>
-            <a:miter/>
-          </a:ln>
-        </p:spPr>
-        <p:txBody>
-          <a:bodyPr rtlCol="0" anchor="ctr"/>
-          <a:lstStyle/>
-          <a:p>
-            <a:pPr marL="0" marR="0" lvl="0" indent="0" algn="l" defTabSz="1219140" rtl="0" eaLnBrk="0" fontAlgn="base" latinLnBrk="0" hangingPunct="0">
-              <a:lnSpc>
-                <a:spcPct val="100000"/>
-              </a:lnSpc>
-              <a:spcBef>
-                <a:spcPct val="0"/>
-              </a:spcBef>
-              <a:spcAft>
-                <a:spcPct val="0"/>
-              </a:spcAft>
-              <a:buClrTx/>
-              <a:buSzTx/>
-              <a:buFontTx/>
-              <a:buNone/>
-              <a:tabLst/>
-              <a:defRPr/>
-            </a:pPr>
-            <a:endParaRPr kumimoji="1" lang="ko-KR" altLang="en-US" sz="2400" b="0" i="0" u="none" strike="noStrike" kern="1200" cap="none" spc="0" normalizeH="0" baseline="0" noProof="0">
-              <a:ln>
-                <a:noFill/>
-              </a:ln>
-              <a:solidFill>
-                <a:prstClr val="black"/>
-              </a:solidFill>
-              <a:effectLst/>
-              <a:uLnTx/>
-              <a:uFillTx/>
-              <a:latin typeface="굴림" panose="020B0600000101010101" pitchFamily="34" charset="-127"/>
-              <a:ea typeface="굴림" panose="020B0600000101010101" pitchFamily="34" charset="-127"/>
-              <a:cs typeface="+mn-cs"/>
-            </a:endParaRPr>
-          </a:p>
-        </p:txBody>
-      </p:sp>
-      <p:sp>
-        <p:nvSpPr>
-          <p:cNvPr id="6" name="TextBox 5">
-            <a:extLst>
-              <a:ext uri="{FF2B5EF4-FFF2-40B4-BE49-F238E27FC236}">
-                <a16:creationId xmlns:a16="http://schemas.microsoft.com/office/drawing/2014/main" id="{3F0B8729-3DE5-F574-A00E-A2D375E3F9CD}"/>
-              </a:ext>
-            </a:extLst>
-          </p:cNvPr>
-          <p:cNvSpPr txBox="1"/>
-          <p:nvPr/>
-        </p:nvSpPr>
-        <p:spPr>
-          <a:xfrm>
-            <a:off x="541691" y="2565221"/>
-            <a:ext cx="3867332" cy="523220"/>
-          </a:xfrm>
-          <a:prstGeom prst="rect">
-            <a:avLst/>
-          </a:prstGeom>
-          <a:noFill/>
-        </p:spPr>
-        <p:txBody>
-          <a:bodyPr wrap="square" rtlCol="0">
-            <a:spAutoFit/>
-          </a:bodyPr>
-          <a:lstStyle/>
-          <a:p>
-            <a:pPr marL="0" marR="0" lvl="0" indent="0" algn="l" defTabSz="1219140" rtl="0" eaLnBrk="0" fontAlgn="base" latinLnBrk="0" hangingPunct="0">
-              <a:lnSpc>
-                <a:spcPct val="100000"/>
-              </a:lnSpc>
-              <a:spcBef>
-                <a:spcPct val="0"/>
-              </a:spcBef>
-              <a:spcAft>
-                <a:spcPct val="0"/>
-              </a:spcAft>
-              <a:buClrTx/>
-              <a:buSzTx/>
-              <a:buFontTx/>
-              <a:buNone/>
-              <a:tabLst/>
-              <a:defRPr sz="2800">
-                <a:solidFill>
-                  <a:srgbClr val="8FA79F"/>
-                </a:solidFill>
-                <a:latin typeface="나눔스퀘어 네오 ExtraBold"/>
-              </a:defRPr>
-            </a:pPr>
-            <a:r>
-              <a:t>Psa 1:1</a:t>
-            </a:r>
-            <a:endParaRPr kumimoji="1" lang="en-US" altLang="ko-KR" sz="2800" b="1" i="0" u="none" strike="noStrike" kern="1200" cap="none" spc="0" normalizeH="0" baseline="0" noProof="0" dirty="0">
-              <a:ln>
-                <a:noFill/>
-              </a:ln>
-              <a:solidFill>
-                <a:srgbClr val="8FA79F"/>
-              </a:solidFill>
-              <a:effectLst/>
-              <a:uLnTx/>
-              <a:uFillTx/>
-              <a:latin typeface="나눔스퀘어 네오 ExtraBold" panose="00000900000000000000" pitchFamily="2" charset="-127"/>
-              <a:ea typeface="나눔스퀘어 네오 ExtraBold" panose="00000900000000000000" pitchFamily="2" charset="-127"/>
-              <a:cs typeface="+mn-cs"/>
-            </a:endParaRPr>
-          </a:p>
-          <a:p>
-            <a:pPr>
-              <a:defRPr sz="2800">
-                <a:solidFill>
-                  <a:srgbClr val="8FA79F"/>
-                </a:solidFill>
-                <a:latin typeface="나눔스퀘어 네오 ExtraBold"/>
-              </a:defRPr>
-            </a:pPr>
-          </a:p>
-        </p:txBody>
-      </p:sp>
-      <p:sp>
-        <p:nvSpPr>
-          <p:cNvPr id="5" name="TextBox 4">
-            <a:extLst>
-              <a:ext uri="{FF2B5EF4-FFF2-40B4-BE49-F238E27FC236}">
-                <a16:creationId xmlns:a16="http://schemas.microsoft.com/office/drawing/2014/main" id="{66F56BDC-842A-F82D-62A9-29DCB99DBEEB}"/>
-              </a:ext>
-            </a:extLst>
-          </p:cNvPr>
-          <p:cNvSpPr txBox="1"/>
-          <p:nvPr/>
-        </p:nvSpPr>
-        <p:spPr>
-          <a:xfrm>
-            <a:off x="4606904" y="414536"/>
-            <a:ext cx="7246825" cy="369332"/>
-          </a:xfrm>
-          <a:prstGeom prst="rect">
-            <a:avLst/>
-          </a:prstGeom>
-          <a:noFill/>
-        </p:spPr>
-        <p:txBody>
-          <a:bodyPr wrap="square" rtlCol="0">
-            <a:spAutoFit/>
-          </a:bodyPr>
-          <a:lstStyle/>
-          <a:p>
-            <a:pPr>
-              <a:defRPr sz="2800">
-                <a:solidFill>
-                  <a:srgbClr val="1F3337"/>
-                </a:solidFill>
-                <a:latin typeface="나눔스퀘어 네오 Bold"/>
-              </a:defRPr>
-            </a:pPr>
-            <a:r>
-              <a:t>¹ 복 있는 사람은 악인들의 꾀를 따르지 아니하며 죄인들의 길에 서지 아니하며 오만한 자들의 자리에 앉지 아니하고</a:t>
-            </a:r>
-          </a:p>
-        </p:txBody>
-      </p:sp>
-      <p:sp>
-        <p:nvSpPr>
-          <p:cNvPr id="3" name="TextBox 2">
-            <a:extLst>
-              <a:ext uri="{FF2B5EF4-FFF2-40B4-BE49-F238E27FC236}">
-                <a16:creationId xmlns:a16="http://schemas.microsoft.com/office/drawing/2014/main" id="{9992D8C0-60E8-B6D2-A388-9B378A00EBBC}"/>
-              </a:ext>
-            </a:extLst>
-          </p:cNvPr>
-          <p:cNvSpPr txBox="1"/>
-          <p:nvPr/>
-        </p:nvSpPr>
-        <p:spPr>
-          <a:xfrm>
-            <a:off x="4606908" y="3992331"/>
-            <a:ext cx="7246821" cy="369332"/>
-          </a:xfrm>
-          <a:prstGeom prst="rect">
-            <a:avLst/>
-          </a:prstGeom>
-          <a:noFill/>
-        </p:spPr>
-        <p:txBody>
-          <a:bodyPr wrap="square" rtlCol="0">
-            <a:spAutoFit/>
-          </a:bodyPr>
-          <a:lstStyle/>
-          <a:p>
-            <a:pPr>
-              <a:defRPr sz="2000">
-                <a:solidFill>
-                  <a:srgbClr val="4F655E"/>
-                </a:solidFill>
-                <a:latin typeface="Pretendard Variable"/>
-              </a:defRPr>
-            </a:pPr>
-            <a:r>
-              <a:t>¹ Blessed is the manwho walks not in the counsel of the wicked, nor stands in the way of sinners, nor sits in the seat of scoffers;</a:t>
+              <a:t>¹ If I speak in the tongues of men and of angels, but have not love, I am a noisy gong or a clanging cymbal.</a:t>
             </a:r>
             <a:endParaRPr lang="ko-KR" altLang="en-US" dirty="0"/>
           </a:p>

--- a/pptx_template/output.pptx
+++ b/pptx_template/output.pptx
@@ -3,13 +3,14 @@
 <p:presentation xmlns:a="http://schemas.openxmlformats.org/drawingml/2006/main" xmlns:r="http://schemas.openxmlformats.org/officeDocument/2006/relationships" xmlns:p="http://schemas.openxmlformats.org/presentationml/2006/main" saveSubsetFonts="1">
   <p:sldMasterIdLst>
     <p:sldMasterId id="2147483648" r:id="rId1"/>
+    <p:sldMasterId id="2147483660" r:id="rId2"/>
   </p:sldMasterIdLst>
   <p:notesMasterIdLst>
-    <p:notesMasterId r:id="rId3"/>
+    <p:notesMasterId r:id="rId4"/>
   </p:notesMasterIdLst>
   <p:sldIdLst>
-    <p:sldId id="4772" r:id="rId2"/>
-    <p:sldId id="4773" r:id="rId8"/>
+    <p:sldId id="4772" r:id="rId3"/>
+    <p:sldId id="4773" r:id="rId9"/>
   </p:sldIdLst>
   <p:sldSz cx="12192000" cy="6858000"/>
   <p:notesSz cx="6858000" cy="9144000"/>
@@ -198,7 +199,7 @@
           <a:p>
             <a:fld id="{17E1D49D-48C3-4654-940B-94FADE24DBDF}" type="datetimeFigureOut">
               <a:rPr lang="ko-KR" altLang="en-US" smtClean="0"/>
-              <a:t>2025-06-04</a:t>
+              <a:t>2025-07-17</a:t>
             </a:fld>
             <a:endParaRPr lang="ko-KR" altLang="en-US"/>
           </a:p>
@@ -780,7 +781,7 @@
           <a:p>
             <a:fld id="{502CD248-AE16-47FA-AF5A-2F10FD8A8207}" type="datetimeFigureOut">
               <a:rPr lang="ko-KR" altLang="en-US" smtClean="0"/>
-              <a:t>2025-06-04</a:t>
+              <a:t>2025-07-17</a:t>
             </a:fld>
             <a:endParaRPr lang="ko-KR" altLang="en-US"/>
           </a:p>
@@ -978,7 +979,7 @@
           <a:p>
             <a:fld id="{502CD248-AE16-47FA-AF5A-2F10FD8A8207}" type="datetimeFigureOut">
               <a:rPr lang="ko-KR" altLang="en-US" smtClean="0"/>
-              <a:t>2025-06-04</a:t>
+              <a:t>2025-07-17</a:t>
             </a:fld>
             <a:endParaRPr lang="ko-KR" altLang="en-US"/>
           </a:p>
@@ -1186,7 +1187,7 @@
           <a:p>
             <a:fld id="{502CD248-AE16-47FA-AF5A-2F10FD8A8207}" type="datetimeFigureOut">
               <a:rPr lang="ko-KR" altLang="en-US" smtClean="0"/>
-              <a:t>2025-06-04</a:t>
+              <a:t>2025-07-17</a:t>
             </a:fld>
             <a:endParaRPr lang="ko-KR" altLang="en-US"/>
           </a:p>
@@ -1250,6 +1251,1941 @@
     <p:extLst>
       <p:ext uri="{BB962C8B-B14F-4D97-AF65-F5344CB8AC3E}">
         <p14:creationId xmlns:p14="http://schemas.microsoft.com/office/powerpoint/2010/main" val="3952461349"/>
+      </p:ext>
+    </p:extLst>
+  </p:cSld>
+  <p:clrMapOvr>
+    <a:masterClrMapping/>
+  </p:clrMapOvr>
+</p:sldLayout>
+</file>
+
+<file path=ppt/slideLayouts/slideLayout12.xml><?xml version="1.0" encoding="utf-8"?>
+<p:sldLayout xmlns:a="http://schemas.openxmlformats.org/drawingml/2006/main" xmlns:r="http://schemas.openxmlformats.org/officeDocument/2006/relationships" xmlns:p="http://schemas.openxmlformats.org/presentationml/2006/main" type="title" preserve="1">
+  <p:cSld name="제목 슬라이드">
+    <p:spTree>
+      <p:nvGrpSpPr>
+        <p:cNvPr id="1" name=""/>
+        <p:cNvGrpSpPr/>
+        <p:nvPr/>
+      </p:nvGrpSpPr>
+      <p:grpSpPr>
+        <a:xfrm>
+          <a:off x="0" y="0"/>
+          <a:ext cx="0" cy="0"/>
+          <a:chOff x="0" y="0"/>
+          <a:chExt cx="0" cy="0"/>
+        </a:xfrm>
+      </p:grpSpPr>
+      <p:sp>
+        <p:nvSpPr>
+          <p:cNvPr id="2" name="제목 1">
+            <a:extLst>
+              <a:ext uri="{FF2B5EF4-FFF2-40B4-BE49-F238E27FC236}">
+                <a16:creationId xmlns:a16="http://schemas.microsoft.com/office/drawing/2014/main" id="{EA5E7732-32E2-EA1A-E2E1-BBB7D3A30B17}"/>
+              </a:ext>
+            </a:extLst>
+          </p:cNvPr>
+          <p:cNvSpPr>
+            <a:spLocks noGrp="1"/>
+          </p:cNvSpPr>
+          <p:nvPr>
+            <p:ph type="ctrTitle"/>
+          </p:nvPr>
+        </p:nvSpPr>
+        <p:spPr>
+          <a:xfrm>
+            <a:off x="1524000" y="1122363"/>
+            <a:ext cx="9144000" cy="2387600"/>
+          </a:xfrm>
+        </p:spPr>
+        <p:txBody>
+          <a:bodyPr anchor="b"/>
+          <a:lstStyle>
+            <a:lvl1pPr algn="ctr">
+              <a:defRPr sz="6000"/>
+            </a:lvl1pPr>
+          </a:lstStyle>
+          <a:p>
+            <a:r>
+              <a:rPr lang="ko-KR" altLang="en-US"/>
+              <a:t>마스터 제목 스타일 편집</a:t>
+            </a:r>
+          </a:p>
+        </p:txBody>
+      </p:sp>
+      <p:sp>
+        <p:nvSpPr>
+          <p:cNvPr id="3" name="부제목 2">
+            <a:extLst>
+              <a:ext uri="{FF2B5EF4-FFF2-40B4-BE49-F238E27FC236}">
+                <a16:creationId xmlns:a16="http://schemas.microsoft.com/office/drawing/2014/main" id="{1DB091D2-73F7-62D1-9DB5-D657B7275F33}"/>
+              </a:ext>
+            </a:extLst>
+          </p:cNvPr>
+          <p:cNvSpPr>
+            <a:spLocks noGrp="1"/>
+          </p:cNvSpPr>
+          <p:nvPr>
+            <p:ph type="subTitle" idx="1"/>
+          </p:nvPr>
+        </p:nvSpPr>
+        <p:spPr>
+          <a:xfrm>
+            <a:off x="1524000" y="3602038"/>
+            <a:ext cx="9144000" cy="1655762"/>
+          </a:xfrm>
+        </p:spPr>
+        <p:txBody>
+          <a:bodyPr/>
+          <a:lstStyle>
+            <a:lvl1pPr marL="0" indent="0" algn="ctr">
+              <a:buNone/>
+              <a:defRPr sz="2400"/>
+            </a:lvl1pPr>
+            <a:lvl2pPr marL="457200" indent="0" algn="ctr">
+              <a:buNone/>
+              <a:defRPr sz="2000"/>
+            </a:lvl2pPr>
+            <a:lvl3pPr marL="914400" indent="0" algn="ctr">
+              <a:buNone/>
+              <a:defRPr sz="1800"/>
+            </a:lvl3pPr>
+            <a:lvl4pPr marL="1371600" indent="0" algn="ctr">
+              <a:buNone/>
+              <a:defRPr sz="1600"/>
+            </a:lvl4pPr>
+            <a:lvl5pPr marL="1828800" indent="0" algn="ctr">
+              <a:buNone/>
+              <a:defRPr sz="1600"/>
+            </a:lvl5pPr>
+            <a:lvl6pPr marL="2286000" indent="0" algn="ctr">
+              <a:buNone/>
+              <a:defRPr sz="1600"/>
+            </a:lvl6pPr>
+            <a:lvl7pPr marL="2743200" indent="0" algn="ctr">
+              <a:buNone/>
+              <a:defRPr sz="1600"/>
+            </a:lvl7pPr>
+            <a:lvl8pPr marL="3200400" indent="0" algn="ctr">
+              <a:buNone/>
+              <a:defRPr sz="1600"/>
+            </a:lvl8pPr>
+            <a:lvl9pPr marL="3657600" indent="0" algn="ctr">
+              <a:buNone/>
+              <a:defRPr sz="1600"/>
+            </a:lvl9pPr>
+          </a:lstStyle>
+          <a:p>
+            <a:r>
+              <a:rPr lang="ko-KR" altLang="en-US"/>
+              <a:t>클릭하여 마스터 부제목 스타일 편집</a:t>
+            </a:r>
+          </a:p>
+        </p:txBody>
+      </p:sp>
+      <p:sp>
+        <p:nvSpPr>
+          <p:cNvPr id="4" name="날짜 개체 틀 3">
+            <a:extLst>
+              <a:ext uri="{FF2B5EF4-FFF2-40B4-BE49-F238E27FC236}">
+                <a16:creationId xmlns:a16="http://schemas.microsoft.com/office/drawing/2014/main" id="{92B2798A-6DB0-BEA1-4256-0986682FFD06}"/>
+              </a:ext>
+            </a:extLst>
+          </p:cNvPr>
+          <p:cNvSpPr>
+            <a:spLocks noGrp="1"/>
+          </p:cNvSpPr>
+          <p:nvPr>
+            <p:ph type="dt" sz="half" idx="10"/>
+          </p:nvPr>
+        </p:nvSpPr>
+        <p:spPr/>
+        <p:txBody>
+          <a:bodyPr/>
+          <a:lstStyle/>
+          <a:p>
+            <a:fld id="{995C7C8F-822A-4723-A724-B24BDCABEA27}" type="datetimeFigureOut">
+              <a:rPr lang="ko-KR" altLang="en-US" smtClean="0"/>
+              <a:t>2025-07-17</a:t>
+            </a:fld>
+            <a:endParaRPr lang="ko-KR" altLang="en-US"/>
+          </a:p>
+        </p:txBody>
+      </p:sp>
+      <p:sp>
+        <p:nvSpPr>
+          <p:cNvPr id="5" name="바닥글 개체 틀 4">
+            <a:extLst>
+              <a:ext uri="{FF2B5EF4-FFF2-40B4-BE49-F238E27FC236}">
+                <a16:creationId xmlns:a16="http://schemas.microsoft.com/office/drawing/2014/main" id="{5E8B68DD-A059-93C4-1F5D-6A536697BC89}"/>
+              </a:ext>
+            </a:extLst>
+          </p:cNvPr>
+          <p:cNvSpPr>
+            <a:spLocks noGrp="1"/>
+          </p:cNvSpPr>
+          <p:nvPr>
+            <p:ph type="ftr" sz="quarter" idx="11"/>
+          </p:nvPr>
+        </p:nvSpPr>
+        <p:spPr/>
+        <p:txBody>
+          <a:bodyPr/>
+          <a:lstStyle/>
+          <a:p>
+            <a:endParaRPr lang="ko-KR" altLang="en-US"/>
+          </a:p>
+        </p:txBody>
+      </p:sp>
+      <p:sp>
+        <p:nvSpPr>
+          <p:cNvPr id="6" name="슬라이드 번호 개체 틀 5">
+            <a:extLst>
+              <a:ext uri="{FF2B5EF4-FFF2-40B4-BE49-F238E27FC236}">
+                <a16:creationId xmlns:a16="http://schemas.microsoft.com/office/drawing/2014/main" id="{ED361E64-4588-5B75-120C-7465EF93FD3F}"/>
+              </a:ext>
+            </a:extLst>
+          </p:cNvPr>
+          <p:cNvSpPr>
+            <a:spLocks noGrp="1"/>
+          </p:cNvSpPr>
+          <p:nvPr>
+            <p:ph type="sldNum" sz="quarter" idx="12"/>
+          </p:nvPr>
+        </p:nvSpPr>
+        <p:spPr/>
+        <p:txBody>
+          <a:bodyPr/>
+          <a:lstStyle/>
+          <a:p>
+            <a:fld id="{6F89A9E9-A8B1-4524-AE75-5A6692DCE9C4}" type="slidenum">
+              <a:rPr lang="ko-KR" altLang="en-US" smtClean="0"/>
+              <a:t>‹#›</a:t>
+            </a:fld>
+            <a:endParaRPr lang="ko-KR" altLang="en-US"/>
+          </a:p>
+        </p:txBody>
+      </p:sp>
+    </p:spTree>
+    <p:extLst>
+      <p:ext uri="{BB962C8B-B14F-4D97-AF65-F5344CB8AC3E}">
+        <p14:creationId xmlns:p14="http://schemas.microsoft.com/office/powerpoint/2010/main" val="2901070255"/>
+      </p:ext>
+    </p:extLst>
+  </p:cSld>
+  <p:clrMapOvr>
+    <a:masterClrMapping/>
+  </p:clrMapOvr>
+</p:sldLayout>
+</file>
+
+<file path=ppt/slideLayouts/slideLayout13.xml><?xml version="1.0" encoding="utf-8"?>
+<p:sldLayout xmlns:a="http://schemas.openxmlformats.org/drawingml/2006/main" xmlns:r="http://schemas.openxmlformats.org/officeDocument/2006/relationships" xmlns:p="http://schemas.openxmlformats.org/presentationml/2006/main" type="obj" preserve="1">
+  <p:cSld name="제목 및 내용">
+    <p:spTree>
+      <p:nvGrpSpPr>
+        <p:cNvPr id="1" name=""/>
+        <p:cNvGrpSpPr/>
+        <p:nvPr/>
+      </p:nvGrpSpPr>
+      <p:grpSpPr>
+        <a:xfrm>
+          <a:off x="0" y="0"/>
+          <a:ext cx="0" cy="0"/>
+          <a:chOff x="0" y="0"/>
+          <a:chExt cx="0" cy="0"/>
+        </a:xfrm>
+      </p:grpSpPr>
+      <p:sp>
+        <p:nvSpPr>
+          <p:cNvPr id="2" name="제목 1">
+            <a:extLst>
+              <a:ext uri="{FF2B5EF4-FFF2-40B4-BE49-F238E27FC236}">
+                <a16:creationId xmlns:a16="http://schemas.microsoft.com/office/drawing/2014/main" id="{EA9E1A13-DA5E-B33E-9A0E-0311E5629425}"/>
+              </a:ext>
+            </a:extLst>
+          </p:cNvPr>
+          <p:cNvSpPr>
+            <a:spLocks noGrp="1"/>
+          </p:cNvSpPr>
+          <p:nvPr>
+            <p:ph type="title"/>
+          </p:nvPr>
+        </p:nvSpPr>
+        <p:spPr/>
+        <p:txBody>
+          <a:bodyPr/>
+          <a:lstStyle/>
+          <a:p>
+            <a:r>
+              <a:rPr lang="ko-KR" altLang="en-US"/>
+              <a:t>마스터 제목 스타일 편집</a:t>
+            </a:r>
+          </a:p>
+        </p:txBody>
+      </p:sp>
+      <p:sp>
+        <p:nvSpPr>
+          <p:cNvPr id="3" name="내용 개체 틀 2">
+            <a:extLst>
+              <a:ext uri="{FF2B5EF4-FFF2-40B4-BE49-F238E27FC236}">
+                <a16:creationId xmlns:a16="http://schemas.microsoft.com/office/drawing/2014/main" id="{32266AB5-8D3D-8EDE-52C9-0C759E7025C6}"/>
+              </a:ext>
+            </a:extLst>
+          </p:cNvPr>
+          <p:cNvSpPr>
+            <a:spLocks noGrp="1"/>
+          </p:cNvSpPr>
+          <p:nvPr>
+            <p:ph idx="1"/>
+          </p:nvPr>
+        </p:nvSpPr>
+        <p:spPr/>
+        <p:txBody>
+          <a:bodyPr/>
+          <a:lstStyle/>
+          <a:p>
+            <a:pPr lvl="0"/>
+            <a:r>
+              <a:rPr lang="ko-KR" altLang="en-US"/>
+              <a:t>마스터 텍스트 스타일을 편집하려면 클릭</a:t>
+            </a:r>
+          </a:p>
+          <a:p>
+            <a:pPr lvl="1"/>
+            <a:r>
+              <a:rPr lang="ko-KR" altLang="en-US"/>
+              <a:t>두 번째 수준</a:t>
+            </a:r>
+          </a:p>
+          <a:p>
+            <a:pPr lvl="2"/>
+            <a:r>
+              <a:rPr lang="ko-KR" altLang="en-US"/>
+              <a:t>세 번째 수준</a:t>
+            </a:r>
+          </a:p>
+          <a:p>
+            <a:pPr lvl="3"/>
+            <a:r>
+              <a:rPr lang="ko-KR" altLang="en-US"/>
+              <a:t>네 번째 수준</a:t>
+            </a:r>
+          </a:p>
+          <a:p>
+            <a:pPr lvl="4"/>
+            <a:r>
+              <a:rPr lang="ko-KR" altLang="en-US"/>
+              <a:t>다섯 번째 수준</a:t>
+            </a:r>
+          </a:p>
+        </p:txBody>
+      </p:sp>
+      <p:sp>
+        <p:nvSpPr>
+          <p:cNvPr id="4" name="날짜 개체 틀 3">
+            <a:extLst>
+              <a:ext uri="{FF2B5EF4-FFF2-40B4-BE49-F238E27FC236}">
+                <a16:creationId xmlns:a16="http://schemas.microsoft.com/office/drawing/2014/main" id="{ED78D646-0716-10BB-FB63-A1F534CDC24A}"/>
+              </a:ext>
+            </a:extLst>
+          </p:cNvPr>
+          <p:cNvSpPr>
+            <a:spLocks noGrp="1"/>
+          </p:cNvSpPr>
+          <p:nvPr>
+            <p:ph type="dt" sz="half" idx="10"/>
+          </p:nvPr>
+        </p:nvSpPr>
+        <p:spPr/>
+        <p:txBody>
+          <a:bodyPr/>
+          <a:lstStyle/>
+          <a:p>
+            <a:fld id="{995C7C8F-822A-4723-A724-B24BDCABEA27}" type="datetimeFigureOut">
+              <a:rPr lang="ko-KR" altLang="en-US" smtClean="0"/>
+              <a:t>2025-07-17</a:t>
+            </a:fld>
+            <a:endParaRPr lang="ko-KR" altLang="en-US"/>
+          </a:p>
+        </p:txBody>
+      </p:sp>
+      <p:sp>
+        <p:nvSpPr>
+          <p:cNvPr id="5" name="바닥글 개체 틀 4">
+            <a:extLst>
+              <a:ext uri="{FF2B5EF4-FFF2-40B4-BE49-F238E27FC236}">
+                <a16:creationId xmlns:a16="http://schemas.microsoft.com/office/drawing/2014/main" id="{872D52AF-0D65-4550-B685-CF373C35DA82}"/>
+              </a:ext>
+            </a:extLst>
+          </p:cNvPr>
+          <p:cNvSpPr>
+            <a:spLocks noGrp="1"/>
+          </p:cNvSpPr>
+          <p:nvPr>
+            <p:ph type="ftr" sz="quarter" idx="11"/>
+          </p:nvPr>
+        </p:nvSpPr>
+        <p:spPr/>
+        <p:txBody>
+          <a:bodyPr/>
+          <a:lstStyle/>
+          <a:p>
+            <a:endParaRPr lang="ko-KR" altLang="en-US"/>
+          </a:p>
+        </p:txBody>
+      </p:sp>
+      <p:sp>
+        <p:nvSpPr>
+          <p:cNvPr id="6" name="슬라이드 번호 개체 틀 5">
+            <a:extLst>
+              <a:ext uri="{FF2B5EF4-FFF2-40B4-BE49-F238E27FC236}">
+                <a16:creationId xmlns:a16="http://schemas.microsoft.com/office/drawing/2014/main" id="{86E7D448-A313-35A9-169F-E50806902BF2}"/>
+              </a:ext>
+            </a:extLst>
+          </p:cNvPr>
+          <p:cNvSpPr>
+            <a:spLocks noGrp="1"/>
+          </p:cNvSpPr>
+          <p:nvPr>
+            <p:ph type="sldNum" sz="quarter" idx="12"/>
+          </p:nvPr>
+        </p:nvSpPr>
+        <p:spPr/>
+        <p:txBody>
+          <a:bodyPr/>
+          <a:lstStyle/>
+          <a:p>
+            <a:fld id="{6F89A9E9-A8B1-4524-AE75-5A6692DCE9C4}" type="slidenum">
+              <a:rPr lang="ko-KR" altLang="en-US" smtClean="0"/>
+              <a:t>‹#›</a:t>
+            </a:fld>
+            <a:endParaRPr lang="ko-KR" altLang="en-US"/>
+          </a:p>
+        </p:txBody>
+      </p:sp>
+    </p:spTree>
+    <p:extLst>
+      <p:ext uri="{BB962C8B-B14F-4D97-AF65-F5344CB8AC3E}">
+        <p14:creationId xmlns:p14="http://schemas.microsoft.com/office/powerpoint/2010/main" val="339762027"/>
+      </p:ext>
+    </p:extLst>
+  </p:cSld>
+  <p:clrMapOvr>
+    <a:masterClrMapping/>
+  </p:clrMapOvr>
+</p:sldLayout>
+</file>
+
+<file path=ppt/slideLayouts/slideLayout14.xml><?xml version="1.0" encoding="utf-8"?>
+<p:sldLayout xmlns:a="http://schemas.openxmlformats.org/drawingml/2006/main" xmlns:r="http://schemas.openxmlformats.org/officeDocument/2006/relationships" xmlns:p="http://schemas.openxmlformats.org/presentationml/2006/main" type="secHead" preserve="1">
+  <p:cSld name="구역 머리글">
+    <p:spTree>
+      <p:nvGrpSpPr>
+        <p:cNvPr id="1" name=""/>
+        <p:cNvGrpSpPr/>
+        <p:nvPr/>
+      </p:nvGrpSpPr>
+      <p:grpSpPr>
+        <a:xfrm>
+          <a:off x="0" y="0"/>
+          <a:ext cx="0" cy="0"/>
+          <a:chOff x="0" y="0"/>
+          <a:chExt cx="0" cy="0"/>
+        </a:xfrm>
+      </p:grpSpPr>
+      <p:sp>
+        <p:nvSpPr>
+          <p:cNvPr id="2" name="제목 1">
+            <a:extLst>
+              <a:ext uri="{FF2B5EF4-FFF2-40B4-BE49-F238E27FC236}">
+                <a16:creationId xmlns:a16="http://schemas.microsoft.com/office/drawing/2014/main" id="{D3C91EF1-B869-6542-0BCB-4D4963023469}"/>
+              </a:ext>
+            </a:extLst>
+          </p:cNvPr>
+          <p:cNvSpPr>
+            <a:spLocks noGrp="1"/>
+          </p:cNvSpPr>
+          <p:nvPr>
+            <p:ph type="title"/>
+          </p:nvPr>
+        </p:nvSpPr>
+        <p:spPr>
+          <a:xfrm>
+            <a:off x="831850" y="1709738"/>
+            <a:ext cx="10515600" cy="2852737"/>
+          </a:xfrm>
+        </p:spPr>
+        <p:txBody>
+          <a:bodyPr anchor="b"/>
+          <a:lstStyle>
+            <a:lvl1pPr>
+              <a:defRPr sz="6000"/>
+            </a:lvl1pPr>
+          </a:lstStyle>
+          <a:p>
+            <a:r>
+              <a:rPr lang="ko-KR" altLang="en-US"/>
+              <a:t>마스터 제목 스타일 편집</a:t>
+            </a:r>
+          </a:p>
+        </p:txBody>
+      </p:sp>
+      <p:sp>
+        <p:nvSpPr>
+          <p:cNvPr id="3" name="텍스트 개체 틀 2">
+            <a:extLst>
+              <a:ext uri="{FF2B5EF4-FFF2-40B4-BE49-F238E27FC236}">
+                <a16:creationId xmlns:a16="http://schemas.microsoft.com/office/drawing/2014/main" id="{CCA5D62D-067D-5329-00DF-AA81F95AE48D}"/>
+              </a:ext>
+            </a:extLst>
+          </p:cNvPr>
+          <p:cNvSpPr>
+            <a:spLocks noGrp="1"/>
+          </p:cNvSpPr>
+          <p:nvPr>
+            <p:ph type="body" idx="1"/>
+          </p:nvPr>
+        </p:nvSpPr>
+        <p:spPr>
+          <a:xfrm>
+            <a:off x="831850" y="4589463"/>
+            <a:ext cx="10515600" cy="1500187"/>
+          </a:xfrm>
+        </p:spPr>
+        <p:txBody>
+          <a:bodyPr/>
+          <a:lstStyle>
+            <a:lvl1pPr marL="0" indent="0">
+              <a:buNone/>
+              <a:defRPr sz="2400">
+                <a:solidFill>
+                  <a:schemeClr val="tx1">
+                    <a:tint val="75000"/>
+                  </a:schemeClr>
+                </a:solidFill>
+              </a:defRPr>
+            </a:lvl1pPr>
+            <a:lvl2pPr marL="457200" indent="0">
+              <a:buNone/>
+              <a:defRPr sz="2000">
+                <a:solidFill>
+                  <a:schemeClr val="tx1">
+                    <a:tint val="75000"/>
+                  </a:schemeClr>
+                </a:solidFill>
+              </a:defRPr>
+            </a:lvl2pPr>
+            <a:lvl3pPr marL="914400" indent="0">
+              <a:buNone/>
+              <a:defRPr sz="1800">
+                <a:solidFill>
+                  <a:schemeClr val="tx1">
+                    <a:tint val="75000"/>
+                  </a:schemeClr>
+                </a:solidFill>
+              </a:defRPr>
+            </a:lvl3pPr>
+            <a:lvl4pPr marL="1371600" indent="0">
+              <a:buNone/>
+              <a:defRPr sz="1600">
+                <a:solidFill>
+                  <a:schemeClr val="tx1">
+                    <a:tint val="75000"/>
+                  </a:schemeClr>
+                </a:solidFill>
+              </a:defRPr>
+            </a:lvl4pPr>
+            <a:lvl5pPr marL="1828800" indent="0">
+              <a:buNone/>
+              <a:defRPr sz="1600">
+                <a:solidFill>
+                  <a:schemeClr val="tx1">
+                    <a:tint val="75000"/>
+                  </a:schemeClr>
+                </a:solidFill>
+              </a:defRPr>
+            </a:lvl5pPr>
+            <a:lvl6pPr marL="2286000" indent="0">
+              <a:buNone/>
+              <a:defRPr sz="1600">
+                <a:solidFill>
+                  <a:schemeClr val="tx1">
+                    <a:tint val="75000"/>
+                  </a:schemeClr>
+                </a:solidFill>
+              </a:defRPr>
+            </a:lvl6pPr>
+            <a:lvl7pPr marL="2743200" indent="0">
+              <a:buNone/>
+              <a:defRPr sz="1600">
+                <a:solidFill>
+                  <a:schemeClr val="tx1">
+                    <a:tint val="75000"/>
+                  </a:schemeClr>
+                </a:solidFill>
+              </a:defRPr>
+            </a:lvl7pPr>
+            <a:lvl8pPr marL="3200400" indent="0">
+              <a:buNone/>
+              <a:defRPr sz="1600">
+                <a:solidFill>
+                  <a:schemeClr val="tx1">
+                    <a:tint val="75000"/>
+                  </a:schemeClr>
+                </a:solidFill>
+              </a:defRPr>
+            </a:lvl8pPr>
+            <a:lvl9pPr marL="3657600" indent="0">
+              <a:buNone/>
+              <a:defRPr sz="1600">
+                <a:solidFill>
+                  <a:schemeClr val="tx1">
+                    <a:tint val="75000"/>
+                  </a:schemeClr>
+                </a:solidFill>
+              </a:defRPr>
+            </a:lvl9pPr>
+          </a:lstStyle>
+          <a:p>
+            <a:pPr lvl="0"/>
+            <a:r>
+              <a:rPr lang="ko-KR" altLang="en-US"/>
+              <a:t>마스터 텍스트 스타일을 편집하려면 클릭</a:t>
+            </a:r>
+          </a:p>
+        </p:txBody>
+      </p:sp>
+      <p:sp>
+        <p:nvSpPr>
+          <p:cNvPr id="4" name="날짜 개체 틀 3">
+            <a:extLst>
+              <a:ext uri="{FF2B5EF4-FFF2-40B4-BE49-F238E27FC236}">
+                <a16:creationId xmlns:a16="http://schemas.microsoft.com/office/drawing/2014/main" id="{F456674C-91CD-02C3-7F44-66820EEF1774}"/>
+              </a:ext>
+            </a:extLst>
+          </p:cNvPr>
+          <p:cNvSpPr>
+            <a:spLocks noGrp="1"/>
+          </p:cNvSpPr>
+          <p:nvPr>
+            <p:ph type="dt" sz="half" idx="10"/>
+          </p:nvPr>
+        </p:nvSpPr>
+        <p:spPr/>
+        <p:txBody>
+          <a:bodyPr/>
+          <a:lstStyle/>
+          <a:p>
+            <a:fld id="{995C7C8F-822A-4723-A724-B24BDCABEA27}" type="datetimeFigureOut">
+              <a:rPr lang="ko-KR" altLang="en-US" smtClean="0"/>
+              <a:t>2025-07-17</a:t>
+            </a:fld>
+            <a:endParaRPr lang="ko-KR" altLang="en-US"/>
+          </a:p>
+        </p:txBody>
+      </p:sp>
+      <p:sp>
+        <p:nvSpPr>
+          <p:cNvPr id="5" name="바닥글 개체 틀 4">
+            <a:extLst>
+              <a:ext uri="{FF2B5EF4-FFF2-40B4-BE49-F238E27FC236}">
+                <a16:creationId xmlns:a16="http://schemas.microsoft.com/office/drawing/2014/main" id="{77F8E788-5E59-2A93-D0B8-68E6EFE28978}"/>
+              </a:ext>
+            </a:extLst>
+          </p:cNvPr>
+          <p:cNvSpPr>
+            <a:spLocks noGrp="1"/>
+          </p:cNvSpPr>
+          <p:nvPr>
+            <p:ph type="ftr" sz="quarter" idx="11"/>
+          </p:nvPr>
+        </p:nvSpPr>
+        <p:spPr/>
+        <p:txBody>
+          <a:bodyPr/>
+          <a:lstStyle/>
+          <a:p>
+            <a:endParaRPr lang="ko-KR" altLang="en-US"/>
+          </a:p>
+        </p:txBody>
+      </p:sp>
+      <p:sp>
+        <p:nvSpPr>
+          <p:cNvPr id="6" name="슬라이드 번호 개체 틀 5">
+            <a:extLst>
+              <a:ext uri="{FF2B5EF4-FFF2-40B4-BE49-F238E27FC236}">
+                <a16:creationId xmlns:a16="http://schemas.microsoft.com/office/drawing/2014/main" id="{61ADFB97-1B7B-637A-EBF1-FE361FB9DEE2}"/>
+              </a:ext>
+            </a:extLst>
+          </p:cNvPr>
+          <p:cNvSpPr>
+            <a:spLocks noGrp="1"/>
+          </p:cNvSpPr>
+          <p:nvPr>
+            <p:ph type="sldNum" sz="quarter" idx="12"/>
+          </p:nvPr>
+        </p:nvSpPr>
+        <p:spPr/>
+        <p:txBody>
+          <a:bodyPr/>
+          <a:lstStyle/>
+          <a:p>
+            <a:fld id="{6F89A9E9-A8B1-4524-AE75-5A6692DCE9C4}" type="slidenum">
+              <a:rPr lang="ko-KR" altLang="en-US" smtClean="0"/>
+              <a:t>‹#›</a:t>
+            </a:fld>
+            <a:endParaRPr lang="ko-KR" altLang="en-US"/>
+          </a:p>
+        </p:txBody>
+      </p:sp>
+    </p:spTree>
+    <p:extLst>
+      <p:ext uri="{BB962C8B-B14F-4D97-AF65-F5344CB8AC3E}">
+        <p14:creationId xmlns:p14="http://schemas.microsoft.com/office/powerpoint/2010/main" val="1027380545"/>
+      </p:ext>
+    </p:extLst>
+  </p:cSld>
+  <p:clrMapOvr>
+    <a:masterClrMapping/>
+  </p:clrMapOvr>
+</p:sldLayout>
+</file>
+
+<file path=ppt/slideLayouts/slideLayout15.xml><?xml version="1.0" encoding="utf-8"?>
+<p:sldLayout xmlns:a="http://schemas.openxmlformats.org/drawingml/2006/main" xmlns:r="http://schemas.openxmlformats.org/officeDocument/2006/relationships" xmlns:p="http://schemas.openxmlformats.org/presentationml/2006/main" type="twoObj" preserve="1">
+  <p:cSld name="콘텐츠 2개">
+    <p:spTree>
+      <p:nvGrpSpPr>
+        <p:cNvPr id="1" name=""/>
+        <p:cNvGrpSpPr/>
+        <p:nvPr/>
+      </p:nvGrpSpPr>
+      <p:grpSpPr>
+        <a:xfrm>
+          <a:off x="0" y="0"/>
+          <a:ext cx="0" cy="0"/>
+          <a:chOff x="0" y="0"/>
+          <a:chExt cx="0" cy="0"/>
+        </a:xfrm>
+      </p:grpSpPr>
+      <p:sp>
+        <p:nvSpPr>
+          <p:cNvPr id="2" name="제목 1">
+            <a:extLst>
+              <a:ext uri="{FF2B5EF4-FFF2-40B4-BE49-F238E27FC236}">
+                <a16:creationId xmlns:a16="http://schemas.microsoft.com/office/drawing/2014/main" id="{C36F0453-CA82-E6D7-4368-0984B10B462C}"/>
+              </a:ext>
+            </a:extLst>
+          </p:cNvPr>
+          <p:cNvSpPr>
+            <a:spLocks noGrp="1"/>
+          </p:cNvSpPr>
+          <p:nvPr>
+            <p:ph type="title"/>
+          </p:nvPr>
+        </p:nvSpPr>
+        <p:spPr/>
+        <p:txBody>
+          <a:bodyPr/>
+          <a:lstStyle/>
+          <a:p>
+            <a:r>
+              <a:rPr lang="ko-KR" altLang="en-US"/>
+              <a:t>마스터 제목 스타일 편집</a:t>
+            </a:r>
+          </a:p>
+        </p:txBody>
+      </p:sp>
+      <p:sp>
+        <p:nvSpPr>
+          <p:cNvPr id="3" name="내용 개체 틀 2">
+            <a:extLst>
+              <a:ext uri="{FF2B5EF4-FFF2-40B4-BE49-F238E27FC236}">
+                <a16:creationId xmlns:a16="http://schemas.microsoft.com/office/drawing/2014/main" id="{2B489ACE-0973-6D9C-69B9-67811D09AF9B}"/>
+              </a:ext>
+            </a:extLst>
+          </p:cNvPr>
+          <p:cNvSpPr>
+            <a:spLocks noGrp="1"/>
+          </p:cNvSpPr>
+          <p:nvPr>
+            <p:ph sz="half" idx="1"/>
+          </p:nvPr>
+        </p:nvSpPr>
+        <p:spPr>
+          <a:xfrm>
+            <a:off x="838200" y="1825625"/>
+            <a:ext cx="5181600" cy="4351338"/>
+          </a:xfrm>
+        </p:spPr>
+        <p:txBody>
+          <a:bodyPr/>
+          <a:lstStyle/>
+          <a:p>
+            <a:pPr lvl="0"/>
+            <a:r>
+              <a:rPr lang="ko-KR" altLang="en-US"/>
+              <a:t>마스터 텍스트 스타일을 편집하려면 클릭</a:t>
+            </a:r>
+          </a:p>
+          <a:p>
+            <a:pPr lvl="1"/>
+            <a:r>
+              <a:rPr lang="ko-KR" altLang="en-US"/>
+              <a:t>두 번째 수준</a:t>
+            </a:r>
+          </a:p>
+          <a:p>
+            <a:pPr lvl="2"/>
+            <a:r>
+              <a:rPr lang="ko-KR" altLang="en-US"/>
+              <a:t>세 번째 수준</a:t>
+            </a:r>
+          </a:p>
+          <a:p>
+            <a:pPr lvl="3"/>
+            <a:r>
+              <a:rPr lang="ko-KR" altLang="en-US"/>
+              <a:t>네 번째 수준</a:t>
+            </a:r>
+          </a:p>
+          <a:p>
+            <a:pPr lvl="4"/>
+            <a:r>
+              <a:rPr lang="ko-KR" altLang="en-US"/>
+              <a:t>다섯 번째 수준</a:t>
+            </a:r>
+          </a:p>
+        </p:txBody>
+      </p:sp>
+      <p:sp>
+        <p:nvSpPr>
+          <p:cNvPr id="4" name="내용 개체 틀 3">
+            <a:extLst>
+              <a:ext uri="{FF2B5EF4-FFF2-40B4-BE49-F238E27FC236}">
+                <a16:creationId xmlns:a16="http://schemas.microsoft.com/office/drawing/2014/main" id="{4E92E260-5A60-3295-E36E-8B53C3B970FC}"/>
+              </a:ext>
+            </a:extLst>
+          </p:cNvPr>
+          <p:cNvSpPr>
+            <a:spLocks noGrp="1"/>
+          </p:cNvSpPr>
+          <p:nvPr>
+            <p:ph sz="half" idx="2"/>
+          </p:nvPr>
+        </p:nvSpPr>
+        <p:spPr>
+          <a:xfrm>
+            <a:off x="6172200" y="1825625"/>
+            <a:ext cx="5181600" cy="4351338"/>
+          </a:xfrm>
+        </p:spPr>
+        <p:txBody>
+          <a:bodyPr/>
+          <a:lstStyle/>
+          <a:p>
+            <a:pPr lvl="0"/>
+            <a:r>
+              <a:rPr lang="ko-KR" altLang="en-US"/>
+              <a:t>마스터 텍스트 스타일을 편집하려면 클릭</a:t>
+            </a:r>
+          </a:p>
+          <a:p>
+            <a:pPr lvl="1"/>
+            <a:r>
+              <a:rPr lang="ko-KR" altLang="en-US"/>
+              <a:t>두 번째 수준</a:t>
+            </a:r>
+          </a:p>
+          <a:p>
+            <a:pPr lvl="2"/>
+            <a:r>
+              <a:rPr lang="ko-KR" altLang="en-US"/>
+              <a:t>세 번째 수준</a:t>
+            </a:r>
+          </a:p>
+          <a:p>
+            <a:pPr lvl="3"/>
+            <a:r>
+              <a:rPr lang="ko-KR" altLang="en-US"/>
+              <a:t>네 번째 수준</a:t>
+            </a:r>
+          </a:p>
+          <a:p>
+            <a:pPr lvl="4"/>
+            <a:r>
+              <a:rPr lang="ko-KR" altLang="en-US"/>
+              <a:t>다섯 번째 수준</a:t>
+            </a:r>
+          </a:p>
+        </p:txBody>
+      </p:sp>
+      <p:sp>
+        <p:nvSpPr>
+          <p:cNvPr id="5" name="날짜 개체 틀 4">
+            <a:extLst>
+              <a:ext uri="{FF2B5EF4-FFF2-40B4-BE49-F238E27FC236}">
+                <a16:creationId xmlns:a16="http://schemas.microsoft.com/office/drawing/2014/main" id="{0BA8ED4A-BC61-41F8-8C89-0ECE48B8E4BA}"/>
+              </a:ext>
+            </a:extLst>
+          </p:cNvPr>
+          <p:cNvSpPr>
+            <a:spLocks noGrp="1"/>
+          </p:cNvSpPr>
+          <p:nvPr>
+            <p:ph type="dt" sz="half" idx="10"/>
+          </p:nvPr>
+        </p:nvSpPr>
+        <p:spPr/>
+        <p:txBody>
+          <a:bodyPr/>
+          <a:lstStyle/>
+          <a:p>
+            <a:fld id="{995C7C8F-822A-4723-A724-B24BDCABEA27}" type="datetimeFigureOut">
+              <a:rPr lang="ko-KR" altLang="en-US" smtClean="0"/>
+              <a:t>2025-07-17</a:t>
+            </a:fld>
+            <a:endParaRPr lang="ko-KR" altLang="en-US"/>
+          </a:p>
+        </p:txBody>
+      </p:sp>
+      <p:sp>
+        <p:nvSpPr>
+          <p:cNvPr id="6" name="바닥글 개체 틀 5">
+            <a:extLst>
+              <a:ext uri="{FF2B5EF4-FFF2-40B4-BE49-F238E27FC236}">
+                <a16:creationId xmlns:a16="http://schemas.microsoft.com/office/drawing/2014/main" id="{5C8C01F0-E2BD-6512-0903-746A9C458521}"/>
+              </a:ext>
+            </a:extLst>
+          </p:cNvPr>
+          <p:cNvSpPr>
+            <a:spLocks noGrp="1"/>
+          </p:cNvSpPr>
+          <p:nvPr>
+            <p:ph type="ftr" sz="quarter" idx="11"/>
+          </p:nvPr>
+        </p:nvSpPr>
+        <p:spPr/>
+        <p:txBody>
+          <a:bodyPr/>
+          <a:lstStyle/>
+          <a:p>
+            <a:endParaRPr lang="ko-KR" altLang="en-US"/>
+          </a:p>
+        </p:txBody>
+      </p:sp>
+      <p:sp>
+        <p:nvSpPr>
+          <p:cNvPr id="7" name="슬라이드 번호 개체 틀 6">
+            <a:extLst>
+              <a:ext uri="{FF2B5EF4-FFF2-40B4-BE49-F238E27FC236}">
+                <a16:creationId xmlns:a16="http://schemas.microsoft.com/office/drawing/2014/main" id="{E2BDB509-000B-21BB-E6A4-324311AF2F74}"/>
+              </a:ext>
+            </a:extLst>
+          </p:cNvPr>
+          <p:cNvSpPr>
+            <a:spLocks noGrp="1"/>
+          </p:cNvSpPr>
+          <p:nvPr>
+            <p:ph type="sldNum" sz="quarter" idx="12"/>
+          </p:nvPr>
+        </p:nvSpPr>
+        <p:spPr/>
+        <p:txBody>
+          <a:bodyPr/>
+          <a:lstStyle/>
+          <a:p>
+            <a:fld id="{6F89A9E9-A8B1-4524-AE75-5A6692DCE9C4}" type="slidenum">
+              <a:rPr lang="ko-KR" altLang="en-US" smtClean="0"/>
+              <a:t>‹#›</a:t>
+            </a:fld>
+            <a:endParaRPr lang="ko-KR" altLang="en-US"/>
+          </a:p>
+        </p:txBody>
+      </p:sp>
+    </p:spTree>
+    <p:extLst>
+      <p:ext uri="{BB962C8B-B14F-4D97-AF65-F5344CB8AC3E}">
+        <p14:creationId xmlns:p14="http://schemas.microsoft.com/office/powerpoint/2010/main" val="1223830881"/>
+      </p:ext>
+    </p:extLst>
+  </p:cSld>
+  <p:clrMapOvr>
+    <a:masterClrMapping/>
+  </p:clrMapOvr>
+</p:sldLayout>
+</file>
+
+<file path=ppt/slideLayouts/slideLayout16.xml><?xml version="1.0" encoding="utf-8"?>
+<p:sldLayout xmlns:a="http://schemas.openxmlformats.org/drawingml/2006/main" xmlns:r="http://schemas.openxmlformats.org/officeDocument/2006/relationships" xmlns:p="http://schemas.openxmlformats.org/presentationml/2006/main" type="twoTxTwoObj" preserve="1">
+  <p:cSld name="비교">
+    <p:spTree>
+      <p:nvGrpSpPr>
+        <p:cNvPr id="1" name=""/>
+        <p:cNvGrpSpPr/>
+        <p:nvPr/>
+      </p:nvGrpSpPr>
+      <p:grpSpPr>
+        <a:xfrm>
+          <a:off x="0" y="0"/>
+          <a:ext cx="0" cy="0"/>
+          <a:chOff x="0" y="0"/>
+          <a:chExt cx="0" cy="0"/>
+        </a:xfrm>
+      </p:grpSpPr>
+      <p:sp>
+        <p:nvSpPr>
+          <p:cNvPr id="2" name="제목 1">
+            <a:extLst>
+              <a:ext uri="{FF2B5EF4-FFF2-40B4-BE49-F238E27FC236}">
+                <a16:creationId xmlns:a16="http://schemas.microsoft.com/office/drawing/2014/main" id="{D13D10C5-0F54-246A-C183-8C9E045C012A}"/>
+              </a:ext>
+            </a:extLst>
+          </p:cNvPr>
+          <p:cNvSpPr>
+            <a:spLocks noGrp="1"/>
+          </p:cNvSpPr>
+          <p:nvPr>
+            <p:ph type="title"/>
+          </p:nvPr>
+        </p:nvSpPr>
+        <p:spPr>
+          <a:xfrm>
+            <a:off x="839788" y="365125"/>
+            <a:ext cx="10515600" cy="1325563"/>
+          </a:xfrm>
+        </p:spPr>
+        <p:txBody>
+          <a:bodyPr/>
+          <a:lstStyle/>
+          <a:p>
+            <a:r>
+              <a:rPr lang="ko-KR" altLang="en-US"/>
+              <a:t>마스터 제목 스타일 편집</a:t>
+            </a:r>
+          </a:p>
+        </p:txBody>
+      </p:sp>
+      <p:sp>
+        <p:nvSpPr>
+          <p:cNvPr id="3" name="텍스트 개체 틀 2">
+            <a:extLst>
+              <a:ext uri="{FF2B5EF4-FFF2-40B4-BE49-F238E27FC236}">
+                <a16:creationId xmlns:a16="http://schemas.microsoft.com/office/drawing/2014/main" id="{864E18FD-30CD-1B58-68BE-EBA22212767F}"/>
+              </a:ext>
+            </a:extLst>
+          </p:cNvPr>
+          <p:cNvSpPr>
+            <a:spLocks noGrp="1"/>
+          </p:cNvSpPr>
+          <p:nvPr>
+            <p:ph type="body" idx="1"/>
+          </p:nvPr>
+        </p:nvSpPr>
+        <p:spPr>
+          <a:xfrm>
+            <a:off x="839788" y="1681163"/>
+            <a:ext cx="5157787" cy="823912"/>
+          </a:xfrm>
+        </p:spPr>
+        <p:txBody>
+          <a:bodyPr anchor="b"/>
+          <a:lstStyle>
+            <a:lvl1pPr marL="0" indent="0">
+              <a:buNone/>
+              <a:defRPr sz="2400" b="1"/>
+            </a:lvl1pPr>
+            <a:lvl2pPr marL="457200" indent="0">
+              <a:buNone/>
+              <a:defRPr sz="2000" b="1"/>
+            </a:lvl2pPr>
+            <a:lvl3pPr marL="914400" indent="0">
+              <a:buNone/>
+              <a:defRPr sz="1800" b="1"/>
+            </a:lvl3pPr>
+            <a:lvl4pPr marL="1371600" indent="0">
+              <a:buNone/>
+              <a:defRPr sz="1600" b="1"/>
+            </a:lvl4pPr>
+            <a:lvl5pPr marL="1828800" indent="0">
+              <a:buNone/>
+              <a:defRPr sz="1600" b="1"/>
+            </a:lvl5pPr>
+            <a:lvl6pPr marL="2286000" indent="0">
+              <a:buNone/>
+              <a:defRPr sz="1600" b="1"/>
+            </a:lvl6pPr>
+            <a:lvl7pPr marL="2743200" indent="0">
+              <a:buNone/>
+              <a:defRPr sz="1600" b="1"/>
+            </a:lvl7pPr>
+            <a:lvl8pPr marL="3200400" indent="0">
+              <a:buNone/>
+              <a:defRPr sz="1600" b="1"/>
+            </a:lvl8pPr>
+            <a:lvl9pPr marL="3657600" indent="0">
+              <a:buNone/>
+              <a:defRPr sz="1600" b="1"/>
+            </a:lvl9pPr>
+          </a:lstStyle>
+          <a:p>
+            <a:pPr lvl="0"/>
+            <a:r>
+              <a:rPr lang="ko-KR" altLang="en-US"/>
+              <a:t>마스터 텍스트 스타일을 편집하려면 클릭</a:t>
+            </a:r>
+          </a:p>
+        </p:txBody>
+      </p:sp>
+      <p:sp>
+        <p:nvSpPr>
+          <p:cNvPr id="4" name="내용 개체 틀 3">
+            <a:extLst>
+              <a:ext uri="{FF2B5EF4-FFF2-40B4-BE49-F238E27FC236}">
+                <a16:creationId xmlns:a16="http://schemas.microsoft.com/office/drawing/2014/main" id="{7815BB73-A4F7-40F0-4482-CEBF8DAB699A}"/>
+              </a:ext>
+            </a:extLst>
+          </p:cNvPr>
+          <p:cNvSpPr>
+            <a:spLocks noGrp="1"/>
+          </p:cNvSpPr>
+          <p:nvPr>
+            <p:ph sz="half" idx="2"/>
+          </p:nvPr>
+        </p:nvSpPr>
+        <p:spPr>
+          <a:xfrm>
+            <a:off x="839788" y="2505075"/>
+            <a:ext cx="5157787" cy="3684588"/>
+          </a:xfrm>
+        </p:spPr>
+        <p:txBody>
+          <a:bodyPr/>
+          <a:lstStyle/>
+          <a:p>
+            <a:pPr lvl="0"/>
+            <a:r>
+              <a:rPr lang="ko-KR" altLang="en-US"/>
+              <a:t>마스터 텍스트 스타일을 편집하려면 클릭</a:t>
+            </a:r>
+          </a:p>
+          <a:p>
+            <a:pPr lvl="1"/>
+            <a:r>
+              <a:rPr lang="ko-KR" altLang="en-US"/>
+              <a:t>두 번째 수준</a:t>
+            </a:r>
+          </a:p>
+          <a:p>
+            <a:pPr lvl="2"/>
+            <a:r>
+              <a:rPr lang="ko-KR" altLang="en-US"/>
+              <a:t>세 번째 수준</a:t>
+            </a:r>
+          </a:p>
+          <a:p>
+            <a:pPr lvl="3"/>
+            <a:r>
+              <a:rPr lang="ko-KR" altLang="en-US"/>
+              <a:t>네 번째 수준</a:t>
+            </a:r>
+          </a:p>
+          <a:p>
+            <a:pPr lvl="4"/>
+            <a:r>
+              <a:rPr lang="ko-KR" altLang="en-US"/>
+              <a:t>다섯 번째 수준</a:t>
+            </a:r>
+          </a:p>
+        </p:txBody>
+      </p:sp>
+      <p:sp>
+        <p:nvSpPr>
+          <p:cNvPr id="5" name="텍스트 개체 틀 4">
+            <a:extLst>
+              <a:ext uri="{FF2B5EF4-FFF2-40B4-BE49-F238E27FC236}">
+                <a16:creationId xmlns:a16="http://schemas.microsoft.com/office/drawing/2014/main" id="{145B7473-11FA-87F9-ACC6-2FDBCC5C8DE0}"/>
+              </a:ext>
+            </a:extLst>
+          </p:cNvPr>
+          <p:cNvSpPr>
+            <a:spLocks noGrp="1"/>
+          </p:cNvSpPr>
+          <p:nvPr>
+            <p:ph type="body" sz="quarter" idx="3"/>
+          </p:nvPr>
+        </p:nvSpPr>
+        <p:spPr>
+          <a:xfrm>
+            <a:off x="6172200" y="1681163"/>
+            <a:ext cx="5183188" cy="823912"/>
+          </a:xfrm>
+        </p:spPr>
+        <p:txBody>
+          <a:bodyPr anchor="b"/>
+          <a:lstStyle>
+            <a:lvl1pPr marL="0" indent="0">
+              <a:buNone/>
+              <a:defRPr sz="2400" b="1"/>
+            </a:lvl1pPr>
+            <a:lvl2pPr marL="457200" indent="0">
+              <a:buNone/>
+              <a:defRPr sz="2000" b="1"/>
+            </a:lvl2pPr>
+            <a:lvl3pPr marL="914400" indent="0">
+              <a:buNone/>
+              <a:defRPr sz="1800" b="1"/>
+            </a:lvl3pPr>
+            <a:lvl4pPr marL="1371600" indent="0">
+              <a:buNone/>
+              <a:defRPr sz="1600" b="1"/>
+            </a:lvl4pPr>
+            <a:lvl5pPr marL="1828800" indent="0">
+              <a:buNone/>
+              <a:defRPr sz="1600" b="1"/>
+            </a:lvl5pPr>
+            <a:lvl6pPr marL="2286000" indent="0">
+              <a:buNone/>
+              <a:defRPr sz="1600" b="1"/>
+            </a:lvl6pPr>
+            <a:lvl7pPr marL="2743200" indent="0">
+              <a:buNone/>
+              <a:defRPr sz="1600" b="1"/>
+            </a:lvl7pPr>
+            <a:lvl8pPr marL="3200400" indent="0">
+              <a:buNone/>
+              <a:defRPr sz="1600" b="1"/>
+            </a:lvl8pPr>
+            <a:lvl9pPr marL="3657600" indent="0">
+              <a:buNone/>
+              <a:defRPr sz="1600" b="1"/>
+            </a:lvl9pPr>
+          </a:lstStyle>
+          <a:p>
+            <a:pPr lvl="0"/>
+            <a:r>
+              <a:rPr lang="ko-KR" altLang="en-US"/>
+              <a:t>마스터 텍스트 스타일을 편집하려면 클릭</a:t>
+            </a:r>
+          </a:p>
+        </p:txBody>
+      </p:sp>
+      <p:sp>
+        <p:nvSpPr>
+          <p:cNvPr id="6" name="내용 개체 틀 5">
+            <a:extLst>
+              <a:ext uri="{FF2B5EF4-FFF2-40B4-BE49-F238E27FC236}">
+                <a16:creationId xmlns:a16="http://schemas.microsoft.com/office/drawing/2014/main" id="{B6BFD4DB-FF59-1274-2205-C8399B4E294E}"/>
+              </a:ext>
+            </a:extLst>
+          </p:cNvPr>
+          <p:cNvSpPr>
+            <a:spLocks noGrp="1"/>
+          </p:cNvSpPr>
+          <p:nvPr>
+            <p:ph sz="quarter" idx="4"/>
+          </p:nvPr>
+        </p:nvSpPr>
+        <p:spPr>
+          <a:xfrm>
+            <a:off x="6172200" y="2505075"/>
+            <a:ext cx="5183188" cy="3684588"/>
+          </a:xfrm>
+        </p:spPr>
+        <p:txBody>
+          <a:bodyPr/>
+          <a:lstStyle/>
+          <a:p>
+            <a:pPr lvl="0"/>
+            <a:r>
+              <a:rPr lang="ko-KR" altLang="en-US"/>
+              <a:t>마스터 텍스트 스타일을 편집하려면 클릭</a:t>
+            </a:r>
+          </a:p>
+          <a:p>
+            <a:pPr lvl="1"/>
+            <a:r>
+              <a:rPr lang="ko-KR" altLang="en-US"/>
+              <a:t>두 번째 수준</a:t>
+            </a:r>
+          </a:p>
+          <a:p>
+            <a:pPr lvl="2"/>
+            <a:r>
+              <a:rPr lang="ko-KR" altLang="en-US"/>
+              <a:t>세 번째 수준</a:t>
+            </a:r>
+          </a:p>
+          <a:p>
+            <a:pPr lvl="3"/>
+            <a:r>
+              <a:rPr lang="ko-KR" altLang="en-US"/>
+              <a:t>네 번째 수준</a:t>
+            </a:r>
+          </a:p>
+          <a:p>
+            <a:pPr lvl="4"/>
+            <a:r>
+              <a:rPr lang="ko-KR" altLang="en-US"/>
+              <a:t>다섯 번째 수준</a:t>
+            </a:r>
+          </a:p>
+        </p:txBody>
+      </p:sp>
+      <p:sp>
+        <p:nvSpPr>
+          <p:cNvPr id="7" name="날짜 개체 틀 6">
+            <a:extLst>
+              <a:ext uri="{FF2B5EF4-FFF2-40B4-BE49-F238E27FC236}">
+                <a16:creationId xmlns:a16="http://schemas.microsoft.com/office/drawing/2014/main" id="{BD6F039F-54D9-F611-6B40-B5EE8A67F4EB}"/>
+              </a:ext>
+            </a:extLst>
+          </p:cNvPr>
+          <p:cNvSpPr>
+            <a:spLocks noGrp="1"/>
+          </p:cNvSpPr>
+          <p:nvPr>
+            <p:ph type="dt" sz="half" idx="10"/>
+          </p:nvPr>
+        </p:nvSpPr>
+        <p:spPr/>
+        <p:txBody>
+          <a:bodyPr/>
+          <a:lstStyle/>
+          <a:p>
+            <a:fld id="{995C7C8F-822A-4723-A724-B24BDCABEA27}" type="datetimeFigureOut">
+              <a:rPr lang="ko-KR" altLang="en-US" smtClean="0"/>
+              <a:t>2025-07-17</a:t>
+            </a:fld>
+            <a:endParaRPr lang="ko-KR" altLang="en-US"/>
+          </a:p>
+        </p:txBody>
+      </p:sp>
+      <p:sp>
+        <p:nvSpPr>
+          <p:cNvPr id="8" name="바닥글 개체 틀 7">
+            <a:extLst>
+              <a:ext uri="{FF2B5EF4-FFF2-40B4-BE49-F238E27FC236}">
+                <a16:creationId xmlns:a16="http://schemas.microsoft.com/office/drawing/2014/main" id="{518E3818-D680-2703-E747-1AAE07B05AB8}"/>
+              </a:ext>
+            </a:extLst>
+          </p:cNvPr>
+          <p:cNvSpPr>
+            <a:spLocks noGrp="1"/>
+          </p:cNvSpPr>
+          <p:nvPr>
+            <p:ph type="ftr" sz="quarter" idx="11"/>
+          </p:nvPr>
+        </p:nvSpPr>
+        <p:spPr/>
+        <p:txBody>
+          <a:bodyPr/>
+          <a:lstStyle/>
+          <a:p>
+            <a:endParaRPr lang="ko-KR" altLang="en-US"/>
+          </a:p>
+        </p:txBody>
+      </p:sp>
+      <p:sp>
+        <p:nvSpPr>
+          <p:cNvPr id="9" name="슬라이드 번호 개체 틀 8">
+            <a:extLst>
+              <a:ext uri="{FF2B5EF4-FFF2-40B4-BE49-F238E27FC236}">
+                <a16:creationId xmlns:a16="http://schemas.microsoft.com/office/drawing/2014/main" id="{079A6F54-36C3-1453-DB13-33B6D191E2B6}"/>
+              </a:ext>
+            </a:extLst>
+          </p:cNvPr>
+          <p:cNvSpPr>
+            <a:spLocks noGrp="1"/>
+          </p:cNvSpPr>
+          <p:nvPr>
+            <p:ph type="sldNum" sz="quarter" idx="12"/>
+          </p:nvPr>
+        </p:nvSpPr>
+        <p:spPr/>
+        <p:txBody>
+          <a:bodyPr/>
+          <a:lstStyle/>
+          <a:p>
+            <a:fld id="{6F89A9E9-A8B1-4524-AE75-5A6692DCE9C4}" type="slidenum">
+              <a:rPr lang="ko-KR" altLang="en-US" smtClean="0"/>
+              <a:t>‹#›</a:t>
+            </a:fld>
+            <a:endParaRPr lang="ko-KR" altLang="en-US"/>
+          </a:p>
+        </p:txBody>
+      </p:sp>
+    </p:spTree>
+    <p:extLst>
+      <p:ext uri="{BB962C8B-B14F-4D97-AF65-F5344CB8AC3E}">
+        <p14:creationId xmlns:p14="http://schemas.microsoft.com/office/powerpoint/2010/main" val="950015994"/>
+      </p:ext>
+    </p:extLst>
+  </p:cSld>
+  <p:clrMapOvr>
+    <a:masterClrMapping/>
+  </p:clrMapOvr>
+</p:sldLayout>
+</file>
+
+<file path=ppt/slideLayouts/slideLayout17.xml><?xml version="1.0" encoding="utf-8"?>
+<p:sldLayout xmlns:a="http://schemas.openxmlformats.org/drawingml/2006/main" xmlns:r="http://schemas.openxmlformats.org/officeDocument/2006/relationships" xmlns:p="http://schemas.openxmlformats.org/presentationml/2006/main" type="titleOnly" preserve="1">
+  <p:cSld name="제목만">
+    <p:spTree>
+      <p:nvGrpSpPr>
+        <p:cNvPr id="1" name=""/>
+        <p:cNvGrpSpPr/>
+        <p:nvPr/>
+      </p:nvGrpSpPr>
+      <p:grpSpPr>
+        <a:xfrm>
+          <a:off x="0" y="0"/>
+          <a:ext cx="0" cy="0"/>
+          <a:chOff x="0" y="0"/>
+          <a:chExt cx="0" cy="0"/>
+        </a:xfrm>
+      </p:grpSpPr>
+      <p:sp>
+        <p:nvSpPr>
+          <p:cNvPr id="2" name="제목 1">
+            <a:extLst>
+              <a:ext uri="{FF2B5EF4-FFF2-40B4-BE49-F238E27FC236}">
+                <a16:creationId xmlns:a16="http://schemas.microsoft.com/office/drawing/2014/main" id="{80CCE3CD-01CD-DB07-9DEA-F789F555975B}"/>
+              </a:ext>
+            </a:extLst>
+          </p:cNvPr>
+          <p:cNvSpPr>
+            <a:spLocks noGrp="1"/>
+          </p:cNvSpPr>
+          <p:nvPr>
+            <p:ph type="title"/>
+          </p:nvPr>
+        </p:nvSpPr>
+        <p:spPr/>
+        <p:txBody>
+          <a:bodyPr/>
+          <a:lstStyle/>
+          <a:p>
+            <a:r>
+              <a:rPr lang="ko-KR" altLang="en-US"/>
+              <a:t>마스터 제목 스타일 편집</a:t>
+            </a:r>
+          </a:p>
+        </p:txBody>
+      </p:sp>
+      <p:sp>
+        <p:nvSpPr>
+          <p:cNvPr id="3" name="날짜 개체 틀 2">
+            <a:extLst>
+              <a:ext uri="{FF2B5EF4-FFF2-40B4-BE49-F238E27FC236}">
+                <a16:creationId xmlns:a16="http://schemas.microsoft.com/office/drawing/2014/main" id="{1D218139-0BD9-7E65-ED9B-3B55F652162D}"/>
+              </a:ext>
+            </a:extLst>
+          </p:cNvPr>
+          <p:cNvSpPr>
+            <a:spLocks noGrp="1"/>
+          </p:cNvSpPr>
+          <p:nvPr>
+            <p:ph type="dt" sz="half" idx="10"/>
+          </p:nvPr>
+        </p:nvSpPr>
+        <p:spPr/>
+        <p:txBody>
+          <a:bodyPr/>
+          <a:lstStyle/>
+          <a:p>
+            <a:fld id="{995C7C8F-822A-4723-A724-B24BDCABEA27}" type="datetimeFigureOut">
+              <a:rPr lang="ko-KR" altLang="en-US" smtClean="0"/>
+              <a:t>2025-07-17</a:t>
+            </a:fld>
+            <a:endParaRPr lang="ko-KR" altLang="en-US"/>
+          </a:p>
+        </p:txBody>
+      </p:sp>
+      <p:sp>
+        <p:nvSpPr>
+          <p:cNvPr id="4" name="바닥글 개체 틀 3">
+            <a:extLst>
+              <a:ext uri="{FF2B5EF4-FFF2-40B4-BE49-F238E27FC236}">
+                <a16:creationId xmlns:a16="http://schemas.microsoft.com/office/drawing/2014/main" id="{7C041A41-E2E0-042A-9A60-9EB1D2A8E1BF}"/>
+              </a:ext>
+            </a:extLst>
+          </p:cNvPr>
+          <p:cNvSpPr>
+            <a:spLocks noGrp="1"/>
+          </p:cNvSpPr>
+          <p:nvPr>
+            <p:ph type="ftr" sz="quarter" idx="11"/>
+          </p:nvPr>
+        </p:nvSpPr>
+        <p:spPr/>
+        <p:txBody>
+          <a:bodyPr/>
+          <a:lstStyle/>
+          <a:p>
+            <a:endParaRPr lang="ko-KR" altLang="en-US"/>
+          </a:p>
+        </p:txBody>
+      </p:sp>
+      <p:sp>
+        <p:nvSpPr>
+          <p:cNvPr id="5" name="슬라이드 번호 개체 틀 4">
+            <a:extLst>
+              <a:ext uri="{FF2B5EF4-FFF2-40B4-BE49-F238E27FC236}">
+                <a16:creationId xmlns:a16="http://schemas.microsoft.com/office/drawing/2014/main" id="{EBED3BCB-F012-DAED-7929-DFF86082A9F0}"/>
+              </a:ext>
+            </a:extLst>
+          </p:cNvPr>
+          <p:cNvSpPr>
+            <a:spLocks noGrp="1"/>
+          </p:cNvSpPr>
+          <p:nvPr>
+            <p:ph type="sldNum" sz="quarter" idx="12"/>
+          </p:nvPr>
+        </p:nvSpPr>
+        <p:spPr/>
+        <p:txBody>
+          <a:bodyPr/>
+          <a:lstStyle/>
+          <a:p>
+            <a:fld id="{6F89A9E9-A8B1-4524-AE75-5A6692DCE9C4}" type="slidenum">
+              <a:rPr lang="ko-KR" altLang="en-US" smtClean="0"/>
+              <a:t>‹#›</a:t>
+            </a:fld>
+            <a:endParaRPr lang="ko-KR" altLang="en-US"/>
+          </a:p>
+        </p:txBody>
+      </p:sp>
+    </p:spTree>
+    <p:extLst>
+      <p:ext uri="{BB962C8B-B14F-4D97-AF65-F5344CB8AC3E}">
+        <p14:creationId xmlns:p14="http://schemas.microsoft.com/office/powerpoint/2010/main" val="3815079387"/>
+      </p:ext>
+    </p:extLst>
+  </p:cSld>
+  <p:clrMapOvr>
+    <a:masterClrMapping/>
+  </p:clrMapOvr>
+</p:sldLayout>
+</file>
+
+<file path=ppt/slideLayouts/slideLayout18.xml><?xml version="1.0" encoding="utf-8"?>
+<p:sldLayout xmlns:a="http://schemas.openxmlformats.org/drawingml/2006/main" xmlns:r="http://schemas.openxmlformats.org/officeDocument/2006/relationships" xmlns:p="http://schemas.openxmlformats.org/presentationml/2006/main" type="blank" preserve="1">
+  <p:cSld name="빈 화면">
+    <p:spTree>
+      <p:nvGrpSpPr>
+        <p:cNvPr id="1" name=""/>
+        <p:cNvGrpSpPr/>
+        <p:nvPr/>
+      </p:nvGrpSpPr>
+      <p:grpSpPr>
+        <a:xfrm>
+          <a:off x="0" y="0"/>
+          <a:ext cx="0" cy="0"/>
+          <a:chOff x="0" y="0"/>
+          <a:chExt cx="0" cy="0"/>
+        </a:xfrm>
+      </p:grpSpPr>
+      <p:sp>
+        <p:nvSpPr>
+          <p:cNvPr id="2" name="날짜 개체 틀 1">
+            <a:extLst>
+              <a:ext uri="{FF2B5EF4-FFF2-40B4-BE49-F238E27FC236}">
+                <a16:creationId xmlns:a16="http://schemas.microsoft.com/office/drawing/2014/main" id="{2F58533F-4E19-A61B-1CC3-1B37414C54F1}"/>
+              </a:ext>
+            </a:extLst>
+          </p:cNvPr>
+          <p:cNvSpPr>
+            <a:spLocks noGrp="1"/>
+          </p:cNvSpPr>
+          <p:nvPr>
+            <p:ph type="dt" sz="half" idx="10"/>
+          </p:nvPr>
+        </p:nvSpPr>
+        <p:spPr/>
+        <p:txBody>
+          <a:bodyPr/>
+          <a:lstStyle/>
+          <a:p>
+            <a:fld id="{995C7C8F-822A-4723-A724-B24BDCABEA27}" type="datetimeFigureOut">
+              <a:rPr lang="ko-KR" altLang="en-US" smtClean="0"/>
+              <a:t>2025-07-17</a:t>
+            </a:fld>
+            <a:endParaRPr lang="ko-KR" altLang="en-US"/>
+          </a:p>
+        </p:txBody>
+      </p:sp>
+      <p:sp>
+        <p:nvSpPr>
+          <p:cNvPr id="3" name="바닥글 개체 틀 2">
+            <a:extLst>
+              <a:ext uri="{FF2B5EF4-FFF2-40B4-BE49-F238E27FC236}">
+                <a16:creationId xmlns:a16="http://schemas.microsoft.com/office/drawing/2014/main" id="{64448466-3913-A76F-4B93-9DD2AF260426}"/>
+              </a:ext>
+            </a:extLst>
+          </p:cNvPr>
+          <p:cNvSpPr>
+            <a:spLocks noGrp="1"/>
+          </p:cNvSpPr>
+          <p:nvPr>
+            <p:ph type="ftr" sz="quarter" idx="11"/>
+          </p:nvPr>
+        </p:nvSpPr>
+        <p:spPr/>
+        <p:txBody>
+          <a:bodyPr/>
+          <a:lstStyle/>
+          <a:p>
+            <a:endParaRPr lang="ko-KR" altLang="en-US"/>
+          </a:p>
+        </p:txBody>
+      </p:sp>
+      <p:sp>
+        <p:nvSpPr>
+          <p:cNvPr id="4" name="슬라이드 번호 개체 틀 3">
+            <a:extLst>
+              <a:ext uri="{FF2B5EF4-FFF2-40B4-BE49-F238E27FC236}">
+                <a16:creationId xmlns:a16="http://schemas.microsoft.com/office/drawing/2014/main" id="{B5DDFE27-651A-F79B-FC02-A7B396A4EBD8}"/>
+              </a:ext>
+            </a:extLst>
+          </p:cNvPr>
+          <p:cNvSpPr>
+            <a:spLocks noGrp="1"/>
+          </p:cNvSpPr>
+          <p:nvPr>
+            <p:ph type="sldNum" sz="quarter" idx="12"/>
+          </p:nvPr>
+        </p:nvSpPr>
+        <p:spPr/>
+        <p:txBody>
+          <a:bodyPr/>
+          <a:lstStyle/>
+          <a:p>
+            <a:fld id="{6F89A9E9-A8B1-4524-AE75-5A6692DCE9C4}" type="slidenum">
+              <a:rPr lang="ko-KR" altLang="en-US" smtClean="0"/>
+              <a:t>‹#›</a:t>
+            </a:fld>
+            <a:endParaRPr lang="ko-KR" altLang="en-US"/>
+          </a:p>
+        </p:txBody>
+      </p:sp>
+    </p:spTree>
+    <p:extLst>
+      <p:ext uri="{BB962C8B-B14F-4D97-AF65-F5344CB8AC3E}">
+        <p14:creationId xmlns:p14="http://schemas.microsoft.com/office/powerpoint/2010/main" val="2217465082"/>
+      </p:ext>
+    </p:extLst>
+  </p:cSld>
+  <p:clrMapOvr>
+    <a:masterClrMapping/>
+  </p:clrMapOvr>
+</p:sldLayout>
+</file>
+
+<file path=ppt/slideLayouts/slideLayout19.xml><?xml version="1.0" encoding="utf-8"?>
+<p:sldLayout xmlns:a="http://schemas.openxmlformats.org/drawingml/2006/main" xmlns:r="http://schemas.openxmlformats.org/officeDocument/2006/relationships" xmlns:p="http://schemas.openxmlformats.org/presentationml/2006/main" type="objTx" preserve="1">
+  <p:cSld name="캡션 있는 콘텐츠">
+    <p:spTree>
+      <p:nvGrpSpPr>
+        <p:cNvPr id="1" name=""/>
+        <p:cNvGrpSpPr/>
+        <p:nvPr/>
+      </p:nvGrpSpPr>
+      <p:grpSpPr>
+        <a:xfrm>
+          <a:off x="0" y="0"/>
+          <a:ext cx="0" cy="0"/>
+          <a:chOff x="0" y="0"/>
+          <a:chExt cx="0" cy="0"/>
+        </a:xfrm>
+      </p:grpSpPr>
+      <p:sp>
+        <p:nvSpPr>
+          <p:cNvPr id="2" name="제목 1">
+            <a:extLst>
+              <a:ext uri="{FF2B5EF4-FFF2-40B4-BE49-F238E27FC236}">
+                <a16:creationId xmlns:a16="http://schemas.microsoft.com/office/drawing/2014/main" id="{2272BCC7-251F-BFEF-C42C-966DFBB6F1FE}"/>
+              </a:ext>
+            </a:extLst>
+          </p:cNvPr>
+          <p:cNvSpPr>
+            <a:spLocks noGrp="1"/>
+          </p:cNvSpPr>
+          <p:nvPr>
+            <p:ph type="title"/>
+          </p:nvPr>
+        </p:nvSpPr>
+        <p:spPr>
+          <a:xfrm>
+            <a:off x="839788" y="457200"/>
+            <a:ext cx="3932237" cy="1600200"/>
+          </a:xfrm>
+        </p:spPr>
+        <p:txBody>
+          <a:bodyPr anchor="b"/>
+          <a:lstStyle>
+            <a:lvl1pPr>
+              <a:defRPr sz="3200"/>
+            </a:lvl1pPr>
+          </a:lstStyle>
+          <a:p>
+            <a:r>
+              <a:rPr lang="ko-KR" altLang="en-US"/>
+              <a:t>마스터 제목 스타일 편집</a:t>
+            </a:r>
+          </a:p>
+        </p:txBody>
+      </p:sp>
+      <p:sp>
+        <p:nvSpPr>
+          <p:cNvPr id="3" name="내용 개체 틀 2">
+            <a:extLst>
+              <a:ext uri="{FF2B5EF4-FFF2-40B4-BE49-F238E27FC236}">
+                <a16:creationId xmlns:a16="http://schemas.microsoft.com/office/drawing/2014/main" id="{5C827EB3-E789-C5C3-9AE8-FE01C486B029}"/>
+              </a:ext>
+            </a:extLst>
+          </p:cNvPr>
+          <p:cNvSpPr>
+            <a:spLocks noGrp="1"/>
+          </p:cNvSpPr>
+          <p:nvPr>
+            <p:ph idx="1"/>
+          </p:nvPr>
+        </p:nvSpPr>
+        <p:spPr>
+          <a:xfrm>
+            <a:off x="5183188" y="987425"/>
+            <a:ext cx="6172200" cy="4873625"/>
+          </a:xfrm>
+        </p:spPr>
+        <p:txBody>
+          <a:bodyPr/>
+          <a:lstStyle>
+            <a:lvl1pPr>
+              <a:defRPr sz="3200"/>
+            </a:lvl1pPr>
+            <a:lvl2pPr>
+              <a:defRPr sz="2800"/>
+            </a:lvl2pPr>
+            <a:lvl3pPr>
+              <a:defRPr sz="2400"/>
+            </a:lvl3pPr>
+            <a:lvl4pPr>
+              <a:defRPr sz="2000"/>
+            </a:lvl4pPr>
+            <a:lvl5pPr>
+              <a:defRPr sz="2000"/>
+            </a:lvl5pPr>
+            <a:lvl6pPr>
+              <a:defRPr sz="2000"/>
+            </a:lvl6pPr>
+            <a:lvl7pPr>
+              <a:defRPr sz="2000"/>
+            </a:lvl7pPr>
+            <a:lvl8pPr>
+              <a:defRPr sz="2000"/>
+            </a:lvl8pPr>
+            <a:lvl9pPr>
+              <a:defRPr sz="2000"/>
+            </a:lvl9pPr>
+          </a:lstStyle>
+          <a:p>
+            <a:pPr lvl="0"/>
+            <a:r>
+              <a:rPr lang="ko-KR" altLang="en-US"/>
+              <a:t>마스터 텍스트 스타일을 편집하려면 클릭</a:t>
+            </a:r>
+          </a:p>
+          <a:p>
+            <a:pPr lvl="1"/>
+            <a:r>
+              <a:rPr lang="ko-KR" altLang="en-US"/>
+              <a:t>두 번째 수준</a:t>
+            </a:r>
+          </a:p>
+          <a:p>
+            <a:pPr lvl="2"/>
+            <a:r>
+              <a:rPr lang="ko-KR" altLang="en-US"/>
+              <a:t>세 번째 수준</a:t>
+            </a:r>
+          </a:p>
+          <a:p>
+            <a:pPr lvl="3"/>
+            <a:r>
+              <a:rPr lang="ko-KR" altLang="en-US"/>
+              <a:t>네 번째 수준</a:t>
+            </a:r>
+          </a:p>
+          <a:p>
+            <a:pPr lvl="4"/>
+            <a:r>
+              <a:rPr lang="ko-KR" altLang="en-US"/>
+              <a:t>다섯 번째 수준</a:t>
+            </a:r>
+          </a:p>
+        </p:txBody>
+      </p:sp>
+      <p:sp>
+        <p:nvSpPr>
+          <p:cNvPr id="4" name="텍스트 개체 틀 3">
+            <a:extLst>
+              <a:ext uri="{FF2B5EF4-FFF2-40B4-BE49-F238E27FC236}">
+                <a16:creationId xmlns:a16="http://schemas.microsoft.com/office/drawing/2014/main" id="{631CE4BD-5D63-8E39-644D-9D1DB57D1174}"/>
+              </a:ext>
+            </a:extLst>
+          </p:cNvPr>
+          <p:cNvSpPr>
+            <a:spLocks noGrp="1"/>
+          </p:cNvSpPr>
+          <p:nvPr>
+            <p:ph type="body" sz="half" idx="2"/>
+          </p:nvPr>
+        </p:nvSpPr>
+        <p:spPr>
+          <a:xfrm>
+            <a:off x="839788" y="2057400"/>
+            <a:ext cx="3932237" cy="3811588"/>
+          </a:xfrm>
+        </p:spPr>
+        <p:txBody>
+          <a:bodyPr/>
+          <a:lstStyle>
+            <a:lvl1pPr marL="0" indent="0">
+              <a:buNone/>
+              <a:defRPr sz="1600"/>
+            </a:lvl1pPr>
+            <a:lvl2pPr marL="457200" indent="0">
+              <a:buNone/>
+              <a:defRPr sz="1400"/>
+            </a:lvl2pPr>
+            <a:lvl3pPr marL="914400" indent="0">
+              <a:buNone/>
+              <a:defRPr sz="1200"/>
+            </a:lvl3pPr>
+            <a:lvl4pPr marL="1371600" indent="0">
+              <a:buNone/>
+              <a:defRPr sz="1000"/>
+            </a:lvl4pPr>
+            <a:lvl5pPr marL="1828800" indent="0">
+              <a:buNone/>
+              <a:defRPr sz="1000"/>
+            </a:lvl5pPr>
+            <a:lvl6pPr marL="2286000" indent="0">
+              <a:buNone/>
+              <a:defRPr sz="1000"/>
+            </a:lvl6pPr>
+            <a:lvl7pPr marL="2743200" indent="0">
+              <a:buNone/>
+              <a:defRPr sz="1000"/>
+            </a:lvl7pPr>
+            <a:lvl8pPr marL="3200400" indent="0">
+              <a:buNone/>
+              <a:defRPr sz="1000"/>
+            </a:lvl8pPr>
+            <a:lvl9pPr marL="3657600" indent="0">
+              <a:buNone/>
+              <a:defRPr sz="1000"/>
+            </a:lvl9pPr>
+          </a:lstStyle>
+          <a:p>
+            <a:pPr lvl="0"/>
+            <a:r>
+              <a:rPr lang="ko-KR" altLang="en-US"/>
+              <a:t>마스터 텍스트 스타일을 편집하려면 클릭</a:t>
+            </a:r>
+          </a:p>
+        </p:txBody>
+      </p:sp>
+      <p:sp>
+        <p:nvSpPr>
+          <p:cNvPr id="5" name="날짜 개체 틀 4">
+            <a:extLst>
+              <a:ext uri="{FF2B5EF4-FFF2-40B4-BE49-F238E27FC236}">
+                <a16:creationId xmlns:a16="http://schemas.microsoft.com/office/drawing/2014/main" id="{F6C75F8A-5A01-6328-30FE-507A41120CB0}"/>
+              </a:ext>
+            </a:extLst>
+          </p:cNvPr>
+          <p:cNvSpPr>
+            <a:spLocks noGrp="1"/>
+          </p:cNvSpPr>
+          <p:nvPr>
+            <p:ph type="dt" sz="half" idx="10"/>
+          </p:nvPr>
+        </p:nvSpPr>
+        <p:spPr/>
+        <p:txBody>
+          <a:bodyPr/>
+          <a:lstStyle/>
+          <a:p>
+            <a:fld id="{995C7C8F-822A-4723-A724-B24BDCABEA27}" type="datetimeFigureOut">
+              <a:rPr lang="ko-KR" altLang="en-US" smtClean="0"/>
+              <a:t>2025-07-17</a:t>
+            </a:fld>
+            <a:endParaRPr lang="ko-KR" altLang="en-US"/>
+          </a:p>
+        </p:txBody>
+      </p:sp>
+      <p:sp>
+        <p:nvSpPr>
+          <p:cNvPr id="6" name="바닥글 개체 틀 5">
+            <a:extLst>
+              <a:ext uri="{FF2B5EF4-FFF2-40B4-BE49-F238E27FC236}">
+                <a16:creationId xmlns:a16="http://schemas.microsoft.com/office/drawing/2014/main" id="{AACF5CFF-29CC-7405-2CC6-A5FFF975FBB9}"/>
+              </a:ext>
+            </a:extLst>
+          </p:cNvPr>
+          <p:cNvSpPr>
+            <a:spLocks noGrp="1"/>
+          </p:cNvSpPr>
+          <p:nvPr>
+            <p:ph type="ftr" sz="quarter" idx="11"/>
+          </p:nvPr>
+        </p:nvSpPr>
+        <p:spPr/>
+        <p:txBody>
+          <a:bodyPr/>
+          <a:lstStyle/>
+          <a:p>
+            <a:endParaRPr lang="ko-KR" altLang="en-US"/>
+          </a:p>
+        </p:txBody>
+      </p:sp>
+      <p:sp>
+        <p:nvSpPr>
+          <p:cNvPr id="7" name="슬라이드 번호 개체 틀 6">
+            <a:extLst>
+              <a:ext uri="{FF2B5EF4-FFF2-40B4-BE49-F238E27FC236}">
+                <a16:creationId xmlns:a16="http://schemas.microsoft.com/office/drawing/2014/main" id="{ECB070C8-BB54-84F9-44FD-C4988995B316}"/>
+              </a:ext>
+            </a:extLst>
+          </p:cNvPr>
+          <p:cNvSpPr>
+            <a:spLocks noGrp="1"/>
+          </p:cNvSpPr>
+          <p:nvPr>
+            <p:ph type="sldNum" sz="quarter" idx="12"/>
+          </p:nvPr>
+        </p:nvSpPr>
+        <p:spPr/>
+        <p:txBody>
+          <a:bodyPr/>
+          <a:lstStyle/>
+          <a:p>
+            <a:fld id="{6F89A9E9-A8B1-4524-AE75-5A6692DCE9C4}" type="slidenum">
+              <a:rPr lang="ko-KR" altLang="en-US" smtClean="0"/>
+              <a:t>‹#›</a:t>
+            </a:fld>
+            <a:endParaRPr lang="ko-KR" altLang="en-US"/>
+          </a:p>
+        </p:txBody>
+      </p:sp>
+    </p:spTree>
+    <p:extLst>
+      <p:ext uri="{BB962C8B-B14F-4D97-AF65-F5344CB8AC3E}">
+        <p14:creationId xmlns:p14="http://schemas.microsoft.com/office/powerpoint/2010/main" val="1262601009"/>
       </p:ext>
     </p:extLst>
   </p:cSld>
@@ -1384,7 +3320,7 @@
           <a:p>
             <a:fld id="{502CD248-AE16-47FA-AF5A-2F10FD8A8207}" type="datetimeFigureOut">
               <a:rPr lang="ko-KR" altLang="en-US" smtClean="0"/>
-              <a:t>2025-06-04</a:t>
+              <a:t>2025-07-17</a:t>
             </a:fld>
             <a:endParaRPr lang="ko-KR" altLang="en-US"/>
           </a:p>
@@ -1448,6 +3384,700 @@
     <p:extLst>
       <p:ext uri="{BB962C8B-B14F-4D97-AF65-F5344CB8AC3E}">
         <p14:creationId xmlns:p14="http://schemas.microsoft.com/office/powerpoint/2010/main" val="1743036898"/>
+      </p:ext>
+    </p:extLst>
+  </p:cSld>
+  <p:clrMapOvr>
+    <a:masterClrMapping/>
+  </p:clrMapOvr>
+</p:sldLayout>
+</file>
+
+<file path=ppt/slideLayouts/slideLayout20.xml><?xml version="1.0" encoding="utf-8"?>
+<p:sldLayout xmlns:a="http://schemas.openxmlformats.org/drawingml/2006/main" xmlns:r="http://schemas.openxmlformats.org/officeDocument/2006/relationships" xmlns:p="http://schemas.openxmlformats.org/presentationml/2006/main" type="picTx" preserve="1">
+  <p:cSld name="캡션 있는 그림">
+    <p:spTree>
+      <p:nvGrpSpPr>
+        <p:cNvPr id="1" name=""/>
+        <p:cNvGrpSpPr/>
+        <p:nvPr/>
+      </p:nvGrpSpPr>
+      <p:grpSpPr>
+        <a:xfrm>
+          <a:off x="0" y="0"/>
+          <a:ext cx="0" cy="0"/>
+          <a:chOff x="0" y="0"/>
+          <a:chExt cx="0" cy="0"/>
+        </a:xfrm>
+      </p:grpSpPr>
+      <p:sp>
+        <p:nvSpPr>
+          <p:cNvPr id="2" name="제목 1">
+            <a:extLst>
+              <a:ext uri="{FF2B5EF4-FFF2-40B4-BE49-F238E27FC236}">
+                <a16:creationId xmlns:a16="http://schemas.microsoft.com/office/drawing/2014/main" id="{F353E7F7-430E-DF29-A907-1E7278D9C427}"/>
+              </a:ext>
+            </a:extLst>
+          </p:cNvPr>
+          <p:cNvSpPr>
+            <a:spLocks noGrp="1"/>
+          </p:cNvSpPr>
+          <p:nvPr>
+            <p:ph type="title"/>
+          </p:nvPr>
+        </p:nvSpPr>
+        <p:spPr>
+          <a:xfrm>
+            <a:off x="839788" y="457200"/>
+            <a:ext cx="3932237" cy="1600200"/>
+          </a:xfrm>
+        </p:spPr>
+        <p:txBody>
+          <a:bodyPr anchor="b"/>
+          <a:lstStyle>
+            <a:lvl1pPr>
+              <a:defRPr sz="3200"/>
+            </a:lvl1pPr>
+          </a:lstStyle>
+          <a:p>
+            <a:r>
+              <a:rPr lang="ko-KR" altLang="en-US"/>
+              <a:t>마스터 제목 스타일 편집</a:t>
+            </a:r>
+          </a:p>
+        </p:txBody>
+      </p:sp>
+      <p:sp>
+        <p:nvSpPr>
+          <p:cNvPr id="3" name="그림 개체 틀 2">
+            <a:extLst>
+              <a:ext uri="{FF2B5EF4-FFF2-40B4-BE49-F238E27FC236}">
+                <a16:creationId xmlns:a16="http://schemas.microsoft.com/office/drawing/2014/main" id="{38D3ECFE-778E-FF6C-8566-585D48061A9F}"/>
+              </a:ext>
+            </a:extLst>
+          </p:cNvPr>
+          <p:cNvSpPr>
+            <a:spLocks noGrp="1"/>
+          </p:cNvSpPr>
+          <p:nvPr>
+            <p:ph type="pic" idx="1"/>
+          </p:nvPr>
+        </p:nvSpPr>
+        <p:spPr>
+          <a:xfrm>
+            <a:off x="5183188" y="987425"/>
+            <a:ext cx="6172200" cy="4873625"/>
+          </a:xfrm>
+        </p:spPr>
+        <p:txBody>
+          <a:bodyPr/>
+          <a:lstStyle>
+            <a:lvl1pPr marL="0" indent="0">
+              <a:buNone/>
+              <a:defRPr sz="3200"/>
+            </a:lvl1pPr>
+            <a:lvl2pPr marL="457200" indent="0">
+              <a:buNone/>
+              <a:defRPr sz="2800"/>
+            </a:lvl2pPr>
+            <a:lvl3pPr marL="914400" indent="0">
+              <a:buNone/>
+              <a:defRPr sz="2400"/>
+            </a:lvl3pPr>
+            <a:lvl4pPr marL="1371600" indent="0">
+              <a:buNone/>
+              <a:defRPr sz="2000"/>
+            </a:lvl4pPr>
+            <a:lvl5pPr marL="1828800" indent="0">
+              <a:buNone/>
+              <a:defRPr sz="2000"/>
+            </a:lvl5pPr>
+            <a:lvl6pPr marL="2286000" indent="0">
+              <a:buNone/>
+              <a:defRPr sz="2000"/>
+            </a:lvl6pPr>
+            <a:lvl7pPr marL="2743200" indent="0">
+              <a:buNone/>
+              <a:defRPr sz="2000"/>
+            </a:lvl7pPr>
+            <a:lvl8pPr marL="3200400" indent="0">
+              <a:buNone/>
+              <a:defRPr sz="2000"/>
+            </a:lvl8pPr>
+            <a:lvl9pPr marL="3657600" indent="0">
+              <a:buNone/>
+              <a:defRPr sz="2000"/>
+            </a:lvl9pPr>
+          </a:lstStyle>
+          <a:p>
+            <a:endParaRPr lang="ko-KR" altLang="en-US"/>
+          </a:p>
+        </p:txBody>
+      </p:sp>
+      <p:sp>
+        <p:nvSpPr>
+          <p:cNvPr id="4" name="텍스트 개체 틀 3">
+            <a:extLst>
+              <a:ext uri="{FF2B5EF4-FFF2-40B4-BE49-F238E27FC236}">
+                <a16:creationId xmlns:a16="http://schemas.microsoft.com/office/drawing/2014/main" id="{B1E822EC-CA3A-CF18-980D-1E4F5B0EF725}"/>
+              </a:ext>
+            </a:extLst>
+          </p:cNvPr>
+          <p:cNvSpPr>
+            <a:spLocks noGrp="1"/>
+          </p:cNvSpPr>
+          <p:nvPr>
+            <p:ph type="body" sz="half" idx="2"/>
+          </p:nvPr>
+        </p:nvSpPr>
+        <p:spPr>
+          <a:xfrm>
+            <a:off x="839788" y="2057400"/>
+            <a:ext cx="3932237" cy="3811588"/>
+          </a:xfrm>
+        </p:spPr>
+        <p:txBody>
+          <a:bodyPr/>
+          <a:lstStyle>
+            <a:lvl1pPr marL="0" indent="0">
+              <a:buNone/>
+              <a:defRPr sz="1600"/>
+            </a:lvl1pPr>
+            <a:lvl2pPr marL="457200" indent="0">
+              <a:buNone/>
+              <a:defRPr sz="1400"/>
+            </a:lvl2pPr>
+            <a:lvl3pPr marL="914400" indent="0">
+              <a:buNone/>
+              <a:defRPr sz="1200"/>
+            </a:lvl3pPr>
+            <a:lvl4pPr marL="1371600" indent="0">
+              <a:buNone/>
+              <a:defRPr sz="1000"/>
+            </a:lvl4pPr>
+            <a:lvl5pPr marL="1828800" indent="0">
+              <a:buNone/>
+              <a:defRPr sz="1000"/>
+            </a:lvl5pPr>
+            <a:lvl6pPr marL="2286000" indent="0">
+              <a:buNone/>
+              <a:defRPr sz="1000"/>
+            </a:lvl6pPr>
+            <a:lvl7pPr marL="2743200" indent="0">
+              <a:buNone/>
+              <a:defRPr sz="1000"/>
+            </a:lvl7pPr>
+            <a:lvl8pPr marL="3200400" indent="0">
+              <a:buNone/>
+              <a:defRPr sz="1000"/>
+            </a:lvl8pPr>
+            <a:lvl9pPr marL="3657600" indent="0">
+              <a:buNone/>
+              <a:defRPr sz="1000"/>
+            </a:lvl9pPr>
+          </a:lstStyle>
+          <a:p>
+            <a:pPr lvl="0"/>
+            <a:r>
+              <a:rPr lang="ko-KR" altLang="en-US"/>
+              <a:t>마스터 텍스트 스타일을 편집하려면 클릭</a:t>
+            </a:r>
+          </a:p>
+        </p:txBody>
+      </p:sp>
+      <p:sp>
+        <p:nvSpPr>
+          <p:cNvPr id="5" name="날짜 개체 틀 4">
+            <a:extLst>
+              <a:ext uri="{FF2B5EF4-FFF2-40B4-BE49-F238E27FC236}">
+                <a16:creationId xmlns:a16="http://schemas.microsoft.com/office/drawing/2014/main" id="{B90817CC-AEEE-A396-3146-5B836E21853B}"/>
+              </a:ext>
+            </a:extLst>
+          </p:cNvPr>
+          <p:cNvSpPr>
+            <a:spLocks noGrp="1"/>
+          </p:cNvSpPr>
+          <p:nvPr>
+            <p:ph type="dt" sz="half" idx="10"/>
+          </p:nvPr>
+        </p:nvSpPr>
+        <p:spPr/>
+        <p:txBody>
+          <a:bodyPr/>
+          <a:lstStyle/>
+          <a:p>
+            <a:fld id="{995C7C8F-822A-4723-A724-B24BDCABEA27}" type="datetimeFigureOut">
+              <a:rPr lang="ko-KR" altLang="en-US" smtClean="0"/>
+              <a:t>2025-07-17</a:t>
+            </a:fld>
+            <a:endParaRPr lang="ko-KR" altLang="en-US"/>
+          </a:p>
+        </p:txBody>
+      </p:sp>
+      <p:sp>
+        <p:nvSpPr>
+          <p:cNvPr id="6" name="바닥글 개체 틀 5">
+            <a:extLst>
+              <a:ext uri="{FF2B5EF4-FFF2-40B4-BE49-F238E27FC236}">
+                <a16:creationId xmlns:a16="http://schemas.microsoft.com/office/drawing/2014/main" id="{48F52151-B15F-286C-5A38-6E1469577B99}"/>
+              </a:ext>
+            </a:extLst>
+          </p:cNvPr>
+          <p:cNvSpPr>
+            <a:spLocks noGrp="1"/>
+          </p:cNvSpPr>
+          <p:nvPr>
+            <p:ph type="ftr" sz="quarter" idx="11"/>
+          </p:nvPr>
+        </p:nvSpPr>
+        <p:spPr/>
+        <p:txBody>
+          <a:bodyPr/>
+          <a:lstStyle/>
+          <a:p>
+            <a:endParaRPr lang="ko-KR" altLang="en-US"/>
+          </a:p>
+        </p:txBody>
+      </p:sp>
+      <p:sp>
+        <p:nvSpPr>
+          <p:cNvPr id="7" name="슬라이드 번호 개체 틀 6">
+            <a:extLst>
+              <a:ext uri="{FF2B5EF4-FFF2-40B4-BE49-F238E27FC236}">
+                <a16:creationId xmlns:a16="http://schemas.microsoft.com/office/drawing/2014/main" id="{1041B3B1-977C-A6B3-64AE-92DFFA07EE6D}"/>
+              </a:ext>
+            </a:extLst>
+          </p:cNvPr>
+          <p:cNvSpPr>
+            <a:spLocks noGrp="1"/>
+          </p:cNvSpPr>
+          <p:nvPr>
+            <p:ph type="sldNum" sz="quarter" idx="12"/>
+          </p:nvPr>
+        </p:nvSpPr>
+        <p:spPr/>
+        <p:txBody>
+          <a:bodyPr/>
+          <a:lstStyle/>
+          <a:p>
+            <a:fld id="{6F89A9E9-A8B1-4524-AE75-5A6692DCE9C4}" type="slidenum">
+              <a:rPr lang="ko-KR" altLang="en-US" smtClean="0"/>
+              <a:t>‹#›</a:t>
+            </a:fld>
+            <a:endParaRPr lang="ko-KR" altLang="en-US"/>
+          </a:p>
+        </p:txBody>
+      </p:sp>
+    </p:spTree>
+    <p:extLst>
+      <p:ext uri="{BB962C8B-B14F-4D97-AF65-F5344CB8AC3E}">
+        <p14:creationId xmlns:p14="http://schemas.microsoft.com/office/powerpoint/2010/main" val="3208407989"/>
+      </p:ext>
+    </p:extLst>
+  </p:cSld>
+  <p:clrMapOvr>
+    <a:masterClrMapping/>
+  </p:clrMapOvr>
+</p:sldLayout>
+</file>
+
+<file path=ppt/slideLayouts/slideLayout21.xml><?xml version="1.0" encoding="utf-8"?>
+<p:sldLayout xmlns:a="http://schemas.openxmlformats.org/drawingml/2006/main" xmlns:r="http://schemas.openxmlformats.org/officeDocument/2006/relationships" xmlns:p="http://schemas.openxmlformats.org/presentationml/2006/main" type="vertTx" preserve="1">
+  <p:cSld name="제목 및 세로 텍스트">
+    <p:spTree>
+      <p:nvGrpSpPr>
+        <p:cNvPr id="1" name=""/>
+        <p:cNvGrpSpPr/>
+        <p:nvPr/>
+      </p:nvGrpSpPr>
+      <p:grpSpPr>
+        <a:xfrm>
+          <a:off x="0" y="0"/>
+          <a:ext cx="0" cy="0"/>
+          <a:chOff x="0" y="0"/>
+          <a:chExt cx="0" cy="0"/>
+        </a:xfrm>
+      </p:grpSpPr>
+      <p:sp>
+        <p:nvSpPr>
+          <p:cNvPr id="2" name="제목 1">
+            <a:extLst>
+              <a:ext uri="{FF2B5EF4-FFF2-40B4-BE49-F238E27FC236}">
+                <a16:creationId xmlns:a16="http://schemas.microsoft.com/office/drawing/2014/main" id="{0449232F-0259-D281-482A-795E3A0120B4}"/>
+              </a:ext>
+            </a:extLst>
+          </p:cNvPr>
+          <p:cNvSpPr>
+            <a:spLocks noGrp="1"/>
+          </p:cNvSpPr>
+          <p:nvPr>
+            <p:ph type="title"/>
+          </p:nvPr>
+        </p:nvSpPr>
+        <p:spPr/>
+        <p:txBody>
+          <a:bodyPr/>
+          <a:lstStyle/>
+          <a:p>
+            <a:r>
+              <a:rPr lang="ko-KR" altLang="en-US"/>
+              <a:t>마스터 제목 스타일 편집</a:t>
+            </a:r>
+          </a:p>
+        </p:txBody>
+      </p:sp>
+      <p:sp>
+        <p:nvSpPr>
+          <p:cNvPr id="3" name="세로 텍스트 개체 틀 2">
+            <a:extLst>
+              <a:ext uri="{FF2B5EF4-FFF2-40B4-BE49-F238E27FC236}">
+                <a16:creationId xmlns:a16="http://schemas.microsoft.com/office/drawing/2014/main" id="{5B6487E5-ECAB-E31D-556E-0F72061D22F4}"/>
+              </a:ext>
+            </a:extLst>
+          </p:cNvPr>
+          <p:cNvSpPr>
+            <a:spLocks noGrp="1"/>
+          </p:cNvSpPr>
+          <p:nvPr>
+            <p:ph type="body" orient="vert" idx="1"/>
+          </p:nvPr>
+        </p:nvSpPr>
+        <p:spPr/>
+        <p:txBody>
+          <a:bodyPr vert="eaVert"/>
+          <a:lstStyle/>
+          <a:p>
+            <a:pPr lvl="0"/>
+            <a:r>
+              <a:rPr lang="ko-KR" altLang="en-US"/>
+              <a:t>마스터 텍스트 스타일을 편집하려면 클릭</a:t>
+            </a:r>
+          </a:p>
+          <a:p>
+            <a:pPr lvl="1"/>
+            <a:r>
+              <a:rPr lang="ko-KR" altLang="en-US"/>
+              <a:t>두 번째 수준</a:t>
+            </a:r>
+          </a:p>
+          <a:p>
+            <a:pPr lvl="2"/>
+            <a:r>
+              <a:rPr lang="ko-KR" altLang="en-US"/>
+              <a:t>세 번째 수준</a:t>
+            </a:r>
+          </a:p>
+          <a:p>
+            <a:pPr lvl="3"/>
+            <a:r>
+              <a:rPr lang="ko-KR" altLang="en-US"/>
+              <a:t>네 번째 수준</a:t>
+            </a:r>
+          </a:p>
+          <a:p>
+            <a:pPr lvl="4"/>
+            <a:r>
+              <a:rPr lang="ko-KR" altLang="en-US"/>
+              <a:t>다섯 번째 수준</a:t>
+            </a:r>
+          </a:p>
+        </p:txBody>
+      </p:sp>
+      <p:sp>
+        <p:nvSpPr>
+          <p:cNvPr id="4" name="날짜 개체 틀 3">
+            <a:extLst>
+              <a:ext uri="{FF2B5EF4-FFF2-40B4-BE49-F238E27FC236}">
+                <a16:creationId xmlns:a16="http://schemas.microsoft.com/office/drawing/2014/main" id="{F767B21D-6700-E965-D8AA-5757BD41E18D}"/>
+              </a:ext>
+            </a:extLst>
+          </p:cNvPr>
+          <p:cNvSpPr>
+            <a:spLocks noGrp="1"/>
+          </p:cNvSpPr>
+          <p:nvPr>
+            <p:ph type="dt" sz="half" idx="10"/>
+          </p:nvPr>
+        </p:nvSpPr>
+        <p:spPr/>
+        <p:txBody>
+          <a:bodyPr/>
+          <a:lstStyle/>
+          <a:p>
+            <a:fld id="{995C7C8F-822A-4723-A724-B24BDCABEA27}" type="datetimeFigureOut">
+              <a:rPr lang="ko-KR" altLang="en-US" smtClean="0"/>
+              <a:t>2025-07-17</a:t>
+            </a:fld>
+            <a:endParaRPr lang="ko-KR" altLang="en-US"/>
+          </a:p>
+        </p:txBody>
+      </p:sp>
+      <p:sp>
+        <p:nvSpPr>
+          <p:cNvPr id="5" name="바닥글 개체 틀 4">
+            <a:extLst>
+              <a:ext uri="{FF2B5EF4-FFF2-40B4-BE49-F238E27FC236}">
+                <a16:creationId xmlns:a16="http://schemas.microsoft.com/office/drawing/2014/main" id="{CA1B398F-B066-AE39-4626-2CC623A847E9}"/>
+              </a:ext>
+            </a:extLst>
+          </p:cNvPr>
+          <p:cNvSpPr>
+            <a:spLocks noGrp="1"/>
+          </p:cNvSpPr>
+          <p:nvPr>
+            <p:ph type="ftr" sz="quarter" idx="11"/>
+          </p:nvPr>
+        </p:nvSpPr>
+        <p:spPr/>
+        <p:txBody>
+          <a:bodyPr/>
+          <a:lstStyle/>
+          <a:p>
+            <a:endParaRPr lang="ko-KR" altLang="en-US"/>
+          </a:p>
+        </p:txBody>
+      </p:sp>
+      <p:sp>
+        <p:nvSpPr>
+          <p:cNvPr id="6" name="슬라이드 번호 개체 틀 5">
+            <a:extLst>
+              <a:ext uri="{FF2B5EF4-FFF2-40B4-BE49-F238E27FC236}">
+                <a16:creationId xmlns:a16="http://schemas.microsoft.com/office/drawing/2014/main" id="{9BBFD0D5-BCF5-1746-90C3-99423EB55D1D}"/>
+              </a:ext>
+            </a:extLst>
+          </p:cNvPr>
+          <p:cNvSpPr>
+            <a:spLocks noGrp="1"/>
+          </p:cNvSpPr>
+          <p:nvPr>
+            <p:ph type="sldNum" sz="quarter" idx="12"/>
+          </p:nvPr>
+        </p:nvSpPr>
+        <p:spPr/>
+        <p:txBody>
+          <a:bodyPr/>
+          <a:lstStyle/>
+          <a:p>
+            <a:fld id="{6F89A9E9-A8B1-4524-AE75-5A6692DCE9C4}" type="slidenum">
+              <a:rPr lang="ko-KR" altLang="en-US" smtClean="0"/>
+              <a:t>‹#›</a:t>
+            </a:fld>
+            <a:endParaRPr lang="ko-KR" altLang="en-US"/>
+          </a:p>
+        </p:txBody>
+      </p:sp>
+    </p:spTree>
+    <p:extLst>
+      <p:ext uri="{BB962C8B-B14F-4D97-AF65-F5344CB8AC3E}">
+        <p14:creationId xmlns:p14="http://schemas.microsoft.com/office/powerpoint/2010/main" val="826992405"/>
+      </p:ext>
+    </p:extLst>
+  </p:cSld>
+  <p:clrMapOvr>
+    <a:masterClrMapping/>
+  </p:clrMapOvr>
+</p:sldLayout>
+</file>
+
+<file path=ppt/slideLayouts/slideLayout22.xml><?xml version="1.0" encoding="utf-8"?>
+<p:sldLayout xmlns:a="http://schemas.openxmlformats.org/drawingml/2006/main" xmlns:r="http://schemas.openxmlformats.org/officeDocument/2006/relationships" xmlns:p="http://schemas.openxmlformats.org/presentationml/2006/main" type="vertTitleAndTx" preserve="1">
+  <p:cSld name="세로 제목 및 텍스트">
+    <p:spTree>
+      <p:nvGrpSpPr>
+        <p:cNvPr id="1" name=""/>
+        <p:cNvGrpSpPr/>
+        <p:nvPr/>
+      </p:nvGrpSpPr>
+      <p:grpSpPr>
+        <a:xfrm>
+          <a:off x="0" y="0"/>
+          <a:ext cx="0" cy="0"/>
+          <a:chOff x="0" y="0"/>
+          <a:chExt cx="0" cy="0"/>
+        </a:xfrm>
+      </p:grpSpPr>
+      <p:sp>
+        <p:nvSpPr>
+          <p:cNvPr id="2" name="세로 제목 1">
+            <a:extLst>
+              <a:ext uri="{FF2B5EF4-FFF2-40B4-BE49-F238E27FC236}">
+                <a16:creationId xmlns:a16="http://schemas.microsoft.com/office/drawing/2014/main" id="{71D96222-EAA6-F744-F27C-B7D5E2DBF18F}"/>
+              </a:ext>
+            </a:extLst>
+          </p:cNvPr>
+          <p:cNvSpPr>
+            <a:spLocks noGrp="1"/>
+          </p:cNvSpPr>
+          <p:nvPr>
+            <p:ph type="title" orient="vert"/>
+          </p:nvPr>
+        </p:nvSpPr>
+        <p:spPr>
+          <a:xfrm>
+            <a:off x="8724900" y="365125"/>
+            <a:ext cx="2628900" cy="5811838"/>
+          </a:xfrm>
+        </p:spPr>
+        <p:txBody>
+          <a:bodyPr vert="eaVert"/>
+          <a:lstStyle/>
+          <a:p>
+            <a:r>
+              <a:rPr lang="ko-KR" altLang="en-US"/>
+              <a:t>마스터 제목 스타일 편집</a:t>
+            </a:r>
+          </a:p>
+        </p:txBody>
+      </p:sp>
+      <p:sp>
+        <p:nvSpPr>
+          <p:cNvPr id="3" name="세로 텍스트 개체 틀 2">
+            <a:extLst>
+              <a:ext uri="{FF2B5EF4-FFF2-40B4-BE49-F238E27FC236}">
+                <a16:creationId xmlns:a16="http://schemas.microsoft.com/office/drawing/2014/main" id="{3441E7DE-98A9-3340-B0A6-C6121D345597}"/>
+              </a:ext>
+            </a:extLst>
+          </p:cNvPr>
+          <p:cNvSpPr>
+            <a:spLocks noGrp="1"/>
+          </p:cNvSpPr>
+          <p:nvPr>
+            <p:ph type="body" orient="vert" idx="1"/>
+          </p:nvPr>
+        </p:nvSpPr>
+        <p:spPr>
+          <a:xfrm>
+            <a:off x="838200" y="365125"/>
+            <a:ext cx="7734300" cy="5811838"/>
+          </a:xfrm>
+        </p:spPr>
+        <p:txBody>
+          <a:bodyPr vert="eaVert"/>
+          <a:lstStyle/>
+          <a:p>
+            <a:pPr lvl="0"/>
+            <a:r>
+              <a:rPr lang="ko-KR" altLang="en-US"/>
+              <a:t>마스터 텍스트 스타일을 편집하려면 클릭</a:t>
+            </a:r>
+          </a:p>
+          <a:p>
+            <a:pPr lvl="1"/>
+            <a:r>
+              <a:rPr lang="ko-KR" altLang="en-US"/>
+              <a:t>두 번째 수준</a:t>
+            </a:r>
+          </a:p>
+          <a:p>
+            <a:pPr lvl="2"/>
+            <a:r>
+              <a:rPr lang="ko-KR" altLang="en-US"/>
+              <a:t>세 번째 수준</a:t>
+            </a:r>
+          </a:p>
+          <a:p>
+            <a:pPr lvl="3"/>
+            <a:r>
+              <a:rPr lang="ko-KR" altLang="en-US"/>
+              <a:t>네 번째 수준</a:t>
+            </a:r>
+          </a:p>
+          <a:p>
+            <a:pPr lvl="4"/>
+            <a:r>
+              <a:rPr lang="ko-KR" altLang="en-US"/>
+              <a:t>다섯 번째 수준</a:t>
+            </a:r>
+          </a:p>
+        </p:txBody>
+      </p:sp>
+      <p:sp>
+        <p:nvSpPr>
+          <p:cNvPr id="4" name="날짜 개체 틀 3">
+            <a:extLst>
+              <a:ext uri="{FF2B5EF4-FFF2-40B4-BE49-F238E27FC236}">
+                <a16:creationId xmlns:a16="http://schemas.microsoft.com/office/drawing/2014/main" id="{4E44A835-7DE6-531E-913F-229CFC3BD219}"/>
+              </a:ext>
+            </a:extLst>
+          </p:cNvPr>
+          <p:cNvSpPr>
+            <a:spLocks noGrp="1"/>
+          </p:cNvSpPr>
+          <p:nvPr>
+            <p:ph type="dt" sz="half" idx="10"/>
+          </p:nvPr>
+        </p:nvSpPr>
+        <p:spPr/>
+        <p:txBody>
+          <a:bodyPr/>
+          <a:lstStyle/>
+          <a:p>
+            <a:fld id="{995C7C8F-822A-4723-A724-B24BDCABEA27}" type="datetimeFigureOut">
+              <a:rPr lang="ko-KR" altLang="en-US" smtClean="0"/>
+              <a:t>2025-07-17</a:t>
+            </a:fld>
+            <a:endParaRPr lang="ko-KR" altLang="en-US"/>
+          </a:p>
+        </p:txBody>
+      </p:sp>
+      <p:sp>
+        <p:nvSpPr>
+          <p:cNvPr id="5" name="바닥글 개체 틀 4">
+            <a:extLst>
+              <a:ext uri="{FF2B5EF4-FFF2-40B4-BE49-F238E27FC236}">
+                <a16:creationId xmlns:a16="http://schemas.microsoft.com/office/drawing/2014/main" id="{7770D9F8-7396-3FBC-730C-BCDFE9D7845B}"/>
+              </a:ext>
+            </a:extLst>
+          </p:cNvPr>
+          <p:cNvSpPr>
+            <a:spLocks noGrp="1"/>
+          </p:cNvSpPr>
+          <p:nvPr>
+            <p:ph type="ftr" sz="quarter" idx="11"/>
+          </p:nvPr>
+        </p:nvSpPr>
+        <p:spPr/>
+        <p:txBody>
+          <a:bodyPr/>
+          <a:lstStyle/>
+          <a:p>
+            <a:endParaRPr lang="ko-KR" altLang="en-US"/>
+          </a:p>
+        </p:txBody>
+      </p:sp>
+      <p:sp>
+        <p:nvSpPr>
+          <p:cNvPr id="6" name="슬라이드 번호 개체 틀 5">
+            <a:extLst>
+              <a:ext uri="{FF2B5EF4-FFF2-40B4-BE49-F238E27FC236}">
+                <a16:creationId xmlns:a16="http://schemas.microsoft.com/office/drawing/2014/main" id="{3634139E-ADE1-80AE-29CE-297CBC11EC52}"/>
+              </a:ext>
+            </a:extLst>
+          </p:cNvPr>
+          <p:cNvSpPr>
+            <a:spLocks noGrp="1"/>
+          </p:cNvSpPr>
+          <p:nvPr>
+            <p:ph type="sldNum" sz="quarter" idx="12"/>
+          </p:nvPr>
+        </p:nvSpPr>
+        <p:spPr/>
+        <p:txBody>
+          <a:bodyPr/>
+          <a:lstStyle/>
+          <a:p>
+            <a:fld id="{6F89A9E9-A8B1-4524-AE75-5A6692DCE9C4}" type="slidenum">
+              <a:rPr lang="ko-KR" altLang="en-US" smtClean="0"/>
+              <a:t>‹#›</a:t>
+            </a:fld>
+            <a:endParaRPr lang="ko-KR" altLang="en-US"/>
+          </a:p>
+        </p:txBody>
+      </p:sp>
+    </p:spTree>
+    <p:extLst>
+      <p:ext uri="{BB962C8B-B14F-4D97-AF65-F5344CB8AC3E}">
+        <p14:creationId xmlns:p14="http://schemas.microsoft.com/office/powerpoint/2010/main" val="485113009"/>
       </p:ext>
     </p:extLst>
   </p:cSld>
@@ -1659,7 +4289,7 @@
           <a:p>
             <a:fld id="{502CD248-AE16-47FA-AF5A-2F10FD8A8207}" type="datetimeFigureOut">
               <a:rPr lang="ko-KR" altLang="en-US" smtClean="0"/>
-              <a:t>2025-06-04</a:t>
+              <a:t>2025-07-17</a:t>
             </a:fld>
             <a:endParaRPr lang="ko-KR" altLang="en-US"/>
           </a:p>
@@ -1924,7 +4554,7 @@
           <a:p>
             <a:fld id="{502CD248-AE16-47FA-AF5A-2F10FD8A8207}" type="datetimeFigureOut">
               <a:rPr lang="ko-KR" altLang="en-US" smtClean="0"/>
-              <a:t>2025-06-04</a:t>
+              <a:t>2025-07-17</a:t>
             </a:fld>
             <a:endParaRPr lang="ko-KR" altLang="en-US"/>
           </a:p>
@@ -2336,7 +4966,7 @@
           <a:p>
             <a:fld id="{502CD248-AE16-47FA-AF5A-2F10FD8A8207}" type="datetimeFigureOut">
               <a:rPr lang="ko-KR" altLang="en-US" smtClean="0"/>
-              <a:t>2025-06-04</a:t>
+              <a:t>2025-07-17</a:t>
             </a:fld>
             <a:endParaRPr lang="ko-KR" altLang="en-US"/>
           </a:p>
@@ -2477,7 +5107,7 @@
           <a:p>
             <a:fld id="{502CD248-AE16-47FA-AF5A-2F10FD8A8207}" type="datetimeFigureOut">
               <a:rPr lang="ko-KR" altLang="en-US" smtClean="0"/>
-              <a:t>2025-06-04</a:t>
+              <a:t>2025-07-17</a:t>
             </a:fld>
             <a:endParaRPr lang="ko-KR" altLang="en-US"/>
           </a:p>
@@ -2590,7 +5220,7 @@
           <a:p>
             <a:fld id="{502CD248-AE16-47FA-AF5A-2F10FD8A8207}" type="datetimeFigureOut">
               <a:rPr lang="ko-KR" altLang="en-US" smtClean="0"/>
-              <a:t>2025-06-04</a:t>
+              <a:t>2025-07-17</a:t>
             </a:fld>
             <a:endParaRPr lang="ko-KR" altLang="en-US"/>
           </a:p>
@@ -2901,7 +5531,7 @@
           <a:p>
             <a:fld id="{502CD248-AE16-47FA-AF5A-2F10FD8A8207}" type="datetimeFigureOut">
               <a:rPr lang="ko-KR" altLang="en-US" smtClean="0"/>
-              <a:t>2025-06-04</a:t>
+              <a:t>2025-07-17</a:t>
             </a:fld>
             <a:endParaRPr lang="ko-KR" altLang="en-US"/>
           </a:p>
@@ -3189,7 +5819,7 @@
           <a:p>
             <a:fld id="{502CD248-AE16-47FA-AF5A-2F10FD8A8207}" type="datetimeFigureOut">
               <a:rPr lang="ko-KR" altLang="en-US" smtClean="0"/>
-              <a:t>2025-06-04</a:t>
+              <a:t>2025-07-17</a:t>
             </a:fld>
             <a:endParaRPr lang="ko-KR" altLang="en-US"/>
           </a:p>
@@ -3430,7 +6060,7 @@
           <a:p>
             <a:fld id="{502CD248-AE16-47FA-AF5A-2F10FD8A8207}" type="datetimeFigureOut">
               <a:rPr lang="ko-KR" altLang="en-US" smtClean="0"/>
-              <a:t>2025-06-04</a:t>
+              <a:t>2025-07-17</a:t>
             </a:fld>
             <a:endParaRPr lang="ko-KR" altLang="en-US"/>
           </a:p>
@@ -3546,6 +6176,574 @@
     <p:sldLayoutId id="2147483657" r:id="rId9"/>
     <p:sldLayoutId id="2147483658" r:id="rId10"/>
     <p:sldLayoutId id="2147483659" r:id="rId11"/>
+  </p:sldLayoutIdLst>
+  <p:txStyles>
+    <p:titleStyle>
+      <a:lvl1pPr algn="l" defTabSz="914400" rtl="0" eaLnBrk="1" latinLnBrk="1" hangingPunct="1">
+        <a:lnSpc>
+          <a:spcPct val="90000"/>
+        </a:lnSpc>
+        <a:spcBef>
+          <a:spcPct val="0"/>
+        </a:spcBef>
+        <a:buNone/>
+        <a:defRPr sz="4400" kern="1200">
+          <a:solidFill>
+            <a:schemeClr val="tx1"/>
+          </a:solidFill>
+          <a:latin typeface="+mj-lt"/>
+          <a:ea typeface="+mj-ea"/>
+          <a:cs typeface="+mj-cs"/>
+        </a:defRPr>
+      </a:lvl1pPr>
+    </p:titleStyle>
+    <p:bodyStyle>
+      <a:lvl1pPr marL="228600" indent="-228600" algn="l" defTabSz="914400" rtl="0" eaLnBrk="1" latinLnBrk="1" hangingPunct="1">
+        <a:lnSpc>
+          <a:spcPct val="90000"/>
+        </a:lnSpc>
+        <a:spcBef>
+          <a:spcPts val="1000"/>
+        </a:spcBef>
+        <a:buFont typeface="Arial" panose="020B0604020202020204" pitchFamily="34" charset="0"/>
+        <a:buChar char="•"/>
+        <a:defRPr sz="2800" kern="1200">
+          <a:solidFill>
+            <a:schemeClr val="tx1"/>
+          </a:solidFill>
+          <a:latin typeface="+mn-lt"/>
+          <a:ea typeface="+mn-ea"/>
+          <a:cs typeface="+mn-cs"/>
+        </a:defRPr>
+      </a:lvl1pPr>
+      <a:lvl2pPr marL="685800" indent="-228600" algn="l" defTabSz="914400" rtl="0" eaLnBrk="1" latinLnBrk="1" hangingPunct="1">
+        <a:lnSpc>
+          <a:spcPct val="90000"/>
+        </a:lnSpc>
+        <a:spcBef>
+          <a:spcPts val="500"/>
+        </a:spcBef>
+        <a:buFont typeface="Arial" panose="020B0604020202020204" pitchFamily="34" charset="0"/>
+        <a:buChar char="•"/>
+        <a:defRPr sz="2400" kern="1200">
+          <a:solidFill>
+            <a:schemeClr val="tx1"/>
+          </a:solidFill>
+          <a:latin typeface="+mn-lt"/>
+          <a:ea typeface="+mn-ea"/>
+          <a:cs typeface="+mn-cs"/>
+        </a:defRPr>
+      </a:lvl2pPr>
+      <a:lvl3pPr marL="1143000" indent="-228600" algn="l" defTabSz="914400" rtl="0" eaLnBrk="1" latinLnBrk="1" hangingPunct="1">
+        <a:lnSpc>
+          <a:spcPct val="90000"/>
+        </a:lnSpc>
+        <a:spcBef>
+          <a:spcPts val="500"/>
+        </a:spcBef>
+        <a:buFont typeface="Arial" panose="020B0604020202020204" pitchFamily="34" charset="0"/>
+        <a:buChar char="•"/>
+        <a:defRPr sz="2000" kern="1200">
+          <a:solidFill>
+            <a:schemeClr val="tx1"/>
+          </a:solidFill>
+          <a:latin typeface="+mn-lt"/>
+          <a:ea typeface="+mn-ea"/>
+          <a:cs typeface="+mn-cs"/>
+        </a:defRPr>
+      </a:lvl3pPr>
+      <a:lvl4pPr marL="1600200" indent="-228600" algn="l" defTabSz="914400" rtl="0" eaLnBrk="1" latinLnBrk="1" hangingPunct="1">
+        <a:lnSpc>
+          <a:spcPct val="90000"/>
+        </a:lnSpc>
+        <a:spcBef>
+          <a:spcPts val="500"/>
+        </a:spcBef>
+        <a:buFont typeface="Arial" panose="020B0604020202020204" pitchFamily="34" charset="0"/>
+        <a:buChar char="•"/>
+        <a:defRPr sz="1800" kern="1200">
+          <a:solidFill>
+            <a:schemeClr val="tx1"/>
+          </a:solidFill>
+          <a:latin typeface="+mn-lt"/>
+          <a:ea typeface="+mn-ea"/>
+          <a:cs typeface="+mn-cs"/>
+        </a:defRPr>
+      </a:lvl4pPr>
+      <a:lvl5pPr marL="2057400" indent="-228600" algn="l" defTabSz="914400" rtl="0" eaLnBrk="1" latinLnBrk="1" hangingPunct="1">
+        <a:lnSpc>
+          <a:spcPct val="90000"/>
+        </a:lnSpc>
+        <a:spcBef>
+          <a:spcPts val="500"/>
+        </a:spcBef>
+        <a:buFont typeface="Arial" panose="020B0604020202020204" pitchFamily="34" charset="0"/>
+        <a:buChar char="•"/>
+        <a:defRPr sz="1800" kern="1200">
+          <a:solidFill>
+            <a:schemeClr val="tx1"/>
+          </a:solidFill>
+          <a:latin typeface="+mn-lt"/>
+          <a:ea typeface="+mn-ea"/>
+          <a:cs typeface="+mn-cs"/>
+        </a:defRPr>
+      </a:lvl5pPr>
+      <a:lvl6pPr marL="2514600" indent="-228600" algn="l" defTabSz="914400" rtl="0" eaLnBrk="1" latinLnBrk="1" hangingPunct="1">
+        <a:lnSpc>
+          <a:spcPct val="90000"/>
+        </a:lnSpc>
+        <a:spcBef>
+          <a:spcPts val="500"/>
+        </a:spcBef>
+        <a:buFont typeface="Arial" panose="020B0604020202020204" pitchFamily="34" charset="0"/>
+        <a:buChar char="•"/>
+        <a:defRPr sz="1800" kern="1200">
+          <a:solidFill>
+            <a:schemeClr val="tx1"/>
+          </a:solidFill>
+          <a:latin typeface="+mn-lt"/>
+          <a:ea typeface="+mn-ea"/>
+          <a:cs typeface="+mn-cs"/>
+        </a:defRPr>
+      </a:lvl6pPr>
+      <a:lvl7pPr marL="2971800" indent="-228600" algn="l" defTabSz="914400" rtl="0" eaLnBrk="1" latinLnBrk="1" hangingPunct="1">
+        <a:lnSpc>
+          <a:spcPct val="90000"/>
+        </a:lnSpc>
+        <a:spcBef>
+          <a:spcPts val="500"/>
+        </a:spcBef>
+        <a:buFont typeface="Arial" panose="020B0604020202020204" pitchFamily="34" charset="0"/>
+        <a:buChar char="•"/>
+        <a:defRPr sz="1800" kern="1200">
+          <a:solidFill>
+            <a:schemeClr val="tx1"/>
+          </a:solidFill>
+          <a:latin typeface="+mn-lt"/>
+          <a:ea typeface="+mn-ea"/>
+          <a:cs typeface="+mn-cs"/>
+        </a:defRPr>
+      </a:lvl7pPr>
+      <a:lvl8pPr marL="3429000" indent="-228600" algn="l" defTabSz="914400" rtl="0" eaLnBrk="1" latinLnBrk="1" hangingPunct="1">
+        <a:lnSpc>
+          <a:spcPct val="90000"/>
+        </a:lnSpc>
+        <a:spcBef>
+          <a:spcPts val="500"/>
+        </a:spcBef>
+        <a:buFont typeface="Arial" panose="020B0604020202020204" pitchFamily="34" charset="0"/>
+        <a:buChar char="•"/>
+        <a:defRPr sz="1800" kern="1200">
+          <a:solidFill>
+            <a:schemeClr val="tx1"/>
+          </a:solidFill>
+          <a:latin typeface="+mn-lt"/>
+          <a:ea typeface="+mn-ea"/>
+          <a:cs typeface="+mn-cs"/>
+        </a:defRPr>
+      </a:lvl8pPr>
+      <a:lvl9pPr marL="3886200" indent="-228600" algn="l" defTabSz="914400" rtl="0" eaLnBrk="1" latinLnBrk="1" hangingPunct="1">
+        <a:lnSpc>
+          <a:spcPct val="90000"/>
+        </a:lnSpc>
+        <a:spcBef>
+          <a:spcPts val="500"/>
+        </a:spcBef>
+        <a:buFont typeface="Arial" panose="020B0604020202020204" pitchFamily="34" charset="0"/>
+        <a:buChar char="•"/>
+        <a:defRPr sz="1800" kern="1200">
+          <a:solidFill>
+            <a:schemeClr val="tx1"/>
+          </a:solidFill>
+          <a:latin typeface="+mn-lt"/>
+          <a:ea typeface="+mn-ea"/>
+          <a:cs typeface="+mn-cs"/>
+        </a:defRPr>
+      </a:lvl9pPr>
+    </p:bodyStyle>
+    <p:otherStyle>
+      <a:defPPr>
+        <a:defRPr lang="ko-KR"/>
+      </a:defPPr>
+      <a:lvl1pPr marL="0" algn="l" defTabSz="914400" rtl="0" eaLnBrk="1" latinLnBrk="1" hangingPunct="1">
+        <a:defRPr sz="1800" kern="1200">
+          <a:solidFill>
+            <a:schemeClr val="tx1"/>
+          </a:solidFill>
+          <a:latin typeface="+mn-lt"/>
+          <a:ea typeface="+mn-ea"/>
+          <a:cs typeface="+mn-cs"/>
+        </a:defRPr>
+      </a:lvl1pPr>
+      <a:lvl2pPr marL="457200" algn="l" defTabSz="914400" rtl="0" eaLnBrk="1" latinLnBrk="1" hangingPunct="1">
+        <a:defRPr sz="1800" kern="1200">
+          <a:solidFill>
+            <a:schemeClr val="tx1"/>
+          </a:solidFill>
+          <a:latin typeface="+mn-lt"/>
+          <a:ea typeface="+mn-ea"/>
+          <a:cs typeface="+mn-cs"/>
+        </a:defRPr>
+      </a:lvl2pPr>
+      <a:lvl3pPr marL="914400" algn="l" defTabSz="914400" rtl="0" eaLnBrk="1" latinLnBrk="1" hangingPunct="1">
+        <a:defRPr sz="1800" kern="1200">
+          <a:solidFill>
+            <a:schemeClr val="tx1"/>
+          </a:solidFill>
+          <a:latin typeface="+mn-lt"/>
+          <a:ea typeface="+mn-ea"/>
+          <a:cs typeface="+mn-cs"/>
+        </a:defRPr>
+      </a:lvl3pPr>
+      <a:lvl4pPr marL="1371600" algn="l" defTabSz="914400" rtl="0" eaLnBrk="1" latinLnBrk="1" hangingPunct="1">
+        <a:defRPr sz="1800" kern="1200">
+          <a:solidFill>
+            <a:schemeClr val="tx1"/>
+          </a:solidFill>
+          <a:latin typeface="+mn-lt"/>
+          <a:ea typeface="+mn-ea"/>
+          <a:cs typeface="+mn-cs"/>
+        </a:defRPr>
+      </a:lvl4pPr>
+      <a:lvl5pPr marL="1828800" algn="l" defTabSz="914400" rtl="0" eaLnBrk="1" latinLnBrk="1" hangingPunct="1">
+        <a:defRPr sz="1800" kern="1200">
+          <a:solidFill>
+            <a:schemeClr val="tx1"/>
+          </a:solidFill>
+          <a:latin typeface="+mn-lt"/>
+          <a:ea typeface="+mn-ea"/>
+          <a:cs typeface="+mn-cs"/>
+        </a:defRPr>
+      </a:lvl5pPr>
+      <a:lvl6pPr marL="2286000" algn="l" defTabSz="914400" rtl="0" eaLnBrk="1" latinLnBrk="1" hangingPunct="1">
+        <a:defRPr sz="1800" kern="1200">
+          <a:solidFill>
+            <a:schemeClr val="tx1"/>
+          </a:solidFill>
+          <a:latin typeface="+mn-lt"/>
+          <a:ea typeface="+mn-ea"/>
+          <a:cs typeface="+mn-cs"/>
+        </a:defRPr>
+      </a:lvl6pPr>
+      <a:lvl7pPr marL="2743200" algn="l" defTabSz="914400" rtl="0" eaLnBrk="1" latinLnBrk="1" hangingPunct="1">
+        <a:defRPr sz="1800" kern="1200">
+          <a:solidFill>
+            <a:schemeClr val="tx1"/>
+          </a:solidFill>
+          <a:latin typeface="+mn-lt"/>
+          <a:ea typeface="+mn-ea"/>
+          <a:cs typeface="+mn-cs"/>
+        </a:defRPr>
+      </a:lvl7pPr>
+      <a:lvl8pPr marL="3200400" algn="l" defTabSz="914400" rtl="0" eaLnBrk="1" latinLnBrk="1" hangingPunct="1">
+        <a:defRPr sz="1800" kern="1200">
+          <a:solidFill>
+            <a:schemeClr val="tx1"/>
+          </a:solidFill>
+          <a:latin typeface="+mn-lt"/>
+          <a:ea typeface="+mn-ea"/>
+          <a:cs typeface="+mn-cs"/>
+        </a:defRPr>
+      </a:lvl8pPr>
+      <a:lvl9pPr marL="3657600" algn="l" defTabSz="914400" rtl="0" eaLnBrk="1" latinLnBrk="1" hangingPunct="1">
+        <a:defRPr sz="1800" kern="1200">
+          <a:solidFill>
+            <a:schemeClr val="tx1"/>
+          </a:solidFill>
+          <a:latin typeface="+mn-lt"/>
+          <a:ea typeface="+mn-ea"/>
+          <a:cs typeface="+mn-cs"/>
+        </a:defRPr>
+      </a:lvl9pPr>
+    </p:otherStyle>
+  </p:txStyles>
+</p:sldMaster>
+</file>
+
+<file path=ppt/slideMasters/slideMaster2.xml><?xml version="1.0" encoding="utf-8"?>
+<p:sldMaster xmlns:a="http://schemas.openxmlformats.org/drawingml/2006/main" xmlns:r="http://schemas.openxmlformats.org/officeDocument/2006/relationships" xmlns:p="http://schemas.openxmlformats.org/presentationml/2006/main" preserve="1">
+  <p:cSld>
+    <p:bg>
+      <p:bgRef idx="1001">
+        <a:schemeClr val="bg1"/>
+      </p:bgRef>
+    </p:bg>
+    <p:spTree>
+      <p:nvGrpSpPr>
+        <p:cNvPr id="1" name=""/>
+        <p:cNvGrpSpPr/>
+        <p:nvPr/>
+      </p:nvGrpSpPr>
+      <p:grpSpPr>
+        <a:xfrm>
+          <a:off x="0" y="0"/>
+          <a:ext cx="0" cy="0"/>
+          <a:chOff x="0" y="0"/>
+          <a:chExt cx="0" cy="0"/>
+        </a:xfrm>
+      </p:grpSpPr>
+      <p:sp>
+        <p:nvSpPr>
+          <p:cNvPr id="2" name="제목 개체 틀 1">
+            <a:extLst>
+              <a:ext uri="{FF2B5EF4-FFF2-40B4-BE49-F238E27FC236}">
+                <a16:creationId xmlns:a16="http://schemas.microsoft.com/office/drawing/2014/main" id="{A638AA3E-3CBE-0E31-C25B-DDF1738E9A06}"/>
+              </a:ext>
+            </a:extLst>
+          </p:cNvPr>
+          <p:cNvSpPr>
+            <a:spLocks noGrp="1"/>
+          </p:cNvSpPr>
+          <p:nvPr>
+            <p:ph type="title"/>
+          </p:nvPr>
+        </p:nvSpPr>
+        <p:spPr>
+          <a:xfrm>
+            <a:off x="838200" y="365125"/>
+            <a:ext cx="10515600" cy="1325563"/>
+          </a:xfrm>
+          <a:prstGeom prst="rect">
+            <a:avLst/>
+          </a:prstGeom>
+        </p:spPr>
+        <p:txBody>
+          <a:bodyPr vert="horz" lIns="91440" tIns="45720" rIns="91440" bIns="45720" rtlCol="0" anchor="ctr">
+            <a:normAutofit/>
+          </a:bodyPr>
+          <a:lstStyle/>
+          <a:p>
+            <a:r>
+              <a:rPr lang="ko-KR" altLang="en-US"/>
+              <a:t>마스터 제목 스타일 편집</a:t>
+            </a:r>
+          </a:p>
+        </p:txBody>
+      </p:sp>
+      <p:sp>
+        <p:nvSpPr>
+          <p:cNvPr id="3" name="텍스트 개체 틀 2">
+            <a:extLst>
+              <a:ext uri="{FF2B5EF4-FFF2-40B4-BE49-F238E27FC236}">
+                <a16:creationId xmlns:a16="http://schemas.microsoft.com/office/drawing/2014/main" id="{889386C2-7F03-5DC4-B6E0-7465E53BB030}"/>
+              </a:ext>
+            </a:extLst>
+          </p:cNvPr>
+          <p:cNvSpPr>
+            <a:spLocks noGrp="1"/>
+          </p:cNvSpPr>
+          <p:nvPr>
+            <p:ph type="body" idx="1"/>
+          </p:nvPr>
+        </p:nvSpPr>
+        <p:spPr>
+          <a:xfrm>
+            <a:off x="838200" y="1825625"/>
+            <a:ext cx="10515600" cy="4351338"/>
+          </a:xfrm>
+          <a:prstGeom prst="rect">
+            <a:avLst/>
+          </a:prstGeom>
+        </p:spPr>
+        <p:txBody>
+          <a:bodyPr vert="horz" lIns="91440" tIns="45720" rIns="91440" bIns="45720" rtlCol="0">
+            <a:normAutofit/>
+          </a:bodyPr>
+          <a:lstStyle/>
+          <a:p>
+            <a:pPr lvl="0"/>
+            <a:r>
+              <a:rPr lang="ko-KR" altLang="en-US"/>
+              <a:t>마스터 텍스트 스타일을 편집하려면 클릭</a:t>
+            </a:r>
+          </a:p>
+          <a:p>
+            <a:pPr lvl="1"/>
+            <a:r>
+              <a:rPr lang="ko-KR" altLang="en-US"/>
+              <a:t>두 번째 수준</a:t>
+            </a:r>
+          </a:p>
+          <a:p>
+            <a:pPr lvl="2"/>
+            <a:r>
+              <a:rPr lang="ko-KR" altLang="en-US"/>
+              <a:t>세 번째 수준</a:t>
+            </a:r>
+          </a:p>
+          <a:p>
+            <a:pPr lvl="3"/>
+            <a:r>
+              <a:rPr lang="ko-KR" altLang="en-US"/>
+              <a:t>네 번째 수준</a:t>
+            </a:r>
+          </a:p>
+          <a:p>
+            <a:pPr lvl="4"/>
+            <a:r>
+              <a:rPr lang="ko-KR" altLang="en-US"/>
+              <a:t>다섯 번째 수준</a:t>
+            </a:r>
+          </a:p>
+        </p:txBody>
+      </p:sp>
+      <p:sp>
+        <p:nvSpPr>
+          <p:cNvPr id="4" name="날짜 개체 틀 3">
+            <a:extLst>
+              <a:ext uri="{FF2B5EF4-FFF2-40B4-BE49-F238E27FC236}">
+                <a16:creationId xmlns:a16="http://schemas.microsoft.com/office/drawing/2014/main" id="{BECDF101-707F-4943-8E03-9E19AD6D0DFA}"/>
+              </a:ext>
+            </a:extLst>
+          </p:cNvPr>
+          <p:cNvSpPr>
+            <a:spLocks noGrp="1"/>
+          </p:cNvSpPr>
+          <p:nvPr>
+            <p:ph type="dt" sz="half" idx="2"/>
+          </p:nvPr>
+        </p:nvSpPr>
+        <p:spPr>
+          <a:xfrm>
+            <a:off x="838200" y="6356350"/>
+            <a:ext cx="2743200" cy="365125"/>
+          </a:xfrm>
+          <a:prstGeom prst="rect">
+            <a:avLst/>
+          </a:prstGeom>
+        </p:spPr>
+        <p:txBody>
+          <a:bodyPr vert="horz" lIns="91440" tIns="45720" rIns="91440" bIns="45720" rtlCol="0" anchor="ctr"/>
+          <a:lstStyle>
+            <a:lvl1pPr algn="l">
+              <a:defRPr sz="1200">
+                <a:solidFill>
+                  <a:schemeClr val="tx1">
+                    <a:tint val="75000"/>
+                  </a:schemeClr>
+                </a:solidFill>
+              </a:defRPr>
+            </a:lvl1pPr>
+          </a:lstStyle>
+          <a:p>
+            <a:fld id="{995C7C8F-822A-4723-A724-B24BDCABEA27}" type="datetimeFigureOut">
+              <a:rPr lang="ko-KR" altLang="en-US" smtClean="0"/>
+              <a:t>2025-07-17</a:t>
+            </a:fld>
+            <a:endParaRPr lang="ko-KR" altLang="en-US"/>
+          </a:p>
+        </p:txBody>
+      </p:sp>
+      <p:sp>
+        <p:nvSpPr>
+          <p:cNvPr id="5" name="바닥글 개체 틀 4">
+            <a:extLst>
+              <a:ext uri="{FF2B5EF4-FFF2-40B4-BE49-F238E27FC236}">
+                <a16:creationId xmlns:a16="http://schemas.microsoft.com/office/drawing/2014/main" id="{5EADDCAF-B549-10B8-1F53-689C68F0E3BE}"/>
+              </a:ext>
+            </a:extLst>
+          </p:cNvPr>
+          <p:cNvSpPr>
+            <a:spLocks noGrp="1"/>
+          </p:cNvSpPr>
+          <p:nvPr>
+            <p:ph type="ftr" sz="quarter" idx="3"/>
+          </p:nvPr>
+        </p:nvSpPr>
+        <p:spPr>
+          <a:xfrm>
+            <a:off x="4038600" y="6356350"/>
+            <a:ext cx="4114800" cy="365125"/>
+          </a:xfrm>
+          <a:prstGeom prst="rect">
+            <a:avLst/>
+          </a:prstGeom>
+        </p:spPr>
+        <p:txBody>
+          <a:bodyPr vert="horz" lIns="91440" tIns="45720" rIns="91440" bIns="45720" rtlCol="0" anchor="ctr"/>
+          <a:lstStyle>
+            <a:lvl1pPr algn="ctr">
+              <a:defRPr sz="1200">
+                <a:solidFill>
+                  <a:schemeClr val="tx1">
+                    <a:tint val="75000"/>
+                  </a:schemeClr>
+                </a:solidFill>
+              </a:defRPr>
+            </a:lvl1pPr>
+          </a:lstStyle>
+          <a:p>
+            <a:endParaRPr lang="ko-KR" altLang="en-US"/>
+          </a:p>
+        </p:txBody>
+      </p:sp>
+      <p:sp>
+        <p:nvSpPr>
+          <p:cNvPr id="6" name="슬라이드 번호 개체 틀 5">
+            <a:extLst>
+              <a:ext uri="{FF2B5EF4-FFF2-40B4-BE49-F238E27FC236}">
+                <a16:creationId xmlns:a16="http://schemas.microsoft.com/office/drawing/2014/main" id="{FDADD43F-1E1B-4880-B829-C75EF985C5EF}"/>
+              </a:ext>
+            </a:extLst>
+          </p:cNvPr>
+          <p:cNvSpPr>
+            <a:spLocks noGrp="1"/>
+          </p:cNvSpPr>
+          <p:nvPr>
+            <p:ph type="sldNum" sz="quarter" idx="4"/>
+          </p:nvPr>
+        </p:nvSpPr>
+        <p:spPr>
+          <a:xfrm>
+            <a:off x="8610600" y="6356350"/>
+            <a:ext cx="2743200" cy="365125"/>
+          </a:xfrm>
+          <a:prstGeom prst="rect">
+            <a:avLst/>
+          </a:prstGeom>
+        </p:spPr>
+        <p:txBody>
+          <a:bodyPr vert="horz" lIns="91440" tIns="45720" rIns="91440" bIns="45720" rtlCol="0" anchor="ctr"/>
+          <a:lstStyle>
+            <a:lvl1pPr algn="r">
+              <a:defRPr sz="1200">
+                <a:solidFill>
+                  <a:schemeClr val="tx1">
+                    <a:tint val="75000"/>
+                  </a:schemeClr>
+                </a:solidFill>
+              </a:defRPr>
+            </a:lvl1pPr>
+          </a:lstStyle>
+          <a:p>
+            <a:fld id="{6F89A9E9-A8B1-4524-AE75-5A6692DCE9C4}" type="slidenum">
+              <a:rPr lang="ko-KR" altLang="en-US" smtClean="0"/>
+              <a:t>‹#›</a:t>
+            </a:fld>
+            <a:endParaRPr lang="ko-KR" altLang="en-US"/>
+          </a:p>
+        </p:txBody>
+      </p:sp>
+    </p:spTree>
+    <p:extLst>
+      <p:ext uri="{BB962C8B-B14F-4D97-AF65-F5344CB8AC3E}">
+        <p14:creationId xmlns:p14="http://schemas.microsoft.com/office/powerpoint/2010/main" val="1587458627"/>
+      </p:ext>
+    </p:extLst>
+  </p:cSld>
+  <p:clrMap bg1="lt1" tx1="dk1" bg2="lt2" tx2="dk2" accent1="accent1" accent2="accent2" accent3="accent3" accent4="accent4" accent5="accent5" accent6="accent6" hlink="hlink" folHlink="folHlink"/>
+  <p:sldLayoutIdLst>
+    <p:sldLayoutId id="2147483661" r:id="rId1"/>
+    <p:sldLayoutId id="2147483662" r:id="rId2"/>
+    <p:sldLayoutId id="2147483663" r:id="rId3"/>
+    <p:sldLayoutId id="2147483664" r:id="rId4"/>
+    <p:sldLayoutId id="2147483665" r:id="rId5"/>
+    <p:sldLayoutId id="2147483666" r:id="rId6"/>
+    <p:sldLayoutId id="2147483667" r:id="rId7"/>
+    <p:sldLayoutId id="2147483668" r:id="rId8"/>
+    <p:sldLayoutId id="2147483669" r:id="rId9"/>
+    <p:sldLayoutId id="2147483670" r:id="rId10"/>
+    <p:sldLayoutId id="2147483671" r:id="rId11"/>
   </p:sldLayoutIdLst>
   <p:txStyles>
     <p:titleStyle>
@@ -3984,11 +7182,11 @@
               <a:defRPr/>
             </a:pPr>
             <a:r>
-              <a:rPr sz="5000">
+              <a:rPr sz="3729">
                 <a:solidFill>
                   <a:srgbClr val="1F3337"/>
                 </a:solidFill>
-                <a:latin typeface="굴림"/>
+                <a:latin typeface="나눔스퀘어 네오 ExtraBold"/>
               </a:rPr>
               <a:t>창세기</a:t>
             </a:r>
@@ -4009,13 +7207,13 @@
           </a:p>
           <a:p>
             <a:r>
-              <a:rPr sz="5000">
+              <a:rPr sz="3729">
                 <a:solidFill>
                   <a:srgbClr val="1F3337"/>
                 </a:solidFill>
-                <a:latin typeface="굴림"/>
+                <a:latin typeface="나눔스퀘어 네오 ExtraBold"/>
               </a:rPr>
-              <a:t>1:1-3</a:t>
+              <a:t>1:1</a:t>
             </a:r>
           </a:p>
         </p:txBody>
@@ -5192,7 +8390,7 @@
               </a:defRPr>
             </a:pPr>
             <a:r>
-              <a:t>Gen 1:1-3</a:t>
+              <a:t>Gen 1:1</a:t>
             </a:r>
             <a:endParaRPr kumimoji="1" lang="en-US" altLang="ko-KR" sz="2800" b="1" i="0" u="none" strike="noStrike" kern="1200" cap="none" spc="0" normalizeH="0" baseline="0" noProof="0" dirty="0">
               <a:ln>
@@ -5250,35 +8448,13 @@
           <a:lstStyle/>
           <a:p>
             <a:r>
-              <a:rPr sz="4000">
+              <a:rPr sz="2800">
                 <a:solidFill>
-                  <a:srgbClr val="FFFFFF"/>
+                  <a:srgbClr val="1F3337"/>
                 </a:solidFill>
-                <a:latin typeface="나눔스퀘어 네오 ExtraBold"/>
+                <a:latin typeface="나눔스퀘어 네오 Bold"/>
               </a:rPr>
               <a:t>¹ 태초에 하나님이 천지를 창조하시니라</a:t>
-            </a:r>
-          </a:p>
-          <a:p>
-            <a:r>
-              <a:rPr sz="4000">
-                <a:solidFill>
-                  <a:srgbClr val="FFFFFF"/>
-                </a:solidFill>
-                <a:latin typeface="나눔스퀘어 네오 ExtraBold"/>
-              </a:rPr>
-              <a:t>² 땅이 혼돈하고 공허하며 흑암이 깊음 위에 있고 하나님의 영은 수면 위에 운행하시니라</a:t>
-            </a:r>
-          </a:p>
-          <a:p>
-            <a:r>
-              <a:rPr sz="4000">
-                <a:solidFill>
-                  <a:srgbClr val="FFFFFF"/>
-                </a:solidFill>
-                <a:latin typeface="나눔스퀘어 네오 ExtraBold"/>
-              </a:rPr>
-              <a:t>³ 하나님이 이르시되 빛이 있으라 하시니 빛이 있었고</a:t>
             </a:r>
           </a:p>
         </p:txBody>
@@ -5311,44 +8487,18 @@
           </a:bodyPr>
           <a:lstStyle/>
           <a:p>
-            <a:pPr>
+            <a:pPr latinLnBrk="0">
               <a:defRPr sz="2000">
                 <a:solidFill>
                   <a:srgbClr val="4F655E"/>
                 </a:solidFill>
-                <a:latin typeface="Pretendard Variable"/>
+                <a:latin typeface="Segoe UI Variable Text Semibold"/>
               </a:defRPr>
             </a:pPr>
             <a:r>
               <a:t>¹ In the beginning, God created the heavens and the earth.</a:t>
             </a:r>
             <a:endParaRPr lang="ko-KR" altLang="en-US" dirty="0"/>
-          </a:p>
-          <a:p>
-            <a:pPr>
-              <a:defRPr sz="2000">
-                <a:solidFill>
-                  <a:srgbClr val="4F655E"/>
-                </a:solidFill>
-                <a:latin typeface="Pretendard Variable"/>
-              </a:defRPr>
-            </a:pPr>
-            <a:r>
-              <a:t>² The earth was without form and void, and darkness was over the face of the deep. And the Spirit of God was hovering over the face of the waters.</a:t>
-            </a:r>
-          </a:p>
-          <a:p>
-            <a:pPr>
-              <a:defRPr sz="2000">
-                <a:solidFill>
-                  <a:srgbClr val="4F655E"/>
-                </a:solidFill>
-                <a:latin typeface="Pretendard Variable"/>
-              </a:defRPr>
-            </a:pPr>
-            <a:r>
-              <a:t>³ And God said, "Let there be light," and there was light.</a:t>
-            </a:r>
           </a:p>
         </p:txBody>
       </p:sp>
@@ -5506,11 +8656,11 @@
               <a:defRPr/>
             </a:pPr>
             <a:r>
-              <a:rPr sz="5000">
+              <a:rPr sz="3729">
                 <a:solidFill>
                   <a:srgbClr val="1F3337"/>
                 </a:solidFill>
-                <a:latin typeface="굴림"/>
+                <a:latin typeface="나눔스퀘어 네오 ExtraBold"/>
               </a:rPr>
               <a:t>고린도전서</a:t>
             </a:r>
@@ -5531,13 +8681,13 @@
           </a:p>
           <a:p>
             <a:r>
-              <a:rPr sz="5000">
+              <a:rPr sz="3729">
                 <a:solidFill>
                   <a:srgbClr val="1F3337"/>
                 </a:solidFill>
-                <a:latin typeface="굴림"/>
+                <a:latin typeface="나눔스퀘어 네오 ExtraBold"/>
               </a:rPr>
-              <a:t>13:1</a:t>
+              <a:t>1:1-2</a:t>
             </a:r>
           </a:p>
         </p:txBody>
@@ -6714,7 +9864,7 @@
               </a:defRPr>
             </a:pPr>
             <a:r>
-              <a:t>1Co 13:1</a:t>
+              <a:t>1Co 1:1-2</a:t>
             </a:r>
             <a:endParaRPr kumimoji="1" lang="en-US" altLang="ko-KR" sz="2800" b="1" i="0" u="none" strike="noStrike" kern="1200" cap="none" spc="0" normalizeH="0" baseline="0" noProof="0" dirty="0">
               <a:ln>
@@ -6772,13 +9922,24 @@
           <a:lstStyle/>
           <a:p>
             <a:r>
-              <a:rPr sz="4000">
+              <a:rPr sz="2800">
                 <a:solidFill>
-                  <a:srgbClr val="FFFFFF"/>
+                  <a:srgbClr val="1F3337"/>
                 </a:solidFill>
-                <a:latin typeface="나눔스퀘어 네오 ExtraBold"/>
+                <a:latin typeface="나눔스퀘어 네오 Bold"/>
               </a:rPr>
-              <a:t>¹ 내가 사람의 방언과 천사의 말을 할지라도 사랑이 없으면 소리 나는 구리와 울리는 꽹과리가 되고</a:t>
+              <a:t>¹ 하나님의 뜻을 따라 그리스도 예수의 사도로 부르심을 받은 바울과 형제 소스데네는</a:t>
+            </a:r>
+          </a:p>
+          <a:p>
+            <a:r>
+              <a:rPr sz="2800">
+                <a:solidFill>
+                  <a:srgbClr val="1F3337"/>
+                </a:solidFill>
+                <a:latin typeface="나눔스퀘어 네오 Bold"/>
+              </a:rPr>
+              <a:t>² 고린도에 있는 하나님의 교회 곧 그리스도 예수 안에서 거룩하여지고 성도라 부르심을 받은 자들과 또 각처에서 우리의 주 곧 그들과 우리의 주 되신 예수 그리스도의 이름을 부르는 모든 자들에게</a:t>
             </a:r>
           </a:p>
         </p:txBody>
@@ -6811,18 +9972,31 @@
           </a:bodyPr>
           <a:lstStyle/>
           <a:p>
+            <a:pPr latinLnBrk="0">
+              <a:defRPr sz="2000">
+                <a:solidFill>
+                  <a:srgbClr val="4F655E"/>
+                </a:solidFill>
+                <a:latin typeface="Segoe UI Variable Text Semibold"/>
+              </a:defRPr>
+            </a:pPr>
+            <a:r>
+              <a:t>¹ Paul, called by the will of God to be an apostle of Christ Jesus, and our brother Sosthenes,</a:t>
+            </a:r>
+            <a:endParaRPr lang="ko-KR" altLang="en-US" dirty="0"/>
+          </a:p>
+          <a:p>
             <a:pPr>
               <a:defRPr sz="2000">
                 <a:solidFill>
                   <a:srgbClr val="4F655E"/>
                 </a:solidFill>
-                <a:latin typeface="Pretendard Variable"/>
+                <a:latin typeface="Segoe UI Variable Text Semibold"/>
               </a:defRPr>
             </a:pPr>
             <a:r>
-              <a:t>¹ If I speak in the tongues of men and of angels, but have not love, I am a noisy gong or a clanging cymbal.</a:t>
-            </a:r>
-            <a:endParaRPr lang="ko-KR" altLang="en-US" dirty="0"/>
+              <a:t>² To the church of God that is in Corinth, to those sanctified in Christ Jesus, called to be saints together with all those who in every place call upon the name of our Lord Jesus Christ, both their Lord and ours:</a:t>
+            </a:r>
           </a:p>
         </p:txBody>
       </p:sp>
@@ -7130,6 +10304,301 @@
 </file>
 
 <file path=ppt/theme/theme2.xml><?xml version="1.0" encoding="utf-8"?>
+<a:theme xmlns:a="http://schemas.openxmlformats.org/drawingml/2006/main" name="디자인 사용자 지정">
+  <a:themeElements>
+    <a:clrScheme name="Office">
+      <a:dk1>
+        <a:sysClr val="windowText" lastClr="000000"/>
+      </a:dk1>
+      <a:lt1>
+        <a:sysClr val="window" lastClr="FFFFFF"/>
+      </a:lt1>
+      <a:dk2>
+        <a:srgbClr val="44546A"/>
+      </a:dk2>
+      <a:lt2>
+        <a:srgbClr val="E7E6E6"/>
+      </a:lt2>
+      <a:accent1>
+        <a:srgbClr val="4472C4"/>
+      </a:accent1>
+      <a:accent2>
+        <a:srgbClr val="ED7D31"/>
+      </a:accent2>
+      <a:accent3>
+        <a:srgbClr val="A5A5A5"/>
+      </a:accent3>
+      <a:accent4>
+        <a:srgbClr val="FFC000"/>
+      </a:accent4>
+      <a:accent5>
+        <a:srgbClr val="5B9BD5"/>
+      </a:accent5>
+      <a:accent6>
+        <a:srgbClr val="70AD47"/>
+      </a:accent6>
+      <a:hlink>
+        <a:srgbClr val="0563C1"/>
+      </a:hlink>
+      <a:folHlink>
+        <a:srgbClr val="954F72"/>
+      </a:folHlink>
+    </a:clrScheme>
+    <a:fontScheme name="Office">
+      <a:majorFont>
+        <a:latin typeface="맑은 고딕" panose="020F0302020204030204"/>
+        <a:ea typeface=""/>
+        <a:cs typeface=""/>
+        <a:font script="Jpan" typeface="游ゴシック Light"/>
+        <a:font script="Hang" typeface="맑은 고딕"/>
+        <a:font script="Hans" typeface="等线 Light"/>
+        <a:font script="Hant" typeface="新細明體"/>
+        <a:font script="Arab" typeface="Times New Roman"/>
+        <a:font script="Hebr" typeface="Times New Roman"/>
+        <a:font script="Thai" typeface="Angsana New"/>
+        <a:font script="Ethi" typeface="Nyala"/>
+        <a:font script="Beng" typeface="Vrinda"/>
+        <a:font script="Gujr" typeface="Shruti"/>
+        <a:font script="Khmr" typeface="MoolBoran"/>
+        <a:font script="Knda" typeface="Tunga"/>
+        <a:font script="Guru" typeface="Raavi"/>
+        <a:font script="Cans" typeface="Euphemia"/>
+        <a:font script="Cher" typeface="Plantagenet Cherokee"/>
+        <a:font script="Yiii" typeface="Microsoft Yi Baiti"/>
+        <a:font script="Tibt" typeface="Microsoft Himalaya"/>
+        <a:font script="Thaa" typeface="MV Boli"/>
+        <a:font script="Deva" typeface="Mangal"/>
+        <a:font script="Telu" typeface="Gautami"/>
+        <a:font script="Taml" typeface="Latha"/>
+        <a:font script="Syrc" typeface="Estrangelo Edessa"/>
+        <a:font script="Orya" typeface="Kalinga"/>
+        <a:font script="Mlym" typeface="Kartika"/>
+        <a:font script="Laoo" typeface="DokChampa"/>
+        <a:font script="Sinh" typeface="Iskoola Pota"/>
+        <a:font script="Mong" typeface="Mongolian Baiti"/>
+        <a:font script="Viet" typeface="Times New Roman"/>
+        <a:font script="Uigh" typeface="Microsoft Uighur"/>
+        <a:font script="Geor" typeface="Sylfaen"/>
+        <a:font script="Armn" typeface="Arial"/>
+        <a:font script="Bugi" typeface="Leelawadee UI"/>
+        <a:font script="Bopo" typeface="Microsoft JhengHei"/>
+        <a:font script="Java" typeface="Javanese Text"/>
+        <a:font script="Lisu" typeface="Segoe UI"/>
+        <a:font script="Mymr" typeface="Myanmar Text"/>
+        <a:font script="Nkoo" typeface="Ebrima"/>
+        <a:font script="Olck" typeface="Nirmala UI"/>
+        <a:font script="Osma" typeface="Ebrima"/>
+        <a:font script="Phag" typeface="Phagspa"/>
+        <a:font script="Syrn" typeface="Estrangelo Edessa"/>
+        <a:font script="Syrj" typeface="Estrangelo Edessa"/>
+        <a:font script="Syre" typeface="Estrangelo Edessa"/>
+        <a:font script="Sora" typeface="Nirmala UI"/>
+        <a:font script="Tale" typeface="Microsoft Tai Le"/>
+        <a:font script="Talu" typeface="Microsoft New Tai Lue"/>
+        <a:font script="Tfng" typeface="Ebrima"/>
+      </a:majorFont>
+      <a:minorFont>
+        <a:latin typeface="맑은 고딕" panose="020F0502020204030204"/>
+        <a:ea typeface=""/>
+        <a:cs typeface=""/>
+        <a:font script="Jpan" typeface="游ゴシック"/>
+        <a:font script="Hang" typeface="맑은 고딕"/>
+        <a:font script="Hans" typeface="等线"/>
+        <a:font script="Hant" typeface="新細明體"/>
+        <a:font script="Arab" typeface="Arial"/>
+        <a:font script="Hebr" typeface="Arial"/>
+        <a:font script="Thai" typeface="Cordia New"/>
+        <a:font script="Ethi" typeface="Nyala"/>
+        <a:font script="Beng" typeface="Vrinda"/>
+        <a:font script="Gujr" typeface="Shruti"/>
+        <a:font script="Khmr" typeface="DaunPenh"/>
+        <a:font script="Knda" typeface="Tunga"/>
+        <a:font script="Guru" typeface="Raavi"/>
+        <a:font script="Cans" typeface="Euphemia"/>
+        <a:font script="Cher" typeface="Plantagenet Cherokee"/>
+        <a:font script="Yiii" typeface="Microsoft Yi Baiti"/>
+        <a:font script="Tibt" typeface="Microsoft Himalaya"/>
+        <a:font script="Thaa" typeface="MV Boli"/>
+        <a:font script="Deva" typeface="Mangal"/>
+        <a:font script="Telu" typeface="Gautami"/>
+        <a:font script="Taml" typeface="Latha"/>
+        <a:font script="Syrc" typeface="Estrangelo Edessa"/>
+        <a:font script="Orya" typeface="Kalinga"/>
+        <a:font script="Mlym" typeface="Kartika"/>
+        <a:font script="Laoo" typeface="DokChampa"/>
+        <a:font script="Sinh" typeface="Iskoola Pota"/>
+        <a:font script="Mong" typeface="Mongolian Baiti"/>
+        <a:font script="Viet" typeface="Arial"/>
+        <a:font script="Uigh" typeface="Microsoft Uighur"/>
+        <a:font script="Geor" typeface="Sylfaen"/>
+        <a:font script="Armn" typeface="Arial"/>
+        <a:font script="Bugi" typeface="Leelawadee UI"/>
+        <a:font script="Bopo" typeface="Microsoft JhengHei"/>
+        <a:font script="Java" typeface="Javanese Text"/>
+        <a:font script="Lisu" typeface="Segoe UI"/>
+        <a:font script="Mymr" typeface="Myanmar Text"/>
+        <a:font script="Nkoo" typeface="Ebrima"/>
+        <a:font script="Olck" typeface="Nirmala UI"/>
+        <a:font script="Osma" typeface="Ebrima"/>
+        <a:font script="Phag" typeface="Phagspa"/>
+        <a:font script="Syrn" typeface="Estrangelo Edessa"/>
+        <a:font script="Syrj" typeface="Estrangelo Edessa"/>
+        <a:font script="Syre" typeface="Estrangelo Edessa"/>
+        <a:font script="Sora" typeface="Nirmala UI"/>
+        <a:font script="Tale" typeface="Microsoft Tai Le"/>
+        <a:font script="Talu" typeface="Microsoft New Tai Lue"/>
+        <a:font script="Tfng" typeface="Ebrima"/>
+      </a:minorFont>
+    </a:fontScheme>
+    <a:fmtScheme name="Office">
+      <a:fillStyleLst>
+        <a:solidFill>
+          <a:schemeClr val="phClr"/>
+        </a:solidFill>
+        <a:gradFill rotWithShape="1">
+          <a:gsLst>
+            <a:gs pos="0">
+              <a:schemeClr val="phClr">
+                <a:lumMod val="110000"/>
+                <a:satMod val="105000"/>
+                <a:tint val="67000"/>
+              </a:schemeClr>
+            </a:gs>
+            <a:gs pos="50000">
+              <a:schemeClr val="phClr">
+                <a:lumMod val="105000"/>
+                <a:satMod val="103000"/>
+                <a:tint val="73000"/>
+              </a:schemeClr>
+            </a:gs>
+            <a:gs pos="100000">
+              <a:schemeClr val="phClr">
+                <a:lumMod val="105000"/>
+                <a:satMod val="109000"/>
+                <a:tint val="81000"/>
+              </a:schemeClr>
+            </a:gs>
+          </a:gsLst>
+          <a:lin ang="5400000" scaled="0"/>
+        </a:gradFill>
+        <a:gradFill rotWithShape="1">
+          <a:gsLst>
+            <a:gs pos="0">
+              <a:schemeClr val="phClr">
+                <a:satMod val="103000"/>
+                <a:lumMod val="102000"/>
+                <a:tint val="94000"/>
+              </a:schemeClr>
+            </a:gs>
+            <a:gs pos="50000">
+              <a:schemeClr val="phClr">
+                <a:satMod val="110000"/>
+                <a:lumMod val="100000"/>
+                <a:shade val="100000"/>
+              </a:schemeClr>
+            </a:gs>
+            <a:gs pos="100000">
+              <a:schemeClr val="phClr">
+                <a:lumMod val="99000"/>
+                <a:satMod val="120000"/>
+                <a:shade val="78000"/>
+              </a:schemeClr>
+            </a:gs>
+          </a:gsLst>
+          <a:lin ang="5400000" scaled="0"/>
+        </a:gradFill>
+      </a:fillStyleLst>
+      <a:lnStyleLst>
+        <a:ln w="6350" cap="flat" cmpd="sng" algn="ctr">
+          <a:solidFill>
+            <a:schemeClr val="phClr"/>
+          </a:solidFill>
+          <a:prstDash val="solid"/>
+          <a:miter lim="800000"/>
+        </a:ln>
+        <a:ln w="12700" cap="flat" cmpd="sng" algn="ctr">
+          <a:solidFill>
+            <a:schemeClr val="phClr"/>
+          </a:solidFill>
+          <a:prstDash val="solid"/>
+          <a:miter lim="800000"/>
+        </a:ln>
+        <a:ln w="19050" cap="flat" cmpd="sng" algn="ctr">
+          <a:solidFill>
+            <a:schemeClr val="phClr"/>
+          </a:solidFill>
+          <a:prstDash val="solid"/>
+          <a:miter lim="800000"/>
+        </a:ln>
+      </a:lnStyleLst>
+      <a:effectStyleLst>
+        <a:effectStyle>
+          <a:effectLst/>
+        </a:effectStyle>
+        <a:effectStyle>
+          <a:effectLst/>
+        </a:effectStyle>
+        <a:effectStyle>
+          <a:effectLst>
+            <a:outerShdw blurRad="57150" dist="19050" dir="5400000" algn="ctr" rotWithShape="0">
+              <a:srgbClr val="000000">
+                <a:alpha val="63000"/>
+              </a:srgbClr>
+            </a:outerShdw>
+          </a:effectLst>
+        </a:effectStyle>
+      </a:effectStyleLst>
+      <a:bgFillStyleLst>
+        <a:solidFill>
+          <a:schemeClr val="phClr"/>
+        </a:solidFill>
+        <a:solidFill>
+          <a:schemeClr val="phClr">
+            <a:tint val="95000"/>
+            <a:satMod val="170000"/>
+          </a:schemeClr>
+        </a:solidFill>
+        <a:gradFill rotWithShape="1">
+          <a:gsLst>
+            <a:gs pos="0">
+              <a:schemeClr val="phClr">
+                <a:tint val="93000"/>
+                <a:satMod val="150000"/>
+                <a:shade val="98000"/>
+                <a:lumMod val="102000"/>
+              </a:schemeClr>
+            </a:gs>
+            <a:gs pos="50000">
+              <a:schemeClr val="phClr">
+                <a:tint val="98000"/>
+                <a:satMod val="130000"/>
+                <a:shade val="90000"/>
+                <a:lumMod val="103000"/>
+              </a:schemeClr>
+            </a:gs>
+            <a:gs pos="100000">
+              <a:schemeClr val="phClr">
+                <a:shade val="63000"/>
+                <a:satMod val="120000"/>
+              </a:schemeClr>
+            </a:gs>
+          </a:gsLst>
+          <a:lin ang="5400000" scaled="0"/>
+        </a:gradFill>
+      </a:bgFillStyleLst>
+    </a:fmtScheme>
+  </a:themeElements>
+  <a:objectDefaults/>
+  <a:extraClrSchemeLst/>
+  <a:extLst>
+    <a:ext uri="{05A4C25C-085E-4340-85A3-A5531E510DB2}">
+      <thm15:themeFamily xmlns:thm15="http://schemas.microsoft.com/office/thememl/2012/main" name="Office Theme" id="{62F939B6-93AF-4DB8-9C6B-D6C7DFDC589F}" vid="{4A3C46E8-61CC-4603-A589-7422A47A8E4A}"/>
+    </a:ext>
+  </a:extLst>
+</a:theme>
+</file>
+
+<file path=ppt/theme/theme3.xml><?xml version="1.0" encoding="utf-8"?>
 <a:theme xmlns:a="http://schemas.openxmlformats.org/drawingml/2006/main" name="Office 테마">
   <a:themeElements>
     <a:clrScheme name="Office">

--- a/pptx_template/output.pptx
+++ b/pptx_template/output.pptx
@@ -10,7 +10,6 @@
   </p:notesMasterIdLst>
   <p:sldIdLst>
     <p:sldId id="4772" r:id="rId3"/>
-    <p:sldId id="4773" r:id="rId9"/>
   </p:sldIdLst>
   <p:sldSz cx="12192000" cy="6858000"/>
   <p:notesSz cx="6858000" cy="9144000"/>
@@ -7188,7 +7187,7 @@
                 </a:solidFill>
                 <a:latin typeface="나눔스퀘어 네오 ExtraBold"/>
               </a:rPr>
-              <a:t>창세기</a:t>
+              <a:t>고린도전서</a:t>
             </a:r>
             <a:endParaRPr kumimoji="1" lang="en-US" altLang="ko-KR" sz="3733" b="1" i="0" u="none" strike="noStrike" kern="1200" cap="none" spc="0" normalizeH="0" baseline="0" noProof="0" dirty="0">
               <a:ln>
@@ -7213,7 +7212,7 @@
                 </a:solidFill>
                 <a:latin typeface="나눔스퀘어 네오 ExtraBold"/>
               </a:rPr>
-              <a:t>1:1</a:t>
+              <a:t>13:1,3</a:t>
             </a:r>
           </a:p>
         </p:txBody>
@@ -8390,7 +8389,7 @@
               </a:defRPr>
             </a:pPr>
             <a:r>
-              <a:t>Gen 1:1</a:t>
+              <a:t>1Co 13:1,3</a:t>
             </a:r>
             <a:endParaRPr kumimoji="1" lang="en-US" altLang="ko-KR" sz="2800" b="1" i="0" u="none" strike="noStrike" kern="1200" cap="none" spc="0" normalizeH="0" baseline="0" noProof="0" dirty="0">
               <a:ln>
@@ -8454,7 +8453,18 @@
                 </a:solidFill>
                 <a:latin typeface="나눔스퀘어 네오 Bold"/>
               </a:rPr>
-              <a:t>¹ 태초에 하나님이 천지를 창조하시니라</a:t>
+              <a:t>¹ 내가 사람의 방언과 천사의 말을 할지라도 사랑이 없으면 소리 나는 구리와 울리는 꽹과리가 되고</a:t>
+            </a:r>
+          </a:p>
+          <a:p>
+            <a:r>
+              <a:rPr sz="2800">
+                <a:solidFill>
+                  <a:srgbClr val="1F3337"/>
+                </a:solidFill>
+                <a:latin typeface="나눔스퀘어 네오 Bold"/>
+              </a:rPr>
+              <a:t>³ 내가 내게 있는 모든 것으로 구제하고 또 내 몸을 불사르게 내줄지라도 사랑이 없으면 내게 아무 유익이 없느니라</a:t>
             </a:r>
           </a:p>
         </p:txBody>
@@ -8496,1492 +8506,7 @@
               </a:defRPr>
             </a:pPr>
             <a:r>
-              <a:t>¹ In the beginning, God created the heavens and the earth.</a:t>
-            </a:r>
-            <a:endParaRPr lang="ko-KR" altLang="en-US" dirty="0"/>
-          </a:p>
-        </p:txBody>
-      </p:sp>
-    </p:spTree>
-    <p:extLst>
-      <p:ext uri="{BB962C8B-B14F-4D97-AF65-F5344CB8AC3E}">
-        <p14:creationId xmlns:p14="http://schemas.microsoft.com/office/powerpoint/2010/main" val="2381306744"/>
-      </p:ext>
-    </p:extLst>
-  </p:cSld>
-  <p:clrMapOvr>
-    <a:masterClrMapping/>
-  </p:clrMapOvr>
-</p:sld>
-</file>
-
-<file path=ppt/slides/slide2.xml><?xml version="1.0" encoding="utf-8"?>
-<p:sld xmlns:a="http://schemas.openxmlformats.org/drawingml/2006/main" xmlns:p="http://schemas.openxmlformats.org/presentationml/2006/main" xmlns:r="http://schemas.openxmlformats.org/officeDocument/2006/relationships">
-  <p:cSld>
-    <p:spTree>
-      <p:nvGrpSpPr>
-        <p:cNvPr id="1" name=""/>
-        <p:cNvGrpSpPr/>
-        <p:nvPr/>
-      </p:nvGrpSpPr>
-      <p:grpSpPr/>
-      <p:sp>
-        <p:nvSpPr>
-          <p:cNvPr id="23" name="직사각형 22">
-            <a:extLst>
-              <a:ext uri="{FF2B5EF4-FFF2-40B4-BE49-F238E27FC236}">
-                <a16:creationId xmlns:a16="http://schemas.microsoft.com/office/drawing/2014/main" id="{19169C31-E35E-B58F-A814-E65D8A184638}"/>
-              </a:ext>
-            </a:extLst>
-          </p:cNvPr>
-          <p:cNvSpPr/>
-          <p:nvPr/>
-        </p:nvSpPr>
-        <p:spPr>
-          <a:xfrm>
-            <a:off x="-7468" y="0"/>
-            <a:ext cx="4212175" cy="6858000"/>
-          </a:xfrm>
-          <a:prstGeom prst="rect">
-            <a:avLst/>
-          </a:prstGeom>
-          <a:solidFill>
-            <a:schemeClr val="accent6">
-              <a:lumMod val="20000"/>
-              <a:lumOff val="80000"/>
-              <a:alpha val="50000"/>
-            </a:schemeClr>
-          </a:solidFill>
-          <a:ln>
-            <a:noFill/>
-          </a:ln>
-        </p:spPr>
-        <p:style>
-          <a:lnRef idx="2">
-            <a:schemeClr val="accent1">
-              <a:shade val="15000"/>
-            </a:schemeClr>
-          </a:lnRef>
-          <a:fillRef idx="1">
-            <a:schemeClr val="accent1"/>
-          </a:fillRef>
-          <a:effectRef idx="0">
-            <a:schemeClr val="accent1"/>
-          </a:effectRef>
-          <a:fontRef idx="minor">
-            <a:schemeClr val="lt1"/>
-          </a:fontRef>
-        </p:style>
-        <p:txBody>
-          <a:bodyPr rtlCol="0" anchor="ctr"/>
-          <a:lstStyle/>
-          <a:p>
-            <a:pPr marL="0" marR="0" lvl="0" indent="0" algn="ctr" defTabSz="1219140" rtl="0" eaLnBrk="0" fontAlgn="base" latinLnBrk="0" hangingPunct="0">
-              <a:lnSpc>
-                <a:spcPct val="100000"/>
-              </a:lnSpc>
-              <a:spcBef>
-                <a:spcPct val="0"/>
-              </a:spcBef>
-              <a:spcAft>
-                <a:spcPct val="0"/>
-              </a:spcAft>
-              <a:buClrTx/>
-              <a:buSzTx/>
-              <a:buFontTx/>
-              <a:buNone/>
-              <a:tabLst/>
-              <a:defRPr/>
-            </a:pPr>
-            <a:endParaRPr kumimoji="1" lang="ko-KR" altLang="en-US" sz="2400" b="0" i="0" u="none" strike="noStrike" kern="1200" cap="none" spc="0" normalizeH="0" baseline="0" noProof="0" dirty="0">
-              <a:ln>
-                <a:noFill/>
-              </a:ln>
-              <a:solidFill>
-                <a:prstClr val="white"/>
-              </a:solidFill>
-              <a:effectLst/>
-              <a:uLnTx/>
-              <a:uFillTx/>
-              <a:latin typeface="맑은 고딕" panose="020F0502020204030204"/>
-              <a:ea typeface="맑은 고딕" panose="020B0503020000020004" pitchFamily="50" charset="-127"/>
-              <a:cs typeface="+mn-cs"/>
-            </a:endParaRPr>
-          </a:p>
-        </p:txBody>
-      </p:sp>
-      <p:sp>
-        <p:nvSpPr>
-          <p:cNvPr id="10" name="TextBox 9">
-            <a:extLst>
-              <a:ext uri="{FF2B5EF4-FFF2-40B4-BE49-F238E27FC236}">
-                <a16:creationId xmlns:a16="http://schemas.microsoft.com/office/drawing/2014/main" id="{F1C51526-9E46-003D-540D-3596EB5F6E8E}"/>
-              </a:ext>
-            </a:extLst>
-          </p:cNvPr>
-          <p:cNvSpPr txBox="1"/>
-          <p:nvPr/>
-        </p:nvSpPr>
-        <p:spPr>
-          <a:xfrm>
-            <a:off x="541691" y="568591"/>
-            <a:ext cx="3867332" cy="666786"/>
-          </a:xfrm>
-          <a:prstGeom prst="rect">
-            <a:avLst/>
-          </a:prstGeom>
-          <a:noFill/>
-        </p:spPr>
-        <p:txBody>
-          <a:bodyPr wrap="square" rtlCol="0">
-            <a:spAutoFit/>
-          </a:bodyPr>
-          <a:lstStyle/>
-          <a:p>
-            <a:pPr marL="0" marR="0" lvl="0" indent="0" algn="l" defTabSz="1219140" rtl="0" eaLnBrk="0" fontAlgn="base" latinLnBrk="0" hangingPunct="0">
-              <a:lnSpc>
-                <a:spcPct val="100000"/>
-              </a:lnSpc>
-              <a:spcBef>
-                <a:spcPct val="0"/>
-              </a:spcBef>
-              <a:spcAft>
-                <a:spcPct val="0"/>
-              </a:spcAft>
-              <a:buClrTx/>
-              <a:buSzTx/>
-              <a:buFontTx/>
-              <a:buNone/>
-              <a:tabLst/>
-              <a:defRPr/>
-            </a:pPr>
-            <a:r>
-              <a:rPr sz="3729">
-                <a:solidFill>
-                  <a:srgbClr val="1F3337"/>
-                </a:solidFill>
-                <a:latin typeface="나눔스퀘어 네오 ExtraBold"/>
-              </a:rPr>
-              <a:t>고린도전서</a:t>
-            </a:r>
-            <a:endParaRPr kumimoji="1" lang="en-US" altLang="ko-KR" sz="3733" b="1" i="0" u="none" strike="noStrike" kern="1200" cap="none" spc="0" normalizeH="0" baseline="0" noProof="0" dirty="0">
-              <a:ln>
-                <a:noFill/>
-              </a:ln>
-              <a:solidFill>
-                <a:srgbClr val="213337"/>
-              </a:solidFill>
-              <a:effectLst/>
-              <a:uLnTx/>
-              <a:uFillTx/>
-              <a:latin typeface="나눔스퀘어 네오 ExtraBold" panose="00000900000000000000" pitchFamily="2" charset="-127"/>
-              <a:ea typeface="나눔스퀘어 네오 ExtraBold" panose="00000900000000000000" pitchFamily="2" charset="-127"/>
-              <a:cs typeface="+mn-cs"/>
-            </a:endParaRPr>
-          </a:p>
-          <a:p>
-            <a:r>
-              <a:rPr sz="3729">
-                <a:solidFill>
-                  <a:srgbClr val="1F3337"/>
-                </a:solidFill>
-                <a:latin typeface="나눔스퀘어 네오 ExtraBold"/>
-              </a:rPr>
-              <a:t>1:1-2</a:t>
-            </a:r>
-          </a:p>
-        </p:txBody>
-      </p:sp>
-      <p:cxnSp>
-        <p:nvCxnSpPr>
-          <p:cNvPr id="14" name="직선 연결선 13">
-            <a:extLst>
-              <a:ext uri="{FF2B5EF4-FFF2-40B4-BE49-F238E27FC236}">
-                <a16:creationId xmlns:a16="http://schemas.microsoft.com/office/drawing/2014/main" id="{DF27D16E-3EE5-D795-3F3F-D360817DC3AA}"/>
-              </a:ext>
-            </a:extLst>
-          </p:cNvPr>
-          <p:cNvCxnSpPr>
-            <a:cxnSpLocks/>
-          </p:cNvCxnSpPr>
-          <p:nvPr/>
-        </p:nvCxnSpPr>
-        <p:spPr>
-          <a:xfrm>
-            <a:off x="4212177" y="241302"/>
-            <a:ext cx="0" cy="6379633"/>
-          </a:xfrm>
-          <a:prstGeom prst="line">
-            <a:avLst/>
-          </a:prstGeom>
-          <a:ln w="19050">
-            <a:solidFill>
-              <a:srgbClr val="213337"/>
-            </a:solidFill>
-          </a:ln>
-        </p:spPr>
-        <p:style>
-          <a:lnRef idx="1">
-            <a:schemeClr val="accent2"/>
-          </a:lnRef>
-          <a:fillRef idx="0">
-            <a:schemeClr val="accent2"/>
-          </a:fillRef>
-          <a:effectRef idx="0">
-            <a:schemeClr val="accent2"/>
-          </a:effectRef>
-          <a:fontRef idx="minor">
-            <a:schemeClr val="tx1"/>
-          </a:fontRef>
-        </p:style>
-      </p:cxnSp>
-      <p:sp>
-        <p:nvSpPr>
-          <p:cNvPr id="15" name="타원 14">
-            <a:extLst>
-              <a:ext uri="{FF2B5EF4-FFF2-40B4-BE49-F238E27FC236}">
-                <a16:creationId xmlns:a16="http://schemas.microsoft.com/office/drawing/2014/main" id="{07FD1CA4-A20B-11FC-E23C-FC5F3F624592}"/>
-              </a:ext>
-            </a:extLst>
-          </p:cNvPr>
-          <p:cNvSpPr/>
-          <p:nvPr/>
-        </p:nvSpPr>
-        <p:spPr>
-          <a:xfrm>
-            <a:off x="4095764" y="578135"/>
-            <a:ext cx="228595" cy="228595"/>
-          </a:xfrm>
-          <a:prstGeom prst="ellipse">
-            <a:avLst/>
-          </a:prstGeom>
-          <a:solidFill>
-            <a:srgbClr val="213337"/>
-          </a:solidFill>
-          <a:ln>
-            <a:noFill/>
-          </a:ln>
-        </p:spPr>
-        <p:style>
-          <a:lnRef idx="2">
-            <a:schemeClr val="accent1">
-              <a:shade val="15000"/>
-            </a:schemeClr>
-          </a:lnRef>
-          <a:fillRef idx="1">
-            <a:schemeClr val="accent1"/>
-          </a:fillRef>
-          <a:effectRef idx="0">
-            <a:schemeClr val="accent1"/>
-          </a:effectRef>
-          <a:fontRef idx="minor">
-            <a:schemeClr val="lt1"/>
-          </a:fontRef>
-        </p:style>
-        <p:txBody>
-          <a:bodyPr rtlCol="0" anchor="ctr"/>
-          <a:lstStyle/>
-          <a:p>
-            <a:pPr marL="0" marR="0" lvl="0" indent="0" algn="ctr" defTabSz="1219140" rtl="0" eaLnBrk="0" fontAlgn="base" latinLnBrk="0" hangingPunct="0">
-              <a:lnSpc>
-                <a:spcPct val="100000"/>
-              </a:lnSpc>
-              <a:spcBef>
-                <a:spcPct val="0"/>
-              </a:spcBef>
-              <a:spcAft>
-                <a:spcPct val="0"/>
-              </a:spcAft>
-              <a:buClrTx/>
-              <a:buSzTx/>
-              <a:buFontTx/>
-              <a:buNone/>
-              <a:tabLst/>
-              <a:defRPr/>
-            </a:pPr>
-            <a:endParaRPr kumimoji="1" lang="ko-KR" altLang="en-US" sz="2400" b="0" i="0" u="none" strike="noStrike" kern="1200" cap="none" spc="0" normalizeH="0" baseline="0" noProof="0">
-              <a:ln>
-                <a:noFill/>
-              </a:ln>
-              <a:solidFill>
-                <a:prstClr val="white"/>
-              </a:solidFill>
-              <a:effectLst/>
-              <a:uLnTx/>
-              <a:uFillTx/>
-              <a:latin typeface="맑은 고딕" panose="020F0502020204030204"/>
-              <a:ea typeface="맑은 고딕" panose="020B0503020000020004" pitchFamily="50" charset="-127"/>
-              <a:cs typeface="+mn-cs"/>
-            </a:endParaRPr>
-          </a:p>
-        </p:txBody>
-      </p:sp>
-      <p:sp>
-        <p:nvSpPr>
-          <p:cNvPr id="22" name="그래픽 20">
-            <a:extLst>
-              <a:ext uri="{FF2B5EF4-FFF2-40B4-BE49-F238E27FC236}">
-                <a16:creationId xmlns:a16="http://schemas.microsoft.com/office/drawing/2014/main" id="{59909059-D14E-9A87-C3A1-5A731C56D049}"/>
-              </a:ext>
-            </a:extLst>
-          </p:cNvPr>
-          <p:cNvSpPr/>
-          <p:nvPr/>
-        </p:nvSpPr>
-        <p:spPr>
-          <a:xfrm rot="10953421">
-            <a:off x="722713" y="1970970"/>
-            <a:ext cx="1134324" cy="332292"/>
-          </a:xfrm>
-          <a:custGeom>
-            <a:avLst/>
-            <a:gdLst>
-              <a:gd name="connsiteX0" fmla="*/ 847353 w 850743"/>
-              <a:gd name="connsiteY0" fmla="*/ 123779 h 249219"/>
-              <a:gd name="connsiteX1" fmla="*/ 707811 w 850743"/>
-              <a:gd name="connsiteY1" fmla="*/ 86105 h 249219"/>
-              <a:gd name="connsiteX2" fmla="*/ 680661 w 850743"/>
-              <a:gd name="connsiteY2" fmla="*/ 85053 h 249219"/>
-              <a:gd name="connsiteX3" fmla="*/ 606575 w 850743"/>
-              <a:gd name="connsiteY3" fmla="*/ 112203 h 249219"/>
-              <a:gd name="connsiteX4" fmla="*/ 606154 w 850743"/>
-              <a:gd name="connsiteY4" fmla="*/ 112835 h 249219"/>
-              <a:gd name="connsiteX5" fmla="*/ 605312 w 850743"/>
-              <a:gd name="connsiteY5" fmla="*/ 112835 h 249219"/>
-              <a:gd name="connsiteX6" fmla="*/ 513547 w 850743"/>
-              <a:gd name="connsiteY6" fmla="*/ 114098 h 249219"/>
-              <a:gd name="connsiteX7" fmla="*/ 503655 w 850743"/>
-              <a:gd name="connsiteY7" fmla="*/ 114098 h 249219"/>
-              <a:gd name="connsiteX8" fmla="*/ 512916 w 850743"/>
-              <a:gd name="connsiteY8" fmla="*/ 110730 h 249219"/>
-              <a:gd name="connsiteX9" fmla="*/ 619204 w 850743"/>
-              <a:gd name="connsiteY9" fmla="*/ 8442 h 249219"/>
-              <a:gd name="connsiteX10" fmla="*/ 618151 w 850743"/>
-              <a:gd name="connsiteY10" fmla="*/ 2759 h 249219"/>
-              <a:gd name="connsiteX11" fmla="*/ 612889 w 850743"/>
-              <a:gd name="connsiteY11" fmla="*/ 23 h 249219"/>
-              <a:gd name="connsiteX12" fmla="*/ 612468 w 850743"/>
-              <a:gd name="connsiteY12" fmla="*/ 23 h 249219"/>
-              <a:gd name="connsiteX13" fmla="*/ 430412 w 850743"/>
-              <a:gd name="connsiteY13" fmla="*/ 114519 h 249219"/>
-              <a:gd name="connsiteX14" fmla="*/ 429991 w 850743"/>
-              <a:gd name="connsiteY14" fmla="*/ 115361 h 249219"/>
-              <a:gd name="connsiteX15" fmla="*/ 428938 w 850743"/>
-              <a:gd name="connsiteY15" fmla="*/ 115361 h 249219"/>
-              <a:gd name="connsiteX16" fmla="*/ 334016 w 850743"/>
-              <a:gd name="connsiteY16" fmla="*/ 116623 h 249219"/>
-              <a:gd name="connsiteX17" fmla="*/ 323072 w 850743"/>
-              <a:gd name="connsiteY17" fmla="*/ 116623 h 249219"/>
-              <a:gd name="connsiteX18" fmla="*/ 333385 w 850743"/>
-              <a:gd name="connsiteY18" fmla="*/ 113256 h 249219"/>
-              <a:gd name="connsiteX19" fmla="*/ 456300 w 850743"/>
-              <a:gd name="connsiteY19" fmla="*/ 13072 h 249219"/>
-              <a:gd name="connsiteX20" fmla="*/ 455458 w 850743"/>
-              <a:gd name="connsiteY20" fmla="*/ 7600 h 249219"/>
-              <a:gd name="connsiteX21" fmla="*/ 449985 w 850743"/>
-              <a:gd name="connsiteY21" fmla="*/ 4443 h 249219"/>
-              <a:gd name="connsiteX22" fmla="*/ 449564 w 850743"/>
-              <a:gd name="connsiteY22" fmla="*/ 4443 h 249219"/>
-              <a:gd name="connsiteX23" fmla="*/ 276768 w 850743"/>
-              <a:gd name="connsiteY23" fmla="*/ 112203 h 249219"/>
-              <a:gd name="connsiteX24" fmla="*/ 276347 w 850743"/>
-              <a:gd name="connsiteY24" fmla="*/ 112835 h 249219"/>
-              <a:gd name="connsiteX25" fmla="*/ 273822 w 850743"/>
-              <a:gd name="connsiteY25" fmla="*/ 116202 h 249219"/>
-              <a:gd name="connsiteX26" fmla="*/ 273401 w 850743"/>
-              <a:gd name="connsiteY26" fmla="*/ 117465 h 249219"/>
-              <a:gd name="connsiteX27" fmla="*/ 236148 w 850743"/>
-              <a:gd name="connsiteY27" fmla="*/ 117886 h 249219"/>
-              <a:gd name="connsiteX28" fmla="*/ 5051 w 850743"/>
-              <a:gd name="connsiteY28" fmla="*/ 118728 h 249219"/>
-              <a:gd name="connsiteX29" fmla="*/ 0 w 850743"/>
-              <a:gd name="connsiteY29" fmla="*/ 132198 h 249219"/>
-              <a:gd name="connsiteX30" fmla="*/ 279084 w 850743"/>
-              <a:gd name="connsiteY30" fmla="*/ 130935 h 249219"/>
-              <a:gd name="connsiteX31" fmla="*/ 280136 w 850743"/>
-              <a:gd name="connsiteY31" fmla="*/ 130935 h 249219"/>
-              <a:gd name="connsiteX32" fmla="*/ 280557 w 850743"/>
-              <a:gd name="connsiteY32" fmla="*/ 131777 h 249219"/>
-              <a:gd name="connsiteX33" fmla="*/ 451248 w 850743"/>
-              <a:gd name="connsiteY33" fmla="*/ 244589 h 249219"/>
-              <a:gd name="connsiteX34" fmla="*/ 452722 w 850743"/>
-              <a:gd name="connsiteY34" fmla="*/ 244589 h 249219"/>
-              <a:gd name="connsiteX35" fmla="*/ 458615 w 850743"/>
-              <a:gd name="connsiteY35" fmla="*/ 241432 h 249219"/>
-              <a:gd name="connsiteX36" fmla="*/ 458615 w 850743"/>
-              <a:gd name="connsiteY36" fmla="*/ 234697 h 249219"/>
-              <a:gd name="connsiteX37" fmla="*/ 344329 w 850743"/>
-              <a:gd name="connsiteY37" fmla="*/ 133461 h 249219"/>
-              <a:gd name="connsiteX38" fmla="*/ 336963 w 850743"/>
-              <a:gd name="connsiteY38" fmla="*/ 130304 h 249219"/>
-              <a:gd name="connsiteX39" fmla="*/ 345171 w 850743"/>
-              <a:gd name="connsiteY39" fmla="*/ 130304 h 249219"/>
-              <a:gd name="connsiteX40" fmla="*/ 419046 w 850743"/>
-              <a:gd name="connsiteY40" fmla="*/ 129252 h 249219"/>
-              <a:gd name="connsiteX41" fmla="*/ 432095 w 850743"/>
-              <a:gd name="connsiteY41" fmla="*/ 129252 h 249219"/>
-              <a:gd name="connsiteX42" fmla="*/ 432516 w 850743"/>
-              <a:gd name="connsiteY42" fmla="*/ 130304 h 249219"/>
-              <a:gd name="connsiteX43" fmla="*/ 507444 w 850743"/>
-              <a:gd name="connsiteY43" fmla="*/ 211545 h 249219"/>
-              <a:gd name="connsiteX44" fmla="*/ 655825 w 850743"/>
-              <a:gd name="connsiteY44" fmla="*/ 249219 h 249219"/>
-              <a:gd name="connsiteX45" fmla="*/ 661719 w 850743"/>
-              <a:gd name="connsiteY45" fmla="*/ 245221 h 249219"/>
-              <a:gd name="connsiteX46" fmla="*/ 661298 w 850743"/>
-              <a:gd name="connsiteY46" fmla="*/ 238906 h 249219"/>
-              <a:gd name="connsiteX47" fmla="*/ 514179 w 850743"/>
-              <a:gd name="connsiteY47" fmla="*/ 131146 h 249219"/>
-              <a:gd name="connsiteX48" fmla="*/ 505339 w 850743"/>
-              <a:gd name="connsiteY48" fmla="*/ 127989 h 249219"/>
-              <a:gd name="connsiteX49" fmla="*/ 514600 w 850743"/>
-              <a:gd name="connsiteY49" fmla="*/ 127989 h 249219"/>
-              <a:gd name="connsiteX50" fmla="*/ 594999 w 850743"/>
-              <a:gd name="connsiteY50" fmla="*/ 126726 h 249219"/>
-              <a:gd name="connsiteX51" fmla="*/ 596052 w 850743"/>
-              <a:gd name="connsiteY51" fmla="*/ 126726 h 249219"/>
-              <a:gd name="connsiteX52" fmla="*/ 596473 w 850743"/>
-              <a:gd name="connsiteY52" fmla="*/ 127568 h 249219"/>
-              <a:gd name="connsiteX53" fmla="*/ 598367 w 850743"/>
-              <a:gd name="connsiteY53" fmla="*/ 129672 h 249219"/>
-              <a:gd name="connsiteX54" fmla="*/ 720650 w 850743"/>
-              <a:gd name="connsiteY54" fmla="*/ 161664 h 249219"/>
-              <a:gd name="connsiteX55" fmla="*/ 734120 w 850743"/>
-              <a:gd name="connsiteY55" fmla="*/ 161664 h 249219"/>
-              <a:gd name="connsiteX56" fmla="*/ 847564 w 850743"/>
-              <a:gd name="connsiteY56" fmla="*/ 135776 h 249219"/>
-              <a:gd name="connsiteX57" fmla="*/ 850721 w 850743"/>
-              <a:gd name="connsiteY57" fmla="*/ 129252 h 249219"/>
-              <a:gd name="connsiteX58" fmla="*/ 847353 w 850743"/>
-              <a:gd name="connsiteY58" fmla="*/ 123990 h 249219"/>
-              <a:gd name="connsiteX59" fmla="*/ 295921 w 850743"/>
-              <a:gd name="connsiteY59" fmla="*/ 107363 h 249219"/>
-              <a:gd name="connsiteX60" fmla="*/ 435463 w 850743"/>
-              <a:gd name="connsiteY60" fmla="*/ 19807 h 249219"/>
-              <a:gd name="connsiteX61" fmla="*/ 438830 w 850743"/>
-              <a:gd name="connsiteY61" fmla="*/ 19386 h 249219"/>
-              <a:gd name="connsiteX62" fmla="*/ 437147 w 850743"/>
-              <a:gd name="connsiteY62" fmla="*/ 22333 h 249219"/>
-              <a:gd name="connsiteX63" fmla="*/ 297605 w 850743"/>
-              <a:gd name="connsiteY63" fmla="*/ 110099 h 249219"/>
-              <a:gd name="connsiteX64" fmla="*/ 292975 w 850743"/>
-              <a:gd name="connsiteY64" fmla="*/ 111362 h 249219"/>
-              <a:gd name="connsiteX65" fmla="*/ 295711 w 850743"/>
-              <a:gd name="connsiteY65" fmla="*/ 107573 h 249219"/>
-              <a:gd name="connsiteX66" fmla="*/ 437357 w 850743"/>
-              <a:gd name="connsiteY66" fmla="*/ 225226 h 249219"/>
-              <a:gd name="connsiteX67" fmla="*/ 439672 w 850743"/>
-              <a:gd name="connsiteY67" fmla="*/ 228804 h 249219"/>
-              <a:gd name="connsiteX68" fmla="*/ 435463 w 850743"/>
-              <a:gd name="connsiteY68" fmla="*/ 227752 h 249219"/>
-              <a:gd name="connsiteX69" fmla="*/ 299078 w 850743"/>
-              <a:gd name="connsiteY69" fmla="*/ 135355 h 249219"/>
-              <a:gd name="connsiteX70" fmla="*/ 296342 w 850743"/>
-              <a:gd name="connsiteY70" fmla="*/ 131356 h 249219"/>
-              <a:gd name="connsiteX71" fmla="*/ 300972 w 850743"/>
-              <a:gd name="connsiteY71" fmla="*/ 132619 h 249219"/>
-              <a:gd name="connsiteX72" fmla="*/ 437357 w 850743"/>
-              <a:gd name="connsiteY72" fmla="*/ 225015 h 249219"/>
-              <a:gd name="connsiteX73" fmla="*/ 449144 w 850743"/>
-              <a:gd name="connsiteY73" fmla="*/ 109467 h 249219"/>
-              <a:gd name="connsiteX74" fmla="*/ 599419 w 850743"/>
-              <a:gd name="connsiteY74" fmla="*/ 14966 h 249219"/>
-              <a:gd name="connsiteX75" fmla="*/ 602366 w 850743"/>
-              <a:gd name="connsiteY75" fmla="*/ 14545 h 249219"/>
-              <a:gd name="connsiteX76" fmla="*/ 601103 w 850743"/>
-              <a:gd name="connsiteY76" fmla="*/ 17281 h 249219"/>
-              <a:gd name="connsiteX77" fmla="*/ 450617 w 850743"/>
-              <a:gd name="connsiteY77" fmla="*/ 111993 h 249219"/>
-              <a:gd name="connsiteX78" fmla="*/ 447039 w 850743"/>
-              <a:gd name="connsiteY78" fmla="*/ 112414 h 249219"/>
-              <a:gd name="connsiteX79" fmla="*/ 448933 w 850743"/>
-              <a:gd name="connsiteY79" fmla="*/ 109257 h 249219"/>
-              <a:gd name="connsiteX80" fmla="*/ 638146 w 850743"/>
-              <a:gd name="connsiteY80" fmla="*/ 231961 h 249219"/>
-              <a:gd name="connsiteX81" fmla="*/ 640882 w 850743"/>
-              <a:gd name="connsiteY81" fmla="*/ 235118 h 249219"/>
-              <a:gd name="connsiteX82" fmla="*/ 636673 w 850743"/>
-              <a:gd name="connsiteY82" fmla="*/ 235118 h 249219"/>
-              <a:gd name="connsiteX83" fmla="*/ 520914 w 850743"/>
-              <a:gd name="connsiteY83" fmla="*/ 203337 h 249219"/>
-              <a:gd name="connsiteX84" fmla="*/ 446197 w 850743"/>
-              <a:gd name="connsiteY84" fmla="*/ 130935 h 249219"/>
-              <a:gd name="connsiteX85" fmla="*/ 445566 w 850743"/>
-              <a:gd name="connsiteY85" fmla="*/ 128831 h 249219"/>
-              <a:gd name="connsiteX86" fmla="*/ 451669 w 850743"/>
-              <a:gd name="connsiteY86" fmla="*/ 128831 h 249219"/>
-              <a:gd name="connsiteX87" fmla="*/ 638146 w 850743"/>
-              <a:gd name="connsiteY87" fmla="*/ 231961 h 249219"/>
-              <a:gd name="connsiteX88" fmla="*/ 825885 w 850743"/>
-              <a:gd name="connsiteY88" fmla="*/ 131988 h 249219"/>
-              <a:gd name="connsiteX89" fmla="*/ 734541 w 850743"/>
-              <a:gd name="connsiteY89" fmla="*/ 147983 h 249219"/>
-              <a:gd name="connsiteX90" fmla="*/ 727806 w 850743"/>
-              <a:gd name="connsiteY90" fmla="*/ 147983 h 249219"/>
-              <a:gd name="connsiteX91" fmla="*/ 720650 w 850743"/>
-              <a:gd name="connsiteY91" fmla="*/ 147983 h 249219"/>
-              <a:gd name="connsiteX92" fmla="*/ 616467 w 850743"/>
-              <a:gd name="connsiteY92" fmla="*/ 124832 h 249219"/>
-              <a:gd name="connsiteX93" fmla="*/ 614784 w 850743"/>
-              <a:gd name="connsiteY93" fmla="*/ 123779 h 249219"/>
-              <a:gd name="connsiteX94" fmla="*/ 616046 w 850743"/>
-              <a:gd name="connsiteY94" fmla="*/ 122306 h 249219"/>
-              <a:gd name="connsiteX95" fmla="*/ 679608 w 850743"/>
-              <a:gd name="connsiteY95" fmla="*/ 98523 h 249219"/>
-              <a:gd name="connsiteX96" fmla="*/ 716020 w 850743"/>
-              <a:gd name="connsiteY96" fmla="*/ 100628 h 249219"/>
-              <a:gd name="connsiteX97" fmla="*/ 825885 w 850743"/>
-              <a:gd name="connsiteY97" fmla="*/ 129041 h 249219"/>
-              <a:gd name="connsiteX98" fmla="*/ 829463 w 850743"/>
-              <a:gd name="connsiteY98" fmla="*/ 130514 h 249219"/>
-              <a:gd name="connsiteX99" fmla="*/ 825885 w 850743"/>
-              <a:gd name="connsiteY99" fmla="*/ 132198 h 249219"/>
-            </a:gdLst>
-            <a:ahLst/>
-            <a:cxnLst>
-              <a:cxn ang="0">
-                <a:pos x="connsiteX0" y="connsiteY0"/>
-              </a:cxn>
-              <a:cxn ang="0">
-                <a:pos x="connsiteX1" y="connsiteY1"/>
-              </a:cxn>
-              <a:cxn ang="0">
-                <a:pos x="connsiteX2" y="connsiteY2"/>
-              </a:cxn>
-              <a:cxn ang="0">
-                <a:pos x="connsiteX3" y="connsiteY3"/>
-              </a:cxn>
-              <a:cxn ang="0">
-                <a:pos x="connsiteX4" y="connsiteY4"/>
-              </a:cxn>
-              <a:cxn ang="0">
-                <a:pos x="connsiteX5" y="connsiteY5"/>
-              </a:cxn>
-              <a:cxn ang="0">
-                <a:pos x="connsiteX6" y="connsiteY6"/>
-              </a:cxn>
-              <a:cxn ang="0">
-                <a:pos x="connsiteX7" y="connsiteY7"/>
-              </a:cxn>
-              <a:cxn ang="0">
-                <a:pos x="connsiteX8" y="connsiteY8"/>
-              </a:cxn>
-              <a:cxn ang="0">
-                <a:pos x="connsiteX9" y="connsiteY9"/>
-              </a:cxn>
-              <a:cxn ang="0">
-                <a:pos x="connsiteX10" y="connsiteY10"/>
-              </a:cxn>
-              <a:cxn ang="0">
-                <a:pos x="connsiteX11" y="connsiteY11"/>
-              </a:cxn>
-              <a:cxn ang="0">
-                <a:pos x="connsiteX12" y="connsiteY12"/>
-              </a:cxn>
-              <a:cxn ang="0">
-                <a:pos x="connsiteX13" y="connsiteY13"/>
-              </a:cxn>
-              <a:cxn ang="0">
-                <a:pos x="connsiteX14" y="connsiteY14"/>
-              </a:cxn>
-              <a:cxn ang="0">
-                <a:pos x="connsiteX15" y="connsiteY15"/>
-              </a:cxn>
-              <a:cxn ang="0">
-                <a:pos x="connsiteX16" y="connsiteY16"/>
-              </a:cxn>
-              <a:cxn ang="0">
-                <a:pos x="connsiteX17" y="connsiteY17"/>
-              </a:cxn>
-              <a:cxn ang="0">
-                <a:pos x="connsiteX18" y="connsiteY18"/>
-              </a:cxn>
-              <a:cxn ang="0">
-                <a:pos x="connsiteX19" y="connsiteY19"/>
-              </a:cxn>
-              <a:cxn ang="0">
-                <a:pos x="connsiteX20" y="connsiteY20"/>
-              </a:cxn>
-              <a:cxn ang="0">
-                <a:pos x="connsiteX21" y="connsiteY21"/>
-              </a:cxn>
-              <a:cxn ang="0">
-                <a:pos x="connsiteX22" y="connsiteY22"/>
-              </a:cxn>
-              <a:cxn ang="0">
-                <a:pos x="connsiteX23" y="connsiteY23"/>
-              </a:cxn>
-              <a:cxn ang="0">
-                <a:pos x="connsiteX24" y="connsiteY24"/>
-              </a:cxn>
-              <a:cxn ang="0">
-                <a:pos x="connsiteX25" y="connsiteY25"/>
-              </a:cxn>
-              <a:cxn ang="0">
-                <a:pos x="connsiteX26" y="connsiteY26"/>
-              </a:cxn>
-              <a:cxn ang="0">
-                <a:pos x="connsiteX27" y="connsiteY27"/>
-              </a:cxn>
-              <a:cxn ang="0">
-                <a:pos x="connsiteX28" y="connsiteY28"/>
-              </a:cxn>
-              <a:cxn ang="0">
-                <a:pos x="connsiteX29" y="connsiteY29"/>
-              </a:cxn>
-              <a:cxn ang="0">
-                <a:pos x="connsiteX30" y="connsiteY30"/>
-              </a:cxn>
-              <a:cxn ang="0">
-                <a:pos x="connsiteX31" y="connsiteY31"/>
-              </a:cxn>
-              <a:cxn ang="0">
-                <a:pos x="connsiteX32" y="connsiteY32"/>
-              </a:cxn>
-              <a:cxn ang="0">
-                <a:pos x="connsiteX33" y="connsiteY33"/>
-              </a:cxn>
-              <a:cxn ang="0">
-                <a:pos x="connsiteX34" y="connsiteY34"/>
-              </a:cxn>
-              <a:cxn ang="0">
-                <a:pos x="connsiteX35" y="connsiteY35"/>
-              </a:cxn>
-              <a:cxn ang="0">
-                <a:pos x="connsiteX36" y="connsiteY36"/>
-              </a:cxn>
-              <a:cxn ang="0">
-                <a:pos x="connsiteX37" y="connsiteY37"/>
-              </a:cxn>
-              <a:cxn ang="0">
-                <a:pos x="connsiteX38" y="connsiteY38"/>
-              </a:cxn>
-              <a:cxn ang="0">
-                <a:pos x="connsiteX39" y="connsiteY39"/>
-              </a:cxn>
-              <a:cxn ang="0">
-                <a:pos x="connsiteX40" y="connsiteY40"/>
-              </a:cxn>
-              <a:cxn ang="0">
-                <a:pos x="connsiteX41" y="connsiteY41"/>
-              </a:cxn>
-              <a:cxn ang="0">
-                <a:pos x="connsiteX42" y="connsiteY42"/>
-              </a:cxn>
-              <a:cxn ang="0">
-                <a:pos x="connsiteX43" y="connsiteY43"/>
-              </a:cxn>
-              <a:cxn ang="0">
-                <a:pos x="connsiteX44" y="connsiteY44"/>
-              </a:cxn>
-              <a:cxn ang="0">
-                <a:pos x="connsiteX45" y="connsiteY45"/>
-              </a:cxn>
-              <a:cxn ang="0">
-                <a:pos x="connsiteX46" y="connsiteY46"/>
-              </a:cxn>
-              <a:cxn ang="0">
-                <a:pos x="connsiteX47" y="connsiteY47"/>
-              </a:cxn>
-              <a:cxn ang="0">
-                <a:pos x="connsiteX48" y="connsiteY48"/>
-              </a:cxn>
-              <a:cxn ang="0">
-                <a:pos x="connsiteX49" y="connsiteY49"/>
-              </a:cxn>
-              <a:cxn ang="0">
-                <a:pos x="connsiteX50" y="connsiteY50"/>
-              </a:cxn>
-              <a:cxn ang="0">
-                <a:pos x="connsiteX51" y="connsiteY51"/>
-              </a:cxn>
-              <a:cxn ang="0">
-                <a:pos x="connsiteX52" y="connsiteY52"/>
-              </a:cxn>
-              <a:cxn ang="0">
-                <a:pos x="connsiteX53" y="connsiteY53"/>
-              </a:cxn>
-              <a:cxn ang="0">
-                <a:pos x="connsiteX54" y="connsiteY54"/>
-              </a:cxn>
-              <a:cxn ang="0">
-                <a:pos x="connsiteX55" y="connsiteY55"/>
-              </a:cxn>
-              <a:cxn ang="0">
-                <a:pos x="connsiteX56" y="connsiteY56"/>
-              </a:cxn>
-              <a:cxn ang="0">
-                <a:pos x="connsiteX57" y="connsiteY57"/>
-              </a:cxn>
-              <a:cxn ang="0">
-                <a:pos x="connsiteX58" y="connsiteY58"/>
-              </a:cxn>
-              <a:cxn ang="0">
-                <a:pos x="connsiteX59" y="connsiteY59"/>
-              </a:cxn>
-              <a:cxn ang="0">
-                <a:pos x="connsiteX60" y="connsiteY60"/>
-              </a:cxn>
-              <a:cxn ang="0">
-                <a:pos x="connsiteX61" y="connsiteY61"/>
-              </a:cxn>
-              <a:cxn ang="0">
-                <a:pos x="connsiteX62" y="connsiteY62"/>
-              </a:cxn>
-              <a:cxn ang="0">
-                <a:pos x="connsiteX63" y="connsiteY63"/>
-              </a:cxn>
-              <a:cxn ang="0">
-                <a:pos x="connsiteX64" y="connsiteY64"/>
-              </a:cxn>
-              <a:cxn ang="0">
-                <a:pos x="connsiteX65" y="connsiteY65"/>
-              </a:cxn>
-              <a:cxn ang="0">
-                <a:pos x="connsiteX66" y="connsiteY66"/>
-              </a:cxn>
-              <a:cxn ang="0">
-                <a:pos x="connsiteX67" y="connsiteY67"/>
-              </a:cxn>
-              <a:cxn ang="0">
-                <a:pos x="connsiteX68" y="connsiteY68"/>
-              </a:cxn>
-              <a:cxn ang="0">
-                <a:pos x="connsiteX69" y="connsiteY69"/>
-              </a:cxn>
-              <a:cxn ang="0">
-                <a:pos x="connsiteX70" y="connsiteY70"/>
-              </a:cxn>
-              <a:cxn ang="0">
-                <a:pos x="connsiteX71" y="connsiteY71"/>
-              </a:cxn>
-              <a:cxn ang="0">
-                <a:pos x="connsiteX72" y="connsiteY72"/>
-              </a:cxn>
-              <a:cxn ang="0">
-                <a:pos x="connsiteX73" y="connsiteY73"/>
-              </a:cxn>
-              <a:cxn ang="0">
-                <a:pos x="connsiteX74" y="connsiteY74"/>
-              </a:cxn>
-              <a:cxn ang="0">
-                <a:pos x="connsiteX75" y="connsiteY75"/>
-              </a:cxn>
-              <a:cxn ang="0">
-                <a:pos x="connsiteX76" y="connsiteY76"/>
-              </a:cxn>
-              <a:cxn ang="0">
-                <a:pos x="connsiteX77" y="connsiteY77"/>
-              </a:cxn>
-              <a:cxn ang="0">
-                <a:pos x="connsiteX78" y="connsiteY78"/>
-              </a:cxn>
-              <a:cxn ang="0">
-                <a:pos x="connsiteX79" y="connsiteY79"/>
-              </a:cxn>
-              <a:cxn ang="0">
-                <a:pos x="connsiteX80" y="connsiteY80"/>
-              </a:cxn>
-              <a:cxn ang="0">
-                <a:pos x="connsiteX81" y="connsiteY81"/>
-              </a:cxn>
-              <a:cxn ang="0">
-                <a:pos x="connsiteX82" y="connsiteY82"/>
-              </a:cxn>
-              <a:cxn ang="0">
-                <a:pos x="connsiteX83" y="connsiteY83"/>
-              </a:cxn>
-              <a:cxn ang="0">
-                <a:pos x="connsiteX84" y="connsiteY84"/>
-              </a:cxn>
-              <a:cxn ang="0">
-                <a:pos x="connsiteX85" y="connsiteY85"/>
-              </a:cxn>
-              <a:cxn ang="0">
-                <a:pos x="connsiteX86" y="connsiteY86"/>
-              </a:cxn>
-              <a:cxn ang="0">
-                <a:pos x="connsiteX87" y="connsiteY87"/>
-              </a:cxn>
-              <a:cxn ang="0">
-                <a:pos x="connsiteX88" y="connsiteY88"/>
-              </a:cxn>
-              <a:cxn ang="0">
-                <a:pos x="connsiteX89" y="connsiteY89"/>
-              </a:cxn>
-              <a:cxn ang="0">
-                <a:pos x="connsiteX90" y="connsiteY90"/>
-              </a:cxn>
-              <a:cxn ang="0">
-                <a:pos x="connsiteX91" y="connsiteY91"/>
-              </a:cxn>
-              <a:cxn ang="0">
-                <a:pos x="connsiteX92" y="connsiteY92"/>
-              </a:cxn>
-              <a:cxn ang="0">
-                <a:pos x="connsiteX93" y="connsiteY93"/>
-              </a:cxn>
-              <a:cxn ang="0">
-                <a:pos x="connsiteX94" y="connsiteY94"/>
-              </a:cxn>
-              <a:cxn ang="0">
-                <a:pos x="connsiteX95" y="connsiteY95"/>
-              </a:cxn>
-              <a:cxn ang="0">
-                <a:pos x="connsiteX96" y="connsiteY96"/>
-              </a:cxn>
-              <a:cxn ang="0">
-                <a:pos x="connsiteX97" y="connsiteY97"/>
-              </a:cxn>
-              <a:cxn ang="0">
-                <a:pos x="connsiteX98" y="connsiteY98"/>
-              </a:cxn>
-              <a:cxn ang="0">
-                <a:pos x="connsiteX99" y="connsiteY99"/>
-              </a:cxn>
-            </a:cxnLst>
-            <a:rect l="l" t="t" r="r" b="b"/>
-            <a:pathLst>
-              <a:path w="850743" h="249219">
-                <a:moveTo>
-                  <a:pt x="847353" y="123779"/>
-                </a:moveTo>
-                <a:cubicBezTo>
-                  <a:pt x="802734" y="102522"/>
-                  <a:pt x="755799" y="89894"/>
-                  <a:pt x="707811" y="86105"/>
-                </a:cubicBezTo>
-                <a:cubicBezTo>
-                  <a:pt x="697288" y="85263"/>
-                  <a:pt x="688659" y="85053"/>
-                  <a:pt x="680661" y="85053"/>
-                </a:cubicBezTo>
-                <a:cubicBezTo>
-                  <a:pt x="645933" y="85474"/>
-                  <a:pt x="621729" y="94314"/>
-                  <a:pt x="606575" y="112203"/>
-                </a:cubicBezTo>
-                <a:lnTo>
-                  <a:pt x="606154" y="112835"/>
-                </a:lnTo>
-                <a:lnTo>
-                  <a:pt x="605312" y="112835"/>
-                </a:lnTo>
-                <a:cubicBezTo>
-                  <a:pt x="574794" y="113256"/>
-                  <a:pt x="544066" y="113677"/>
-                  <a:pt x="513547" y="114098"/>
-                </a:cubicBezTo>
-                <a:lnTo>
-                  <a:pt x="503655" y="114098"/>
-                </a:lnTo>
-                <a:cubicBezTo>
-                  <a:pt x="503655" y="114098"/>
-                  <a:pt x="512916" y="110730"/>
-                  <a:pt x="512916" y="110730"/>
-                </a:cubicBezTo>
-                <a:cubicBezTo>
-                  <a:pt x="566165" y="90946"/>
-                  <a:pt x="604050" y="54745"/>
-                  <a:pt x="619204" y="8442"/>
-                </a:cubicBezTo>
-                <a:cubicBezTo>
-                  <a:pt x="619835" y="6548"/>
-                  <a:pt x="619414" y="4443"/>
-                  <a:pt x="618151" y="2759"/>
-                </a:cubicBezTo>
-                <a:cubicBezTo>
-                  <a:pt x="616888" y="1075"/>
-                  <a:pt x="614784" y="-188"/>
-                  <a:pt x="612889" y="23"/>
-                </a:cubicBezTo>
-                <a:lnTo>
-                  <a:pt x="612468" y="23"/>
-                </a:lnTo>
-                <a:cubicBezTo>
-                  <a:pt x="536910" y="4653"/>
-                  <a:pt x="467244" y="48431"/>
-                  <a:pt x="430412" y="114519"/>
-                </a:cubicBezTo>
-                <a:lnTo>
-                  <a:pt x="429991" y="115361"/>
-                </a:lnTo>
-                <a:lnTo>
-                  <a:pt x="428938" y="115361"/>
-                </a:lnTo>
-                <a:cubicBezTo>
-                  <a:pt x="397368" y="115781"/>
-                  <a:pt x="365587" y="116202"/>
-                  <a:pt x="334016" y="116623"/>
-                </a:cubicBezTo>
-                <a:lnTo>
-                  <a:pt x="323072" y="116623"/>
-                </a:lnTo>
-                <a:cubicBezTo>
-                  <a:pt x="323072" y="116623"/>
-                  <a:pt x="333385" y="113256"/>
-                  <a:pt x="333385" y="113256"/>
-                </a:cubicBezTo>
-                <a:cubicBezTo>
-                  <a:pt x="374848" y="99365"/>
-                  <a:pt x="432727" y="73687"/>
-                  <a:pt x="456300" y="13072"/>
-                </a:cubicBezTo>
-                <a:cubicBezTo>
-                  <a:pt x="456931" y="11388"/>
-                  <a:pt x="456720" y="9284"/>
-                  <a:pt x="455458" y="7600"/>
-                </a:cubicBezTo>
-                <a:cubicBezTo>
-                  <a:pt x="454195" y="5706"/>
-                  <a:pt x="452090" y="4443"/>
-                  <a:pt x="449985" y="4443"/>
-                </a:cubicBezTo>
-                <a:lnTo>
-                  <a:pt x="449564" y="4443"/>
-                </a:lnTo>
-                <a:cubicBezTo>
-                  <a:pt x="378005" y="10336"/>
-                  <a:pt x="313390" y="50746"/>
-                  <a:pt x="276768" y="112203"/>
-                </a:cubicBezTo>
-                <a:lnTo>
-                  <a:pt x="276347" y="112835"/>
-                </a:lnTo>
-                <a:cubicBezTo>
-                  <a:pt x="275085" y="113677"/>
-                  <a:pt x="274243" y="114940"/>
-                  <a:pt x="273822" y="116202"/>
-                </a:cubicBezTo>
-                <a:lnTo>
-                  <a:pt x="273401" y="117465"/>
-                </a:lnTo>
-                <a:lnTo>
-                  <a:pt x="236148" y="117886"/>
-                </a:lnTo>
-                <a:cubicBezTo>
-                  <a:pt x="216574" y="118097"/>
-                  <a:pt x="96816" y="118307"/>
-                  <a:pt x="5051" y="118728"/>
-                </a:cubicBezTo>
-                <a:cubicBezTo>
-                  <a:pt x="3368" y="123148"/>
-                  <a:pt x="1684" y="127568"/>
-                  <a:pt x="0" y="132198"/>
-                </a:cubicBezTo>
-                <a:cubicBezTo>
-                  <a:pt x="105235" y="131777"/>
-                  <a:pt x="246461" y="131356"/>
-                  <a:pt x="279084" y="130935"/>
-                </a:cubicBezTo>
-                <a:lnTo>
-                  <a:pt x="280136" y="130935"/>
-                </a:lnTo>
-                <a:cubicBezTo>
-                  <a:pt x="280136" y="130935"/>
-                  <a:pt x="280557" y="131777"/>
-                  <a:pt x="280557" y="131777"/>
-                </a:cubicBezTo>
-                <a:cubicBezTo>
-                  <a:pt x="319073" y="191972"/>
-                  <a:pt x="381162" y="233224"/>
-                  <a:pt x="451248" y="244589"/>
-                </a:cubicBezTo>
-                <a:cubicBezTo>
-                  <a:pt x="451669" y="244589"/>
-                  <a:pt x="452090" y="244589"/>
-                  <a:pt x="452722" y="244589"/>
-                </a:cubicBezTo>
-                <a:cubicBezTo>
-                  <a:pt x="455247" y="244589"/>
-                  <a:pt x="457352" y="243326"/>
-                  <a:pt x="458615" y="241432"/>
-                </a:cubicBezTo>
-                <a:cubicBezTo>
-                  <a:pt x="459878" y="239327"/>
-                  <a:pt x="459878" y="237012"/>
-                  <a:pt x="458615" y="234697"/>
-                </a:cubicBezTo>
-                <a:cubicBezTo>
-                  <a:pt x="430833" y="179343"/>
-                  <a:pt x="381162" y="149036"/>
-                  <a:pt x="344329" y="133461"/>
-                </a:cubicBezTo>
-                <a:lnTo>
-                  <a:pt x="336963" y="130304"/>
-                </a:lnTo>
-                <a:lnTo>
-                  <a:pt x="345171" y="130304"/>
-                </a:lnTo>
-                <a:cubicBezTo>
-                  <a:pt x="345171" y="130304"/>
-                  <a:pt x="398841" y="129462"/>
-                  <a:pt x="419046" y="129252"/>
-                </a:cubicBezTo>
-                <a:lnTo>
-                  <a:pt x="432095" y="129252"/>
-                </a:lnTo>
-                <a:cubicBezTo>
-                  <a:pt x="432095" y="129252"/>
-                  <a:pt x="432516" y="130304"/>
-                  <a:pt x="432516" y="130304"/>
-                </a:cubicBezTo>
-                <a:cubicBezTo>
-                  <a:pt x="440304" y="162085"/>
-                  <a:pt x="465350" y="189235"/>
-                  <a:pt x="507444" y="211545"/>
-                </a:cubicBezTo>
-                <a:cubicBezTo>
-                  <a:pt x="552274" y="235328"/>
-                  <a:pt x="603629" y="248378"/>
-                  <a:pt x="655825" y="249219"/>
-                </a:cubicBezTo>
-                <a:cubicBezTo>
-                  <a:pt x="658141" y="249219"/>
-                  <a:pt x="660666" y="247536"/>
-                  <a:pt x="661719" y="245221"/>
-                </a:cubicBezTo>
-                <a:cubicBezTo>
-                  <a:pt x="662771" y="243116"/>
-                  <a:pt x="662560" y="240801"/>
-                  <a:pt x="661298" y="238906"/>
-                </a:cubicBezTo>
-                <a:cubicBezTo>
-                  <a:pt x="623413" y="189656"/>
-                  <a:pt x="572690" y="152403"/>
-                  <a:pt x="514179" y="131146"/>
-                </a:cubicBezTo>
-                <a:lnTo>
-                  <a:pt x="505339" y="127989"/>
-                </a:lnTo>
-                <a:lnTo>
-                  <a:pt x="514600" y="127989"/>
-                </a:lnTo>
-                <a:cubicBezTo>
-                  <a:pt x="514600" y="127989"/>
-                  <a:pt x="572900" y="126936"/>
-                  <a:pt x="594999" y="126726"/>
-                </a:cubicBezTo>
-                <a:lnTo>
-                  <a:pt x="596052" y="126726"/>
-                </a:lnTo>
-                <a:cubicBezTo>
-                  <a:pt x="596052" y="126726"/>
-                  <a:pt x="596473" y="127568"/>
-                  <a:pt x="596473" y="127568"/>
-                </a:cubicBezTo>
-                <a:cubicBezTo>
-                  <a:pt x="596894" y="128410"/>
-                  <a:pt x="597736" y="129041"/>
-                  <a:pt x="598367" y="129672"/>
-                </a:cubicBezTo>
-                <a:cubicBezTo>
-                  <a:pt x="629517" y="150719"/>
-                  <a:pt x="669506" y="161243"/>
-                  <a:pt x="720650" y="161664"/>
-                </a:cubicBezTo>
-                <a:cubicBezTo>
-                  <a:pt x="725070" y="161664"/>
-                  <a:pt x="729700" y="161664"/>
-                  <a:pt x="734120" y="161664"/>
-                </a:cubicBezTo>
-                <a:cubicBezTo>
-                  <a:pt x="768637" y="161243"/>
-                  <a:pt x="812836" y="158086"/>
-                  <a:pt x="847564" y="135776"/>
-                </a:cubicBezTo>
-                <a:cubicBezTo>
-                  <a:pt x="849668" y="134513"/>
-                  <a:pt x="850931" y="131777"/>
-                  <a:pt x="850721" y="129252"/>
-                </a:cubicBezTo>
-                <a:cubicBezTo>
-                  <a:pt x="850721" y="126936"/>
-                  <a:pt x="849248" y="125042"/>
-                  <a:pt x="847353" y="123990"/>
-                </a:cubicBezTo>
-                <a:close/>
-                <a:moveTo>
-                  <a:pt x="295921" y="107363"/>
-                </a:moveTo>
-                <a:cubicBezTo>
-                  <a:pt x="328544" y="60428"/>
-                  <a:pt x="379478" y="28647"/>
-                  <a:pt x="435463" y="19807"/>
-                </a:cubicBezTo>
-                <a:lnTo>
-                  <a:pt x="438830" y="19386"/>
-                </a:lnTo>
-                <a:lnTo>
-                  <a:pt x="437147" y="22333"/>
-                </a:lnTo>
-                <a:cubicBezTo>
-                  <a:pt x="409996" y="73687"/>
-                  <a:pt x="351485" y="95576"/>
-                  <a:pt x="297605" y="110099"/>
-                </a:cubicBezTo>
-                <a:lnTo>
-                  <a:pt x="292975" y="111362"/>
-                </a:lnTo>
-                <a:lnTo>
-                  <a:pt x="295711" y="107573"/>
-                </a:lnTo>
-                <a:close/>
-                <a:moveTo>
-                  <a:pt x="437357" y="225226"/>
-                </a:moveTo>
-                <a:lnTo>
-                  <a:pt x="439672" y="228804"/>
-                </a:lnTo>
-                <a:lnTo>
-                  <a:pt x="435463" y="227752"/>
-                </a:lnTo>
-                <a:cubicBezTo>
-                  <a:pt x="380530" y="214071"/>
-                  <a:pt x="332122" y="181238"/>
-                  <a:pt x="299078" y="135355"/>
-                </a:cubicBezTo>
-                <a:lnTo>
-                  <a:pt x="296342" y="131356"/>
-                </a:lnTo>
-                <a:lnTo>
-                  <a:pt x="300972" y="132619"/>
-                </a:lnTo>
-                <a:cubicBezTo>
-                  <a:pt x="361167" y="149036"/>
-                  <a:pt x="409575" y="181869"/>
-                  <a:pt x="437357" y="225015"/>
-                </a:cubicBezTo>
-                <a:close/>
-                <a:moveTo>
-                  <a:pt x="449144" y="109467"/>
-                </a:moveTo>
-                <a:cubicBezTo>
-                  <a:pt x="482608" y="57902"/>
-                  <a:pt x="538804" y="22543"/>
-                  <a:pt x="599419" y="14966"/>
-                </a:cubicBezTo>
-                <a:lnTo>
-                  <a:pt x="602366" y="14545"/>
-                </a:lnTo>
-                <a:lnTo>
-                  <a:pt x="601103" y="17281"/>
-                </a:lnTo>
-                <a:cubicBezTo>
-                  <a:pt x="587633" y="47379"/>
-                  <a:pt x="550169" y="99996"/>
-                  <a:pt x="450617" y="111993"/>
-                </a:cubicBezTo>
-                <a:lnTo>
-                  <a:pt x="447039" y="112414"/>
-                </a:lnTo>
-                <a:lnTo>
-                  <a:pt x="448933" y="109257"/>
-                </a:lnTo>
-                <a:close/>
-                <a:moveTo>
-                  <a:pt x="638146" y="231961"/>
-                </a:moveTo>
-                <a:lnTo>
-                  <a:pt x="640882" y="235118"/>
-                </a:lnTo>
-                <a:lnTo>
-                  <a:pt x="636673" y="235118"/>
-                </a:lnTo>
-                <a:cubicBezTo>
-                  <a:pt x="595631" y="231750"/>
-                  <a:pt x="556694" y="221227"/>
-                  <a:pt x="520914" y="203337"/>
-                </a:cubicBezTo>
-                <a:cubicBezTo>
-                  <a:pt x="478820" y="182500"/>
-                  <a:pt x="454405" y="158717"/>
-                  <a:pt x="446197" y="130935"/>
-                </a:cubicBezTo>
-                <a:lnTo>
-                  <a:pt x="445566" y="128831"/>
-                </a:lnTo>
-                <a:lnTo>
-                  <a:pt x="451669" y="128831"/>
-                </a:lnTo>
-                <a:cubicBezTo>
-                  <a:pt x="523019" y="139986"/>
-                  <a:pt x="590790" y="177660"/>
-                  <a:pt x="638146" y="231961"/>
-                </a:cubicBezTo>
-                <a:close/>
-                <a:moveTo>
-                  <a:pt x="825885" y="131988"/>
-                </a:moveTo>
-                <a:cubicBezTo>
-                  <a:pt x="796419" y="145458"/>
-                  <a:pt x="763165" y="147562"/>
-                  <a:pt x="734541" y="147983"/>
-                </a:cubicBezTo>
-                <a:cubicBezTo>
-                  <a:pt x="732226" y="147983"/>
-                  <a:pt x="729911" y="147983"/>
-                  <a:pt x="727806" y="147983"/>
-                </a:cubicBezTo>
-                <a:cubicBezTo>
-                  <a:pt x="725491" y="147983"/>
-                  <a:pt x="722965" y="147983"/>
-                  <a:pt x="720650" y="147983"/>
-                </a:cubicBezTo>
-                <a:cubicBezTo>
-                  <a:pt x="678135" y="147562"/>
-                  <a:pt x="644039" y="139986"/>
-                  <a:pt x="616467" y="124832"/>
-                </a:cubicBezTo>
-                <a:lnTo>
-                  <a:pt x="614784" y="123779"/>
-                </a:lnTo>
-                <a:lnTo>
-                  <a:pt x="616046" y="122306"/>
-                </a:lnTo>
-                <a:cubicBezTo>
-                  <a:pt x="628043" y="106731"/>
-                  <a:pt x="648880" y="98944"/>
-                  <a:pt x="679608" y="98523"/>
-                </a:cubicBezTo>
-                <a:cubicBezTo>
-                  <a:pt x="692237" y="98523"/>
-                  <a:pt x="704654" y="99575"/>
-                  <a:pt x="716020" y="100628"/>
-                </a:cubicBezTo>
-                <a:cubicBezTo>
-                  <a:pt x="753273" y="104206"/>
-                  <a:pt x="790316" y="113887"/>
-                  <a:pt x="825885" y="129041"/>
-                </a:cubicBezTo>
-                <a:lnTo>
-                  <a:pt x="829463" y="130514"/>
-                </a:lnTo>
-                <a:lnTo>
-                  <a:pt x="825885" y="132198"/>
-                </a:lnTo>
-                <a:close/>
-              </a:path>
-            </a:pathLst>
-          </a:custGeom>
-          <a:solidFill>
-            <a:schemeClr val="accent6">
-              <a:lumMod val="50000"/>
-            </a:schemeClr>
-          </a:solidFill>
-          <a:ln w="20955" cap="flat">
-            <a:noFill/>
-            <a:prstDash val="solid"/>
-            <a:miter/>
-          </a:ln>
-        </p:spPr>
-        <p:txBody>
-          <a:bodyPr rtlCol="0" anchor="ctr"/>
-          <a:lstStyle/>
-          <a:p>
-            <a:pPr marL="0" marR="0" lvl="0" indent="0" algn="l" defTabSz="1219140" rtl="0" eaLnBrk="0" fontAlgn="base" latinLnBrk="0" hangingPunct="0">
-              <a:lnSpc>
-                <a:spcPct val="100000"/>
-              </a:lnSpc>
-              <a:spcBef>
-                <a:spcPct val="0"/>
-              </a:spcBef>
-              <a:spcAft>
-                <a:spcPct val="0"/>
-              </a:spcAft>
-              <a:buClrTx/>
-              <a:buSzTx/>
-              <a:buFontTx/>
-              <a:buNone/>
-              <a:tabLst/>
-              <a:defRPr/>
-            </a:pPr>
-            <a:endParaRPr kumimoji="1" lang="ko-KR" altLang="en-US" sz="2400" b="0" i="0" u="none" strike="noStrike" kern="1200" cap="none" spc="0" normalizeH="0" baseline="0" noProof="0">
-              <a:ln>
-                <a:noFill/>
-              </a:ln>
-              <a:solidFill>
-                <a:prstClr val="black"/>
-              </a:solidFill>
-              <a:effectLst/>
-              <a:uLnTx/>
-              <a:uFillTx/>
-              <a:latin typeface="굴림" panose="020B0600000101010101" pitchFamily="34" charset="-127"/>
-              <a:ea typeface="굴림" panose="020B0600000101010101" pitchFamily="34" charset="-127"/>
-              <a:cs typeface="+mn-cs"/>
-            </a:endParaRPr>
-          </a:p>
-        </p:txBody>
-      </p:sp>
-      <p:sp>
-        <p:nvSpPr>
-          <p:cNvPr id="6" name="TextBox 5">
-            <a:extLst>
-              <a:ext uri="{FF2B5EF4-FFF2-40B4-BE49-F238E27FC236}">
-                <a16:creationId xmlns:a16="http://schemas.microsoft.com/office/drawing/2014/main" id="{3F0B8729-3DE5-F574-A00E-A2D375E3F9CD}"/>
-              </a:ext>
-            </a:extLst>
-          </p:cNvPr>
-          <p:cNvSpPr txBox="1"/>
-          <p:nvPr/>
-        </p:nvSpPr>
-        <p:spPr>
-          <a:xfrm>
-            <a:off x="541691" y="2565221"/>
-            <a:ext cx="3867332" cy="523220"/>
-          </a:xfrm>
-          <a:prstGeom prst="rect">
-            <a:avLst/>
-          </a:prstGeom>
-          <a:noFill/>
-        </p:spPr>
-        <p:txBody>
-          <a:bodyPr wrap="square" rtlCol="0">
-            <a:spAutoFit/>
-          </a:bodyPr>
-          <a:lstStyle/>
-          <a:p>
-            <a:pPr marL="0" marR="0" lvl="0" indent="0" algn="l" defTabSz="1219140" rtl="0" eaLnBrk="0" fontAlgn="base" latinLnBrk="0" hangingPunct="0">
-              <a:lnSpc>
-                <a:spcPct val="100000"/>
-              </a:lnSpc>
-              <a:spcBef>
-                <a:spcPct val="0"/>
-              </a:spcBef>
-              <a:spcAft>
-                <a:spcPct val="0"/>
-              </a:spcAft>
-              <a:buClrTx/>
-              <a:buSzTx/>
-              <a:buFontTx/>
-              <a:buNone/>
-              <a:tabLst/>
-              <a:defRPr sz="2800">
-                <a:solidFill>
-                  <a:srgbClr val="8FA79F"/>
-                </a:solidFill>
-                <a:latin typeface="나눔스퀘어 네오 ExtraBold"/>
-              </a:defRPr>
-            </a:pPr>
-            <a:r>
-              <a:t>1Co 1:1-2</a:t>
-            </a:r>
-            <a:endParaRPr kumimoji="1" lang="en-US" altLang="ko-KR" sz="2800" b="1" i="0" u="none" strike="noStrike" kern="1200" cap="none" spc="0" normalizeH="0" baseline="0" noProof="0" dirty="0">
-              <a:ln>
-                <a:noFill/>
-              </a:ln>
-              <a:solidFill>
-                <a:srgbClr val="8FA79F"/>
-              </a:solidFill>
-              <a:effectLst/>
-              <a:uLnTx/>
-              <a:uFillTx/>
-              <a:latin typeface="나눔스퀘어 네오 ExtraBold" panose="00000900000000000000" pitchFamily="2" charset="-127"/>
-              <a:ea typeface="나눔스퀘어 네오 ExtraBold" panose="00000900000000000000" pitchFamily="2" charset="-127"/>
-              <a:cs typeface="+mn-cs"/>
-            </a:endParaRPr>
-          </a:p>
-          <a:p>
-            <a:pPr>
-              <a:defRPr sz="2800">
-                <a:solidFill>
-                  <a:srgbClr val="8FA79F"/>
-                </a:solidFill>
-                <a:latin typeface="나눔스퀘어 네오 ExtraBold"/>
-              </a:defRPr>
-            </a:pPr>
-          </a:p>
-        </p:txBody>
-      </p:sp>
-      <p:sp>
-        <p:nvSpPr>
-          <p:cNvPr id="5" name="TextBox 4">
-            <a:extLst>
-              <a:ext uri="{FF2B5EF4-FFF2-40B4-BE49-F238E27FC236}">
-                <a16:creationId xmlns:a16="http://schemas.microsoft.com/office/drawing/2014/main" id="{66F56BDC-842A-F82D-62A9-29DCB99DBEEB}"/>
-              </a:ext>
-            </a:extLst>
-          </p:cNvPr>
-          <p:cNvSpPr txBox="1"/>
-          <p:nvPr/>
-        </p:nvSpPr>
-        <p:spPr>
-          <a:xfrm>
-            <a:off x="4606904" y="414536"/>
-            <a:ext cx="7246825" cy="369332"/>
-          </a:xfrm>
-          <a:prstGeom prst="rect">
-            <a:avLst/>
-          </a:prstGeom>
-          <a:noFill/>
-        </p:spPr>
-        <p:txBody>
-          <a:bodyPr wrap="square" rtlCol="0">
-            <a:spAutoFit/>
-          </a:bodyPr>
-          <a:lstStyle/>
-          <a:p>
-            <a:r>
-              <a:rPr sz="2800">
-                <a:solidFill>
-                  <a:srgbClr val="1F3337"/>
-                </a:solidFill>
-                <a:latin typeface="나눔스퀘어 네오 Bold"/>
-              </a:rPr>
-              <a:t>¹ 하나님의 뜻을 따라 그리스도 예수의 사도로 부르심을 받은 바울과 형제 소스데네는</a:t>
-            </a:r>
-          </a:p>
-          <a:p>
-            <a:r>
-              <a:rPr sz="2800">
-                <a:solidFill>
-                  <a:srgbClr val="1F3337"/>
-                </a:solidFill>
-                <a:latin typeface="나눔스퀘어 네오 Bold"/>
-              </a:rPr>
-              <a:t>² 고린도에 있는 하나님의 교회 곧 그리스도 예수 안에서 거룩하여지고 성도라 부르심을 받은 자들과 또 각처에서 우리의 주 곧 그들과 우리의 주 되신 예수 그리스도의 이름을 부르는 모든 자들에게</a:t>
-            </a:r>
-          </a:p>
-        </p:txBody>
-      </p:sp>
-      <p:sp>
-        <p:nvSpPr>
-          <p:cNvPr id="3" name="TextBox 2">
-            <a:extLst>
-              <a:ext uri="{FF2B5EF4-FFF2-40B4-BE49-F238E27FC236}">
-                <a16:creationId xmlns:a16="http://schemas.microsoft.com/office/drawing/2014/main" id="{9992D8C0-60E8-B6D2-A388-9B378A00EBBC}"/>
-              </a:ext>
-            </a:extLst>
-          </p:cNvPr>
-          <p:cNvSpPr txBox="1"/>
-          <p:nvPr/>
-        </p:nvSpPr>
-        <p:spPr>
-          <a:xfrm>
-            <a:off x="4606908" y="3992331"/>
-            <a:ext cx="7246821" cy="369332"/>
-          </a:xfrm>
-          <a:prstGeom prst="rect">
-            <a:avLst/>
-          </a:prstGeom>
-          <a:noFill/>
-        </p:spPr>
-        <p:txBody>
-          <a:bodyPr wrap="square" rtlCol="0">
-            <a:spAutoFit/>
-          </a:bodyPr>
-          <a:lstStyle/>
-          <a:p>
-            <a:pPr latinLnBrk="0">
-              <a:defRPr sz="2000">
-                <a:solidFill>
-                  <a:srgbClr val="4F655E"/>
-                </a:solidFill>
-                <a:latin typeface="Segoe UI Variable Text Semibold"/>
-              </a:defRPr>
-            </a:pPr>
-            <a:r>
-              <a:t>¹ Paul, called by the will of God to be an apostle of Christ Jesus, and our brother Sosthenes,</a:t>
+              <a:t>¹ If I speak in the tongues of men and of angels, but have not love, I am a noisy gong or a clanging cymbal.</a:t>
             </a:r>
             <a:endParaRPr lang="ko-KR" altLang="en-US" dirty="0"/>
           </a:p>
@@ -9995,12 +8520,17 @@
               </a:defRPr>
             </a:pPr>
             <a:r>
-              <a:t>² To the church of God that is in Corinth, to those sanctified in Christ Jesus, called to be saints together with all those who in every place call upon the name of our Lord Jesus Christ, both their Lord and ours:</a:t>
+              <a:t>³ If I give away all I have, and if I deliver up my body to be burned, but have not love, I gain nothing.</a:t>
             </a:r>
           </a:p>
         </p:txBody>
       </p:sp>
     </p:spTree>
+    <p:extLst>
+      <p:ext uri="{BB962C8B-B14F-4D97-AF65-F5344CB8AC3E}">
+        <p14:creationId xmlns:p14="http://schemas.microsoft.com/office/powerpoint/2010/main" val="2381306744"/>
+      </p:ext>
+    </p:extLst>
   </p:cSld>
   <p:clrMapOvr>
     <a:masterClrMapping/>
